--- a/output/wordlabs-claim-3day.pptx
+++ b/output/wordlabs-claim-3day.pptx
@@ -5622,7 +5622,7 @@
                 <a:ea typeface="Trebuchet MS" pitchFamily="34" charset="-122"/>
                 <a:cs typeface="Trebuchet MS" pitchFamily="34" charset="-120"/>
               </a:rPr>
-              <a:t>1</a:t>
+              <a:t>2</a:t>
             </a:r>
             <a:pPr algn="ctr" indent="0" marL="0">
               <a:buNone/>
@@ -5636,7 +5636,7 @@
                 <a:ea typeface="Trebuchet MS" pitchFamily="34" charset="-122"/>
                 <a:cs typeface="Trebuchet MS" pitchFamily="34" charset="-120"/>
               </a:rPr>
-              <a:t>  punctuation mark</a:t>
+              <a:t>  punctuation marks</a:t>
             </a:r>
             <a:endParaRPr lang="en-US" sz="2800" dirty="0"/>
           </a:p>
@@ -6040,7 +6040,7 @@
                 <a:ea typeface="Calibri" pitchFamily="34" charset="-122"/>
                 <a:cs typeface="Calibri" pitchFamily="34" charset="-120"/>
               </a:rPr>
-              <a:t>Did you hear her </a:t>
+              <a:t>The scientist was </a:t>
             </a:r>
             <a:pPr algn="l" indent="0" marL="0">
               <a:buNone/>
@@ -6057,7 +6057,7 @@
                 <a:ea typeface="Calibri" pitchFamily="34" charset="-122"/>
                 <a:cs typeface="Calibri" pitchFamily="34" charset="-120"/>
               </a:rPr>
-              <a:t>exclaim</a:t>
+              <a:t>acclaimed</a:t>
             </a:r>
             <a:pPr algn="l" indent="0" marL="0">
               <a:buNone/>
@@ -6071,7 +6071,7 @@
                 <a:ea typeface="Calibri" pitchFamily="34" charset="-122"/>
                 <a:cs typeface="Calibri" pitchFamily="34" charset="-120"/>
               </a:rPr>
-              <a:t> with joy when the teacher gave </a:t>
+              <a:t> for her discovery, and she would </a:t>
             </a:r>
             <a:pPr algn="l" indent="0" marL="0">
               <a:buNone/>
@@ -6088,7 +6088,7 @@
                 <a:ea typeface="Calibri" pitchFamily="34" charset="-122"/>
                 <a:cs typeface="Calibri" pitchFamily="34" charset="-120"/>
               </a:rPr>
-              <a:t>acclaim</a:t>
+              <a:t>exclaim</a:t>
             </a:r>
             <a:pPr algn="l" indent="0" marL="0">
               <a:buNone/>
@@ -6102,7 +6102,7 @@
                 <a:ea typeface="Calibri" pitchFamily="34" charset="-122"/>
                 <a:cs typeface="Calibri" pitchFamily="34" charset="-120"/>
               </a:rPr>
-              <a:t> to the whole class?</a:t>
+              <a:t> her findings to the whole school!</a:t>
             </a:r>
             <a:endParaRPr lang="en-US" sz="1800" dirty="0"/>
           </a:p>
@@ -6257,7 +6257,7 @@
                 <a:ea typeface="Trebuchet MS" pitchFamily="34" charset="-122"/>
                 <a:cs typeface="Trebuchet MS" pitchFamily="34" charset="-120"/>
               </a:rPr>
-              <a:t>exclaim</a:t>
+              <a:t>acclaimed</a:t>
             </a:r>
             <a:endParaRPr lang="en-US" sz="1400" dirty="0"/>
           </a:p>
@@ -6385,7 +6385,7 @@
                 <a:ea typeface="Trebuchet MS" pitchFamily="34" charset="-122"/>
                 <a:cs typeface="Trebuchet MS" pitchFamily="34" charset="-120"/>
               </a:rPr>
-              <a:t>acclaim</a:t>
+              <a:t>exclaim</a:t>
             </a:r>
             <a:endParaRPr lang="en-US" sz="1400" dirty="0"/>
           </a:p>
@@ -6855,7 +6855,7 @@
                 <a:ea typeface="Trebuchet MS" pitchFamily="34" charset="-122"/>
                 <a:cs typeface="Trebuchet MS" pitchFamily="34" charset="-120"/>
               </a:rPr>
-              <a:t>exclaim</a:t>
+              <a:t>acclaimed</a:t>
             </a:r>
             <a:endParaRPr lang="en-US" sz="2800" dirty="0"/>
           </a:p>
@@ -7682,7 +7682,7 @@
                 <a:ea typeface="Trebuchet MS" pitchFamily="34" charset="-122"/>
                 <a:cs typeface="Trebuchet MS" pitchFamily="34" charset="-120"/>
               </a:rPr>
-              <a:t>exclaim</a:t>
+              <a:t>acclaimed</a:t>
             </a:r>
             <a:endParaRPr lang="en-US" sz="2800" dirty="0"/>
           </a:p>
@@ -7762,7 +7762,7 @@
         </p:nvSpPr>
         <p:spPr>
           <a:xfrm>
-            <a:off x="2938272" y="2258568"/>
+            <a:off x="2221992" y="2258568"/>
             <a:ext cx="1828800" cy="292608"/>
           </a:xfrm>
           <a:prstGeom prst="rect">
@@ -7796,7 +7796,7 @@
         </p:nvSpPr>
         <p:spPr>
           <a:xfrm>
-            <a:off x="2938272" y="2258568"/>
+            <a:off x="2221992" y="2258568"/>
             <a:ext cx="1828800" cy="292608"/>
           </a:xfrm>
           <a:prstGeom prst="rect">
@@ -7821,7 +7821,7 @@
                 <a:ea typeface="Trebuchet MS" pitchFamily="34" charset="-122"/>
                 <a:cs typeface="Trebuchet MS" pitchFamily="34" charset="-120"/>
               </a:rPr>
-              <a:t>ex</a:t>
+              <a:t>ac</a:t>
             </a:r>
             <a:endParaRPr lang="en-US" sz="1300" dirty="0"/>
           </a:p>
@@ -7835,7 +7835,7 @@
         </p:nvSpPr>
         <p:spPr>
           <a:xfrm>
-            <a:off x="2938272" y="2569464"/>
+            <a:off x="2221992" y="2569464"/>
             <a:ext cx="1828800" cy="201168"/>
           </a:xfrm>
           <a:prstGeom prst="rect">
@@ -7860,7 +7860,7 @@
                 <a:ea typeface="Calibri" pitchFamily="34" charset="-122"/>
                 <a:cs typeface="Calibri" pitchFamily="34" charset="-120"/>
               </a:rPr>
-              <a:t>out</a:t>
+              <a:t>to, towards</a:t>
             </a:r>
             <a:endParaRPr lang="en-US" sz="850" dirty="0"/>
           </a:p>
@@ -7868,13 +7868,52 @@
       </p:sp>
       <p:sp>
         <p:nvSpPr>
-          <p:cNvPr id="19" name="Shape 17"/>
-          <p:cNvSpPr/>
-          <p:nvPr/>
-        </p:nvSpPr>
-        <p:spPr>
-          <a:xfrm>
-            <a:off x="5803392" y="2258568"/>
+          <p:cNvPr id="19" name="Text 17"/>
+          <p:cNvSpPr/>
+          <p:nvPr/>
+        </p:nvSpPr>
+        <p:spPr>
+          <a:xfrm>
+            <a:off x="2221992" y="2752344"/>
+            <a:ext cx="1828800" cy="182880"/>
+          </a:xfrm>
+          <a:prstGeom prst="rect">
+            <a:avLst/>
+          </a:prstGeom>
+          <a:noFill/>
+          <a:ln/>
+        </p:spPr>
+        <p:txBody>
+          <a:bodyPr wrap="square" lIns="0" tIns="0" rIns="0" bIns="0" rtlCol="0" anchor="t"/>
+          <a:lstStyle/>
+          <a:p>
+            <a:pPr algn="ctr" indent="0" marL="0">
+              <a:buNone/>
+            </a:pPr>
+            <a:r>
+              <a:rPr lang="en-US" sz="700" i="1" dirty="0">
+                <a:solidFill>
+                  <a:srgbClr val="94A3B8"/>
+                </a:solidFill>
+                <a:latin typeface="Calibri" pitchFamily="34" charset="0"/>
+                <a:ea typeface="Calibri" pitchFamily="34" charset="-122"/>
+                <a:cs typeface="Calibri" pitchFamily="34" charset="-120"/>
+              </a:rPr>
+              <a:t>ad → ac before 'c'</a:t>
+            </a:r>
+            <a:endParaRPr lang="en-US" sz="700" dirty="0"/>
+          </a:p>
+        </p:txBody>
+      </p:sp>
+      <p:sp>
+        <p:nvSpPr>
+          <p:cNvPr id="20" name="Shape 18"/>
+          <p:cNvSpPr/>
+          <p:nvPr/>
+        </p:nvSpPr>
+        <p:spPr>
+          <a:xfrm>
+            <a:off x="4370832" y="2258568"/>
             <a:ext cx="1828800" cy="292608"/>
           </a:xfrm>
           <a:prstGeom prst="rect">
@@ -7902,13 +7941,13 @@
       </p:sp>
       <p:sp>
         <p:nvSpPr>
-          <p:cNvPr id="20" name="Text 18"/>
-          <p:cNvSpPr/>
-          <p:nvPr/>
-        </p:nvSpPr>
-        <p:spPr>
-          <a:xfrm>
-            <a:off x="5803392" y="2258568"/>
+          <p:cNvPr id="21" name="Text 19"/>
+          <p:cNvSpPr/>
+          <p:nvPr/>
+        </p:nvSpPr>
+        <p:spPr>
+          <a:xfrm>
+            <a:off x="4370832" y="2258568"/>
             <a:ext cx="1828800" cy="292608"/>
           </a:xfrm>
           <a:prstGeom prst="rect">
@@ -7941,13 +7980,13 @@
       </p:sp>
       <p:sp>
         <p:nvSpPr>
-          <p:cNvPr id="21" name="Text 19"/>
-          <p:cNvSpPr/>
-          <p:nvPr/>
-        </p:nvSpPr>
-        <p:spPr>
-          <a:xfrm>
-            <a:off x="5803392" y="2569464"/>
+          <p:cNvPr id="22" name="Text 20"/>
+          <p:cNvSpPr/>
+          <p:nvPr/>
+        </p:nvSpPr>
+        <p:spPr>
+          <a:xfrm>
+            <a:off x="4370832" y="2569464"/>
             <a:ext cx="1828800" cy="201168"/>
           </a:xfrm>
           <a:prstGeom prst="rect">
@@ -7980,7 +8019,119 @@
       </p:sp>
       <p:sp>
         <p:nvSpPr>
-          <p:cNvPr id="22" name="Shape 20"/>
+          <p:cNvPr id="23" name="Shape 21"/>
+          <p:cNvSpPr/>
+          <p:nvPr/>
+        </p:nvSpPr>
+        <p:spPr>
+          <a:xfrm>
+            <a:off x="6519672" y="2258568"/>
+            <a:ext cx="1828800" cy="292608"/>
+          </a:xfrm>
+          <a:prstGeom prst="rect">
+            <a:avLst>
+              <a:gd name="adj" fmla="val 25000"/>
+            </a:avLst>
+          </a:prstGeom>
+          <a:solidFill>
+            <a:srgbClr val="FCE7F3"/>
+          </a:solidFill>
+          <a:ln w="19050">
+            <a:solidFill>
+              <a:srgbClr val="DB2777"/>
+            </a:solidFill>
+            <a:prstDash val="solid"/>
+          </a:ln>
+          <a:effectLst>
+            <a:outerShdw sx="100000" sy="100000" kx="0" ky="0" algn="bl" rotWithShape="0" blurRad="101600" dist="38100" dir="8100000">
+              <a:srgbClr val="000000">
+                <a:alpha val="12000"/>
+              </a:srgbClr>
+            </a:outerShdw>
+          </a:effectLst>
+        </p:spPr>
+      </p:sp>
+      <p:sp>
+        <p:nvSpPr>
+          <p:cNvPr id="24" name="Text 22"/>
+          <p:cNvSpPr/>
+          <p:nvPr/>
+        </p:nvSpPr>
+        <p:spPr>
+          <a:xfrm>
+            <a:off x="6519672" y="2258568"/>
+            <a:ext cx="1828800" cy="292608"/>
+          </a:xfrm>
+          <a:prstGeom prst="rect">
+            <a:avLst/>
+          </a:prstGeom>
+          <a:noFill/>
+          <a:ln/>
+        </p:spPr>
+        <p:txBody>
+          <a:bodyPr wrap="square" lIns="0" tIns="0" rIns="0" bIns="0" rtlCol="0" anchor="ctr"/>
+          <a:lstStyle/>
+          <a:p>
+            <a:pPr algn="ctr" indent="0" marL="0">
+              <a:buNone/>
+            </a:pPr>
+            <a:r>
+              <a:rPr lang="en-US" sz="1300" b="1" dirty="0">
+                <a:solidFill>
+                  <a:srgbClr val="9D174D"/>
+                </a:solidFill>
+                <a:latin typeface="Trebuchet MS" pitchFamily="34" charset="0"/>
+                <a:ea typeface="Trebuchet MS" pitchFamily="34" charset="-122"/>
+                <a:cs typeface="Trebuchet MS" pitchFamily="34" charset="-120"/>
+              </a:rPr>
+              <a:t>ed</a:t>
+            </a:r>
+            <a:endParaRPr lang="en-US" sz="1300" dirty="0"/>
+          </a:p>
+        </p:txBody>
+      </p:sp>
+      <p:sp>
+        <p:nvSpPr>
+          <p:cNvPr id="25" name="Text 23"/>
+          <p:cNvSpPr/>
+          <p:nvPr/>
+        </p:nvSpPr>
+        <p:spPr>
+          <a:xfrm>
+            <a:off x="6519672" y="2569464"/>
+            <a:ext cx="1828800" cy="201168"/>
+          </a:xfrm>
+          <a:prstGeom prst="rect">
+            <a:avLst/>
+          </a:prstGeom>
+          <a:noFill/>
+          <a:ln/>
+        </p:spPr>
+        <p:txBody>
+          <a:bodyPr wrap="square" lIns="0" tIns="0" rIns="0" bIns="0" rtlCol="0" anchor="t"/>
+          <a:lstStyle/>
+          <a:p>
+            <a:pPr algn="ctr" indent="0" marL="0">
+              <a:buNone/>
+            </a:pPr>
+            <a:r>
+              <a:rPr lang="en-US" sz="850" dirty="0">
+                <a:solidFill>
+                  <a:srgbClr val="475569"/>
+                </a:solidFill>
+                <a:latin typeface="Calibri" pitchFamily="34" charset="0"/>
+                <a:ea typeface="Calibri" pitchFamily="34" charset="-122"/>
+                <a:cs typeface="Calibri" pitchFamily="34" charset="-120"/>
+              </a:rPr>
+              <a:t>past tense</a:t>
+            </a:r>
+            <a:endParaRPr lang="en-US" sz="850" dirty="0"/>
+          </a:p>
+        </p:txBody>
+      </p:sp>
+      <p:sp>
+        <p:nvSpPr>
+          <p:cNvPr id="26" name="Shape 24"/>
           <p:cNvSpPr/>
           <p:nvPr/>
         </p:nvSpPr>
@@ -8007,7 +8158,7 @@
       </p:sp>
       <p:sp>
         <p:nvSpPr>
-          <p:cNvPr id="23" name="Text 21"/>
+          <p:cNvPr id="27" name="Text 25"/>
           <p:cNvSpPr/>
           <p:nvPr/>
         </p:nvSpPr>
@@ -8046,7 +8197,7 @@
       </p:sp>
       <p:sp>
         <p:nvSpPr>
-          <p:cNvPr id="24" name="Shape 22"/>
+          <p:cNvPr id="28" name="Shape 26"/>
           <p:cNvSpPr/>
           <p:nvPr/>
         </p:nvSpPr>
@@ -8073,7 +8224,7 @@
       </p:sp>
       <p:sp>
         <p:nvSpPr>
-          <p:cNvPr id="25" name="Text 23"/>
+          <p:cNvPr id="29" name="Text 27"/>
           <p:cNvSpPr/>
           <p:nvPr/>
         </p:nvSpPr>
@@ -8112,7 +8263,7 @@
       </p:sp>
       <p:sp>
         <p:nvSpPr>
-          <p:cNvPr id="26" name="Shape 24"/>
+          <p:cNvPr id="30" name="Shape 28"/>
           <p:cNvSpPr/>
           <p:nvPr/>
         </p:nvSpPr>
@@ -8139,7 +8290,7 @@
       </p:sp>
       <p:sp>
         <p:nvSpPr>
-          <p:cNvPr id="27" name="Text 25"/>
+          <p:cNvPr id="31" name="Text 29"/>
           <p:cNvSpPr/>
           <p:nvPr/>
         </p:nvSpPr>
@@ -8178,7 +8329,7 @@
       </p:sp>
       <p:sp>
         <p:nvSpPr>
-          <p:cNvPr id="28" name="Shape 26"/>
+          <p:cNvPr id="32" name="Shape 30"/>
           <p:cNvSpPr/>
           <p:nvPr/>
         </p:nvSpPr>
@@ -8205,7 +8356,7 @@
       </p:sp>
       <p:sp>
         <p:nvSpPr>
-          <p:cNvPr id="29" name="Text 27"/>
+          <p:cNvPr id="33" name="Text 31"/>
           <p:cNvSpPr/>
           <p:nvPr/>
         </p:nvSpPr>
@@ -8667,7 +8818,7 @@
                 <a:ea typeface="Trebuchet MS" pitchFamily="34" charset="-122"/>
                 <a:cs typeface="Trebuchet MS" pitchFamily="34" charset="-120"/>
               </a:rPr>
-              <a:t>exclaim</a:t>
+              <a:t>acclaimed</a:t>
             </a:r>
             <a:endParaRPr lang="en-US" sz="2800" dirty="0"/>
           </a:p>
@@ -8747,7 +8898,7 @@
         </p:nvSpPr>
         <p:spPr>
           <a:xfrm>
-            <a:off x="2938272" y="2258568"/>
+            <a:off x="2221992" y="2258568"/>
             <a:ext cx="1828800" cy="292608"/>
           </a:xfrm>
           <a:prstGeom prst="rect">
@@ -8781,7 +8932,7 @@
         </p:nvSpPr>
         <p:spPr>
           <a:xfrm>
-            <a:off x="2938272" y="2258568"/>
+            <a:off x="2221992" y="2258568"/>
             <a:ext cx="1828800" cy="292608"/>
           </a:xfrm>
           <a:prstGeom prst="rect">
@@ -8806,7 +8957,7 @@
                 <a:ea typeface="Trebuchet MS" pitchFamily="34" charset="-122"/>
                 <a:cs typeface="Trebuchet MS" pitchFamily="34" charset="-120"/>
               </a:rPr>
-              <a:t>ex</a:t>
+              <a:t>ac</a:t>
             </a:r>
             <a:endParaRPr lang="en-US" sz="1300" dirty="0"/>
           </a:p>
@@ -8820,7 +8971,7 @@
         </p:nvSpPr>
         <p:spPr>
           <a:xfrm>
-            <a:off x="2938272" y="2569464"/>
+            <a:off x="2221992" y="2569464"/>
             <a:ext cx="1828800" cy="201168"/>
           </a:xfrm>
           <a:prstGeom prst="rect">
@@ -8845,7 +8996,7 @@
                 <a:ea typeface="Calibri" pitchFamily="34" charset="-122"/>
                 <a:cs typeface="Calibri" pitchFamily="34" charset="-120"/>
               </a:rPr>
-              <a:t>out</a:t>
+              <a:t>to, towards</a:t>
             </a:r>
             <a:endParaRPr lang="en-US" sz="850" dirty="0"/>
           </a:p>
@@ -8853,13 +9004,52 @@
       </p:sp>
       <p:sp>
         <p:nvSpPr>
-          <p:cNvPr id="19" name="Shape 17"/>
-          <p:cNvSpPr/>
-          <p:nvPr/>
-        </p:nvSpPr>
-        <p:spPr>
-          <a:xfrm>
-            <a:off x="5803392" y="2258568"/>
+          <p:cNvPr id="19" name="Text 17"/>
+          <p:cNvSpPr/>
+          <p:nvPr/>
+        </p:nvSpPr>
+        <p:spPr>
+          <a:xfrm>
+            <a:off x="2221992" y="2752344"/>
+            <a:ext cx="1828800" cy="182880"/>
+          </a:xfrm>
+          <a:prstGeom prst="rect">
+            <a:avLst/>
+          </a:prstGeom>
+          <a:noFill/>
+          <a:ln/>
+        </p:spPr>
+        <p:txBody>
+          <a:bodyPr wrap="square" lIns="0" tIns="0" rIns="0" bIns="0" rtlCol="0" anchor="t"/>
+          <a:lstStyle/>
+          <a:p>
+            <a:pPr algn="ctr" indent="0" marL="0">
+              <a:buNone/>
+            </a:pPr>
+            <a:r>
+              <a:rPr lang="en-US" sz="700" i="1" dirty="0">
+                <a:solidFill>
+                  <a:srgbClr val="94A3B8"/>
+                </a:solidFill>
+                <a:latin typeface="Calibri" pitchFamily="34" charset="0"/>
+                <a:ea typeface="Calibri" pitchFamily="34" charset="-122"/>
+                <a:cs typeface="Calibri" pitchFamily="34" charset="-120"/>
+              </a:rPr>
+              <a:t>ad → ac before 'c'</a:t>
+            </a:r>
+            <a:endParaRPr lang="en-US" sz="700" dirty="0"/>
+          </a:p>
+        </p:txBody>
+      </p:sp>
+      <p:sp>
+        <p:nvSpPr>
+          <p:cNvPr id="20" name="Shape 18"/>
+          <p:cNvSpPr/>
+          <p:nvPr/>
+        </p:nvSpPr>
+        <p:spPr>
+          <a:xfrm>
+            <a:off x="4370832" y="2258568"/>
             <a:ext cx="1828800" cy="292608"/>
           </a:xfrm>
           <a:prstGeom prst="rect">
@@ -8887,13 +9077,13 @@
       </p:sp>
       <p:sp>
         <p:nvSpPr>
-          <p:cNvPr id="20" name="Text 18"/>
-          <p:cNvSpPr/>
-          <p:nvPr/>
-        </p:nvSpPr>
-        <p:spPr>
-          <a:xfrm>
-            <a:off x="5803392" y="2258568"/>
+          <p:cNvPr id="21" name="Text 19"/>
+          <p:cNvSpPr/>
+          <p:nvPr/>
+        </p:nvSpPr>
+        <p:spPr>
+          <a:xfrm>
+            <a:off x="4370832" y="2258568"/>
             <a:ext cx="1828800" cy="292608"/>
           </a:xfrm>
           <a:prstGeom prst="rect">
@@ -8926,13 +9116,13 @@
       </p:sp>
       <p:sp>
         <p:nvSpPr>
-          <p:cNvPr id="21" name="Text 19"/>
-          <p:cNvSpPr/>
-          <p:nvPr/>
-        </p:nvSpPr>
-        <p:spPr>
-          <a:xfrm>
-            <a:off x="5803392" y="2569464"/>
+          <p:cNvPr id="22" name="Text 20"/>
+          <p:cNvSpPr/>
+          <p:nvPr/>
+        </p:nvSpPr>
+        <p:spPr>
+          <a:xfrm>
+            <a:off x="4370832" y="2569464"/>
             <a:ext cx="1828800" cy="201168"/>
           </a:xfrm>
           <a:prstGeom prst="rect">
@@ -8965,7 +9155,119 @@
       </p:sp>
       <p:sp>
         <p:nvSpPr>
-          <p:cNvPr id="22" name="Shape 20"/>
+          <p:cNvPr id="23" name="Shape 21"/>
+          <p:cNvSpPr/>
+          <p:nvPr/>
+        </p:nvSpPr>
+        <p:spPr>
+          <a:xfrm>
+            <a:off x="6519672" y="2258568"/>
+            <a:ext cx="1828800" cy="292608"/>
+          </a:xfrm>
+          <a:prstGeom prst="rect">
+            <a:avLst>
+              <a:gd name="adj" fmla="val 25000"/>
+            </a:avLst>
+          </a:prstGeom>
+          <a:solidFill>
+            <a:srgbClr val="FCE7F3"/>
+          </a:solidFill>
+          <a:ln w="19050">
+            <a:solidFill>
+              <a:srgbClr val="DB2777"/>
+            </a:solidFill>
+            <a:prstDash val="solid"/>
+          </a:ln>
+          <a:effectLst>
+            <a:outerShdw sx="100000" sy="100000" kx="0" ky="0" algn="bl" rotWithShape="0" blurRad="101600" dist="38100" dir="8100000">
+              <a:srgbClr val="000000">
+                <a:alpha val="12000"/>
+              </a:srgbClr>
+            </a:outerShdw>
+          </a:effectLst>
+        </p:spPr>
+      </p:sp>
+      <p:sp>
+        <p:nvSpPr>
+          <p:cNvPr id="24" name="Text 22"/>
+          <p:cNvSpPr/>
+          <p:nvPr/>
+        </p:nvSpPr>
+        <p:spPr>
+          <a:xfrm>
+            <a:off x="6519672" y="2258568"/>
+            <a:ext cx="1828800" cy="292608"/>
+          </a:xfrm>
+          <a:prstGeom prst="rect">
+            <a:avLst/>
+          </a:prstGeom>
+          <a:noFill/>
+          <a:ln/>
+        </p:spPr>
+        <p:txBody>
+          <a:bodyPr wrap="square" lIns="0" tIns="0" rIns="0" bIns="0" rtlCol="0" anchor="ctr"/>
+          <a:lstStyle/>
+          <a:p>
+            <a:pPr algn="ctr" indent="0" marL="0">
+              <a:buNone/>
+            </a:pPr>
+            <a:r>
+              <a:rPr lang="en-US" sz="1300" b="1" dirty="0">
+                <a:solidFill>
+                  <a:srgbClr val="9D174D"/>
+                </a:solidFill>
+                <a:latin typeface="Trebuchet MS" pitchFamily="34" charset="0"/>
+                <a:ea typeface="Trebuchet MS" pitchFamily="34" charset="-122"/>
+                <a:cs typeface="Trebuchet MS" pitchFamily="34" charset="-120"/>
+              </a:rPr>
+              <a:t>ed</a:t>
+            </a:r>
+            <a:endParaRPr lang="en-US" sz="1300" dirty="0"/>
+          </a:p>
+        </p:txBody>
+      </p:sp>
+      <p:sp>
+        <p:nvSpPr>
+          <p:cNvPr id="25" name="Text 23"/>
+          <p:cNvSpPr/>
+          <p:nvPr/>
+        </p:nvSpPr>
+        <p:spPr>
+          <a:xfrm>
+            <a:off x="6519672" y="2569464"/>
+            <a:ext cx="1828800" cy="201168"/>
+          </a:xfrm>
+          <a:prstGeom prst="rect">
+            <a:avLst/>
+          </a:prstGeom>
+          <a:noFill/>
+          <a:ln/>
+        </p:spPr>
+        <p:txBody>
+          <a:bodyPr wrap="square" lIns="0" tIns="0" rIns="0" bIns="0" rtlCol="0" anchor="t"/>
+          <a:lstStyle/>
+          <a:p>
+            <a:pPr algn="ctr" indent="0" marL="0">
+              <a:buNone/>
+            </a:pPr>
+            <a:r>
+              <a:rPr lang="en-US" sz="850" dirty="0">
+                <a:solidFill>
+                  <a:srgbClr val="475569"/>
+                </a:solidFill>
+                <a:latin typeface="Calibri" pitchFamily="34" charset="0"/>
+                <a:ea typeface="Calibri" pitchFamily="34" charset="-122"/>
+                <a:cs typeface="Calibri" pitchFamily="34" charset="-120"/>
+              </a:rPr>
+              <a:t>past tense</a:t>
+            </a:r>
+            <a:endParaRPr lang="en-US" sz="850" dirty="0"/>
+          </a:p>
+        </p:txBody>
+      </p:sp>
+      <p:sp>
+        <p:nvSpPr>
+          <p:cNvPr id="26" name="Shape 24"/>
           <p:cNvSpPr/>
           <p:nvPr/>
         </p:nvSpPr>
@@ -8992,7 +9294,7 @@
       </p:sp>
       <p:sp>
         <p:nvSpPr>
-          <p:cNvPr id="23" name="Text 21"/>
+          <p:cNvPr id="27" name="Text 25"/>
           <p:cNvSpPr/>
           <p:nvPr/>
         </p:nvSpPr>
@@ -9031,7 +9333,7 @@
       </p:sp>
       <p:sp>
         <p:nvSpPr>
-          <p:cNvPr id="24" name="Shape 22"/>
+          <p:cNvPr id="28" name="Shape 26"/>
           <p:cNvSpPr/>
           <p:nvPr/>
         </p:nvSpPr>
@@ -9058,7 +9360,7 @@
       </p:sp>
       <p:sp>
         <p:nvSpPr>
-          <p:cNvPr id="25" name="Shape 23"/>
+          <p:cNvPr id="29" name="Shape 27"/>
           <p:cNvSpPr/>
           <p:nvPr/>
         </p:nvSpPr>
@@ -9085,7 +9387,7 @@
       </p:sp>
       <p:sp>
         <p:nvSpPr>
-          <p:cNvPr id="26" name="Text 24"/>
+          <p:cNvPr id="30" name="Text 28"/>
           <p:cNvSpPr/>
           <p:nvPr/>
         </p:nvSpPr>
@@ -9116,7 +9418,7 @@
                 <a:ea typeface="Trebuchet MS" pitchFamily="34" charset="-122"/>
                 <a:cs typeface="Trebuchet MS" pitchFamily="34" charset="-120"/>
               </a:rPr>
-              <a:t>ex</a:t>
+              <a:t>ac</a:t>
             </a:r>
             <a:endParaRPr lang="en-US" sz="1400" dirty="0"/>
           </a:p>
@@ -9124,7 +9426,7 @@
       </p:sp>
       <p:sp>
         <p:nvSpPr>
-          <p:cNvPr id="27" name="Text 25"/>
+          <p:cNvPr id="31" name="Text 29"/>
           <p:cNvSpPr/>
           <p:nvPr/>
         </p:nvSpPr>
@@ -9163,7 +9465,7 @@
       </p:sp>
       <p:sp>
         <p:nvSpPr>
-          <p:cNvPr id="28" name="Shape 26"/>
+          <p:cNvPr id="32" name="Shape 30"/>
           <p:cNvSpPr/>
           <p:nvPr/>
         </p:nvSpPr>
@@ -9190,7 +9492,7 @@
       </p:sp>
       <p:sp>
         <p:nvSpPr>
-          <p:cNvPr id="29" name="Text 27"/>
+          <p:cNvPr id="33" name="Text 31"/>
           <p:cNvSpPr/>
           <p:nvPr/>
         </p:nvSpPr>
@@ -9221,7 +9523,7 @@
                 <a:ea typeface="Trebuchet MS" pitchFamily="34" charset="-122"/>
                 <a:cs typeface="Trebuchet MS" pitchFamily="34" charset="-120"/>
               </a:rPr>
-              <a:t>claim</a:t>
+              <a:t>claimed</a:t>
             </a:r>
             <a:endParaRPr lang="en-US" sz="1400" dirty="0"/>
           </a:p>
@@ -9229,7 +9531,7 @@
       </p:sp>
       <p:sp>
         <p:nvSpPr>
-          <p:cNvPr id="30" name="Shape 28"/>
+          <p:cNvPr id="34" name="Shape 32"/>
           <p:cNvSpPr/>
           <p:nvPr/>
         </p:nvSpPr>
@@ -9256,7 +9558,7 @@
       </p:sp>
       <p:sp>
         <p:nvSpPr>
-          <p:cNvPr id="31" name="Text 29"/>
+          <p:cNvPr id="35" name="Text 33"/>
           <p:cNvSpPr/>
           <p:nvPr/>
         </p:nvSpPr>
@@ -9295,7 +9597,7 @@
       </p:sp>
       <p:sp>
         <p:nvSpPr>
-          <p:cNvPr id="32" name="Shape 30"/>
+          <p:cNvPr id="36" name="Shape 34"/>
           <p:cNvSpPr/>
           <p:nvPr/>
         </p:nvSpPr>
@@ -9322,7 +9624,7 @@
       </p:sp>
       <p:sp>
         <p:nvSpPr>
-          <p:cNvPr id="33" name="Text 31"/>
+          <p:cNvPr id="37" name="Text 35"/>
           <p:cNvSpPr/>
           <p:nvPr/>
         </p:nvSpPr>
@@ -9784,7 +10086,7 @@
                 <a:ea typeface="Trebuchet MS" pitchFamily="34" charset="-122"/>
                 <a:cs typeface="Trebuchet MS" pitchFamily="34" charset="-120"/>
               </a:rPr>
-              <a:t>exclaim</a:t>
+              <a:t>acclaimed</a:t>
             </a:r>
             <a:endParaRPr lang="en-US" sz="2800" dirty="0"/>
           </a:p>
@@ -9864,7 +10166,7 @@
         </p:nvSpPr>
         <p:spPr>
           <a:xfrm>
-            <a:off x="2938272" y="2258568"/>
+            <a:off x="2221992" y="2258568"/>
             <a:ext cx="1828800" cy="292608"/>
           </a:xfrm>
           <a:prstGeom prst="rect">
@@ -9898,7 +10200,7 @@
         </p:nvSpPr>
         <p:spPr>
           <a:xfrm>
-            <a:off x="2938272" y="2258568"/>
+            <a:off x="2221992" y="2258568"/>
             <a:ext cx="1828800" cy="292608"/>
           </a:xfrm>
           <a:prstGeom prst="rect">
@@ -9923,7 +10225,7 @@
                 <a:ea typeface="Trebuchet MS" pitchFamily="34" charset="-122"/>
                 <a:cs typeface="Trebuchet MS" pitchFamily="34" charset="-120"/>
               </a:rPr>
-              <a:t>ex</a:t>
+              <a:t>ac</a:t>
             </a:r>
             <a:endParaRPr lang="en-US" sz="1300" dirty="0"/>
           </a:p>
@@ -9937,7 +10239,7 @@
         </p:nvSpPr>
         <p:spPr>
           <a:xfrm>
-            <a:off x="2938272" y="2569464"/>
+            <a:off x="2221992" y="2569464"/>
             <a:ext cx="1828800" cy="201168"/>
           </a:xfrm>
           <a:prstGeom prst="rect">
@@ -9962,7 +10264,7 @@
                 <a:ea typeface="Calibri" pitchFamily="34" charset="-122"/>
                 <a:cs typeface="Calibri" pitchFamily="34" charset="-120"/>
               </a:rPr>
-              <a:t>out</a:t>
+              <a:t>to, towards</a:t>
             </a:r>
             <a:endParaRPr lang="en-US" sz="850" dirty="0"/>
           </a:p>
@@ -9970,13 +10272,52 @@
       </p:sp>
       <p:sp>
         <p:nvSpPr>
-          <p:cNvPr id="19" name="Shape 17"/>
-          <p:cNvSpPr/>
-          <p:nvPr/>
-        </p:nvSpPr>
-        <p:spPr>
-          <a:xfrm>
-            <a:off x="5803392" y="2258568"/>
+          <p:cNvPr id="19" name="Text 17"/>
+          <p:cNvSpPr/>
+          <p:nvPr/>
+        </p:nvSpPr>
+        <p:spPr>
+          <a:xfrm>
+            <a:off x="2221992" y="2752344"/>
+            <a:ext cx="1828800" cy="182880"/>
+          </a:xfrm>
+          <a:prstGeom prst="rect">
+            <a:avLst/>
+          </a:prstGeom>
+          <a:noFill/>
+          <a:ln/>
+        </p:spPr>
+        <p:txBody>
+          <a:bodyPr wrap="square" lIns="0" tIns="0" rIns="0" bIns="0" rtlCol="0" anchor="t"/>
+          <a:lstStyle/>
+          <a:p>
+            <a:pPr algn="ctr" indent="0" marL="0">
+              <a:buNone/>
+            </a:pPr>
+            <a:r>
+              <a:rPr lang="en-US" sz="700" i="1" dirty="0">
+                <a:solidFill>
+                  <a:srgbClr val="94A3B8"/>
+                </a:solidFill>
+                <a:latin typeface="Calibri" pitchFamily="34" charset="0"/>
+                <a:ea typeface="Calibri" pitchFamily="34" charset="-122"/>
+                <a:cs typeface="Calibri" pitchFamily="34" charset="-120"/>
+              </a:rPr>
+              <a:t>ad → ac before 'c'</a:t>
+            </a:r>
+            <a:endParaRPr lang="en-US" sz="700" dirty="0"/>
+          </a:p>
+        </p:txBody>
+      </p:sp>
+      <p:sp>
+        <p:nvSpPr>
+          <p:cNvPr id="20" name="Shape 18"/>
+          <p:cNvSpPr/>
+          <p:nvPr/>
+        </p:nvSpPr>
+        <p:spPr>
+          <a:xfrm>
+            <a:off x="4370832" y="2258568"/>
             <a:ext cx="1828800" cy="292608"/>
           </a:xfrm>
           <a:prstGeom prst="rect">
@@ -10004,13 +10345,13 @@
       </p:sp>
       <p:sp>
         <p:nvSpPr>
-          <p:cNvPr id="20" name="Text 18"/>
-          <p:cNvSpPr/>
-          <p:nvPr/>
-        </p:nvSpPr>
-        <p:spPr>
-          <a:xfrm>
-            <a:off x="5803392" y="2258568"/>
+          <p:cNvPr id="21" name="Text 19"/>
+          <p:cNvSpPr/>
+          <p:nvPr/>
+        </p:nvSpPr>
+        <p:spPr>
+          <a:xfrm>
+            <a:off x="4370832" y="2258568"/>
             <a:ext cx="1828800" cy="292608"/>
           </a:xfrm>
           <a:prstGeom prst="rect">
@@ -10043,13 +10384,13 @@
       </p:sp>
       <p:sp>
         <p:nvSpPr>
-          <p:cNvPr id="21" name="Text 19"/>
-          <p:cNvSpPr/>
-          <p:nvPr/>
-        </p:nvSpPr>
-        <p:spPr>
-          <a:xfrm>
-            <a:off x="5803392" y="2569464"/>
+          <p:cNvPr id="22" name="Text 20"/>
+          <p:cNvSpPr/>
+          <p:nvPr/>
+        </p:nvSpPr>
+        <p:spPr>
+          <a:xfrm>
+            <a:off x="4370832" y="2569464"/>
             <a:ext cx="1828800" cy="201168"/>
           </a:xfrm>
           <a:prstGeom prst="rect">
@@ -10082,7 +10423,119 @@
       </p:sp>
       <p:sp>
         <p:nvSpPr>
-          <p:cNvPr id="22" name="Shape 20"/>
+          <p:cNvPr id="23" name="Shape 21"/>
+          <p:cNvSpPr/>
+          <p:nvPr/>
+        </p:nvSpPr>
+        <p:spPr>
+          <a:xfrm>
+            <a:off x="6519672" y="2258568"/>
+            <a:ext cx="1828800" cy="292608"/>
+          </a:xfrm>
+          <a:prstGeom prst="rect">
+            <a:avLst>
+              <a:gd name="adj" fmla="val 25000"/>
+            </a:avLst>
+          </a:prstGeom>
+          <a:solidFill>
+            <a:srgbClr val="FCE7F3"/>
+          </a:solidFill>
+          <a:ln w="19050">
+            <a:solidFill>
+              <a:srgbClr val="DB2777"/>
+            </a:solidFill>
+            <a:prstDash val="solid"/>
+          </a:ln>
+          <a:effectLst>
+            <a:outerShdw sx="100000" sy="100000" kx="0" ky="0" algn="bl" rotWithShape="0" blurRad="101600" dist="38100" dir="8100000">
+              <a:srgbClr val="000000">
+                <a:alpha val="12000"/>
+              </a:srgbClr>
+            </a:outerShdw>
+          </a:effectLst>
+        </p:spPr>
+      </p:sp>
+      <p:sp>
+        <p:nvSpPr>
+          <p:cNvPr id="24" name="Text 22"/>
+          <p:cNvSpPr/>
+          <p:nvPr/>
+        </p:nvSpPr>
+        <p:spPr>
+          <a:xfrm>
+            <a:off x="6519672" y="2258568"/>
+            <a:ext cx="1828800" cy="292608"/>
+          </a:xfrm>
+          <a:prstGeom prst="rect">
+            <a:avLst/>
+          </a:prstGeom>
+          <a:noFill/>
+          <a:ln/>
+        </p:spPr>
+        <p:txBody>
+          <a:bodyPr wrap="square" lIns="0" tIns="0" rIns="0" bIns="0" rtlCol="0" anchor="ctr"/>
+          <a:lstStyle/>
+          <a:p>
+            <a:pPr algn="ctr" indent="0" marL="0">
+              <a:buNone/>
+            </a:pPr>
+            <a:r>
+              <a:rPr lang="en-US" sz="1300" b="1" dirty="0">
+                <a:solidFill>
+                  <a:srgbClr val="9D174D"/>
+                </a:solidFill>
+                <a:latin typeface="Trebuchet MS" pitchFamily="34" charset="0"/>
+                <a:ea typeface="Trebuchet MS" pitchFamily="34" charset="-122"/>
+                <a:cs typeface="Trebuchet MS" pitchFamily="34" charset="-120"/>
+              </a:rPr>
+              <a:t>ed</a:t>
+            </a:r>
+            <a:endParaRPr lang="en-US" sz="1300" dirty="0"/>
+          </a:p>
+        </p:txBody>
+      </p:sp>
+      <p:sp>
+        <p:nvSpPr>
+          <p:cNvPr id="25" name="Text 23"/>
+          <p:cNvSpPr/>
+          <p:nvPr/>
+        </p:nvSpPr>
+        <p:spPr>
+          <a:xfrm>
+            <a:off x="6519672" y="2569464"/>
+            <a:ext cx="1828800" cy="201168"/>
+          </a:xfrm>
+          <a:prstGeom prst="rect">
+            <a:avLst/>
+          </a:prstGeom>
+          <a:noFill/>
+          <a:ln/>
+        </p:spPr>
+        <p:txBody>
+          <a:bodyPr wrap="square" lIns="0" tIns="0" rIns="0" bIns="0" rtlCol="0" anchor="t"/>
+          <a:lstStyle/>
+          <a:p>
+            <a:pPr algn="ctr" indent="0" marL="0">
+              <a:buNone/>
+            </a:pPr>
+            <a:r>
+              <a:rPr lang="en-US" sz="850" dirty="0">
+                <a:solidFill>
+                  <a:srgbClr val="475569"/>
+                </a:solidFill>
+                <a:latin typeface="Calibri" pitchFamily="34" charset="0"/>
+                <a:ea typeface="Calibri" pitchFamily="34" charset="-122"/>
+                <a:cs typeface="Calibri" pitchFamily="34" charset="-120"/>
+              </a:rPr>
+              <a:t>past tense</a:t>
+            </a:r>
+            <a:endParaRPr lang="en-US" sz="850" dirty="0"/>
+          </a:p>
+        </p:txBody>
+      </p:sp>
+      <p:sp>
+        <p:nvSpPr>
+          <p:cNvPr id="26" name="Shape 24"/>
           <p:cNvSpPr/>
           <p:nvPr/>
         </p:nvSpPr>
@@ -10109,7 +10562,7 @@
       </p:sp>
       <p:sp>
         <p:nvSpPr>
-          <p:cNvPr id="23" name="Text 21"/>
+          <p:cNvPr id="27" name="Text 25"/>
           <p:cNvSpPr/>
           <p:nvPr/>
         </p:nvSpPr>
@@ -10148,7 +10601,7 @@
       </p:sp>
       <p:sp>
         <p:nvSpPr>
-          <p:cNvPr id="24" name="Shape 22"/>
+          <p:cNvPr id="28" name="Shape 26"/>
           <p:cNvSpPr/>
           <p:nvPr/>
         </p:nvSpPr>
@@ -10175,7 +10628,7 @@
       </p:sp>
       <p:sp>
         <p:nvSpPr>
-          <p:cNvPr id="25" name="Shape 23"/>
+          <p:cNvPr id="29" name="Shape 27"/>
           <p:cNvSpPr/>
           <p:nvPr/>
         </p:nvSpPr>
@@ -10202,7 +10655,7 @@
       </p:sp>
       <p:sp>
         <p:nvSpPr>
-          <p:cNvPr id="26" name="Text 24"/>
+          <p:cNvPr id="30" name="Text 28"/>
           <p:cNvSpPr/>
           <p:nvPr/>
         </p:nvSpPr>
@@ -10233,7 +10686,7 @@
                 <a:ea typeface="Trebuchet MS" pitchFamily="34" charset="-122"/>
                 <a:cs typeface="Trebuchet MS" pitchFamily="34" charset="-120"/>
               </a:rPr>
-              <a:t>ex</a:t>
+              <a:t>ac</a:t>
             </a:r>
             <a:endParaRPr lang="en-US" sz="1400" dirty="0"/>
           </a:p>
@@ -10241,7 +10694,7 @@
       </p:sp>
       <p:sp>
         <p:nvSpPr>
-          <p:cNvPr id="27" name="Text 25"/>
+          <p:cNvPr id="31" name="Text 29"/>
           <p:cNvSpPr/>
           <p:nvPr/>
         </p:nvSpPr>
@@ -10280,7 +10733,7 @@
       </p:sp>
       <p:sp>
         <p:nvSpPr>
-          <p:cNvPr id="28" name="Shape 26"/>
+          <p:cNvPr id="32" name="Shape 30"/>
           <p:cNvSpPr/>
           <p:nvPr/>
         </p:nvSpPr>
@@ -10307,7 +10760,7 @@
       </p:sp>
       <p:sp>
         <p:nvSpPr>
-          <p:cNvPr id="29" name="Text 27"/>
+          <p:cNvPr id="33" name="Text 31"/>
           <p:cNvSpPr/>
           <p:nvPr/>
         </p:nvSpPr>
@@ -10338,7 +10791,7 @@
                 <a:ea typeface="Trebuchet MS" pitchFamily="34" charset="-122"/>
                 <a:cs typeface="Trebuchet MS" pitchFamily="34" charset="-120"/>
               </a:rPr>
-              <a:t>claim</a:t>
+              <a:t>claimed</a:t>
             </a:r>
             <a:endParaRPr lang="en-US" sz="1400" dirty="0"/>
           </a:p>
@@ -10346,7 +10799,7 @@
       </p:sp>
       <p:sp>
         <p:nvSpPr>
-          <p:cNvPr id="30" name="Shape 28"/>
+          <p:cNvPr id="34" name="Shape 32"/>
           <p:cNvSpPr/>
           <p:nvPr/>
         </p:nvSpPr>
@@ -10373,7 +10826,7 @@
       </p:sp>
       <p:sp>
         <p:nvSpPr>
-          <p:cNvPr id="31" name="Text 29"/>
+          <p:cNvPr id="35" name="Text 33"/>
           <p:cNvSpPr/>
           <p:nvPr/>
         </p:nvSpPr>
@@ -10412,7 +10865,7 @@
       </p:sp>
       <p:sp>
         <p:nvSpPr>
-          <p:cNvPr id="32" name="Shape 30"/>
+          <p:cNvPr id="36" name="Shape 34"/>
           <p:cNvSpPr/>
           <p:nvPr/>
         </p:nvSpPr>
@@ -10439,13 +10892,13 @@
       </p:sp>
       <p:sp>
         <p:nvSpPr>
-          <p:cNvPr id="33" name="Shape 31"/>
-          <p:cNvSpPr/>
-          <p:nvPr/>
-        </p:nvSpPr>
-        <p:spPr>
-          <a:xfrm>
-            <a:off x="2254649" y="4169664"/>
+          <p:cNvPr id="37" name="Shape 35"/>
+          <p:cNvSpPr/>
+          <p:nvPr/>
+        </p:nvSpPr>
+        <p:spPr>
+          <a:xfrm>
+            <a:off x="2124837" y="4169664"/>
             <a:ext cx="685800" cy="384048"/>
           </a:xfrm>
           <a:prstGeom prst="rect">
@@ -10466,13 +10919,13 @@
       </p:sp>
       <p:sp>
         <p:nvSpPr>
-          <p:cNvPr id="34" name="Text 32"/>
-          <p:cNvSpPr/>
-          <p:nvPr/>
-        </p:nvSpPr>
-        <p:spPr>
-          <a:xfrm>
-            <a:off x="2254649" y="4169664"/>
+          <p:cNvPr id="38" name="Text 36"/>
+          <p:cNvSpPr/>
+          <p:nvPr/>
+        </p:nvSpPr>
+        <p:spPr>
+          <a:xfrm>
+            <a:off x="2124837" y="4169664"/>
             <a:ext cx="685800" cy="384048"/>
           </a:xfrm>
           <a:prstGeom prst="rect">
@@ -10497,7 +10950,7 @@
                 <a:ea typeface="Trebuchet MS" pitchFamily="34" charset="-122"/>
                 <a:cs typeface="Trebuchet MS" pitchFamily="34" charset="-120"/>
               </a:rPr>
-              <a:t>e</a:t>
+              <a:t>a</a:t>
             </a:r>
             <a:endParaRPr lang="en-US" sz="900" dirty="0"/>
           </a:p>
@@ -10505,13 +10958,13 @@
       </p:sp>
       <p:sp>
         <p:nvSpPr>
-          <p:cNvPr id="35" name="Shape 33"/>
-          <p:cNvSpPr/>
-          <p:nvPr/>
-        </p:nvSpPr>
-        <p:spPr>
-          <a:xfrm>
-            <a:off x="3293146" y="4169664"/>
+          <p:cNvPr id="39" name="Shape 37"/>
+          <p:cNvSpPr/>
+          <p:nvPr/>
+        </p:nvSpPr>
+        <p:spPr>
+          <a:xfrm>
+            <a:off x="3033522" y="4169664"/>
             <a:ext cx="685800" cy="384048"/>
           </a:xfrm>
           <a:prstGeom prst="rect">
@@ -10532,13 +10985,13 @@
       </p:sp>
       <p:sp>
         <p:nvSpPr>
-          <p:cNvPr id="36" name="Text 34"/>
-          <p:cNvSpPr/>
-          <p:nvPr/>
-        </p:nvSpPr>
-        <p:spPr>
-          <a:xfrm>
-            <a:off x="3293146" y="4169664"/>
+          <p:cNvPr id="40" name="Text 38"/>
+          <p:cNvSpPr/>
+          <p:nvPr/>
+        </p:nvSpPr>
+        <p:spPr>
+          <a:xfrm>
+            <a:off x="3033522" y="4169664"/>
             <a:ext cx="685800" cy="384048"/>
           </a:xfrm>
           <a:prstGeom prst="rect">
@@ -10563,7 +11016,7 @@
                 <a:ea typeface="Trebuchet MS" pitchFamily="34" charset="-122"/>
                 <a:cs typeface="Trebuchet MS" pitchFamily="34" charset="-120"/>
               </a:rPr>
-              <a:t>x</a:t>
+              <a:t>c</a:t>
             </a:r>
             <a:endParaRPr lang="en-US" sz="900" dirty="0"/>
           </a:p>
@@ -10571,13 +11024,79 @@
       </p:sp>
       <p:sp>
         <p:nvSpPr>
-          <p:cNvPr id="37" name="Text 35"/>
-          <p:cNvSpPr/>
-          <p:nvPr/>
-        </p:nvSpPr>
-        <p:spPr>
-          <a:xfrm>
-            <a:off x="3293146" y="4572000"/>
+          <p:cNvPr id="41" name="Shape 39"/>
+          <p:cNvSpPr/>
+          <p:nvPr/>
+        </p:nvSpPr>
+        <p:spPr>
+          <a:xfrm>
+            <a:off x="3942207" y="4169664"/>
+            <a:ext cx="685800" cy="384048"/>
+          </a:xfrm>
+          <a:prstGeom prst="rect">
+            <a:avLst>
+              <a:gd name="adj" fmla="val 9524"/>
+            </a:avLst>
+          </a:prstGeom>
+          <a:solidFill>
+            <a:srgbClr val="FFFFFF"/>
+          </a:solidFill>
+          <a:ln w="12700">
+            <a:solidFill>
+              <a:srgbClr val="DB2777"/>
+            </a:solidFill>
+            <a:prstDash val="solid"/>
+          </a:ln>
+        </p:spPr>
+      </p:sp>
+      <p:sp>
+        <p:nvSpPr>
+          <p:cNvPr id="42" name="Text 40"/>
+          <p:cNvSpPr/>
+          <p:nvPr/>
+        </p:nvSpPr>
+        <p:spPr>
+          <a:xfrm>
+            <a:off x="3942207" y="4169664"/>
+            <a:ext cx="685800" cy="384048"/>
+          </a:xfrm>
+          <a:prstGeom prst="rect">
+            <a:avLst/>
+          </a:prstGeom>
+          <a:noFill/>
+          <a:ln/>
+        </p:spPr>
+        <p:txBody>
+          <a:bodyPr wrap="square" lIns="0" tIns="0" rIns="0" bIns="0" rtlCol="0" anchor="ctr"/>
+          <a:lstStyle/>
+          <a:p>
+            <a:pPr algn="ctr" indent="0" marL="0">
+              <a:buNone/>
+            </a:pPr>
+            <a:r>
+              <a:rPr lang="en-US" sz="900" b="1" dirty="0">
+                <a:solidFill>
+                  <a:srgbClr val="9D174D"/>
+                </a:solidFill>
+                <a:latin typeface="Trebuchet MS" pitchFamily="34" charset="0"/>
+                <a:ea typeface="Trebuchet MS" pitchFamily="34" charset="-122"/>
+                <a:cs typeface="Trebuchet MS" pitchFamily="34" charset="-120"/>
+              </a:rPr>
+              <a:t>c</a:t>
+            </a:r>
+            <a:endParaRPr lang="en-US" sz="900" dirty="0"/>
+          </a:p>
+        </p:txBody>
+      </p:sp>
+      <p:sp>
+        <p:nvSpPr>
+          <p:cNvPr id="43" name="Text 41"/>
+          <p:cNvSpPr/>
+          <p:nvPr/>
+        </p:nvSpPr>
+        <p:spPr>
+          <a:xfrm>
+            <a:off x="3942207" y="4572000"/>
             <a:ext cx="685800" cy="219456"/>
           </a:xfrm>
           <a:prstGeom prst="rect">
@@ -10602,7 +11121,7 @@
                 <a:ea typeface="Calibri" pitchFamily="34" charset="-122"/>
                 <a:cs typeface="Calibri" pitchFamily="34" charset="-120"/>
               </a:rPr>
-              <a:t>/ks/</a:t>
+              <a:t>/k/</a:t>
             </a:r>
             <a:endParaRPr lang="en-US" sz="750" dirty="0"/>
           </a:p>
@@ -10610,13 +11129,13 @@
       </p:sp>
       <p:sp>
         <p:nvSpPr>
-          <p:cNvPr id="38" name="Shape 36"/>
-          <p:cNvSpPr/>
-          <p:nvPr/>
-        </p:nvSpPr>
-        <p:spPr>
-          <a:xfrm>
-            <a:off x="4331643" y="4169664"/>
+          <p:cNvPr id="44" name="Shape 42"/>
+          <p:cNvSpPr/>
+          <p:nvPr/>
+        </p:nvSpPr>
+        <p:spPr>
+          <a:xfrm>
+            <a:off x="4850892" y="4169664"/>
             <a:ext cx="685800" cy="384048"/>
           </a:xfrm>
           <a:prstGeom prst="rect">
@@ -10637,13 +11156,13 @@
       </p:sp>
       <p:sp>
         <p:nvSpPr>
-          <p:cNvPr id="39" name="Text 37"/>
-          <p:cNvSpPr/>
-          <p:nvPr/>
-        </p:nvSpPr>
-        <p:spPr>
-          <a:xfrm>
-            <a:off x="4331643" y="4169664"/>
+          <p:cNvPr id="45" name="Text 43"/>
+          <p:cNvSpPr/>
+          <p:nvPr/>
+        </p:nvSpPr>
+        <p:spPr>
+          <a:xfrm>
+            <a:off x="4850892" y="4169664"/>
             <a:ext cx="685800" cy="384048"/>
           </a:xfrm>
           <a:prstGeom prst="rect">
@@ -10668,7 +11187,7 @@
                 <a:ea typeface="Trebuchet MS" pitchFamily="34" charset="-122"/>
                 <a:cs typeface="Trebuchet MS" pitchFamily="34" charset="-120"/>
               </a:rPr>
-              <a:t>c</a:t>
+              <a:t>l</a:t>
             </a:r>
             <a:endParaRPr lang="en-US" sz="900" dirty="0"/>
           </a:p>
@@ -10676,13 +11195,211 @@
       </p:sp>
       <p:sp>
         <p:nvSpPr>
-          <p:cNvPr id="40" name="Text 38"/>
-          <p:cNvSpPr/>
-          <p:nvPr/>
-        </p:nvSpPr>
-        <p:spPr>
-          <a:xfrm>
-            <a:off x="4331643" y="4572000"/>
+          <p:cNvPr id="46" name="Shape 44"/>
+          <p:cNvSpPr/>
+          <p:nvPr/>
+        </p:nvSpPr>
+        <p:spPr>
+          <a:xfrm>
+            <a:off x="5759577" y="4169664"/>
+            <a:ext cx="685800" cy="384048"/>
+          </a:xfrm>
+          <a:prstGeom prst="rect">
+            <a:avLst>
+              <a:gd name="adj" fmla="val 9524"/>
+            </a:avLst>
+          </a:prstGeom>
+          <a:solidFill>
+            <a:srgbClr val="FFFFFF"/>
+          </a:solidFill>
+          <a:ln w="12700">
+            <a:solidFill>
+              <a:srgbClr val="DB2777"/>
+            </a:solidFill>
+            <a:prstDash val="solid"/>
+          </a:ln>
+        </p:spPr>
+      </p:sp>
+      <p:sp>
+        <p:nvSpPr>
+          <p:cNvPr id="47" name="Text 45"/>
+          <p:cNvSpPr/>
+          <p:nvPr/>
+        </p:nvSpPr>
+        <p:spPr>
+          <a:xfrm>
+            <a:off x="5759577" y="4169664"/>
+            <a:ext cx="685800" cy="384048"/>
+          </a:xfrm>
+          <a:prstGeom prst="rect">
+            <a:avLst/>
+          </a:prstGeom>
+          <a:noFill/>
+          <a:ln/>
+        </p:spPr>
+        <p:txBody>
+          <a:bodyPr wrap="square" lIns="0" tIns="0" rIns="0" bIns="0" rtlCol="0" anchor="ctr"/>
+          <a:lstStyle/>
+          <a:p>
+            <a:pPr algn="ctr" indent="0" marL="0">
+              <a:buNone/>
+            </a:pPr>
+            <a:r>
+              <a:rPr lang="en-US" sz="900" b="1" dirty="0">
+                <a:solidFill>
+                  <a:srgbClr val="9D174D"/>
+                </a:solidFill>
+                <a:latin typeface="Trebuchet MS" pitchFamily="34" charset="0"/>
+                <a:ea typeface="Trebuchet MS" pitchFamily="34" charset="-122"/>
+                <a:cs typeface="Trebuchet MS" pitchFamily="34" charset="-120"/>
+              </a:rPr>
+              <a:t>ai</a:t>
+            </a:r>
+            <a:endParaRPr lang="en-US" sz="900" dirty="0"/>
+          </a:p>
+        </p:txBody>
+      </p:sp>
+      <p:sp>
+        <p:nvSpPr>
+          <p:cNvPr id="48" name="Shape 46"/>
+          <p:cNvSpPr/>
+          <p:nvPr/>
+        </p:nvSpPr>
+        <p:spPr>
+          <a:xfrm>
+            <a:off x="6668262" y="4169664"/>
+            <a:ext cx="685800" cy="384048"/>
+          </a:xfrm>
+          <a:prstGeom prst="rect">
+            <a:avLst>
+              <a:gd name="adj" fmla="val 9524"/>
+            </a:avLst>
+          </a:prstGeom>
+          <a:solidFill>
+            <a:srgbClr val="FFFFFF"/>
+          </a:solidFill>
+          <a:ln w="12700">
+            <a:solidFill>
+              <a:srgbClr val="DB2777"/>
+            </a:solidFill>
+            <a:prstDash val="solid"/>
+          </a:ln>
+        </p:spPr>
+      </p:sp>
+      <p:sp>
+        <p:nvSpPr>
+          <p:cNvPr id="49" name="Text 47"/>
+          <p:cNvSpPr/>
+          <p:nvPr/>
+        </p:nvSpPr>
+        <p:spPr>
+          <a:xfrm>
+            <a:off x="6668262" y="4169664"/>
+            <a:ext cx="685800" cy="384048"/>
+          </a:xfrm>
+          <a:prstGeom prst="rect">
+            <a:avLst/>
+          </a:prstGeom>
+          <a:noFill/>
+          <a:ln/>
+        </p:spPr>
+        <p:txBody>
+          <a:bodyPr wrap="square" lIns="0" tIns="0" rIns="0" bIns="0" rtlCol="0" anchor="ctr"/>
+          <a:lstStyle/>
+          <a:p>
+            <a:pPr algn="ctr" indent="0" marL="0">
+              <a:buNone/>
+            </a:pPr>
+            <a:r>
+              <a:rPr lang="en-US" sz="900" b="1" dirty="0">
+                <a:solidFill>
+                  <a:srgbClr val="9D174D"/>
+                </a:solidFill>
+                <a:latin typeface="Trebuchet MS" pitchFamily="34" charset="0"/>
+                <a:ea typeface="Trebuchet MS" pitchFamily="34" charset="-122"/>
+                <a:cs typeface="Trebuchet MS" pitchFamily="34" charset="-120"/>
+              </a:rPr>
+              <a:t>m</a:t>
+            </a:r>
+            <a:endParaRPr lang="en-US" sz="900" dirty="0"/>
+          </a:p>
+        </p:txBody>
+      </p:sp>
+      <p:sp>
+        <p:nvSpPr>
+          <p:cNvPr id="50" name="Shape 48"/>
+          <p:cNvSpPr/>
+          <p:nvPr/>
+        </p:nvSpPr>
+        <p:spPr>
+          <a:xfrm>
+            <a:off x="7576947" y="4169664"/>
+            <a:ext cx="685800" cy="384048"/>
+          </a:xfrm>
+          <a:prstGeom prst="rect">
+            <a:avLst>
+              <a:gd name="adj" fmla="val 9524"/>
+            </a:avLst>
+          </a:prstGeom>
+          <a:solidFill>
+            <a:srgbClr val="FFFFFF"/>
+          </a:solidFill>
+          <a:ln w="12700">
+            <a:solidFill>
+              <a:srgbClr val="DB2777"/>
+            </a:solidFill>
+            <a:prstDash val="solid"/>
+          </a:ln>
+        </p:spPr>
+      </p:sp>
+      <p:sp>
+        <p:nvSpPr>
+          <p:cNvPr id="51" name="Text 49"/>
+          <p:cNvSpPr/>
+          <p:nvPr/>
+        </p:nvSpPr>
+        <p:spPr>
+          <a:xfrm>
+            <a:off x="7576947" y="4169664"/>
+            <a:ext cx="685800" cy="384048"/>
+          </a:xfrm>
+          <a:prstGeom prst="rect">
+            <a:avLst/>
+          </a:prstGeom>
+          <a:noFill/>
+          <a:ln/>
+        </p:spPr>
+        <p:txBody>
+          <a:bodyPr wrap="square" lIns="0" tIns="0" rIns="0" bIns="0" rtlCol="0" anchor="ctr"/>
+          <a:lstStyle/>
+          <a:p>
+            <a:pPr algn="ctr" indent="0" marL="0">
+              <a:buNone/>
+            </a:pPr>
+            <a:r>
+              <a:rPr lang="en-US" sz="900" b="1" dirty="0">
+                <a:solidFill>
+                  <a:srgbClr val="9D174D"/>
+                </a:solidFill>
+                <a:latin typeface="Trebuchet MS" pitchFamily="34" charset="0"/>
+                <a:ea typeface="Trebuchet MS" pitchFamily="34" charset="-122"/>
+                <a:cs typeface="Trebuchet MS" pitchFamily="34" charset="-120"/>
+              </a:rPr>
+              <a:t>ed</a:t>
+            </a:r>
+            <a:endParaRPr lang="en-US" sz="900" dirty="0"/>
+          </a:p>
+        </p:txBody>
+      </p:sp>
+      <p:sp>
+        <p:nvSpPr>
+          <p:cNvPr id="52" name="Text 50"/>
+          <p:cNvSpPr/>
+          <p:nvPr/>
+        </p:nvSpPr>
+        <p:spPr>
+          <a:xfrm>
+            <a:off x="7576947" y="4572000"/>
             <a:ext cx="685800" cy="219456"/>
           </a:xfrm>
           <a:prstGeom prst="rect">
@@ -10707,207 +11424,9 @@
                 <a:ea typeface="Calibri" pitchFamily="34" charset="-122"/>
                 <a:cs typeface="Calibri" pitchFamily="34" charset="-120"/>
               </a:rPr>
-              <a:t>/k/</a:t>
+              <a:t>/d/</a:t>
             </a:r>
             <a:endParaRPr lang="en-US" sz="750" dirty="0"/>
-          </a:p>
-        </p:txBody>
-      </p:sp>
-      <p:sp>
-        <p:nvSpPr>
-          <p:cNvPr id="41" name="Shape 39"/>
-          <p:cNvSpPr/>
-          <p:nvPr/>
-        </p:nvSpPr>
-        <p:spPr>
-          <a:xfrm>
-            <a:off x="5370141" y="4169664"/>
-            <a:ext cx="685800" cy="384048"/>
-          </a:xfrm>
-          <a:prstGeom prst="rect">
-            <a:avLst>
-              <a:gd name="adj" fmla="val 9524"/>
-            </a:avLst>
-          </a:prstGeom>
-          <a:solidFill>
-            <a:srgbClr val="FFFFFF"/>
-          </a:solidFill>
-          <a:ln w="12700">
-            <a:solidFill>
-              <a:srgbClr val="DB2777"/>
-            </a:solidFill>
-            <a:prstDash val="solid"/>
-          </a:ln>
-        </p:spPr>
-      </p:sp>
-      <p:sp>
-        <p:nvSpPr>
-          <p:cNvPr id="42" name="Text 40"/>
-          <p:cNvSpPr/>
-          <p:nvPr/>
-        </p:nvSpPr>
-        <p:spPr>
-          <a:xfrm>
-            <a:off x="5370141" y="4169664"/>
-            <a:ext cx="685800" cy="384048"/>
-          </a:xfrm>
-          <a:prstGeom prst="rect">
-            <a:avLst/>
-          </a:prstGeom>
-          <a:noFill/>
-          <a:ln/>
-        </p:spPr>
-        <p:txBody>
-          <a:bodyPr wrap="square" lIns="0" tIns="0" rIns="0" bIns="0" rtlCol="0" anchor="ctr"/>
-          <a:lstStyle/>
-          <a:p>
-            <a:pPr algn="ctr" indent="0" marL="0">
-              <a:buNone/>
-            </a:pPr>
-            <a:r>
-              <a:rPr lang="en-US" sz="900" b="1" dirty="0">
-                <a:solidFill>
-                  <a:srgbClr val="9D174D"/>
-                </a:solidFill>
-                <a:latin typeface="Trebuchet MS" pitchFamily="34" charset="0"/>
-                <a:ea typeface="Trebuchet MS" pitchFamily="34" charset="-122"/>
-                <a:cs typeface="Trebuchet MS" pitchFamily="34" charset="-120"/>
-              </a:rPr>
-              <a:t>l</a:t>
-            </a:r>
-            <a:endParaRPr lang="en-US" sz="900" dirty="0"/>
-          </a:p>
-        </p:txBody>
-      </p:sp>
-      <p:sp>
-        <p:nvSpPr>
-          <p:cNvPr id="43" name="Shape 41"/>
-          <p:cNvSpPr/>
-          <p:nvPr/>
-        </p:nvSpPr>
-        <p:spPr>
-          <a:xfrm>
-            <a:off x="6408638" y="4169664"/>
-            <a:ext cx="685800" cy="384048"/>
-          </a:xfrm>
-          <a:prstGeom prst="rect">
-            <a:avLst>
-              <a:gd name="adj" fmla="val 9524"/>
-            </a:avLst>
-          </a:prstGeom>
-          <a:solidFill>
-            <a:srgbClr val="FFFFFF"/>
-          </a:solidFill>
-          <a:ln w="12700">
-            <a:solidFill>
-              <a:srgbClr val="DB2777"/>
-            </a:solidFill>
-            <a:prstDash val="solid"/>
-          </a:ln>
-        </p:spPr>
-      </p:sp>
-      <p:sp>
-        <p:nvSpPr>
-          <p:cNvPr id="44" name="Text 42"/>
-          <p:cNvSpPr/>
-          <p:nvPr/>
-        </p:nvSpPr>
-        <p:spPr>
-          <a:xfrm>
-            <a:off x="6408638" y="4169664"/>
-            <a:ext cx="685800" cy="384048"/>
-          </a:xfrm>
-          <a:prstGeom prst="rect">
-            <a:avLst/>
-          </a:prstGeom>
-          <a:noFill/>
-          <a:ln/>
-        </p:spPr>
-        <p:txBody>
-          <a:bodyPr wrap="square" lIns="0" tIns="0" rIns="0" bIns="0" rtlCol="0" anchor="ctr"/>
-          <a:lstStyle/>
-          <a:p>
-            <a:pPr algn="ctr" indent="0" marL="0">
-              <a:buNone/>
-            </a:pPr>
-            <a:r>
-              <a:rPr lang="en-US" sz="900" b="1" dirty="0">
-                <a:solidFill>
-                  <a:srgbClr val="9D174D"/>
-                </a:solidFill>
-                <a:latin typeface="Trebuchet MS" pitchFamily="34" charset="0"/>
-                <a:ea typeface="Trebuchet MS" pitchFamily="34" charset="-122"/>
-                <a:cs typeface="Trebuchet MS" pitchFamily="34" charset="-120"/>
-              </a:rPr>
-              <a:t>ai</a:t>
-            </a:r>
-            <a:endParaRPr lang="en-US" sz="900" dirty="0"/>
-          </a:p>
-        </p:txBody>
-      </p:sp>
-      <p:sp>
-        <p:nvSpPr>
-          <p:cNvPr id="45" name="Shape 43"/>
-          <p:cNvSpPr/>
-          <p:nvPr/>
-        </p:nvSpPr>
-        <p:spPr>
-          <a:xfrm>
-            <a:off x="7447135" y="4169664"/>
-            <a:ext cx="685800" cy="384048"/>
-          </a:xfrm>
-          <a:prstGeom prst="rect">
-            <a:avLst>
-              <a:gd name="adj" fmla="val 9524"/>
-            </a:avLst>
-          </a:prstGeom>
-          <a:solidFill>
-            <a:srgbClr val="FFFFFF"/>
-          </a:solidFill>
-          <a:ln w="12700">
-            <a:solidFill>
-              <a:srgbClr val="DB2777"/>
-            </a:solidFill>
-            <a:prstDash val="solid"/>
-          </a:ln>
-        </p:spPr>
-      </p:sp>
-      <p:sp>
-        <p:nvSpPr>
-          <p:cNvPr id="46" name="Text 44"/>
-          <p:cNvSpPr/>
-          <p:nvPr/>
-        </p:nvSpPr>
-        <p:spPr>
-          <a:xfrm>
-            <a:off x="7447135" y="4169664"/>
-            <a:ext cx="685800" cy="384048"/>
-          </a:xfrm>
-          <a:prstGeom prst="rect">
-            <a:avLst/>
-          </a:prstGeom>
-          <a:noFill/>
-          <a:ln/>
-        </p:spPr>
-        <p:txBody>
-          <a:bodyPr wrap="square" lIns="0" tIns="0" rIns="0" bIns="0" rtlCol="0" anchor="ctr"/>
-          <a:lstStyle/>
-          <a:p>
-            <a:pPr algn="ctr" indent="0" marL="0">
-              <a:buNone/>
-            </a:pPr>
-            <a:r>
-              <a:rPr lang="en-US" sz="900" b="1" dirty="0">
-                <a:solidFill>
-                  <a:srgbClr val="9D174D"/>
-                </a:solidFill>
-                <a:latin typeface="Trebuchet MS" pitchFamily="34" charset="0"/>
-                <a:ea typeface="Trebuchet MS" pitchFamily="34" charset="-122"/>
-                <a:cs typeface="Trebuchet MS" pitchFamily="34" charset="-120"/>
-              </a:rPr>
-              <a:t>m</a:t>
-            </a:r>
-            <a:endParaRPr lang="en-US" sz="900" dirty="0"/>
           </a:p>
         </p:txBody>
       </p:sp>
@@ -11336,7 +11855,7 @@
                 <a:ea typeface="Trebuchet MS" pitchFamily="34" charset="-122"/>
                 <a:cs typeface="Trebuchet MS" pitchFamily="34" charset="-120"/>
               </a:rPr>
-              <a:t>acclaim</a:t>
+              <a:t>exclaim</a:t>
             </a:r>
             <a:endParaRPr lang="en-US" sz="2800" dirty="0"/>
           </a:p>
@@ -12163,7 +12682,7 @@
                 <a:ea typeface="Trebuchet MS" pitchFamily="34" charset="-122"/>
                 <a:cs typeface="Trebuchet MS" pitchFamily="34" charset="-120"/>
               </a:rPr>
-              <a:t>acclaim</a:t>
+              <a:t>exclaim</a:t>
             </a:r>
             <a:endParaRPr lang="en-US" sz="2800" dirty="0"/>
           </a:p>
@@ -12302,7 +12821,7 @@
                 <a:ea typeface="Trebuchet MS" pitchFamily="34" charset="-122"/>
                 <a:cs typeface="Trebuchet MS" pitchFamily="34" charset="-120"/>
               </a:rPr>
-              <a:t>ac</a:t>
+              <a:t>ex</a:t>
             </a:r>
             <a:endParaRPr lang="en-US" sz="1300" dirty="0"/>
           </a:p>
@@ -12341,7 +12860,7 @@
                 <a:ea typeface="Calibri" pitchFamily="34" charset="-122"/>
                 <a:cs typeface="Calibri" pitchFamily="34" charset="-120"/>
               </a:rPr>
-              <a:t>to or towards</a:t>
+              <a:t>out, away from</a:t>
             </a:r>
             <a:endParaRPr lang="en-US" sz="850" dirty="0"/>
           </a:p>
@@ -12349,46 +12868,7 @@
       </p:sp>
       <p:sp>
         <p:nvSpPr>
-          <p:cNvPr id="19" name="Text 17"/>
-          <p:cNvSpPr/>
-          <p:nvPr/>
-        </p:nvSpPr>
-        <p:spPr>
-          <a:xfrm>
-            <a:off x="2938272" y="2752344"/>
-            <a:ext cx="1828800" cy="182880"/>
-          </a:xfrm>
-          <a:prstGeom prst="rect">
-            <a:avLst/>
-          </a:prstGeom>
-          <a:noFill/>
-          <a:ln/>
-        </p:spPr>
-        <p:txBody>
-          <a:bodyPr wrap="square" lIns="0" tIns="0" rIns="0" bIns="0" rtlCol="0" anchor="t"/>
-          <a:lstStyle/>
-          <a:p>
-            <a:pPr algn="ctr" indent="0" marL="0">
-              <a:buNone/>
-            </a:pPr>
-            <a:r>
-              <a:rPr lang="en-US" sz="700" i="1" dirty="0">
-                <a:solidFill>
-                  <a:srgbClr val="94A3B8"/>
-                </a:solidFill>
-                <a:latin typeface="Calibri" pitchFamily="34" charset="0"/>
-                <a:ea typeface="Calibri" pitchFamily="34" charset="-122"/>
-                <a:cs typeface="Calibri" pitchFamily="34" charset="-120"/>
-              </a:rPr>
-              <a:t>ad → ac before 'c'</a:t>
-            </a:r>
-            <a:endParaRPr lang="en-US" sz="700" dirty="0"/>
-          </a:p>
-        </p:txBody>
-      </p:sp>
-      <p:sp>
-        <p:nvSpPr>
-          <p:cNvPr id="20" name="Shape 18"/>
+          <p:cNvPr id="19" name="Shape 17"/>
           <p:cNvSpPr/>
           <p:nvPr/>
         </p:nvSpPr>
@@ -12422,7 +12902,7 @@
       </p:sp>
       <p:sp>
         <p:nvSpPr>
-          <p:cNvPr id="21" name="Text 19"/>
+          <p:cNvPr id="20" name="Text 18"/>
           <p:cNvSpPr/>
           <p:nvPr/>
         </p:nvSpPr>
@@ -12461,7 +12941,7 @@
       </p:sp>
       <p:sp>
         <p:nvSpPr>
-          <p:cNvPr id="22" name="Text 20"/>
+          <p:cNvPr id="21" name="Text 19"/>
           <p:cNvSpPr/>
           <p:nvPr/>
         </p:nvSpPr>
@@ -12500,7 +12980,7 @@
       </p:sp>
       <p:sp>
         <p:nvSpPr>
-          <p:cNvPr id="23" name="Shape 21"/>
+          <p:cNvPr id="22" name="Shape 20"/>
           <p:cNvSpPr/>
           <p:nvPr/>
         </p:nvSpPr>
@@ -12527,7 +13007,7 @@
       </p:sp>
       <p:sp>
         <p:nvSpPr>
-          <p:cNvPr id="24" name="Text 22"/>
+          <p:cNvPr id="23" name="Text 21"/>
           <p:cNvSpPr/>
           <p:nvPr/>
         </p:nvSpPr>
@@ -12566,7 +13046,7 @@
       </p:sp>
       <p:sp>
         <p:nvSpPr>
-          <p:cNvPr id="25" name="Shape 23"/>
+          <p:cNvPr id="24" name="Shape 22"/>
           <p:cNvSpPr/>
           <p:nvPr/>
         </p:nvSpPr>
@@ -12593,7 +13073,7 @@
       </p:sp>
       <p:sp>
         <p:nvSpPr>
-          <p:cNvPr id="26" name="Text 24"/>
+          <p:cNvPr id="25" name="Text 23"/>
           <p:cNvSpPr/>
           <p:nvPr/>
         </p:nvSpPr>
@@ -12632,7 +13112,7 @@
       </p:sp>
       <p:sp>
         <p:nvSpPr>
-          <p:cNvPr id="27" name="Shape 25"/>
+          <p:cNvPr id="26" name="Shape 24"/>
           <p:cNvSpPr/>
           <p:nvPr/>
         </p:nvSpPr>
@@ -12659,7 +13139,7 @@
       </p:sp>
       <p:sp>
         <p:nvSpPr>
-          <p:cNvPr id="28" name="Text 26"/>
+          <p:cNvPr id="27" name="Text 25"/>
           <p:cNvSpPr/>
           <p:nvPr/>
         </p:nvSpPr>
@@ -12698,7 +13178,7 @@
       </p:sp>
       <p:sp>
         <p:nvSpPr>
-          <p:cNvPr id="29" name="Shape 27"/>
+          <p:cNvPr id="28" name="Shape 26"/>
           <p:cNvSpPr/>
           <p:nvPr/>
         </p:nvSpPr>
@@ -12725,7 +13205,7 @@
       </p:sp>
       <p:sp>
         <p:nvSpPr>
-          <p:cNvPr id="30" name="Text 28"/>
+          <p:cNvPr id="29" name="Text 27"/>
           <p:cNvSpPr/>
           <p:nvPr/>
         </p:nvSpPr>
@@ -13187,7 +13667,7 @@
                 <a:ea typeface="Trebuchet MS" pitchFamily="34" charset="-122"/>
                 <a:cs typeface="Trebuchet MS" pitchFamily="34" charset="-120"/>
               </a:rPr>
-              <a:t>acclaim</a:t>
+              <a:t>exclaim</a:t>
             </a:r>
             <a:endParaRPr lang="en-US" sz="2800" dirty="0"/>
           </a:p>
@@ -13326,7 +13806,7 @@
                 <a:ea typeface="Trebuchet MS" pitchFamily="34" charset="-122"/>
                 <a:cs typeface="Trebuchet MS" pitchFamily="34" charset="-120"/>
               </a:rPr>
-              <a:t>ac</a:t>
+              <a:t>ex</a:t>
             </a:r>
             <a:endParaRPr lang="en-US" sz="1300" dirty="0"/>
           </a:p>
@@ -13365,7 +13845,7 @@
                 <a:ea typeface="Calibri" pitchFamily="34" charset="-122"/>
                 <a:cs typeface="Calibri" pitchFamily="34" charset="-120"/>
               </a:rPr>
-              <a:t>to or towards</a:t>
+              <a:t>out, away from</a:t>
             </a:r>
             <a:endParaRPr lang="en-US" sz="850" dirty="0"/>
           </a:p>
@@ -13373,46 +13853,7 @@
       </p:sp>
       <p:sp>
         <p:nvSpPr>
-          <p:cNvPr id="19" name="Text 17"/>
-          <p:cNvSpPr/>
-          <p:nvPr/>
-        </p:nvSpPr>
-        <p:spPr>
-          <a:xfrm>
-            <a:off x="2938272" y="2752344"/>
-            <a:ext cx="1828800" cy="182880"/>
-          </a:xfrm>
-          <a:prstGeom prst="rect">
-            <a:avLst/>
-          </a:prstGeom>
-          <a:noFill/>
-          <a:ln/>
-        </p:spPr>
-        <p:txBody>
-          <a:bodyPr wrap="square" lIns="0" tIns="0" rIns="0" bIns="0" rtlCol="0" anchor="t"/>
-          <a:lstStyle/>
-          <a:p>
-            <a:pPr algn="ctr" indent="0" marL="0">
-              <a:buNone/>
-            </a:pPr>
-            <a:r>
-              <a:rPr lang="en-US" sz="700" i="1" dirty="0">
-                <a:solidFill>
-                  <a:srgbClr val="94A3B8"/>
-                </a:solidFill>
-                <a:latin typeface="Calibri" pitchFamily="34" charset="0"/>
-                <a:ea typeface="Calibri" pitchFamily="34" charset="-122"/>
-                <a:cs typeface="Calibri" pitchFamily="34" charset="-120"/>
-              </a:rPr>
-              <a:t>ad → ac before 'c'</a:t>
-            </a:r>
-            <a:endParaRPr lang="en-US" sz="700" dirty="0"/>
-          </a:p>
-        </p:txBody>
-      </p:sp>
-      <p:sp>
-        <p:nvSpPr>
-          <p:cNvPr id="20" name="Shape 18"/>
+          <p:cNvPr id="19" name="Shape 17"/>
           <p:cNvSpPr/>
           <p:nvPr/>
         </p:nvSpPr>
@@ -13446,7 +13887,7 @@
       </p:sp>
       <p:sp>
         <p:nvSpPr>
-          <p:cNvPr id="21" name="Text 19"/>
+          <p:cNvPr id="20" name="Text 18"/>
           <p:cNvSpPr/>
           <p:nvPr/>
         </p:nvSpPr>
@@ -13485,7 +13926,7 @@
       </p:sp>
       <p:sp>
         <p:nvSpPr>
-          <p:cNvPr id="22" name="Text 20"/>
+          <p:cNvPr id="21" name="Text 19"/>
           <p:cNvSpPr/>
           <p:nvPr/>
         </p:nvSpPr>
@@ -13524,7 +13965,7 @@
       </p:sp>
       <p:sp>
         <p:nvSpPr>
-          <p:cNvPr id="23" name="Shape 21"/>
+          <p:cNvPr id="22" name="Shape 20"/>
           <p:cNvSpPr/>
           <p:nvPr/>
         </p:nvSpPr>
@@ -13551,7 +13992,7 @@
       </p:sp>
       <p:sp>
         <p:nvSpPr>
-          <p:cNvPr id="24" name="Text 22"/>
+          <p:cNvPr id="23" name="Text 21"/>
           <p:cNvSpPr/>
           <p:nvPr/>
         </p:nvSpPr>
@@ -13590,7 +14031,7 @@
       </p:sp>
       <p:sp>
         <p:nvSpPr>
-          <p:cNvPr id="25" name="Shape 23"/>
+          <p:cNvPr id="24" name="Shape 22"/>
           <p:cNvSpPr/>
           <p:nvPr/>
         </p:nvSpPr>
@@ -13617,7 +14058,7 @@
       </p:sp>
       <p:sp>
         <p:nvSpPr>
-          <p:cNvPr id="26" name="Shape 24"/>
+          <p:cNvPr id="25" name="Shape 23"/>
           <p:cNvSpPr/>
           <p:nvPr/>
         </p:nvSpPr>
@@ -13644,7 +14085,7 @@
       </p:sp>
       <p:sp>
         <p:nvSpPr>
-          <p:cNvPr id="27" name="Text 25"/>
+          <p:cNvPr id="26" name="Text 24"/>
           <p:cNvSpPr/>
           <p:nvPr/>
         </p:nvSpPr>
@@ -13675,7 +14116,7 @@
                 <a:ea typeface="Trebuchet MS" pitchFamily="34" charset="-122"/>
                 <a:cs typeface="Trebuchet MS" pitchFamily="34" charset="-120"/>
               </a:rPr>
-              <a:t>ac</a:t>
+              <a:t>ex</a:t>
             </a:r>
             <a:endParaRPr lang="en-US" sz="1400" dirty="0"/>
           </a:p>
@@ -13683,7 +14124,7 @@
       </p:sp>
       <p:sp>
         <p:nvSpPr>
-          <p:cNvPr id="28" name="Text 26"/>
+          <p:cNvPr id="27" name="Text 25"/>
           <p:cNvSpPr/>
           <p:nvPr/>
         </p:nvSpPr>
@@ -13722,7 +14163,7 @@
       </p:sp>
       <p:sp>
         <p:nvSpPr>
-          <p:cNvPr id="29" name="Shape 27"/>
+          <p:cNvPr id="28" name="Shape 26"/>
           <p:cNvSpPr/>
           <p:nvPr/>
         </p:nvSpPr>
@@ -13749,7 +14190,7 @@
       </p:sp>
       <p:sp>
         <p:nvSpPr>
-          <p:cNvPr id="30" name="Text 28"/>
+          <p:cNvPr id="29" name="Text 27"/>
           <p:cNvSpPr/>
           <p:nvPr/>
         </p:nvSpPr>
@@ -13788,7 +14229,7 @@
       </p:sp>
       <p:sp>
         <p:nvSpPr>
-          <p:cNvPr id="31" name="Shape 29"/>
+          <p:cNvPr id="30" name="Shape 28"/>
           <p:cNvSpPr/>
           <p:nvPr/>
         </p:nvSpPr>
@@ -13815,7 +14256,7 @@
       </p:sp>
       <p:sp>
         <p:nvSpPr>
-          <p:cNvPr id="32" name="Text 30"/>
+          <p:cNvPr id="31" name="Text 29"/>
           <p:cNvSpPr/>
           <p:nvPr/>
         </p:nvSpPr>
@@ -13854,7 +14295,7 @@
       </p:sp>
       <p:sp>
         <p:nvSpPr>
-          <p:cNvPr id="33" name="Shape 31"/>
+          <p:cNvPr id="32" name="Shape 30"/>
           <p:cNvSpPr/>
           <p:nvPr/>
         </p:nvSpPr>
@@ -13881,7 +14322,7 @@
       </p:sp>
       <p:sp>
         <p:nvSpPr>
-          <p:cNvPr id="34" name="Text 32"/>
+          <p:cNvPr id="33" name="Text 31"/>
           <p:cNvSpPr/>
           <p:nvPr/>
         </p:nvSpPr>
@@ -14608,7 +15049,7 @@
                 <a:ea typeface="Trebuchet MS" pitchFamily="34" charset="-122"/>
                 <a:cs typeface="Trebuchet MS" pitchFamily="34" charset="-120"/>
               </a:rPr>
-              <a:t>acclaim</a:t>
+              <a:t>exclaim</a:t>
             </a:r>
             <a:endParaRPr lang="en-US" sz="2800" dirty="0"/>
           </a:p>
@@ -14747,7 +15188,7 @@
                 <a:ea typeface="Trebuchet MS" pitchFamily="34" charset="-122"/>
                 <a:cs typeface="Trebuchet MS" pitchFamily="34" charset="-120"/>
               </a:rPr>
-              <a:t>ac</a:t>
+              <a:t>ex</a:t>
             </a:r>
             <a:endParaRPr lang="en-US" sz="1300" dirty="0"/>
           </a:p>
@@ -14786,7 +15227,7 @@
                 <a:ea typeface="Calibri" pitchFamily="34" charset="-122"/>
                 <a:cs typeface="Calibri" pitchFamily="34" charset="-120"/>
               </a:rPr>
-              <a:t>to or towards</a:t>
+              <a:t>out, away from</a:t>
             </a:r>
             <a:endParaRPr lang="en-US" sz="850" dirty="0"/>
           </a:p>
@@ -14794,46 +15235,7 @@
       </p:sp>
       <p:sp>
         <p:nvSpPr>
-          <p:cNvPr id="19" name="Text 17"/>
-          <p:cNvSpPr/>
-          <p:nvPr/>
-        </p:nvSpPr>
-        <p:spPr>
-          <a:xfrm>
-            <a:off x="2938272" y="2752344"/>
-            <a:ext cx="1828800" cy="182880"/>
-          </a:xfrm>
-          <a:prstGeom prst="rect">
-            <a:avLst/>
-          </a:prstGeom>
-          <a:noFill/>
-          <a:ln/>
-        </p:spPr>
-        <p:txBody>
-          <a:bodyPr wrap="square" lIns="0" tIns="0" rIns="0" bIns="0" rtlCol="0" anchor="t"/>
-          <a:lstStyle/>
-          <a:p>
-            <a:pPr algn="ctr" indent="0" marL="0">
-              <a:buNone/>
-            </a:pPr>
-            <a:r>
-              <a:rPr lang="en-US" sz="700" i="1" dirty="0">
-                <a:solidFill>
-                  <a:srgbClr val="94A3B8"/>
-                </a:solidFill>
-                <a:latin typeface="Calibri" pitchFamily="34" charset="0"/>
-                <a:ea typeface="Calibri" pitchFamily="34" charset="-122"/>
-                <a:cs typeface="Calibri" pitchFamily="34" charset="-120"/>
-              </a:rPr>
-              <a:t>ad → ac before 'c'</a:t>
-            </a:r>
-            <a:endParaRPr lang="en-US" sz="700" dirty="0"/>
-          </a:p>
-        </p:txBody>
-      </p:sp>
-      <p:sp>
-        <p:nvSpPr>
-          <p:cNvPr id="20" name="Shape 18"/>
+          <p:cNvPr id="19" name="Shape 17"/>
           <p:cNvSpPr/>
           <p:nvPr/>
         </p:nvSpPr>
@@ -14867,7 +15269,7 @@
       </p:sp>
       <p:sp>
         <p:nvSpPr>
-          <p:cNvPr id="21" name="Text 19"/>
+          <p:cNvPr id="20" name="Text 18"/>
           <p:cNvSpPr/>
           <p:nvPr/>
         </p:nvSpPr>
@@ -14906,7 +15308,7 @@
       </p:sp>
       <p:sp>
         <p:nvSpPr>
-          <p:cNvPr id="22" name="Text 20"/>
+          <p:cNvPr id="21" name="Text 19"/>
           <p:cNvSpPr/>
           <p:nvPr/>
         </p:nvSpPr>
@@ -14945,7 +15347,7 @@
       </p:sp>
       <p:sp>
         <p:nvSpPr>
-          <p:cNvPr id="23" name="Shape 21"/>
+          <p:cNvPr id="22" name="Shape 20"/>
           <p:cNvSpPr/>
           <p:nvPr/>
         </p:nvSpPr>
@@ -14972,7 +15374,7 @@
       </p:sp>
       <p:sp>
         <p:nvSpPr>
-          <p:cNvPr id="24" name="Text 22"/>
+          <p:cNvPr id="23" name="Text 21"/>
           <p:cNvSpPr/>
           <p:nvPr/>
         </p:nvSpPr>
@@ -15011,7 +15413,7 @@
       </p:sp>
       <p:sp>
         <p:nvSpPr>
-          <p:cNvPr id="25" name="Shape 23"/>
+          <p:cNvPr id="24" name="Shape 22"/>
           <p:cNvSpPr/>
           <p:nvPr/>
         </p:nvSpPr>
@@ -15038,7 +15440,7 @@
       </p:sp>
       <p:sp>
         <p:nvSpPr>
-          <p:cNvPr id="26" name="Shape 24"/>
+          <p:cNvPr id="25" name="Shape 23"/>
           <p:cNvSpPr/>
           <p:nvPr/>
         </p:nvSpPr>
@@ -15065,7 +15467,7 @@
       </p:sp>
       <p:sp>
         <p:nvSpPr>
-          <p:cNvPr id="27" name="Text 25"/>
+          <p:cNvPr id="26" name="Text 24"/>
           <p:cNvSpPr/>
           <p:nvPr/>
         </p:nvSpPr>
@@ -15096,7 +15498,7 @@
                 <a:ea typeface="Trebuchet MS" pitchFamily="34" charset="-122"/>
                 <a:cs typeface="Trebuchet MS" pitchFamily="34" charset="-120"/>
               </a:rPr>
-              <a:t>ac</a:t>
+              <a:t>ex</a:t>
             </a:r>
             <a:endParaRPr lang="en-US" sz="1400" dirty="0"/>
           </a:p>
@@ -15104,7 +15506,7 @@
       </p:sp>
       <p:sp>
         <p:nvSpPr>
-          <p:cNvPr id="28" name="Text 26"/>
+          <p:cNvPr id="27" name="Text 25"/>
           <p:cNvSpPr/>
           <p:nvPr/>
         </p:nvSpPr>
@@ -15143,7 +15545,7 @@
       </p:sp>
       <p:sp>
         <p:nvSpPr>
-          <p:cNvPr id="29" name="Shape 27"/>
+          <p:cNvPr id="28" name="Shape 26"/>
           <p:cNvSpPr/>
           <p:nvPr/>
         </p:nvSpPr>
@@ -15170,7 +15572,7 @@
       </p:sp>
       <p:sp>
         <p:nvSpPr>
-          <p:cNvPr id="30" name="Text 28"/>
+          <p:cNvPr id="29" name="Text 27"/>
           <p:cNvSpPr/>
           <p:nvPr/>
         </p:nvSpPr>
@@ -15209,7 +15611,7 @@
       </p:sp>
       <p:sp>
         <p:nvSpPr>
-          <p:cNvPr id="31" name="Shape 29"/>
+          <p:cNvPr id="30" name="Shape 28"/>
           <p:cNvSpPr/>
           <p:nvPr/>
         </p:nvSpPr>
@@ -15236,7 +15638,7 @@
       </p:sp>
       <p:sp>
         <p:nvSpPr>
-          <p:cNvPr id="32" name="Text 30"/>
+          <p:cNvPr id="31" name="Text 29"/>
           <p:cNvSpPr/>
           <p:nvPr/>
         </p:nvSpPr>
@@ -15275,7 +15677,7 @@
       </p:sp>
       <p:sp>
         <p:nvSpPr>
-          <p:cNvPr id="33" name="Shape 31"/>
+          <p:cNvPr id="32" name="Shape 30"/>
           <p:cNvSpPr/>
           <p:nvPr/>
         </p:nvSpPr>
@@ -15302,13 +15704,13 @@
       </p:sp>
       <p:sp>
         <p:nvSpPr>
-          <p:cNvPr id="34" name="Shape 32"/>
-          <p:cNvSpPr/>
-          <p:nvPr/>
-        </p:nvSpPr>
-        <p:spPr>
-          <a:xfrm>
-            <a:off x="2427732" y="4169664"/>
+          <p:cNvPr id="33" name="Shape 31"/>
+          <p:cNvSpPr/>
+          <p:nvPr/>
+        </p:nvSpPr>
+        <p:spPr>
+          <a:xfrm>
+            <a:off x="2254649" y="4169664"/>
             <a:ext cx="685800" cy="384048"/>
           </a:xfrm>
           <a:prstGeom prst="rect">
@@ -15329,13 +15731,13 @@
       </p:sp>
       <p:sp>
         <p:nvSpPr>
-          <p:cNvPr id="35" name="Text 33"/>
-          <p:cNvSpPr/>
-          <p:nvPr/>
-        </p:nvSpPr>
-        <p:spPr>
-          <a:xfrm>
-            <a:off x="2427732" y="4169664"/>
+          <p:cNvPr id="34" name="Text 32"/>
+          <p:cNvSpPr/>
+          <p:nvPr/>
+        </p:nvSpPr>
+        <p:spPr>
+          <a:xfrm>
+            <a:off x="2254649" y="4169664"/>
             <a:ext cx="685800" cy="384048"/>
           </a:xfrm>
           <a:prstGeom prst="rect">
@@ -15360,7 +15762,7 @@
                 <a:ea typeface="Trebuchet MS" pitchFamily="34" charset="-122"/>
                 <a:cs typeface="Trebuchet MS" pitchFamily="34" charset="-120"/>
               </a:rPr>
-              <a:t>a</a:t>
+              <a:t>e</a:t>
             </a:r>
             <a:endParaRPr lang="en-US" sz="900" dirty="0"/>
           </a:p>
@@ -15368,13 +15770,13 @@
       </p:sp>
       <p:sp>
         <p:nvSpPr>
-          <p:cNvPr id="36" name="Shape 34"/>
-          <p:cNvSpPr/>
-          <p:nvPr/>
-        </p:nvSpPr>
-        <p:spPr>
-          <a:xfrm>
-            <a:off x="3639312" y="4169664"/>
+          <p:cNvPr id="35" name="Shape 33"/>
+          <p:cNvSpPr/>
+          <p:nvPr/>
+        </p:nvSpPr>
+        <p:spPr>
+          <a:xfrm>
+            <a:off x="3293146" y="4169664"/>
             <a:ext cx="685800" cy="384048"/>
           </a:xfrm>
           <a:prstGeom prst="rect">
@@ -15395,13 +15797,13 @@
       </p:sp>
       <p:sp>
         <p:nvSpPr>
-          <p:cNvPr id="37" name="Text 35"/>
-          <p:cNvSpPr/>
-          <p:nvPr/>
-        </p:nvSpPr>
-        <p:spPr>
-          <a:xfrm>
-            <a:off x="3639312" y="4169664"/>
+          <p:cNvPr id="36" name="Text 34"/>
+          <p:cNvSpPr/>
+          <p:nvPr/>
+        </p:nvSpPr>
+        <p:spPr>
+          <a:xfrm>
+            <a:off x="3293146" y="4169664"/>
             <a:ext cx="685800" cy="384048"/>
           </a:xfrm>
           <a:prstGeom prst="rect">
@@ -15426,7 +15828,7 @@
                 <a:ea typeface="Trebuchet MS" pitchFamily="34" charset="-122"/>
                 <a:cs typeface="Trebuchet MS" pitchFamily="34" charset="-120"/>
               </a:rPr>
-              <a:t>cc</a:t>
+              <a:t>x</a:t>
             </a:r>
             <a:endParaRPr lang="en-US" sz="900" dirty="0"/>
           </a:p>
@@ -15434,13 +15836,13 @@
       </p:sp>
       <p:sp>
         <p:nvSpPr>
-          <p:cNvPr id="38" name="Text 36"/>
-          <p:cNvSpPr/>
-          <p:nvPr/>
-        </p:nvSpPr>
-        <p:spPr>
-          <a:xfrm>
-            <a:off x="3639312" y="4572000"/>
+          <p:cNvPr id="37" name="Text 35"/>
+          <p:cNvSpPr/>
+          <p:nvPr/>
+        </p:nvSpPr>
+        <p:spPr>
+          <a:xfrm>
+            <a:off x="3293146" y="4572000"/>
             <a:ext cx="685800" cy="219456"/>
           </a:xfrm>
           <a:prstGeom prst="rect">
@@ -15465,7 +15867,7 @@
                 <a:ea typeface="Calibri" pitchFamily="34" charset="-122"/>
                 <a:cs typeface="Calibri" pitchFamily="34" charset="-120"/>
               </a:rPr>
-              <a:t>/k/</a:t>
+              <a:t>/ks/</a:t>
             </a:r>
             <a:endParaRPr lang="en-US" sz="750" dirty="0"/>
           </a:p>
@@ -15473,13 +15875,13 @@
       </p:sp>
       <p:sp>
         <p:nvSpPr>
-          <p:cNvPr id="39" name="Shape 37"/>
-          <p:cNvSpPr/>
-          <p:nvPr/>
-        </p:nvSpPr>
-        <p:spPr>
-          <a:xfrm>
-            <a:off x="4850892" y="4169664"/>
+          <p:cNvPr id="38" name="Shape 36"/>
+          <p:cNvSpPr/>
+          <p:nvPr/>
+        </p:nvSpPr>
+        <p:spPr>
+          <a:xfrm>
+            <a:off x="4331643" y="4169664"/>
             <a:ext cx="685800" cy="384048"/>
           </a:xfrm>
           <a:prstGeom prst="rect">
@@ -15500,13 +15902,13 @@
       </p:sp>
       <p:sp>
         <p:nvSpPr>
-          <p:cNvPr id="40" name="Text 38"/>
-          <p:cNvSpPr/>
-          <p:nvPr/>
-        </p:nvSpPr>
-        <p:spPr>
-          <a:xfrm>
-            <a:off x="4850892" y="4169664"/>
+          <p:cNvPr id="39" name="Text 37"/>
+          <p:cNvSpPr/>
+          <p:nvPr/>
+        </p:nvSpPr>
+        <p:spPr>
+          <a:xfrm>
+            <a:off x="4331643" y="4169664"/>
             <a:ext cx="685800" cy="384048"/>
           </a:xfrm>
           <a:prstGeom prst="rect">
@@ -15531,7 +15933,7 @@
                 <a:ea typeface="Trebuchet MS" pitchFamily="34" charset="-122"/>
                 <a:cs typeface="Trebuchet MS" pitchFamily="34" charset="-120"/>
               </a:rPr>
-              <a:t>l</a:t>
+              <a:t>c</a:t>
             </a:r>
             <a:endParaRPr lang="en-US" sz="900" dirty="0"/>
           </a:p>
@@ -15539,13 +15941,52 @@
       </p:sp>
       <p:sp>
         <p:nvSpPr>
+          <p:cNvPr id="40" name="Text 38"/>
+          <p:cNvSpPr/>
+          <p:nvPr/>
+        </p:nvSpPr>
+        <p:spPr>
+          <a:xfrm>
+            <a:off x="4331643" y="4572000"/>
+            <a:ext cx="685800" cy="219456"/>
+          </a:xfrm>
+          <a:prstGeom prst="rect">
+            <a:avLst/>
+          </a:prstGeom>
+          <a:noFill/>
+          <a:ln/>
+        </p:spPr>
+        <p:txBody>
+          <a:bodyPr wrap="square" lIns="0" tIns="0" rIns="0" bIns="0" rtlCol="0" anchor="t"/>
+          <a:lstStyle/>
+          <a:p>
+            <a:pPr algn="ctr" indent="0" marL="0">
+              <a:buNone/>
+            </a:pPr>
+            <a:r>
+              <a:rPr lang="en-US" sz="750" i="1" dirty="0">
+                <a:solidFill>
+                  <a:srgbClr val="94A3B8"/>
+                </a:solidFill>
+                <a:latin typeface="Calibri" pitchFamily="34" charset="0"/>
+                <a:ea typeface="Calibri" pitchFamily="34" charset="-122"/>
+                <a:cs typeface="Calibri" pitchFamily="34" charset="-120"/>
+              </a:rPr>
+              <a:t>/k/</a:t>
+            </a:r>
+            <a:endParaRPr lang="en-US" sz="750" dirty="0"/>
+          </a:p>
+        </p:txBody>
+      </p:sp>
+      <p:sp>
+        <p:nvSpPr>
           <p:cNvPr id="41" name="Shape 39"/>
           <p:cNvSpPr/>
           <p:nvPr/>
         </p:nvSpPr>
         <p:spPr>
           <a:xfrm>
-            <a:off x="6062472" y="4169664"/>
+            <a:off x="5370141" y="4169664"/>
             <a:ext cx="685800" cy="384048"/>
           </a:xfrm>
           <a:prstGeom prst="rect">
@@ -15572,7 +16013,7 @@
         </p:nvSpPr>
         <p:spPr>
           <a:xfrm>
-            <a:off x="6062472" y="4169664"/>
+            <a:off x="5370141" y="4169664"/>
             <a:ext cx="685800" cy="384048"/>
           </a:xfrm>
           <a:prstGeom prst="rect">
@@ -15597,7 +16038,7 @@
                 <a:ea typeface="Trebuchet MS" pitchFamily="34" charset="-122"/>
                 <a:cs typeface="Trebuchet MS" pitchFamily="34" charset="-120"/>
               </a:rPr>
-              <a:t>ai</a:t>
+              <a:t>l</a:t>
             </a:r>
             <a:endParaRPr lang="en-US" sz="900" dirty="0"/>
           </a:p>
@@ -15611,7 +16052,7 @@
         </p:nvSpPr>
         <p:spPr>
           <a:xfrm>
-            <a:off x="7274052" y="4169664"/>
+            <a:off x="6408638" y="4169664"/>
             <a:ext cx="685800" cy="384048"/>
           </a:xfrm>
           <a:prstGeom prst="rect">
@@ -15638,7 +16079,73 @@
         </p:nvSpPr>
         <p:spPr>
           <a:xfrm>
-            <a:off x="7274052" y="4169664"/>
+            <a:off x="6408638" y="4169664"/>
+            <a:ext cx="685800" cy="384048"/>
+          </a:xfrm>
+          <a:prstGeom prst="rect">
+            <a:avLst/>
+          </a:prstGeom>
+          <a:noFill/>
+          <a:ln/>
+        </p:spPr>
+        <p:txBody>
+          <a:bodyPr wrap="square" lIns="0" tIns="0" rIns="0" bIns="0" rtlCol="0" anchor="ctr"/>
+          <a:lstStyle/>
+          <a:p>
+            <a:pPr algn="ctr" indent="0" marL="0">
+              <a:buNone/>
+            </a:pPr>
+            <a:r>
+              <a:rPr lang="en-US" sz="900" b="1" dirty="0">
+                <a:solidFill>
+                  <a:srgbClr val="9D174D"/>
+                </a:solidFill>
+                <a:latin typeface="Trebuchet MS" pitchFamily="34" charset="0"/>
+                <a:ea typeface="Trebuchet MS" pitchFamily="34" charset="-122"/>
+                <a:cs typeface="Trebuchet MS" pitchFamily="34" charset="-120"/>
+              </a:rPr>
+              <a:t>ai</a:t>
+            </a:r>
+            <a:endParaRPr lang="en-US" sz="900" dirty="0"/>
+          </a:p>
+        </p:txBody>
+      </p:sp>
+      <p:sp>
+        <p:nvSpPr>
+          <p:cNvPr id="45" name="Shape 43"/>
+          <p:cNvSpPr/>
+          <p:nvPr/>
+        </p:nvSpPr>
+        <p:spPr>
+          <a:xfrm>
+            <a:off x="7447135" y="4169664"/>
+            <a:ext cx="685800" cy="384048"/>
+          </a:xfrm>
+          <a:prstGeom prst="rect">
+            <a:avLst>
+              <a:gd name="adj" fmla="val 9524"/>
+            </a:avLst>
+          </a:prstGeom>
+          <a:solidFill>
+            <a:srgbClr val="FFFFFF"/>
+          </a:solidFill>
+          <a:ln w="12700">
+            <a:solidFill>
+              <a:srgbClr val="DB2777"/>
+            </a:solidFill>
+            <a:prstDash val="solid"/>
+          </a:ln>
+        </p:spPr>
+      </p:sp>
+      <p:sp>
+        <p:nvSpPr>
+          <p:cNvPr id="46" name="Text 44"/>
+          <p:cNvSpPr/>
+          <p:nvPr/>
+        </p:nvSpPr>
+        <p:spPr>
+          <a:xfrm>
+            <a:off x="7447135" y="4169664"/>
             <a:ext cx="685800" cy="384048"/>
           </a:xfrm>
           <a:prstGeom prst="rect">
@@ -16989,7 +17496,7 @@
                 <a:ea typeface="Calibri" pitchFamily="34" charset="-122"/>
                 <a:cs typeface="Calibri" pitchFamily="34" charset="-120"/>
               </a:rPr>
-              <a:t>The </a:t>
+              <a:t>The mayor would </a:t>
             </a:r>
             <a:pPr algn="l" indent="0" marL="0">
               <a:buNone/>
@@ -17006,7 +17513,7 @@
                 <a:ea typeface="Calibri" pitchFamily="34" charset="-122"/>
                 <a:cs typeface="Calibri" pitchFamily="34" charset="-120"/>
               </a:rPr>
-              <a:t>claimant</a:t>
+              <a:t>proclaim</a:t>
             </a:r>
             <a:pPr algn="l" indent="0" marL="0">
               <a:buNone/>
@@ -17020,7 +17527,7 @@
                 <a:ea typeface="Calibri" pitchFamily="34" charset="-122"/>
                 <a:cs typeface="Calibri" pitchFamily="34" charset="-120"/>
               </a:rPr>
-              <a:t> stood up to </a:t>
+              <a:t> the new law, but the citizens wanted to </a:t>
             </a:r>
             <a:pPr algn="l" indent="0" marL="0">
               <a:buNone/>
@@ -17037,7 +17544,7 @@
                 <a:ea typeface="Calibri" pitchFamily="34" charset="-122"/>
                 <a:cs typeface="Calibri" pitchFamily="34" charset="-120"/>
               </a:rPr>
-              <a:t>proclaim</a:t>
+              <a:t>reclaim</a:t>
             </a:r>
             <a:pPr algn="l" indent="0" marL="0">
               <a:buNone/>
@@ -17051,7 +17558,7 @@
                 <a:ea typeface="Calibri" pitchFamily="34" charset="-122"/>
                 <a:cs typeface="Calibri" pitchFamily="34" charset="-120"/>
               </a:rPr>
-              <a:t> her rights, but the judge asked her to </a:t>
+              <a:t> their rights, and some would </a:t>
             </a:r>
             <a:pPr algn="l" indent="0" marL="0">
               <a:buNone/>
@@ -17082,7 +17589,7 @@
                 <a:ea typeface="Calibri" pitchFamily="34" charset="-122"/>
                 <a:cs typeface="Calibri" pitchFamily="34" charset="-120"/>
               </a:rPr>
-              <a:t> any involvement in the dispute.</a:t>
+              <a:t> any part in the vote.</a:t>
             </a:r>
             <a:endParaRPr lang="en-US" sz="1800" dirty="0"/>
           </a:p>
@@ -17237,7 +17744,7 @@
                 <a:ea typeface="Trebuchet MS" pitchFamily="34" charset="-122"/>
                 <a:cs typeface="Trebuchet MS" pitchFamily="34" charset="-120"/>
               </a:rPr>
-              <a:t>claimant</a:t>
+              <a:t>proclaim</a:t>
             </a:r>
             <a:endParaRPr lang="en-US" sz="1400" dirty="0"/>
           </a:p>
@@ -17365,7 +17872,7 @@
                 <a:ea typeface="Trebuchet MS" pitchFamily="34" charset="-122"/>
                 <a:cs typeface="Trebuchet MS" pitchFamily="34" charset="-120"/>
               </a:rPr>
-              <a:t>proclaim</a:t>
+              <a:t>reclaim</a:t>
             </a:r>
             <a:endParaRPr lang="en-US" sz="1400" dirty="0"/>
           </a:p>
@@ -17963,7 +18470,7 @@
                 <a:ea typeface="Trebuchet MS" pitchFamily="34" charset="-122"/>
                 <a:cs typeface="Trebuchet MS" pitchFamily="34" charset="-120"/>
               </a:rPr>
-              <a:t>claimant</a:t>
+              <a:t>proclaim</a:t>
             </a:r>
             <a:endParaRPr lang="en-US" sz="2800" dirty="0"/>
           </a:p>
@@ -18790,7 +19297,7 @@
                 <a:ea typeface="Trebuchet MS" pitchFamily="34" charset="-122"/>
                 <a:cs typeface="Trebuchet MS" pitchFamily="34" charset="-120"/>
               </a:rPr>
-              <a:t>claimant</a:t>
+              <a:t>proclaim</a:t>
             </a:r>
             <a:endParaRPr lang="en-US" sz="2800" dirty="0"/>
           </a:p>
@@ -18879,11 +19386,11 @@
             </a:avLst>
           </a:prstGeom>
           <a:solidFill>
-            <a:srgbClr val="CCFBF1"/>
+            <a:srgbClr val="DDD6FE"/>
           </a:solidFill>
           <a:ln w="19050">
             <a:solidFill>
-              <a:srgbClr val="0D9488"/>
+              <a:srgbClr val="7C3AED"/>
             </a:solidFill>
             <a:prstDash val="solid"/>
           </a:ln>
@@ -18923,13 +19430,13 @@
             <a:r>
               <a:rPr lang="en-US" sz="1300" b="1" dirty="0">
                 <a:solidFill>
-                  <a:srgbClr val="0F766E"/>
+                  <a:srgbClr val="4C1D95"/>
                 </a:solidFill>
                 <a:latin typeface="Trebuchet MS" pitchFamily="34" charset="0"/>
                 <a:ea typeface="Trebuchet MS" pitchFamily="34" charset="-122"/>
                 <a:cs typeface="Trebuchet MS" pitchFamily="34" charset="-120"/>
               </a:rPr>
-              <a:t>claim</a:t>
+              <a:t>pro</a:t>
             </a:r>
             <a:endParaRPr lang="en-US" sz="1300" dirty="0"/>
           </a:p>
@@ -18968,7 +19475,7 @@
                 <a:ea typeface="Calibri" pitchFamily="34" charset="-122"/>
                 <a:cs typeface="Calibri" pitchFamily="34" charset="-120"/>
               </a:rPr>
-              <a:t>to call out or declare</a:t>
+              <a:t>forward, publicly</a:t>
             </a:r>
             <a:endParaRPr lang="en-US" sz="850" dirty="0"/>
           </a:p>
@@ -18991,11 +19498,11 @@
             </a:avLst>
           </a:prstGeom>
           <a:solidFill>
-            <a:srgbClr val="FCE7F3"/>
+            <a:srgbClr val="CCFBF1"/>
           </a:solidFill>
           <a:ln w="19050">
             <a:solidFill>
-              <a:srgbClr val="DB2777"/>
+              <a:srgbClr val="0D9488"/>
             </a:solidFill>
             <a:prstDash val="solid"/>
           </a:ln>
@@ -19035,13 +19542,13 @@
             <a:r>
               <a:rPr lang="en-US" sz="1300" b="1" dirty="0">
                 <a:solidFill>
-                  <a:srgbClr val="9D174D"/>
+                  <a:srgbClr val="0F766E"/>
                 </a:solidFill>
                 <a:latin typeface="Trebuchet MS" pitchFamily="34" charset="0"/>
                 <a:ea typeface="Trebuchet MS" pitchFamily="34" charset="-122"/>
                 <a:cs typeface="Trebuchet MS" pitchFamily="34" charset="-120"/>
               </a:rPr>
-              <a:t>ant</a:t>
+              <a:t>claim</a:t>
             </a:r>
             <a:endParaRPr lang="en-US" sz="1300" dirty="0"/>
           </a:p>
@@ -19080,7 +19587,7 @@
                 <a:ea typeface="Calibri" pitchFamily="34" charset="-122"/>
                 <a:cs typeface="Calibri" pitchFamily="34" charset="-120"/>
               </a:rPr>
-              <a:t>a person who does something</a:t>
+              <a:t>to call out or declare</a:t>
             </a:r>
             <a:endParaRPr lang="en-US" sz="850" dirty="0"/>
           </a:p>
@@ -19775,7 +20282,7 @@
                 <a:ea typeface="Trebuchet MS" pitchFamily="34" charset="-122"/>
                 <a:cs typeface="Trebuchet MS" pitchFamily="34" charset="-120"/>
               </a:rPr>
-              <a:t>claimant</a:t>
+              <a:t>proclaim</a:t>
             </a:r>
             <a:endParaRPr lang="en-US" sz="2800" dirty="0"/>
           </a:p>
@@ -19864,11 +20371,11 @@
             </a:avLst>
           </a:prstGeom>
           <a:solidFill>
-            <a:srgbClr val="CCFBF1"/>
+            <a:srgbClr val="DDD6FE"/>
           </a:solidFill>
           <a:ln w="19050">
             <a:solidFill>
-              <a:srgbClr val="0D9488"/>
+              <a:srgbClr val="7C3AED"/>
             </a:solidFill>
             <a:prstDash val="solid"/>
           </a:ln>
@@ -19908,13 +20415,13 @@
             <a:r>
               <a:rPr lang="en-US" sz="1300" b="1" dirty="0">
                 <a:solidFill>
-                  <a:srgbClr val="0F766E"/>
+                  <a:srgbClr val="4C1D95"/>
                 </a:solidFill>
                 <a:latin typeface="Trebuchet MS" pitchFamily="34" charset="0"/>
                 <a:ea typeface="Trebuchet MS" pitchFamily="34" charset="-122"/>
                 <a:cs typeface="Trebuchet MS" pitchFamily="34" charset="-120"/>
               </a:rPr>
-              <a:t>claim</a:t>
+              <a:t>pro</a:t>
             </a:r>
             <a:endParaRPr lang="en-US" sz="1300" dirty="0"/>
           </a:p>
@@ -19953,7 +20460,7 @@
                 <a:ea typeface="Calibri" pitchFamily="34" charset="-122"/>
                 <a:cs typeface="Calibri" pitchFamily="34" charset="-120"/>
               </a:rPr>
-              <a:t>to call out or declare</a:t>
+              <a:t>forward, publicly</a:t>
             </a:r>
             <a:endParaRPr lang="en-US" sz="850" dirty="0"/>
           </a:p>
@@ -19976,11 +20483,11 @@
             </a:avLst>
           </a:prstGeom>
           <a:solidFill>
-            <a:srgbClr val="FCE7F3"/>
+            <a:srgbClr val="CCFBF1"/>
           </a:solidFill>
           <a:ln w="19050">
             <a:solidFill>
-              <a:srgbClr val="DB2777"/>
+              <a:srgbClr val="0D9488"/>
             </a:solidFill>
             <a:prstDash val="solid"/>
           </a:ln>
@@ -20020,13 +20527,13 @@
             <a:r>
               <a:rPr lang="en-US" sz="1300" b="1" dirty="0">
                 <a:solidFill>
-                  <a:srgbClr val="9D174D"/>
+                  <a:srgbClr val="0F766E"/>
                 </a:solidFill>
                 <a:latin typeface="Trebuchet MS" pitchFamily="34" charset="0"/>
                 <a:ea typeface="Trebuchet MS" pitchFamily="34" charset="-122"/>
                 <a:cs typeface="Trebuchet MS" pitchFamily="34" charset="-120"/>
               </a:rPr>
-              <a:t>ant</a:t>
+              <a:t>claim</a:t>
             </a:r>
             <a:endParaRPr lang="en-US" sz="1300" dirty="0"/>
           </a:p>
@@ -20065,7 +20572,7 @@
                 <a:ea typeface="Calibri" pitchFamily="34" charset="-122"/>
                 <a:cs typeface="Calibri" pitchFamily="34" charset="-120"/>
               </a:rPr>
-              <a:t>a person who does something</a:t>
+              <a:t>to call out or declare</a:t>
             </a:r>
             <a:endParaRPr lang="en-US" sz="850" dirty="0"/>
           </a:p>
@@ -20224,7 +20731,7 @@
                 <a:ea typeface="Trebuchet MS" pitchFamily="34" charset="-122"/>
                 <a:cs typeface="Trebuchet MS" pitchFamily="34" charset="-120"/>
               </a:rPr>
-              <a:t>claim</a:t>
+              <a:t>pro</a:t>
             </a:r>
             <a:endParaRPr lang="en-US" sz="1400" dirty="0"/>
           </a:p>
@@ -20329,7 +20836,7 @@
                 <a:ea typeface="Trebuchet MS" pitchFamily="34" charset="-122"/>
                 <a:cs typeface="Trebuchet MS" pitchFamily="34" charset="-120"/>
               </a:rPr>
-              <a:t>ant</a:t>
+              <a:t>claim</a:t>
             </a:r>
             <a:endParaRPr lang="en-US" sz="1400" dirty="0"/>
           </a:p>
@@ -20892,7 +21399,7 @@
                 <a:ea typeface="Trebuchet MS" pitchFamily="34" charset="-122"/>
                 <a:cs typeface="Trebuchet MS" pitchFamily="34" charset="-120"/>
               </a:rPr>
-              <a:t>claimant</a:t>
+              <a:t>proclaim</a:t>
             </a:r>
             <a:endParaRPr lang="en-US" sz="2800" dirty="0"/>
           </a:p>
@@ -20981,11 +21488,11 @@
             </a:avLst>
           </a:prstGeom>
           <a:solidFill>
-            <a:srgbClr val="CCFBF1"/>
+            <a:srgbClr val="DDD6FE"/>
           </a:solidFill>
           <a:ln w="19050">
             <a:solidFill>
-              <a:srgbClr val="0D9488"/>
+              <a:srgbClr val="7C3AED"/>
             </a:solidFill>
             <a:prstDash val="solid"/>
           </a:ln>
@@ -21025,13 +21532,13 @@
             <a:r>
               <a:rPr lang="en-US" sz="1300" b="1" dirty="0">
                 <a:solidFill>
-                  <a:srgbClr val="0F766E"/>
+                  <a:srgbClr val="4C1D95"/>
                 </a:solidFill>
                 <a:latin typeface="Trebuchet MS" pitchFamily="34" charset="0"/>
                 <a:ea typeface="Trebuchet MS" pitchFamily="34" charset="-122"/>
                 <a:cs typeface="Trebuchet MS" pitchFamily="34" charset="-120"/>
               </a:rPr>
-              <a:t>claim</a:t>
+              <a:t>pro</a:t>
             </a:r>
             <a:endParaRPr lang="en-US" sz="1300" dirty="0"/>
           </a:p>
@@ -21070,7 +21577,7 @@
                 <a:ea typeface="Calibri" pitchFamily="34" charset="-122"/>
                 <a:cs typeface="Calibri" pitchFamily="34" charset="-120"/>
               </a:rPr>
-              <a:t>to call out or declare</a:t>
+              <a:t>forward, publicly</a:t>
             </a:r>
             <a:endParaRPr lang="en-US" sz="850" dirty="0"/>
           </a:p>
@@ -21093,11 +21600,11 @@
             </a:avLst>
           </a:prstGeom>
           <a:solidFill>
-            <a:srgbClr val="FCE7F3"/>
+            <a:srgbClr val="CCFBF1"/>
           </a:solidFill>
           <a:ln w="19050">
             <a:solidFill>
-              <a:srgbClr val="DB2777"/>
+              <a:srgbClr val="0D9488"/>
             </a:solidFill>
             <a:prstDash val="solid"/>
           </a:ln>
@@ -21137,13 +21644,13 @@
             <a:r>
               <a:rPr lang="en-US" sz="1300" b="1" dirty="0">
                 <a:solidFill>
-                  <a:srgbClr val="9D174D"/>
+                  <a:srgbClr val="0F766E"/>
                 </a:solidFill>
                 <a:latin typeface="Trebuchet MS" pitchFamily="34" charset="0"/>
                 <a:ea typeface="Trebuchet MS" pitchFamily="34" charset="-122"/>
                 <a:cs typeface="Trebuchet MS" pitchFamily="34" charset="-120"/>
               </a:rPr>
-              <a:t>ant</a:t>
+              <a:t>claim</a:t>
             </a:r>
             <a:endParaRPr lang="en-US" sz="1300" dirty="0"/>
           </a:p>
@@ -21182,7 +21689,7 @@
                 <a:ea typeface="Calibri" pitchFamily="34" charset="-122"/>
                 <a:cs typeface="Calibri" pitchFamily="34" charset="-120"/>
               </a:rPr>
-              <a:t>a person who does something</a:t>
+              <a:t>to call out or declare</a:t>
             </a:r>
             <a:endParaRPr lang="en-US" sz="850" dirty="0"/>
           </a:p>
@@ -21341,7 +21848,7 @@
                 <a:ea typeface="Trebuchet MS" pitchFamily="34" charset="-122"/>
                 <a:cs typeface="Trebuchet MS" pitchFamily="34" charset="-120"/>
               </a:rPr>
-              <a:t>claim</a:t>
+              <a:t>pro</a:t>
             </a:r>
             <a:endParaRPr lang="en-US" sz="1400" dirty="0"/>
           </a:p>
@@ -21446,7 +21953,7 @@
                 <a:ea typeface="Trebuchet MS" pitchFamily="34" charset="-122"/>
                 <a:cs typeface="Trebuchet MS" pitchFamily="34" charset="-120"/>
               </a:rPr>
-              <a:t>ant</a:t>
+              <a:t>claim</a:t>
             </a:r>
             <a:endParaRPr lang="en-US" sz="1400" dirty="0"/>
           </a:p>
@@ -21605,6 +22112,204 @@
                 <a:ea typeface="Trebuchet MS" pitchFamily="34" charset="-122"/>
                 <a:cs typeface="Trebuchet MS" pitchFamily="34" charset="-120"/>
               </a:rPr>
+              <a:t>p</a:t>
+            </a:r>
+            <a:endParaRPr lang="en-US" sz="900" dirty="0"/>
+          </a:p>
+        </p:txBody>
+      </p:sp>
+      <p:sp>
+        <p:nvSpPr>
+          <p:cNvPr id="35" name="Shape 33"/>
+          <p:cNvSpPr/>
+          <p:nvPr/>
+        </p:nvSpPr>
+        <p:spPr>
+          <a:xfrm>
+            <a:off x="3033522" y="4169664"/>
+            <a:ext cx="685800" cy="384048"/>
+          </a:xfrm>
+          <a:prstGeom prst="rect">
+            <a:avLst>
+              <a:gd name="adj" fmla="val 9524"/>
+            </a:avLst>
+          </a:prstGeom>
+          <a:solidFill>
+            <a:srgbClr val="FFFFFF"/>
+          </a:solidFill>
+          <a:ln w="12700">
+            <a:solidFill>
+              <a:srgbClr val="DB2777"/>
+            </a:solidFill>
+            <a:prstDash val="solid"/>
+          </a:ln>
+        </p:spPr>
+      </p:sp>
+      <p:sp>
+        <p:nvSpPr>
+          <p:cNvPr id="36" name="Text 34"/>
+          <p:cNvSpPr/>
+          <p:nvPr/>
+        </p:nvSpPr>
+        <p:spPr>
+          <a:xfrm>
+            <a:off x="3033522" y="4169664"/>
+            <a:ext cx="685800" cy="384048"/>
+          </a:xfrm>
+          <a:prstGeom prst="rect">
+            <a:avLst/>
+          </a:prstGeom>
+          <a:noFill/>
+          <a:ln/>
+        </p:spPr>
+        <p:txBody>
+          <a:bodyPr wrap="square" lIns="0" tIns="0" rIns="0" bIns="0" rtlCol="0" anchor="ctr"/>
+          <a:lstStyle/>
+          <a:p>
+            <a:pPr algn="ctr" indent="0" marL="0">
+              <a:buNone/>
+            </a:pPr>
+            <a:r>
+              <a:rPr lang="en-US" sz="900" b="1" dirty="0">
+                <a:solidFill>
+                  <a:srgbClr val="9D174D"/>
+                </a:solidFill>
+                <a:latin typeface="Trebuchet MS" pitchFamily="34" charset="0"/>
+                <a:ea typeface="Trebuchet MS" pitchFamily="34" charset="-122"/>
+                <a:cs typeface="Trebuchet MS" pitchFamily="34" charset="-120"/>
+              </a:rPr>
+              <a:t>r</a:t>
+            </a:r>
+            <a:endParaRPr lang="en-US" sz="900" dirty="0"/>
+          </a:p>
+        </p:txBody>
+      </p:sp>
+      <p:sp>
+        <p:nvSpPr>
+          <p:cNvPr id="37" name="Shape 35"/>
+          <p:cNvSpPr/>
+          <p:nvPr/>
+        </p:nvSpPr>
+        <p:spPr>
+          <a:xfrm>
+            <a:off x="3942207" y="4169664"/>
+            <a:ext cx="685800" cy="384048"/>
+          </a:xfrm>
+          <a:prstGeom prst="rect">
+            <a:avLst>
+              <a:gd name="adj" fmla="val 9524"/>
+            </a:avLst>
+          </a:prstGeom>
+          <a:solidFill>
+            <a:srgbClr val="FFFFFF"/>
+          </a:solidFill>
+          <a:ln w="12700">
+            <a:solidFill>
+              <a:srgbClr val="DB2777"/>
+            </a:solidFill>
+            <a:prstDash val="solid"/>
+          </a:ln>
+        </p:spPr>
+      </p:sp>
+      <p:sp>
+        <p:nvSpPr>
+          <p:cNvPr id="38" name="Text 36"/>
+          <p:cNvSpPr/>
+          <p:nvPr/>
+        </p:nvSpPr>
+        <p:spPr>
+          <a:xfrm>
+            <a:off x="3942207" y="4169664"/>
+            <a:ext cx="685800" cy="384048"/>
+          </a:xfrm>
+          <a:prstGeom prst="rect">
+            <a:avLst/>
+          </a:prstGeom>
+          <a:noFill/>
+          <a:ln/>
+        </p:spPr>
+        <p:txBody>
+          <a:bodyPr wrap="square" lIns="0" tIns="0" rIns="0" bIns="0" rtlCol="0" anchor="ctr"/>
+          <a:lstStyle/>
+          <a:p>
+            <a:pPr algn="ctr" indent="0" marL="0">
+              <a:buNone/>
+            </a:pPr>
+            <a:r>
+              <a:rPr lang="en-US" sz="900" b="1" dirty="0">
+                <a:solidFill>
+                  <a:srgbClr val="9D174D"/>
+                </a:solidFill>
+                <a:latin typeface="Trebuchet MS" pitchFamily="34" charset="0"/>
+                <a:ea typeface="Trebuchet MS" pitchFamily="34" charset="-122"/>
+                <a:cs typeface="Trebuchet MS" pitchFamily="34" charset="-120"/>
+              </a:rPr>
+              <a:t>o</a:t>
+            </a:r>
+            <a:endParaRPr lang="en-US" sz="900" dirty="0"/>
+          </a:p>
+        </p:txBody>
+      </p:sp>
+      <p:sp>
+        <p:nvSpPr>
+          <p:cNvPr id="39" name="Shape 37"/>
+          <p:cNvSpPr/>
+          <p:nvPr/>
+        </p:nvSpPr>
+        <p:spPr>
+          <a:xfrm>
+            <a:off x="4850892" y="4169664"/>
+            <a:ext cx="685800" cy="384048"/>
+          </a:xfrm>
+          <a:prstGeom prst="rect">
+            <a:avLst>
+              <a:gd name="adj" fmla="val 9524"/>
+            </a:avLst>
+          </a:prstGeom>
+          <a:solidFill>
+            <a:srgbClr val="FFFFFF"/>
+          </a:solidFill>
+          <a:ln w="12700">
+            <a:solidFill>
+              <a:srgbClr val="DB2777"/>
+            </a:solidFill>
+            <a:prstDash val="solid"/>
+          </a:ln>
+        </p:spPr>
+      </p:sp>
+      <p:sp>
+        <p:nvSpPr>
+          <p:cNvPr id="40" name="Text 38"/>
+          <p:cNvSpPr/>
+          <p:nvPr/>
+        </p:nvSpPr>
+        <p:spPr>
+          <a:xfrm>
+            <a:off x="4850892" y="4169664"/>
+            <a:ext cx="685800" cy="384048"/>
+          </a:xfrm>
+          <a:prstGeom prst="rect">
+            <a:avLst/>
+          </a:prstGeom>
+          <a:noFill/>
+          <a:ln/>
+        </p:spPr>
+        <p:txBody>
+          <a:bodyPr wrap="square" lIns="0" tIns="0" rIns="0" bIns="0" rtlCol="0" anchor="ctr"/>
+          <a:lstStyle/>
+          <a:p>
+            <a:pPr algn="ctr" indent="0" marL="0">
+              <a:buNone/>
+            </a:pPr>
+            <a:r>
+              <a:rPr lang="en-US" sz="900" b="1" dirty="0">
+                <a:solidFill>
+                  <a:srgbClr val="9D174D"/>
+                </a:solidFill>
+                <a:latin typeface="Trebuchet MS" pitchFamily="34" charset="0"/>
+                <a:ea typeface="Trebuchet MS" pitchFamily="34" charset="-122"/>
+                <a:cs typeface="Trebuchet MS" pitchFamily="34" charset="-120"/>
+              </a:rPr>
               <a:t>c</a:t>
             </a:r>
             <a:endParaRPr lang="en-US" sz="900" dirty="0"/>
@@ -21613,13 +22318,13 @@
       </p:sp>
       <p:sp>
         <p:nvSpPr>
-          <p:cNvPr id="35" name="Text 33"/>
-          <p:cNvSpPr/>
-          <p:nvPr/>
-        </p:nvSpPr>
-        <p:spPr>
-          <a:xfrm>
-            <a:off x="2124837" y="4572000"/>
+          <p:cNvPr id="41" name="Text 39"/>
+          <p:cNvSpPr/>
+          <p:nvPr/>
+        </p:nvSpPr>
+        <p:spPr>
+          <a:xfrm>
+            <a:off x="4850892" y="4572000"/>
             <a:ext cx="685800" cy="219456"/>
           </a:xfrm>
           <a:prstGeom prst="rect">
@@ -21652,13 +22357,13 @@
       </p:sp>
       <p:sp>
         <p:nvSpPr>
-          <p:cNvPr id="36" name="Shape 34"/>
-          <p:cNvSpPr/>
-          <p:nvPr/>
-        </p:nvSpPr>
-        <p:spPr>
-          <a:xfrm>
-            <a:off x="3033522" y="4169664"/>
+          <p:cNvPr id="42" name="Shape 40"/>
+          <p:cNvSpPr/>
+          <p:nvPr/>
+        </p:nvSpPr>
+        <p:spPr>
+          <a:xfrm>
+            <a:off x="5759577" y="4169664"/>
             <a:ext cx="685800" cy="384048"/>
           </a:xfrm>
           <a:prstGeom prst="rect">
@@ -21679,13 +22384,13 @@
       </p:sp>
       <p:sp>
         <p:nvSpPr>
-          <p:cNvPr id="37" name="Text 35"/>
-          <p:cNvSpPr/>
-          <p:nvPr/>
-        </p:nvSpPr>
-        <p:spPr>
-          <a:xfrm>
-            <a:off x="3033522" y="4169664"/>
+          <p:cNvPr id="43" name="Text 41"/>
+          <p:cNvSpPr/>
+          <p:nvPr/>
+        </p:nvSpPr>
+        <p:spPr>
+          <a:xfrm>
+            <a:off x="5759577" y="4169664"/>
             <a:ext cx="685800" cy="384048"/>
           </a:xfrm>
           <a:prstGeom prst="rect">
@@ -21718,13 +22423,13 @@
       </p:sp>
       <p:sp>
         <p:nvSpPr>
-          <p:cNvPr id="38" name="Shape 36"/>
-          <p:cNvSpPr/>
-          <p:nvPr/>
-        </p:nvSpPr>
-        <p:spPr>
-          <a:xfrm>
-            <a:off x="3942207" y="4169664"/>
+          <p:cNvPr id="44" name="Shape 42"/>
+          <p:cNvSpPr/>
+          <p:nvPr/>
+        </p:nvSpPr>
+        <p:spPr>
+          <a:xfrm>
+            <a:off x="6668262" y="4169664"/>
             <a:ext cx="685800" cy="384048"/>
           </a:xfrm>
           <a:prstGeom prst="rect">
@@ -21745,13 +22450,13 @@
       </p:sp>
       <p:sp>
         <p:nvSpPr>
-          <p:cNvPr id="39" name="Text 37"/>
-          <p:cNvSpPr/>
-          <p:nvPr/>
-        </p:nvSpPr>
-        <p:spPr>
-          <a:xfrm>
-            <a:off x="3942207" y="4169664"/>
+          <p:cNvPr id="45" name="Text 43"/>
+          <p:cNvSpPr/>
+          <p:nvPr/>
+        </p:nvSpPr>
+        <p:spPr>
+          <a:xfrm>
+            <a:off x="6668262" y="4169664"/>
             <a:ext cx="685800" cy="384048"/>
           </a:xfrm>
           <a:prstGeom prst="rect">
@@ -21784,13 +22489,13 @@
       </p:sp>
       <p:sp>
         <p:nvSpPr>
-          <p:cNvPr id="40" name="Shape 38"/>
-          <p:cNvSpPr/>
-          <p:nvPr/>
-        </p:nvSpPr>
-        <p:spPr>
-          <a:xfrm>
-            <a:off x="4850892" y="4169664"/>
+          <p:cNvPr id="46" name="Shape 44"/>
+          <p:cNvSpPr/>
+          <p:nvPr/>
+        </p:nvSpPr>
+        <p:spPr>
+          <a:xfrm>
+            <a:off x="7576947" y="4169664"/>
             <a:ext cx="685800" cy="384048"/>
           </a:xfrm>
           <a:prstGeom prst="rect">
@@ -21811,13 +22516,13 @@
       </p:sp>
       <p:sp>
         <p:nvSpPr>
-          <p:cNvPr id="41" name="Text 39"/>
-          <p:cNvSpPr/>
-          <p:nvPr/>
-        </p:nvSpPr>
-        <p:spPr>
-          <a:xfrm>
-            <a:off x="4850892" y="4169664"/>
+          <p:cNvPr id="47" name="Text 45"/>
+          <p:cNvSpPr/>
+          <p:nvPr/>
+        </p:nvSpPr>
+        <p:spPr>
+          <a:xfrm>
+            <a:off x="7576947" y="4169664"/>
             <a:ext cx="685800" cy="384048"/>
           </a:xfrm>
           <a:prstGeom prst="rect">
@@ -21843,204 +22548,6 @@
                 <a:cs typeface="Trebuchet MS" pitchFamily="34" charset="-120"/>
               </a:rPr>
               <a:t>m</a:t>
-            </a:r>
-            <a:endParaRPr lang="en-US" sz="900" dirty="0"/>
-          </a:p>
-        </p:txBody>
-      </p:sp>
-      <p:sp>
-        <p:nvSpPr>
-          <p:cNvPr id="42" name="Shape 40"/>
-          <p:cNvSpPr/>
-          <p:nvPr/>
-        </p:nvSpPr>
-        <p:spPr>
-          <a:xfrm>
-            <a:off x="5759577" y="4169664"/>
-            <a:ext cx="685800" cy="384048"/>
-          </a:xfrm>
-          <a:prstGeom prst="rect">
-            <a:avLst>
-              <a:gd name="adj" fmla="val 9524"/>
-            </a:avLst>
-          </a:prstGeom>
-          <a:solidFill>
-            <a:srgbClr val="FFFFFF"/>
-          </a:solidFill>
-          <a:ln w="12700">
-            <a:solidFill>
-              <a:srgbClr val="DB2777"/>
-            </a:solidFill>
-            <a:prstDash val="solid"/>
-          </a:ln>
-        </p:spPr>
-      </p:sp>
-      <p:sp>
-        <p:nvSpPr>
-          <p:cNvPr id="43" name="Text 41"/>
-          <p:cNvSpPr/>
-          <p:nvPr/>
-        </p:nvSpPr>
-        <p:spPr>
-          <a:xfrm>
-            <a:off x="5759577" y="4169664"/>
-            <a:ext cx="685800" cy="384048"/>
-          </a:xfrm>
-          <a:prstGeom prst="rect">
-            <a:avLst/>
-          </a:prstGeom>
-          <a:noFill/>
-          <a:ln/>
-        </p:spPr>
-        <p:txBody>
-          <a:bodyPr wrap="square" lIns="0" tIns="0" rIns="0" bIns="0" rtlCol="0" anchor="ctr"/>
-          <a:lstStyle/>
-          <a:p>
-            <a:pPr algn="ctr" indent="0" marL="0">
-              <a:buNone/>
-            </a:pPr>
-            <a:r>
-              <a:rPr lang="en-US" sz="900" b="1" dirty="0">
-                <a:solidFill>
-                  <a:srgbClr val="9D174D"/>
-                </a:solidFill>
-                <a:latin typeface="Trebuchet MS" pitchFamily="34" charset="0"/>
-                <a:ea typeface="Trebuchet MS" pitchFamily="34" charset="-122"/>
-                <a:cs typeface="Trebuchet MS" pitchFamily="34" charset="-120"/>
-              </a:rPr>
-              <a:t>a</a:t>
-            </a:r>
-            <a:endParaRPr lang="en-US" sz="900" dirty="0"/>
-          </a:p>
-        </p:txBody>
-      </p:sp>
-      <p:sp>
-        <p:nvSpPr>
-          <p:cNvPr id="44" name="Shape 42"/>
-          <p:cNvSpPr/>
-          <p:nvPr/>
-        </p:nvSpPr>
-        <p:spPr>
-          <a:xfrm>
-            <a:off x="6668262" y="4169664"/>
-            <a:ext cx="685800" cy="384048"/>
-          </a:xfrm>
-          <a:prstGeom prst="rect">
-            <a:avLst>
-              <a:gd name="adj" fmla="val 9524"/>
-            </a:avLst>
-          </a:prstGeom>
-          <a:solidFill>
-            <a:srgbClr val="FFFFFF"/>
-          </a:solidFill>
-          <a:ln w="12700">
-            <a:solidFill>
-              <a:srgbClr val="DB2777"/>
-            </a:solidFill>
-            <a:prstDash val="solid"/>
-          </a:ln>
-        </p:spPr>
-      </p:sp>
-      <p:sp>
-        <p:nvSpPr>
-          <p:cNvPr id="45" name="Text 43"/>
-          <p:cNvSpPr/>
-          <p:nvPr/>
-        </p:nvSpPr>
-        <p:spPr>
-          <a:xfrm>
-            <a:off x="6668262" y="4169664"/>
-            <a:ext cx="685800" cy="384048"/>
-          </a:xfrm>
-          <a:prstGeom prst="rect">
-            <a:avLst/>
-          </a:prstGeom>
-          <a:noFill/>
-          <a:ln/>
-        </p:spPr>
-        <p:txBody>
-          <a:bodyPr wrap="square" lIns="0" tIns="0" rIns="0" bIns="0" rtlCol="0" anchor="ctr"/>
-          <a:lstStyle/>
-          <a:p>
-            <a:pPr algn="ctr" indent="0" marL="0">
-              <a:buNone/>
-            </a:pPr>
-            <a:r>
-              <a:rPr lang="en-US" sz="900" b="1" dirty="0">
-                <a:solidFill>
-                  <a:srgbClr val="9D174D"/>
-                </a:solidFill>
-                <a:latin typeface="Trebuchet MS" pitchFamily="34" charset="0"/>
-                <a:ea typeface="Trebuchet MS" pitchFamily="34" charset="-122"/>
-                <a:cs typeface="Trebuchet MS" pitchFamily="34" charset="-120"/>
-              </a:rPr>
-              <a:t>n</a:t>
-            </a:r>
-            <a:endParaRPr lang="en-US" sz="900" dirty="0"/>
-          </a:p>
-        </p:txBody>
-      </p:sp>
-      <p:sp>
-        <p:nvSpPr>
-          <p:cNvPr id="46" name="Shape 44"/>
-          <p:cNvSpPr/>
-          <p:nvPr/>
-        </p:nvSpPr>
-        <p:spPr>
-          <a:xfrm>
-            <a:off x="7576947" y="4169664"/>
-            <a:ext cx="685800" cy="384048"/>
-          </a:xfrm>
-          <a:prstGeom prst="rect">
-            <a:avLst>
-              <a:gd name="adj" fmla="val 9524"/>
-            </a:avLst>
-          </a:prstGeom>
-          <a:solidFill>
-            <a:srgbClr val="FFFFFF"/>
-          </a:solidFill>
-          <a:ln w="12700">
-            <a:solidFill>
-              <a:srgbClr val="DB2777"/>
-            </a:solidFill>
-            <a:prstDash val="solid"/>
-          </a:ln>
-        </p:spPr>
-      </p:sp>
-      <p:sp>
-        <p:nvSpPr>
-          <p:cNvPr id="47" name="Text 45"/>
-          <p:cNvSpPr/>
-          <p:nvPr/>
-        </p:nvSpPr>
-        <p:spPr>
-          <a:xfrm>
-            <a:off x="7576947" y="4169664"/>
-            <a:ext cx="685800" cy="384048"/>
-          </a:xfrm>
-          <a:prstGeom prst="rect">
-            <a:avLst/>
-          </a:prstGeom>
-          <a:noFill/>
-          <a:ln/>
-        </p:spPr>
-        <p:txBody>
-          <a:bodyPr wrap="square" lIns="0" tIns="0" rIns="0" bIns="0" rtlCol="0" anchor="ctr"/>
-          <a:lstStyle/>
-          <a:p>
-            <a:pPr algn="ctr" indent="0" marL="0">
-              <a:buNone/>
-            </a:pPr>
-            <a:r>
-              <a:rPr lang="en-US" sz="900" b="1" dirty="0">
-                <a:solidFill>
-                  <a:srgbClr val="9D174D"/>
-                </a:solidFill>
-                <a:latin typeface="Trebuchet MS" pitchFamily="34" charset="0"/>
-                <a:ea typeface="Trebuchet MS" pitchFamily="34" charset="-122"/>
-                <a:cs typeface="Trebuchet MS" pitchFamily="34" charset="-120"/>
-              </a:rPr>
-              <a:t>t</a:t>
             </a:r>
             <a:endParaRPr lang="en-US" sz="900" dirty="0"/>
           </a:p>
@@ -22471,7 +22978,7 @@
                 <a:ea typeface="Trebuchet MS" pitchFamily="34" charset="-122"/>
                 <a:cs typeface="Trebuchet MS" pitchFamily="34" charset="-120"/>
               </a:rPr>
-              <a:t>proclaim</a:t>
+              <a:t>reclaim</a:t>
             </a:r>
             <a:endParaRPr lang="en-US" sz="2800" dirty="0"/>
           </a:p>
@@ -23298,7 +23805,7 @@
                 <a:ea typeface="Trebuchet MS" pitchFamily="34" charset="-122"/>
                 <a:cs typeface="Trebuchet MS" pitchFamily="34" charset="-120"/>
               </a:rPr>
-              <a:t>proclaim</a:t>
+              <a:t>reclaim</a:t>
             </a:r>
             <a:endParaRPr lang="en-US" sz="2800" dirty="0"/>
           </a:p>
@@ -23437,7 +23944,7 @@
                 <a:ea typeface="Trebuchet MS" pitchFamily="34" charset="-122"/>
                 <a:cs typeface="Trebuchet MS" pitchFamily="34" charset="-120"/>
               </a:rPr>
-              <a:t>pro</a:t>
+              <a:t>re</a:t>
             </a:r>
             <a:endParaRPr lang="en-US" sz="1300" dirty="0"/>
           </a:p>
@@ -23476,7 +23983,7 @@
                 <a:ea typeface="Calibri" pitchFamily="34" charset="-122"/>
                 <a:cs typeface="Calibri" pitchFamily="34" charset="-120"/>
               </a:rPr>
-              <a:t>forward or publicly</a:t>
+              <a:t>again, back</a:t>
             </a:r>
             <a:endParaRPr lang="en-US" sz="850" dirty="0"/>
           </a:p>
@@ -25002,7 +25509,7 @@
                 <a:ea typeface="Trebuchet MS" pitchFamily="34" charset="-122"/>
                 <a:cs typeface="Trebuchet MS" pitchFamily="34" charset="-120"/>
               </a:rPr>
-              <a:t>proclaim</a:t>
+              <a:t>reclaim</a:t>
             </a:r>
             <a:endParaRPr lang="en-US" sz="2800" dirty="0"/>
           </a:p>
@@ -25141,7 +25648,7 @@
                 <a:ea typeface="Trebuchet MS" pitchFamily="34" charset="-122"/>
                 <a:cs typeface="Trebuchet MS" pitchFamily="34" charset="-120"/>
               </a:rPr>
-              <a:t>pro</a:t>
+              <a:t>re</a:t>
             </a:r>
             <a:endParaRPr lang="en-US" sz="1300" dirty="0"/>
           </a:p>
@@ -25180,7 +25687,7 @@
                 <a:ea typeface="Calibri" pitchFamily="34" charset="-122"/>
                 <a:cs typeface="Calibri" pitchFamily="34" charset="-120"/>
               </a:rPr>
-              <a:t>forward or publicly</a:t>
+              <a:t>again, back</a:t>
             </a:r>
             <a:endParaRPr lang="en-US" sz="850" dirty="0"/>
           </a:p>
@@ -25451,7 +25958,7 @@
                 <a:ea typeface="Trebuchet MS" pitchFamily="34" charset="-122"/>
                 <a:cs typeface="Trebuchet MS" pitchFamily="34" charset="-120"/>
               </a:rPr>
-              <a:t>pro</a:t>
+              <a:t>re</a:t>
             </a:r>
             <a:endParaRPr lang="en-US" sz="1400" dirty="0"/>
           </a:p>
@@ -26119,7 +26626,7 @@
                 <a:ea typeface="Trebuchet MS" pitchFamily="34" charset="-122"/>
                 <a:cs typeface="Trebuchet MS" pitchFamily="34" charset="-120"/>
               </a:rPr>
-              <a:t>proclaim</a:t>
+              <a:t>reclaim</a:t>
             </a:r>
             <a:endParaRPr lang="en-US" sz="2800" dirty="0"/>
           </a:p>
@@ -26258,7 +26765,7 @@
                 <a:ea typeface="Trebuchet MS" pitchFamily="34" charset="-122"/>
                 <a:cs typeface="Trebuchet MS" pitchFamily="34" charset="-120"/>
               </a:rPr>
-              <a:t>pro</a:t>
+              <a:t>re</a:t>
             </a:r>
             <a:endParaRPr lang="en-US" sz="1300" dirty="0"/>
           </a:p>
@@ -26297,7 +26804,7 @@
                 <a:ea typeface="Calibri" pitchFamily="34" charset="-122"/>
                 <a:cs typeface="Calibri" pitchFamily="34" charset="-120"/>
               </a:rPr>
-              <a:t>forward or publicly</a:t>
+              <a:t>again, back</a:t>
             </a:r>
             <a:endParaRPr lang="en-US" sz="850" dirty="0"/>
           </a:p>
@@ -26568,7 +27075,7 @@
                 <a:ea typeface="Trebuchet MS" pitchFamily="34" charset="-122"/>
                 <a:cs typeface="Trebuchet MS" pitchFamily="34" charset="-120"/>
               </a:rPr>
-              <a:t>pro</a:t>
+              <a:t>re</a:t>
             </a:r>
             <a:endParaRPr lang="en-US" sz="1400" dirty="0"/>
           </a:p>
@@ -26780,7 +27287,7 @@
         </p:nvSpPr>
         <p:spPr>
           <a:xfrm>
-            <a:off x="2124837" y="4169664"/>
+            <a:off x="2254649" y="4169664"/>
             <a:ext cx="685800" cy="384048"/>
           </a:xfrm>
           <a:prstGeom prst="rect">
@@ -26807,7 +27314,7 @@
         </p:nvSpPr>
         <p:spPr>
           <a:xfrm>
-            <a:off x="2124837" y="4169664"/>
+            <a:off x="2254649" y="4169664"/>
             <a:ext cx="685800" cy="384048"/>
           </a:xfrm>
           <a:prstGeom prst="rect">
@@ -26832,7 +27339,7 @@
                 <a:ea typeface="Trebuchet MS" pitchFamily="34" charset="-122"/>
                 <a:cs typeface="Trebuchet MS" pitchFamily="34" charset="-120"/>
               </a:rPr>
-              <a:t>p</a:t>
+              <a:t>r</a:t>
             </a:r>
             <a:endParaRPr lang="en-US" sz="900" dirty="0"/>
           </a:p>
@@ -26846,7 +27353,7 @@
         </p:nvSpPr>
         <p:spPr>
           <a:xfrm>
-            <a:off x="3033522" y="4169664"/>
+            <a:off x="3293146" y="4169664"/>
             <a:ext cx="685800" cy="384048"/>
           </a:xfrm>
           <a:prstGeom prst="rect">
@@ -26873,7 +27380,7 @@
         </p:nvSpPr>
         <p:spPr>
           <a:xfrm>
-            <a:off x="3033522" y="4169664"/>
+            <a:off x="3293146" y="4169664"/>
             <a:ext cx="685800" cy="384048"/>
           </a:xfrm>
           <a:prstGeom prst="rect">
@@ -26898,7 +27405,7 @@
                 <a:ea typeface="Trebuchet MS" pitchFamily="34" charset="-122"/>
                 <a:cs typeface="Trebuchet MS" pitchFamily="34" charset="-120"/>
               </a:rPr>
-              <a:t>r</a:t>
+              <a:t>e</a:t>
             </a:r>
             <a:endParaRPr lang="en-US" sz="900" dirty="0"/>
           </a:p>
@@ -26912,7 +27419,7 @@
         </p:nvSpPr>
         <p:spPr>
           <a:xfrm>
-            <a:off x="3942207" y="4169664"/>
+            <a:off x="4331643" y="4169664"/>
             <a:ext cx="685800" cy="384048"/>
           </a:xfrm>
           <a:prstGeom prst="rect">
@@ -26939,7 +27446,7 @@
         </p:nvSpPr>
         <p:spPr>
           <a:xfrm>
-            <a:off x="3942207" y="4169664"/>
+            <a:off x="4331643" y="4169664"/>
             <a:ext cx="685800" cy="384048"/>
           </a:xfrm>
           <a:prstGeom prst="rect">
@@ -26964,7 +27471,7 @@
                 <a:ea typeface="Trebuchet MS" pitchFamily="34" charset="-122"/>
                 <a:cs typeface="Trebuchet MS" pitchFamily="34" charset="-120"/>
               </a:rPr>
-              <a:t>o</a:t>
+              <a:t>c</a:t>
             </a:r>
             <a:endParaRPr lang="en-US" sz="900" dirty="0"/>
           </a:p>
@@ -26972,13 +27479,52 @@
       </p:sp>
       <p:sp>
         <p:nvSpPr>
-          <p:cNvPr id="39" name="Shape 37"/>
-          <p:cNvSpPr/>
-          <p:nvPr/>
-        </p:nvSpPr>
-        <p:spPr>
-          <a:xfrm>
-            <a:off x="4850892" y="4169664"/>
+          <p:cNvPr id="39" name="Text 37"/>
+          <p:cNvSpPr/>
+          <p:nvPr/>
+        </p:nvSpPr>
+        <p:spPr>
+          <a:xfrm>
+            <a:off x="4331643" y="4572000"/>
+            <a:ext cx="685800" cy="219456"/>
+          </a:xfrm>
+          <a:prstGeom prst="rect">
+            <a:avLst/>
+          </a:prstGeom>
+          <a:noFill/>
+          <a:ln/>
+        </p:spPr>
+        <p:txBody>
+          <a:bodyPr wrap="square" lIns="0" tIns="0" rIns="0" bIns="0" rtlCol="0" anchor="t"/>
+          <a:lstStyle/>
+          <a:p>
+            <a:pPr algn="ctr" indent="0" marL="0">
+              <a:buNone/>
+            </a:pPr>
+            <a:r>
+              <a:rPr lang="en-US" sz="750" i="1" dirty="0">
+                <a:solidFill>
+                  <a:srgbClr val="94A3B8"/>
+                </a:solidFill>
+                <a:latin typeface="Calibri" pitchFamily="34" charset="0"/>
+                <a:ea typeface="Calibri" pitchFamily="34" charset="-122"/>
+                <a:cs typeface="Calibri" pitchFamily="34" charset="-120"/>
+              </a:rPr>
+              <a:t>/k/</a:t>
+            </a:r>
+            <a:endParaRPr lang="en-US" sz="750" dirty="0"/>
+          </a:p>
+        </p:txBody>
+      </p:sp>
+      <p:sp>
+        <p:nvSpPr>
+          <p:cNvPr id="40" name="Shape 38"/>
+          <p:cNvSpPr/>
+          <p:nvPr/>
+        </p:nvSpPr>
+        <p:spPr>
+          <a:xfrm>
+            <a:off x="5370141" y="4169664"/>
             <a:ext cx="685800" cy="384048"/>
           </a:xfrm>
           <a:prstGeom prst="rect">
@@ -26999,13 +27545,13 @@
       </p:sp>
       <p:sp>
         <p:nvSpPr>
-          <p:cNvPr id="40" name="Text 38"/>
-          <p:cNvSpPr/>
-          <p:nvPr/>
-        </p:nvSpPr>
-        <p:spPr>
-          <a:xfrm>
-            <a:off x="4850892" y="4169664"/>
+          <p:cNvPr id="41" name="Text 39"/>
+          <p:cNvSpPr/>
+          <p:nvPr/>
+        </p:nvSpPr>
+        <p:spPr>
+          <a:xfrm>
+            <a:off x="5370141" y="4169664"/>
             <a:ext cx="685800" cy="384048"/>
           </a:xfrm>
           <a:prstGeom prst="rect">
@@ -27030,7 +27576,7 @@
                 <a:ea typeface="Trebuchet MS" pitchFamily="34" charset="-122"/>
                 <a:cs typeface="Trebuchet MS" pitchFamily="34" charset="-120"/>
               </a:rPr>
-              <a:t>c</a:t>
+              <a:t>l</a:t>
             </a:r>
             <a:endParaRPr lang="en-US" sz="900" dirty="0"/>
           </a:p>
@@ -27038,52 +27584,13 @@
       </p:sp>
       <p:sp>
         <p:nvSpPr>
-          <p:cNvPr id="41" name="Text 39"/>
-          <p:cNvSpPr/>
-          <p:nvPr/>
-        </p:nvSpPr>
-        <p:spPr>
-          <a:xfrm>
-            <a:off x="4850892" y="4572000"/>
-            <a:ext cx="685800" cy="219456"/>
-          </a:xfrm>
-          <a:prstGeom prst="rect">
-            <a:avLst/>
-          </a:prstGeom>
-          <a:noFill/>
-          <a:ln/>
-        </p:spPr>
-        <p:txBody>
-          <a:bodyPr wrap="square" lIns="0" tIns="0" rIns="0" bIns="0" rtlCol="0" anchor="t"/>
-          <a:lstStyle/>
-          <a:p>
-            <a:pPr algn="ctr" indent="0" marL="0">
-              <a:buNone/>
-            </a:pPr>
-            <a:r>
-              <a:rPr lang="en-US" sz="750" i="1" dirty="0">
-                <a:solidFill>
-                  <a:srgbClr val="94A3B8"/>
-                </a:solidFill>
-                <a:latin typeface="Calibri" pitchFamily="34" charset="0"/>
-                <a:ea typeface="Calibri" pitchFamily="34" charset="-122"/>
-                <a:cs typeface="Calibri" pitchFamily="34" charset="-120"/>
-              </a:rPr>
-              <a:t>/k/</a:t>
-            </a:r>
-            <a:endParaRPr lang="en-US" sz="750" dirty="0"/>
-          </a:p>
-        </p:txBody>
-      </p:sp>
-      <p:sp>
-        <p:nvSpPr>
           <p:cNvPr id="42" name="Shape 40"/>
           <p:cNvSpPr/>
           <p:nvPr/>
         </p:nvSpPr>
         <p:spPr>
           <a:xfrm>
-            <a:off x="5759577" y="4169664"/>
+            <a:off x="6408638" y="4169664"/>
             <a:ext cx="685800" cy="384048"/>
           </a:xfrm>
           <a:prstGeom prst="rect">
@@ -27110,7 +27617,7 @@
         </p:nvSpPr>
         <p:spPr>
           <a:xfrm>
-            <a:off x="5759577" y="4169664"/>
+            <a:off x="6408638" y="4169664"/>
             <a:ext cx="685800" cy="384048"/>
           </a:xfrm>
           <a:prstGeom prst="rect">
@@ -27135,7 +27642,7 @@
                 <a:ea typeface="Trebuchet MS" pitchFamily="34" charset="-122"/>
                 <a:cs typeface="Trebuchet MS" pitchFamily="34" charset="-120"/>
               </a:rPr>
-              <a:t>l</a:t>
+              <a:t>ai</a:t>
             </a:r>
             <a:endParaRPr lang="en-US" sz="900" dirty="0"/>
           </a:p>
@@ -27149,7 +27656,7 @@
         </p:nvSpPr>
         <p:spPr>
           <a:xfrm>
-            <a:off x="6668262" y="4169664"/>
+            <a:off x="7447135" y="4169664"/>
             <a:ext cx="685800" cy="384048"/>
           </a:xfrm>
           <a:prstGeom prst="rect">
@@ -27176,73 +27683,7 @@
         </p:nvSpPr>
         <p:spPr>
           <a:xfrm>
-            <a:off x="6668262" y="4169664"/>
-            <a:ext cx="685800" cy="384048"/>
-          </a:xfrm>
-          <a:prstGeom prst="rect">
-            <a:avLst/>
-          </a:prstGeom>
-          <a:noFill/>
-          <a:ln/>
-        </p:spPr>
-        <p:txBody>
-          <a:bodyPr wrap="square" lIns="0" tIns="0" rIns="0" bIns="0" rtlCol="0" anchor="ctr"/>
-          <a:lstStyle/>
-          <a:p>
-            <a:pPr algn="ctr" indent="0" marL="0">
-              <a:buNone/>
-            </a:pPr>
-            <a:r>
-              <a:rPr lang="en-US" sz="900" b="1" dirty="0">
-                <a:solidFill>
-                  <a:srgbClr val="9D174D"/>
-                </a:solidFill>
-                <a:latin typeface="Trebuchet MS" pitchFamily="34" charset="0"/>
-                <a:ea typeface="Trebuchet MS" pitchFamily="34" charset="-122"/>
-                <a:cs typeface="Trebuchet MS" pitchFamily="34" charset="-120"/>
-              </a:rPr>
-              <a:t>ai</a:t>
-            </a:r>
-            <a:endParaRPr lang="en-US" sz="900" dirty="0"/>
-          </a:p>
-        </p:txBody>
-      </p:sp>
-      <p:sp>
-        <p:nvSpPr>
-          <p:cNvPr id="46" name="Shape 44"/>
-          <p:cNvSpPr/>
-          <p:nvPr/>
-        </p:nvSpPr>
-        <p:spPr>
-          <a:xfrm>
-            <a:off x="7576947" y="4169664"/>
-            <a:ext cx="685800" cy="384048"/>
-          </a:xfrm>
-          <a:prstGeom prst="rect">
-            <a:avLst>
-              <a:gd name="adj" fmla="val 9524"/>
-            </a:avLst>
-          </a:prstGeom>
-          <a:solidFill>
-            <a:srgbClr val="FFFFFF"/>
-          </a:solidFill>
-          <a:ln w="12700">
-            <a:solidFill>
-              <a:srgbClr val="DB2777"/>
-            </a:solidFill>
-            <a:prstDash val="solid"/>
-          </a:ln>
-        </p:spPr>
-      </p:sp>
-      <p:sp>
-        <p:nvSpPr>
-          <p:cNvPr id="47" name="Text 45"/>
-          <p:cNvSpPr/>
-          <p:nvPr/>
-        </p:nvSpPr>
-        <p:spPr>
-          <a:xfrm>
-            <a:off x="7576947" y="4169664"/>
+            <a:off x="7447135" y="4169664"/>
             <a:ext cx="685800" cy="384048"/>
           </a:xfrm>
           <a:prstGeom prst="rect">
@@ -28703,7 +29144,7 @@
                 <a:ea typeface="Calibri" pitchFamily="34" charset="-122"/>
                 <a:cs typeface="Calibri" pitchFamily="34" charset="-120"/>
               </a:rPr>
-              <a:t>not or away</a:t>
+              <a:t>not, away from</a:t>
             </a:r>
             <a:endParaRPr lang="en-US" sz="850" dirty="0"/>
           </a:p>
@@ -29688,7 +30129,7 @@
                 <a:ea typeface="Calibri" pitchFamily="34" charset="-122"/>
                 <a:cs typeface="Calibri" pitchFamily="34" charset="-120"/>
               </a:rPr>
-              <a:t>not or away</a:t>
+              <a:t>not, away from</a:t>
             </a:r>
             <a:endParaRPr lang="en-US" sz="850" dirty="0"/>
           </a:p>
@@ -30805,7 +31246,7 @@
                 <a:ea typeface="Calibri" pitchFamily="34" charset="-122"/>
                 <a:cs typeface="Calibri" pitchFamily="34" charset="-120"/>
               </a:rPr>
-              <a:t>not or away</a:t>
+              <a:t>not, away from</a:t>
             </a:r>
             <a:endParaRPr lang="en-US" sz="850" dirty="0"/>
           </a:p>
@@ -33882,7 +34323,7 @@
                 <a:ea typeface="Trebuchet MS" pitchFamily="34" charset="-122"/>
                 <a:cs typeface="Trebuchet MS" pitchFamily="34" charset="-120"/>
               </a:rPr>
-              <a:t>dis-</a:t>
+              <a:t>ac-</a:t>
             </a:r>
             <a:endParaRPr lang="en-US" sz="1300" dirty="0"/>
           </a:p>
@@ -34035,7 +34476,7 @@
                 <a:ea typeface="Trebuchet MS" pitchFamily="34" charset="-122"/>
                 <a:cs typeface="Trebuchet MS" pitchFamily="34" charset="-120"/>
               </a:rPr>
-              <a:t>ac-</a:t>
+              <a:t>pro-</a:t>
             </a:r>
             <a:endParaRPr lang="en-US" sz="1300" dirty="0"/>
           </a:p>
@@ -34188,7 +34629,7 @@
                 <a:ea typeface="Trebuchet MS" pitchFamily="34" charset="-122"/>
                 <a:cs typeface="Trebuchet MS" pitchFamily="34" charset="-120"/>
               </a:rPr>
-              <a:t>pro-</a:t>
+              <a:t>dis-</a:t>
             </a:r>
             <a:endParaRPr lang="en-US" sz="1300" dirty="0"/>
           </a:p>
@@ -34448,7 +34889,7 @@
                 <a:ea typeface="Trebuchet MS" pitchFamily="34" charset="-122"/>
                 <a:cs typeface="Trebuchet MS" pitchFamily="34" charset="-120"/>
               </a:rPr>
-              <a:t>reclaim</a:t>
+              <a:t>exclaim</a:t>
             </a:r>
             <a:endParaRPr lang="en-US" sz="1200" dirty="0"/>
           </a:p>
@@ -34514,7 +34955,7 @@
                 <a:ea typeface="Trebuchet MS" pitchFamily="34" charset="-122"/>
                 <a:cs typeface="Trebuchet MS" pitchFamily="34" charset="-120"/>
               </a:rPr>
-              <a:t>exclaim</a:t>
+              <a:t>reclaim</a:t>
             </a:r>
             <a:endParaRPr lang="en-US" sz="1200" dirty="0"/>
           </a:p>
@@ -34580,7 +35021,7 @@
                 <a:ea typeface="Trebuchet MS" pitchFamily="34" charset="-122"/>
                 <a:cs typeface="Trebuchet MS" pitchFamily="34" charset="-120"/>
               </a:rPr>
-              <a:t>disclaim</a:t>
+              <a:t>acclaim</a:t>
             </a:r>
             <a:endParaRPr lang="en-US" sz="1200" dirty="0"/>
           </a:p>
@@ -34646,7 +35087,7 @@
                 <a:ea typeface="Trebuchet MS" pitchFamily="34" charset="-122"/>
                 <a:cs typeface="Trebuchet MS" pitchFamily="34" charset="-120"/>
               </a:rPr>
-              <a:t>acclaim</a:t>
+              <a:t>disclaim</a:t>
             </a:r>
             <a:endParaRPr lang="en-US" sz="1200" dirty="0"/>
           </a:p>
@@ -34778,7 +35219,7 @@
                 <a:ea typeface="Trebuchet MS" pitchFamily="34" charset="-122"/>
                 <a:cs typeface="Trebuchet MS" pitchFamily="34" charset="-120"/>
               </a:rPr>
-              <a:t>exclamation</a:t>
+              <a:t>claiming</a:t>
             </a:r>
             <a:endParaRPr lang="en-US" sz="1200" dirty="0"/>
           </a:p>
@@ -34844,7 +35285,7 @@
                 <a:ea typeface="Trebuchet MS" pitchFamily="34" charset="-122"/>
                 <a:cs typeface="Trebuchet MS" pitchFamily="34" charset="-120"/>
               </a:rPr>
-              <a:t>claimant</a:t>
+              <a:t>exclaimed</a:t>
             </a:r>
             <a:endParaRPr lang="en-US" sz="1200" dirty="0"/>
           </a:p>
@@ -36032,7 +36473,7 @@
                 <a:ea typeface="Calibri" pitchFamily="34" charset="-122"/>
                 <a:cs typeface="Calibri" pitchFamily="34" charset="-120"/>
               </a:rPr>
-              <a:t>1.  The root 'claim' comes from a Latin word meaning to call out.</a:t>
+              <a:t>1.  The prefix 're' in 'reclaim' means to do something again or get something back.</a:t>
             </a:r>
             <a:endParaRPr lang="en-US" sz="1300" dirty="0"/>
           </a:p>
@@ -36171,7 +36612,7 @@
                 <a:ea typeface="Calibri" pitchFamily="34" charset="-122"/>
                 <a:cs typeface="Calibri" pitchFamily="34" charset="-120"/>
               </a:rPr>
-              <a:t>2.  The word 'exclaim' means to stay quiet and say nothing.</a:t>
+              <a:t>2.  The root 'claim' comes from a Latin word meaning to call out.</a:t>
             </a:r>
             <a:endParaRPr lang="en-US" sz="1300" dirty="0"/>
           </a:p>
@@ -36194,11 +36635,11 @@
             </a:avLst>
           </a:prstGeom>
           <a:solidFill>
-            <a:srgbClr val="FEE2E2"/>
-          </a:solidFill>
-          <a:ln w="12700">
-            <a:solidFill>
-              <a:srgbClr val="DC2626"/>
+            <a:srgbClr val="DCFCE7"/>
+          </a:solidFill>
+          <a:ln w="12700">
+            <a:solidFill>
+              <a:srgbClr val="16A34A"/>
             </a:solidFill>
             <a:prstDash val="solid"/>
           </a:ln>
@@ -36231,13 +36672,13 @@
             <a:r>
               <a:rPr lang="en-US" sz="1100" b="1" dirty="0">
                 <a:solidFill>
-                  <a:srgbClr val="DC2626"/>
+                  <a:srgbClr val="16A34A"/>
                 </a:solidFill>
                 <a:latin typeface="Trebuchet MS" pitchFamily="34" charset="0"/>
                 <a:ea typeface="Trebuchet MS" pitchFamily="34" charset="-122"/>
                 <a:cs typeface="Trebuchet MS" pitchFamily="34" charset="-120"/>
               </a:rPr>
-              <a:t>FALSE</a:t>
+              <a:t>TRUE</a:t>
             </a:r>
             <a:endParaRPr lang="en-US" sz="1100" dirty="0"/>
           </a:p>
@@ -36310,7 +36751,7 @@
                 <a:ea typeface="Calibri" pitchFamily="34" charset="-122"/>
                 <a:cs typeface="Calibri" pitchFamily="34" charset="-120"/>
               </a:rPr>
-              <a:t>3.  The prefix 're' in 'reclaim' means back or again.</a:t>
+              <a:t>3.  The word 'acclaim' contains the root 'claim'.</a:t>
             </a:r>
             <a:endParaRPr lang="en-US" sz="1300" dirty="0"/>
           </a:p>
@@ -36449,7 +36890,7 @@
                 <a:ea typeface="Calibri" pitchFamily="34" charset="-122"/>
                 <a:cs typeface="Calibri" pitchFamily="34" charset="-120"/>
               </a:rPr>
-              <a:t>4.  An exclamation mark is used after sentences said with strong feeling.</a:t>
+              <a:t>4.  The root 'claim' originally came from a Greek word meaning to write.</a:t>
             </a:r>
             <a:endParaRPr lang="en-US" sz="1300" dirty="0"/>
           </a:p>
@@ -36472,11 +36913,11 @@
             </a:avLst>
           </a:prstGeom>
           <a:solidFill>
-            <a:srgbClr val="DCFCE7"/>
-          </a:solidFill>
-          <a:ln w="12700">
-            <a:solidFill>
-              <a:srgbClr val="16A34A"/>
+            <a:srgbClr val="FEE2E2"/>
+          </a:solidFill>
+          <a:ln w="12700">
+            <a:solidFill>
+              <a:srgbClr val="DC2626"/>
             </a:solidFill>
             <a:prstDash val="solid"/>
           </a:ln>
@@ -36509,13 +36950,13 @@
             <a:r>
               <a:rPr lang="en-US" sz="1100" b="1" dirty="0">
                 <a:solidFill>
-                  <a:srgbClr val="16A34A"/>
+                  <a:srgbClr val="DC2626"/>
                 </a:solidFill>
                 <a:latin typeface="Trebuchet MS" pitchFamily="34" charset="0"/>
                 <a:ea typeface="Trebuchet MS" pitchFamily="34" charset="-122"/>
                 <a:cs typeface="Trebuchet MS" pitchFamily="34" charset="-120"/>
               </a:rPr>
-              <a:t>TRUE</a:t>
+              <a:t>FALSE</a:t>
             </a:r>
             <a:endParaRPr lang="en-US" sz="1100" dirty="0"/>
           </a:p>
@@ -36588,7 +37029,7 @@
                 <a:ea typeface="Calibri" pitchFamily="34" charset="-122"/>
                 <a:cs typeface="Calibri" pitchFamily="34" charset="-120"/>
               </a:rPr>
-              <a:t>5.  The word 'acclaim' means to take something away from someone.</a:t>
+              <a:t>5.  The word 'exclaim' means to stay silent and say nothing.</a:t>
             </a:r>
             <a:endParaRPr lang="en-US" sz="1300" dirty="0"/>
           </a:p>
@@ -37293,7 +37734,7 @@
                 <a:ea typeface="Trebuchet MS" pitchFamily="34" charset="-122"/>
                 <a:cs typeface="Trebuchet MS" pitchFamily="34" charset="-120"/>
               </a:rPr>
-              <a:t>reclaim</a:t>
+              <a:t>exclaim</a:t>
             </a:r>
             <a:endParaRPr lang="en-US" sz="1300" dirty="0"/>
           </a:p>
@@ -37359,7 +37800,7 @@
                 <a:ea typeface="Trebuchet MS" pitchFamily="34" charset="-122"/>
                 <a:cs typeface="Trebuchet MS" pitchFamily="34" charset="-120"/>
               </a:rPr>
-              <a:t>exclaim</a:t>
+              <a:t>reclaim</a:t>
             </a:r>
             <a:endParaRPr lang="en-US" sz="1300" dirty="0"/>
           </a:p>
@@ -37425,7 +37866,7 @@
                 <a:ea typeface="Trebuchet MS" pitchFamily="34" charset="-122"/>
                 <a:cs typeface="Trebuchet MS" pitchFamily="34" charset="-120"/>
               </a:rPr>
-              <a:t>disclaim</a:t>
+              <a:t>acclaim</a:t>
             </a:r>
             <a:endParaRPr lang="en-US" sz="1300" dirty="0"/>
           </a:p>
@@ -37491,7 +37932,7 @@
                 <a:ea typeface="Trebuchet MS" pitchFamily="34" charset="-122"/>
                 <a:cs typeface="Trebuchet MS" pitchFamily="34" charset="-120"/>
               </a:rPr>
-              <a:t>acclaim</a:t>
+              <a:t>disclaim</a:t>
             </a:r>
             <a:endParaRPr lang="en-US" sz="1300" dirty="0"/>
           </a:p>
@@ -37623,7 +38064,7 @@
                 <a:ea typeface="Trebuchet MS" pitchFamily="34" charset="-122"/>
                 <a:cs typeface="Trebuchet MS" pitchFamily="34" charset="-120"/>
               </a:rPr>
-              <a:t>exclamation</a:t>
+              <a:t>claiming</a:t>
             </a:r>
             <a:endParaRPr lang="en-US" sz="1300" dirty="0"/>
           </a:p>
@@ -38561,7 +39002,7 @@
                 <a:ea typeface="Trebuchet MS" pitchFamily="34" charset="-122"/>
                 <a:cs typeface="Trebuchet MS" pitchFamily="34" charset="-120"/>
               </a:rPr>
-              <a:t>dis-</a:t>
+              <a:t>ac-</a:t>
             </a:r>
             <a:endParaRPr lang="en-US" sz="1300" dirty="0"/>
           </a:p>
@@ -38714,7 +39155,7 @@
                 <a:ea typeface="Trebuchet MS" pitchFamily="34" charset="-122"/>
                 <a:cs typeface="Trebuchet MS" pitchFamily="34" charset="-120"/>
               </a:rPr>
-              <a:t>ac-</a:t>
+              <a:t>pro-</a:t>
             </a:r>
             <a:endParaRPr lang="en-US" sz="1300" dirty="0"/>
           </a:p>
@@ -38867,7 +39308,7 @@
                 <a:ea typeface="Trebuchet MS" pitchFamily="34" charset="-122"/>
                 <a:cs typeface="Trebuchet MS" pitchFamily="34" charset="-120"/>
               </a:rPr>
-              <a:t>pro-</a:t>
+              <a:t>dis-</a:t>
             </a:r>
             <a:endParaRPr lang="en-US" sz="1300" dirty="0"/>
           </a:p>
@@ -39867,7 +40308,7 @@
                 <a:ea typeface="Calibri" pitchFamily="34" charset="-122"/>
                 <a:cs typeface="Calibri" pitchFamily="34" charset="-120"/>
               </a:rPr>
-              <a:t>A word or phrase said suddenly with strong feeling, like 'Wow!' or 'Help!'</a:t>
+              <a:t>The act of saying something is yours or that something is true right now.</a:t>
             </a:r>
             <a:endParaRPr lang="en-US" sz="1200" dirty="0"/>
           </a:p>
@@ -39940,7 +40381,7 @@
                 <a:ea typeface="Trebuchet MS" pitchFamily="34" charset="-122"/>
                 <a:cs typeface="Trebuchet MS" pitchFamily="34" charset="-120"/>
               </a:rPr>
-              <a:t>reclaim</a:t>
+              <a:t>exclaim</a:t>
             </a:r>
             <a:endParaRPr lang="en-US" sz="1200" dirty="0"/>
           </a:p>
@@ -40006,7 +40447,7 @@
                 <a:ea typeface="Calibri" pitchFamily="34" charset="-122"/>
                 <a:cs typeface="Calibri" pitchFamily="34" charset="-120"/>
               </a:rPr>
-              <a:t>To say that something is not yours or not your responsibility.</a:t>
+              <a:t>To praise someone or something very enthusiastically and publicly.</a:t>
             </a:r>
             <a:endParaRPr lang="en-US" sz="1200" dirty="0"/>
           </a:p>
@@ -40079,7 +40520,7 @@
                 <a:ea typeface="Trebuchet MS" pitchFamily="34" charset="-122"/>
                 <a:cs typeface="Trebuchet MS" pitchFamily="34" charset="-120"/>
               </a:rPr>
-              <a:t>exclaim</a:t>
+              <a:t>reclaim</a:t>
             </a:r>
             <a:endParaRPr lang="en-US" sz="1200" dirty="0"/>
           </a:p>
@@ -40145,7 +40586,7 @@
                 <a:ea typeface="Calibri" pitchFamily="34" charset="-122"/>
                 <a:cs typeface="Calibri" pitchFamily="34" charset="-120"/>
               </a:rPr>
-              <a:t>To announce something important to everyone officially.</a:t>
+              <a:t>To announce something important to lots of people in a very clear and confident way.</a:t>
             </a:r>
             <a:endParaRPr lang="en-US" sz="1200" dirty="0"/>
           </a:p>
@@ -40218,7 +40659,7 @@
                 <a:ea typeface="Trebuchet MS" pitchFamily="34" charset="-122"/>
                 <a:cs typeface="Trebuchet MS" pitchFamily="34" charset="-120"/>
               </a:rPr>
-              <a:t>disclaim</a:t>
+              <a:t>acclaim</a:t>
             </a:r>
             <a:endParaRPr lang="en-US" sz="1200" dirty="0"/>
           </a:p>
@@ -40284,7 +40725,7 @@
                 <a:ea typeface="Calibri" pitchFamily="34" charset="-122"/>
                 <a:cs typeface="Calibri" pitchFamily="34" charset="-120"/>
               </a:rPr>
-              <a:t>Praise and approval given to someone for doing something great.</a:t>
+              <a:t>To say that you have no connection to something or that it is not your responsibility.</a:t>
             </a:r>
             <a:endParaRPr lang="en-US" sz="1200" dirty="0"/>
           </a:p>
@@ -40357,7 +40798,7 @@
                 <a:ea typeface="Trebuchet MS" pitchFamily="34" charset="-122"/>
                 <a:cs typeface="Trebuchet MS" pitchFamily="34" charset="-120"/>
               </a:rPr>
-              <a:t>acclaim</a:t>
+              <a:t>disclaim</a:t>
             </a:r>
             <a:endParaRPr lang="en-US" sz="1200" dirty="0"/>
           </a:p>
@@ -40423,7 +40864,7 @@
                 <a:ea typeface="Calibri" pitchFamily="34" charset="-122"/>
                 <a:cs typeface="Calibri" pitchFamily="34" charset="-120"/>
               </a:rPr>
-              <a:t>To say that something belongs to you or is true.</a:t>
+              <a:t>To say that something belongs to you or that something is true.</a:t>
             </a:r>
             <a:endParaRPr lang="en-US" sz="1200" dirty="0"/>
           </a:p>
@@ -40562,7 +41003,7 @@
                 <a:ea typeface="Calibri" pitchFamily="34" charset="-122"/>
                 <a:cs typeface="Calibri" pitchFamily="34" charset="-120"/>
               </a:rPr>
-              <a:t>To say something suddenly and loudly, usually with strong feeling.</a:t>
+              <a:t>To get something back that was yours, or to make land useful again.</a:t>
             </a:r>
             <a:endParaRPr lang="en-US" sz="1200" dirty="0"/>
           </a:p>
@@ -40635,7 +41076,7 @@
                 <a:ea typeface="Trebuchet MS" pitchFamily="34" charset="-122"/>
                 <a:cs typeface="Trebuchet MS" pitchFamily="34" charset="-120"/>
               </a:rPr>
-              <a:t>exclamation</a:t>
+              <a:t>claiming</a:t>
             </a:r>
             <a:endParaRPr lang="en-US" sz="1200" dirty="0"/>
           </a:p>
@@ -40701,7 +41142,7 @@
                 <a:ea typeface="Calibri" pitchFamily="34" charset="-122"/>
                 <a:cs typeface="Calibri" pitchFamily="34" charset="-120"/>
               </a:rPr>
-              <a:t>To get something back that was yours before.</a:t>
+              <a:t>To say something suddenly and loudly, often because you are surprised or excited.</a:t>
             </a:r>
             <a:endParaRPr lang="en-US" sz="1200" dirty="0"/>
           </a:p>
@@ -41196,7 +41637,7 @@
                 <a:ea typeface="Calibri" pitchFamily="34" charset="-122"/>
                 <a:cs typeface="Calibri" pitchFamily="34" charset="-120"/>
               </a:rPr>
-              <a:t>The explorer wanted to reclaim the treasure that had been taken from the ancient temple.</a:t>
+              <a:t>She stood up to exclaim her excitement when her name was called for the award.</a:t>
             </a:r>
             <a:endParaRPr lang="en-US" sz="1500" dirty="0"/>
           </a:p>
@@ -41360,7 +41801,7 @@
                 <a:ea typeface="Calibri" pitchFamily="34" charset="-122"/>
                 <a:cs typeface="Calibri" pitchFamily="34" charset="-120"/>
               </a:rPr>
-              <a:t>She let out an exclamation of surprise when she saw the enormous birthday cake.</a:t>
+              <a:t>The explorer wanted to reclaim the treasure that had been stolen from his village.</a:t>
             </a:r>
             <a:endParaRPr lang="en-US" sz="1500" dirty="0"/>
           </a:p>
@@ -41524,7 +41965,7 @@
                 <a:ea typeface="Calibri" pitchFamily="34" charset="-122"/>
                 <a:cs typeface="Calibri" pitchFamily="34" charset="-120"/>
               </a:rPr>
-              <a:t>The king decided to proclaim a public holiday to celebrate the victory.</a:t>
+              <a:t>The king would proclaim a holiday so that everyone in the land could celebrate.</a:t>
             </a:r>
             <a:endParaRPr lang="en-US" sz="1500" dirty="0"/>
           </a:p>

--- a/output/wordlabs-claim-3day.pptx
+++ b/output/wordlabs-claim-3day.pptx
@@ -4240,7 +4240,7 @@
                 <a:ea typeface="Calibri" pitchFamily="34" charset="-122"/>
                 <a:cs typeface="Calibri" pitchFamily="34" charset="-120"/>
               </a:rPr>
-              <a:t>"to call out or declare"</a:t>
+              <a:t>"call out; cry"</a:t>
             </a:r>
             <a:endParaRPr lang="en-US" sz="2200" dirty="0"/>
           </a:p>
@@ -4279,7 +4279,7 @@
                 <a:ea typeface="Calibri" pitchFamily="34" charset="-122"/>
                 <a:cs typeface="Calibri" pitchFamily="34" charset="-120"/>
               </a:rPr>
-              <a:t>Origin: Latin: clamare</a:t>
+              <a:t>Origin: Latin root</a:t>
             </a:r>
             <a:endParaRPr lang="en-US" sz="1300" dirty="0"/>
           </a:p>
@@ -5288,7 +5288,7 @@
                 <a:ea typeface="Calibri" pitchFamily="34" charset="-122"/>
                 <a:cs typeface="Calibri" pitchFamily="34" charset="-120"/>
               </a:rPr>
-              <a:t>Word Labs  •  wordlabs.app  •  Root: 'claim' = to call out or declare</a:t>
+              <a:t>Word Labs  •  wordlabs.app  •  Root: 'claim' = call out; cry</a:t>
             </a:r>
             <a:endParaRPr lang="en-US" sz="800" dirty="0"/>
           </a:p>
@@ -5622,7 +5622,7 @@
                 <a:ea typeface="Trebuchet MS" pitchFamily="34" charset="-122"/>
                 <a:cs typeface="Trebuchet MS" pitchFamily="34" charset="-120"/>
               </a:rPr>
-              <a:t>2</a:t>
+              <a:t>0</a:t>
             </a:r>
             <a:pPr algn="ctr" indent="0" marL="0">
               <a:buNone/>
@@ -5636,7 +5636,7 @@
                 <a:ea typeface="Trebuchet MS" pitchFamily="34" charset="-122"/>
                 <a:cs typeface="Trebuchet MS" pitchFamily="34" charset="-120"/>
               </a:rPr>
-              <a:t>  punctuation marks</a:t>
+              <a:t>  punctuation mark</a:t>
             </a:r>
             <a:endParaRPr lang="en-US" sz="2800" dirty="0"/>
           </a:p>
@@ -5928,7 +5928,7 @@
                 <a:ea typeface="Calibri" pitchFamily="34" charset="-122"/>
                 <a:cs typeface="Calibri" pitchFamily="34" charset="-120"/>
               </a:rPr>
-              <a:t>Word Labs  •  wordlabs.app  •  Root: 'claim' = to call out or declare</a:t>
+              <a:t>Word Labs  •  wordlabs.app  •  Root: 'claim' = call out; cry</a:t>
             </a:r>
             <a:endParaRPr lang="en-US" sz="800" dirty="0"/>
           </a:p>
@@ -6040,7 +6040,7 @@
                 <a:ea typeface="Calibri" pitchFamily="34" charset="-122"/>
                 <a:cs typeface="Calibri" pitchFamily="34" charset="-120"/>
               </a:rPr>
-              <a:t>The scientist was </a:t>
+              <a:t>The </a:t>
             </a:r>
             <a:pPr algn="l" indent="0" marL="0">
               <a:buNone/>
@@ -6071,7 +6071,7 @@
                 <a:ea typeface="Calibri" pitchFamily="34" charset="-122"/>
                 <a:cs typeface="Calibri" pitchFamily="34" charset="-120"/>
               </a:rPr>
-              <a:t> for her discovery, and she would </a:t>
+              <a:t> film won several awards at the festival. The company </a:t>
             </a:r>
             <a:pPr algn="l" indent="0" marL="0">
               <a:buNone/>
@@ -6088,7 +6088,7 @@
                 <a:ea typeface="Calibri" pitchFamily="34" charset="-122"/>
                 <a:cs typeface="Calibri" pitchFamily="34" charset="-120"/>
               </a:rPr>
-              <a:t>exclaim</a:t>
+              <a:t>disclaims</a:t>
             </a:r>
             <a:pPr algn="l" indent="0" marL="0">
               <a:buNone/>
@@ -6102,7 +6102,7 @@
                 <a:ea typeface="Calibri" pitchFamily="34" charset="-122"/>
                 <a:cs typeface="Calibri" pitchFamily="34" charset="-120"/>
               </a:rPr>
-              <a:t> her findings to the whole school!</a:t>
+              <a:t> any responsibility for delays.</a:t>
             </a:r>
             <a:endParaRPr lang="en-US" sz="1800" dirty="0"/>
           </a:p>
@@ -6385,7 +6385,7 @@
                 <a:ea typeface="Trebuchet MS" pitchFamily="34" charset="-122"/>
                 <a:cs typeface="Trebuchet MS" pitchFamily="34" charset="-120"/>
               </a:rPr>
-              <a:t>exclaim</a:t>
+              <a:t>disclaims</a:t>
             </a:r>
             <a:endParaRPr lang="en-US" sz="1400" dirty="0"/>
           </a:p>
@@ -6716,7 +6716,7 @@
                 <a:ea typeface="Calibri" pitchFamily="34" charset="-122"/>
                 <a:cs typeface="Calibri" pitchFamily="34" charset="-120"/>
               </a:rPr>
-              <a:t>Word Labs  •  wordlabs.app  •  Root: 'claim' = to call out or declare</a:t>
+              <a:t>Word Labs  •  wordlabs.app  •  Root: 'claim' = call out; cry</a:t>
             </a:r>
             <a:endParaRPr lang="en-US" sz="800" dirty="0"/>
           </a:p>
@@ -7543,7 +7543,7 @@
                 <a:ea typeface="Calibri" pitchFamily="34" charset="-122"/>
                 <a:cs typeface="Calibri" pitchFamily="34" charset="-120"/>
               </a:rPr>
-              <a:t>Word Labs  •  wordlabs.app  •  Root: 'claim' = to call out or declare</a:t>
+              <a:t>Word Labs  •  wordlabs.app  •  Root: 'claim' = call out; cry</a:t>
             </a:r>
             <a:endParaRPr lang="en-US" sz="800" dirty="0"/>
           </a:p>
@@ -7821,7 +7821,7 @@
                 <a:ea typeface="Trebuchet MS" pitchFamily="34" charset="-122"/>
                 <a:cs typeface="Trebuchet MS" pitchFamily="34" charset="-120"/>
               </a:rPr>
-              <a:t>ac</a:t>
+              <a:t>ad</a:t>
             </a:r>
             <a:endParaRPr lang="en-US" sz="1300" dirty="0"/>
           </a:p>
@@ -7860,7 +7860,7 @@
                 <a:ea typeface="Calibri" pitchFamily="34" charset="-122"/>
                 <a:cs typeface="Calibri" pitchFamily="34" charset="-120"/>
               </a:rPr>
-              <a:t>to, towards</a:t>
+              <a:t>towards; to</a:t>
             </a:r>
             <a:endParaRPr lang="en-US" sz="850" dirty="0"/>
           </a:p>
@@ -7868,46 +7868,7 @@
       </p:sp>
       <p:sp>
         <p:nvSpPr>
-          <p:cNvPr id="19" name="Text 17"/>
-          <p:cNvSpPr/>
-          <p:nvPr/>
-        </p:nvSpPr>
-        <p:spPr>
-          <a:xfrm>
-            <a:off x="2221992" y="2752344"/>
-            <a:ext cx="1828800" cy="182880"/>
-          </a:xfrm>
-          <a:prstGeom prst="rect">
-            <a:avLst/>
-          </a:prstGeom>
-          <a:noFill/>
-          <a:ln/>
-        </p:spPr>
-        <p:txBody>
-          <a:bodyPr wrap="square" lIns="0" tIns="0" rIns="0" bIns="0" rtlCol="0" anchor="t"/>
-          <a:lstStyle/>
-          <a:p>
-            <a:pPr algn="ctr" indent="0" marL="0">
-              <a:buNone/>
-            </a:pPr>
-            <a:r>
-              <a:rPr lang="en-US" sz="700" i="1" dirty="0">
-                <a:solidFill>
-                  <a:srgbClr val="94A3B8"/>
-                </a:solidFill>
-                <a:latin typeface="Calibri" pitchFamily="34" charset="0"/>
-                <a:ea typeface="Calibri" pitchFamily="34" charset="-122"/>
-                <a:cs typeface="Calibri" pitchFamily="34" charset="-120"/>
-              </a:rPr>
-              <a:t>ad → ac before 'c'</a:t>
-            </a:r>
-            <a:endParaRPr lang="en-US" sz="700" dirty="0"/>
-          </a:p>
-        </p:txBody>
-      </p:sp>
-      <p:sp>
-        <p:nvSpPr>
-          <p:cNvPr id="20" name="Shape 18"/>
+          <p:cNvPr id="19" name="Shape 17"/>
           <p:cNvSpPr/>
           <p:nvPr/>
         </p:nvSpPr>
@@ -7941,7 +7902,7 @@
       </p:sp>
       <p:sp>
         <p:nvSpPr>
-          <p:cNvPr id="21" name="Text 19"/>
+          <p:cNvPr id="20" name="Text 18"/>
           <p:cNvSpPr/>
           <p:nvPr/>
         </p:nvSpPr>
@@ -7980,7 +7941,7 @@
       </p:sp>
       <p:sp>
         <p:nvSpPr>
-          <p:cNvPr id="22" name="Text 20"/>
+          <p:cNvPr id="21" name="Text 19"/>
           <p:cNvSpPr/>
           <p:nvPr/>
         </p:nvSpPr>
@@ -8011,7 +7972,7 @@
                 <a:ea typeface="Calibri" pitchFamily="34" charset="-122"/>
                 <a:cs typeface="Calibri" pitchFamily="34" charset="-120"/>
               </a:rPr>
-              <a:t>to call out or declare</a:t>
+              <a:t>call out; cry</a:t>
             </a:r>
             <a:endParaRPr lang="en-US" sz="850" dirty="0"/>
           </a:p>
@@ -8019,7 +7980,7 @@
       </p:sp>
       <p:sp>
         <p:nvSpPr>
-          <p:cNvPr id="23" name="Shape 21"/>
+          <p:cNvPr id="22" name="Shape 20"/>
           <p:cNvSpPr/>
           <p:nvPr/>
         </p:nvSpPr>
@@ -8053,7 +8014,7 @@
       </p:sp>
       <p:sp>
         <p:nvSpPr>
-          <p:cNvPr id="24" name="Text 22"/>
+          <p:cNvPr id="23" name="Text 21"/>
           <p:cNvSpPr/>
           <p:nvPr/>
         </p:nvSpPr>
@@ -8092,7 +8053,7 @@
       </p:sp>
       <p:sp>
         <p:nvSpPr>
-          <p:cNvPr id="25" name="Text 23"/>
+          <p:cNvPr id="24" name="Text 22"/>
           <p:cNvSpPr/>
           <p:nvPr/>
         </p:nvSpPr>
@@ -8131,7 +8092,7 @@
       </p:sp>
       <p:sp>
         <p:nvSpPr>
-          <p:cNvPr id="26" name="Shape 24"/>
+          <p:cNvPr id="25" name="Shape 23"/>
           <p:cNvSpPr/>
           <p:nvPr/>
         </p:nvSpPr>
@@ -8158,7 +8119,7 @@
       </p:sp>
       <p:sp>
         <p:nvSpPr>
-          <p:cNvPr id="27" name="Text 25"/>
+          <p:cNvPr id="26" name="Text 24"/>
           <p:cNvSpPr/>
           <p:nvPr/>
         </p:nvSpPr>
@@ -8197,7 +8158,7 @@
       </p:sp>
       <p:sp>
         <p:nvSpPr>
-          <p:cNvPr id="28" name="Shape 26"/>
+          <p:cNvPr id="27" name="Shape 25"/>
           <p:cNvSpPr/>
           <p:nvPr/>
         </p:nvSpPr>
@@ -8224,7 +8185,7 @@
       </p:sp>
       <p:sp>
         <p:nvSpPr>
-          <p:cNvPr id="29" name="Text 27"/>
+          <p:cNvPr id="28" name="Text 26"/>
           <p:cNvSpPr/>
           <p:nvPr/>
         </p:nvSpPr>
@@ -8263,7 +8224,7 @@
       </p:sp>
       <p:sp>
         <p:nvSpPr>
-          <p:cNvPr id="30" name="Shape 28"/>
+          <p:cNvPr id="29" name="Shape 27"/>
           <p:cNvSpPr/>
           <p:nvPr/>
         </p:nvSpPr>
@@ -8290,7 +8251,7 @@
       </p:sp>
       <p:sp>
         <p:nvSpPr>
-          <p:cNvPr id="31" name="Text 29"/>
+          <p:cNvPr id="30" name="Text 28"/>
           <p:cNvSpPr/>
           <p:nvPr/>
         </p:nvSpPr>
@@ -8329,7 +8290,7 @@
       </p:sp>
       <p:sp>
         <p:nvSpPr>
-          <p:cNvPr id="32" name="Shape 30"/>
+          <p:cNvPr id="31" name="Shape 29"/>
           <p:cNvSpPr/>
           <p:nvPr/>
         </p:nvSpPr>
@@ -8356,7 +8317,7 @@
       </p:sp>
       <p:sp>
         <p:nvSpPr>
-          <p:cNvPr id="33" name="Text 31"/>
+          <p:cNvPr id="32" name="Text 30"/>
           <p:cNvSpPr/>
           <p:nvPr/>
         </p:nvSpPr>
@@ -8679,7 +8640,7 @@
                 <a:ea typeface="Calibri" pitchFamily="34" charset="-122"/>
                 <a:cs typeface="Calibri" pitchFamily="34" charset="-120"/>
               </a:rPr>
-              <a:t>Word Labs  •  wordlabs.app  •  Root: 'claim' = to call out or declare</a:t>
+              <a:t>Word Labs  •  wordlabs.app  •  Root: 'claim' = call out; cry</a:t>
             </a:r>
             <a:endParaRPr lang="en-US" sz="800" dirty="0"/>
           </a:p>
@@ -8957,7 +8918,7 @@
                 <a:ea typeface="Trebuchet MS" pitchFamily="34" charset="-122"/>
                 <a:cs typeface="Trebuchet MS" pitchFamily="34" charset="-120"/>
               </a:rPr>
-              <a:t>ac</a:t>
+              <a:t>ad</a:t>
             </a:r>
             <a:endParaRPr lang="en-US" sz="1300" dirty="0"/>
           </a:p>
@@ -8996,7 +8957,7 @@
                 <a:ea typeface="Calibri" pitchFamily="34" charset="-122"/>
                 <a:cs typeface="Calibri" pitchFamily="34" charset="-120"/>
               </a:rPr>
-              <a:t>to, towards</a:t>
+              <a:t>towards; to</a:t>
             </a:r>
             <a:endParaRPr lang="en-US" sz="850" dirty="0"/>
           </a:p>
@@ -9004,46 +8965,7 @@
       </p:sp>
       <p:sp>
         <p:nvSpPr>
-          <p:cNvPr id="19" name="Text 17"/>
-          <p:cNvSpPr/>
-          <p:nvPr/>
-        </p:nvSpPr>
-        <p:spPr>
-          <a:xfrm>
-            <a:off x="2221992" y="2752344"/>
-            <a:ext cx="1828800" cy="182880"/>
-          </a:xfrm>
-          <a:prstGeom prst="rect">
-            <a:avLst/>
-          </a:prstGeom>
-          <a:noFill/>
-          <a:ln/>
-        </p:spPr>
-        <p:txBody>
-          <a:bodyPr wrap="square" lIns="0" tIns="0" rIns="0" bIns="0" rtlCol="0" anchor="t"/>
-          <a:lstStyle/>
-          <a:p>
-            <a:pPr algn="ctr" indent="0" marL="0">
-              <a:buNone/>
-            </a:pPr>
-            <a:r>
-              <a:rPr lang="en-US" sz="700" i="1" dirty="0">
-                <a:solidFill>
-                  <a:srgbClr val="94A3B8"/>
-                </a:solidFill>
-                <a:latin typeface="Calibri" pitchFamily="34" charset="0"/>
-                <a:ea typeface="Calibri" pitchFamily="34" charset="-122"/>
-                <a:cs typeface="Calibri" pitchFamily="34" charset="-120"/>
-              </a:rPr>
-              <a:t>ad → ac before 'c'</a:t>
-            </a:r>
-            <a:endParaRPr lang="en-US" sz="700" dirty="0"/>
-          </a:p>
-        </p:txBody>
-      </p:sp>
-      <p:sp>
-        <p:nvSpPr>
-          <p:cNvPr id="20" name="Shape 18"/>
+          <p:cNvPr id="19" name="Shape 17"/>
           <p:cNvSpPr/>
           <p:nvPr/>
         </p:nvSpPr>
@@ -9077,7 +8999,7 @@
       </p:sp>
       <p:sp>
         <p:nvSpPr>
-          <p:cNvPr id="21" name="Text 19"/>
+          <p:cNvPr id="20" name="Text 18"/>
           <p:cNvSpPr/>
           <p:nvPr/>
         </p:nvSpPr>
@@ -9116,7 +9038,7 @@
       </p:sp>
       <p:sp>
         <p:nvSpPr>
-          <p:cNvPr id="22" name="Text 20"/>
+          <p:cNvPr id="21" name="Text 19"/>
           <p:cNvSpPr/>
           <p:nvPr/>
         </p:nvSpPr>
@@ -9147,7 +9069,7 @@
                 <a:ea typeface="Calibri" pitchFamily="34" charset="-122"/>
                 <a:cs typeface="Calibri" pitchFamily="34" charset="-120"/>
               </a:rPr>
-              <a:t>to call out or declare</a:t>
+              <a:t>call out; cry</a:t>
             </a:r>
             <a:endParaRPr lang="en-US" sz="850" dirty="0"/>
           </a:p>
@@ -9155,7 +9077,7 @@
       </p:sp>
       <p:sp>
         <p:nvSpPr>
-          <p:cNvPr id="23" name="Shape 21"/>
+          <p:cNvPr id="22" name="Shape 20"/>
           <p:cNvSpPr/>
           <p:nvPr/>
         </p:nvSpPr>
@@ -9189,7 +9111,7 @@
       </p:sp>
       <p:sp>
         <p:nvSpPr>
-          <p:cNvPr id="24" name="Text 22"/>
+          <p:cNvPr id="23" name="Text 21"/>
           <p:cNvSpPr/>
           <p:nvPr/>
         </p:nvSpPr>
@@ -9228,7 +9150,7 @@
       </p:sp>
       <p:sp>
         <p:nvSpPr>
-          <p:cNvPr id="25" name="Text 23"/>
+          <p:cNvPr id="24" name="Text 22"/>
           <p:cNvSpPr/>
           <p:nvPr/>
         </p:nvSpPr>
@@ -9267,7 +9189,7 @@
       </p:sp>
       <p:sp>
         <p:nvSpPr>
-          <p:cNvPr id="26" name="Shape 24"/>
+          <p:cNvPr id="25" name="Shape 23"/>
           <p:cNvSpPr/>
           <p:nvPr/>
         </p:nvSpPr>
@@ -9294,7 +9216,7 @@
       </p:sp>
       <p:sp>
         <p:nvSpPr>
-          <p:cNvPr id="27" name="Text 25"/>
+          <p:cNvPr id="26" name="Text 24"/>
           <p:cNvSpPr/>
           <p:nvPr/>
         </p:nvSpPr>
@@ -9333,7 +9255,7 @@
       </p:sp>
       <p:sp>
         <p:nvSpPr>
-          <p:cNvPr id="28" name="Shape 26"/>
+          <p:cNvPr id="27" name="Shape 25"/>
           <p:cNvSpPr/>
           <p:nvPr/>
         </p:nvSpPr>
@@ -9360,7 +9282,7 @@
       </p:sp>
       <p:sp>
         <p:nvSpPr>
-          <p:cNvPr id="29" name="Shape 27"/>
+          <p:cNvPr id="28" name="Shape 26"/>
           <p:cNvSpPr/>
           <p:nvPr/>
         </p:nvSpPr>
@@ -9387,7 +9309,7 @@
       </p:sp>
       <p:sp>
         <p:nvSpPr>
-          <p:cNvPr id="30" name="Text 28"/>
+          <p:cNvPr id="29" name="Text 27"/>
           <p:cNvSpPr/>
           <p:nvPr/>
         </p:nvSpPr>
@@ -9426,7 +9348,7 @@
       </p:sp>
       <p:sp>
         <p:nvSpPr>
-          <p:cNvPr id="31" name="Text 29"/>
+          <p:cNvPr id="30" name="Text 28"/>
           <p:cNvSpPr/>
           <p:nvPr/>
         </p:nvSpPr>
@@ -9465,7 +9387,7 @@
       </p:sp>
       <p:sp>
         <p:nvSpPr>
-          <p:cNvPr id="32" name="Shape 30"/>
+          <p:cNvPr id="31" name="Shape 29"/>
           <p:cNvSpPr/>
           <p:nvPr/>
         </p:nvSpPr>
@@ -9492,7 +9414,7 @@
       </p:sp>
       <p:sp>
         <p:nvSpPr>
-          <p:cNvPr id="33" name="Text 31"/>
+          <p:cNvPr id="32" name="Text 30"/>
           <p:cNvSpPr/>
           <p:nvPr/>
         </p:nvSpPr>
@@ -9531,7 +9453,7 @@
       </p:sp>
       <p:sp>
         <p:nvSpPr>
-          <p:cNvPr id="34" name="Shape 32"/>
+          <p:cNvPr id="33" name="Shape 31"/>
           <p:cNvSpPr/>
           <p:nvPr/>
         </p:nvSpPr>
@@ -9558,7 +9480,7 @@
       </p:sp>
       <p:sp>
         <p:nvSpPr>
-          <p:cNvPr id="35" name="Text 33"/>
+          <p:cNvPr id="34" name="Text 32"/>
           <p:cNvSpPr/>
           <p:nvPr/>
         </p:nvSpPr>
@@ -9597,7 +9519,7 @@
       </p:sp>
       <p:sp>
         <p:nvSpPr>
-          <p:cNvPr id="36" name="Shape 34"/>
+          <p:cNvPr id="35" name="Shape 33"/>
           <p:cNvSpPr/>
           <p:nvPr/>
         </p:nvSpPr>
@@ -9624,7 +9546,7 @@
       </p:sp>
       <p:sp>
         <p:nvSpPr>
-          <p:cNvPr id="37" name="Text 35"/>
+          <p:cNvPr id="36" name="Text 34"/>
           <p:cNvSpPr/>
           <p:nvPr/>
         </p:nvSpPr>
@@ -9947,7 +9869,7 @@
                 <a:ea typeface="Calibri" pitchFamily="34" charset="-122"/>
                 <a:cs typeface="Calibri" pitchFamily="34" charset="-120"/>
               </a:rPr>
-              <a:t>Word Labs  •  wordlabs.app  •  Root: 'claim' = to call out or declare</a:t>
+              <a:t>Word Labs  •  wordlabs.app  •  Root: 'claim' = call out; cry</a:t>
             </a:r>
             <a:endParaRPr lang="en-US" sz="800" dirty="0"/>
           </a:p>
@@ -10225,7 +10147,7 @@
                 <a:ea typeface="Trebuchet MS" pitchFamily="34" charset="-122"/>
                 <a:cs typeface="Trebuchet MS" pitchFamily="34" charset="-120"/>
               </a:rPr>
-              <a:t>ac</a:t>
+              <a:t>ad</a:t>
             </a:r>
             <a:endParaRPr lang="en-US" sz="1300" dirty="0"/>
           </a:p>
@@ -10264,7 +10186,7 @@
                 <a:ea typeface="Calibri" pitchFamily="34" charset="-122"/>
                 <a:cs typeface="Calibri" pitchFamily="34" charset="-120"/>
               </a:rPr>
-              <a:t>to, towards</a:t>
+              <a:t>towards; to</a:t>
             </a:r>
             <a:endParaRPr lang="en-US" sz="850" dirty="0"/>
           </a:p>
@@ -10272,46 +10194,7 @@
       </p:sp>
       <p:sp>
         <p:nvSpPr>
-          <p:cNvPr id="19" name="Text 17"/>
-          <p:cNvSpPr/>
-          <p:nvPr/>
-        </p:nvSpPr>
-        <p:spPr>
-          <a:xfrm>
-            <a:off x="2221992" y="2752344"/>
-            <a:ext cx="1828800" cy="182880"/>
-          </a:xfrm>
-          <a:prstGeom prst="rect">
-            <a:avLst/>
-          </a:prstGeom>
-          <a:noFill/>
-          <a:ln/>
-        </p:spPr>
-        <p:txBody>
-          <a:bodyPr wrap="square" lIns="0" tIns="0" rIns="0" bIns="0" rtlCol="0" anchor="t"/>
-          <a:lstStyle/>
-          <a:p>
-            <a:pPr algn="ctr" indent="0" marL="0">
-              <a:buNone/>
-            </a:pPr>
-            <a:r>
-              <a:rPr lang="en-US" sz="700" i="1" dirty="0">
-                <a:solidFill>
-                  <a:srgbClr val="94A3B8"/>
-                </a:solidFill>
-                <a:latin typeface="Calibri" pitchFamily="34" charset="0"/>
-                <a:ea typeface="Calibri" pitchFamily="34" charset="-122"/>
-                <a:cs typeface="Calibri" pitchFamily="34" charset="-120"/>
-              </a:rPr>
-              <a:t>ad → ac before 'c'</a:t>
-            </a:r>
-            <a:endParaRPr lang="en-US" sz="700" dirty="0"/>
-          </a:p>
-        </p:txBody>
-      </p:sp>
-      <p:sp>
-        <p:nvSpPr>
-          <p:cNvPr id="20" name="Shape 18"/>
+          <p:cNvPr id="19" name="Shape 17"/>
           <p:cNvSpPr/>
           <p:nvPr/>
         </p:nvSpPr>
@@ -10345,7 +10228,7 @@
       </p:sp>
       <p:sp>
         <p:nvSpPr>
-          <p:cNvPr id="21" name="Text 19"/>
+          <p:cNvPr id="20" name="Text 18"/>
           <p:cNvSpPr/>
           <p:nvPr/>
         </p:nvSpPr>
@@ -10384,7 +10267,7 @@
       </p:sp>
       <p:sp>
         <p:nvSpPr>
-          <p:cNvPr id="22" name="Text 20"/>
+          <p:cNvPr id="21" name="Text 19"/>
           <p:cNvSpPr/>
           <p:nvPr/>
         </p:nvSpPr>
@@ -10415,7 +10298,7 @@
                 <a:ea typeface="Calibri" pitchFamily="34" charset="-122"/>
                 <a:cs typeface="Calibri" pitchFamily="34" charset="-120"/>
               </a:rPr>
-              <a:t>to call out or declare</a:t>
+              <a:t>call out; cry</a:t>
             </a:r>
             <a:endParaRPr lang="en-US" sz="850" dirty="0"/>
           </a:p>
@@ -10423,7 +10306,7 @@
       </p:sp>
       <p:sp>
         <p:nvSpPr>
-          <p:cNvPr id="23" name="Shape 21"/>
+          <p:cNvPr id="22" name="Shape 20"/>
           <p:cNvSpPr/>
           <p:nvPr/>
         </p:nvSpPr>
@@ -10457,7 +10340,7 @@
       </p:sp>
       <p:sp>
         <p:nvSpPr>
-          <p:cNvPr id="24" name="Text 22"/>
+          <p:cNvPr id="23" name="Text 21"/>
           <p:cNvSpPr/>
           <p:nvPr/>
         </p:nvSpPr>
@@ -10496,7 +10379,7 @@
       </p:sp>
       <p:sp>
         <p:nvSpPr>
-          <p:cNvPr id="25" name="Text 23"/>
+          <p:cNvPr id="24" name="Text 22"/>
           <p:cNvSpPr/>
           <p:nvPr/>
         </p:nvSpPr>
@@ -10535,7 +10418,7 @@
       </p:sp>
       <p:sp>
         <p:nvSpPr>
-          <p:cNvPr id="26" name="Shape 24"/>
+          <p:cNvPr id="25" name="Shape 23"/>
           <p:cNvSpPr/>
           <p:nvPr/>
         </p:nvSpPr>
@@ -10562,7 +10445,7 @@
       </p:sp>
       <p:sp>
         <p:nvSpPr>
-          <p:cNvPr id="27" name="Text 25"/>
+          <p:cNvPr id="26" name="Text 24"/>
           <p:cNvSpPr/>
           <p:nvPr/>
         </p:nvSpPr>
@@ -10601,7 +10484,7 @@
       </p:sp>
       <p:sp>
         <p:nvSpPr>
-          <p:cNvPr id="28" name="Shape 26"/>
+          <p:cNvPr id="27" name="Shape 25"/>
           <p:cNvSpPr/>
           <p:nvPr/>
         </p:nvSpPr>
@@ -10628,7 +10511,7 @@
       </p:sp>
       <p:sp>
         <p:nvSpPr>
-          <p:cNvPr id="29" name="Shape 27"/>
+          <p:cNvPr id="28" name="Shape 26"/>
           <p:cNvSpPr/>
           <p:nvPr/>
         </p:nvSpPr>
@@ -10655,7 +10538,7 @@
       </p:sp>
       <p:sp>
         <p:nvSpPr>
-          <p:cNvPr id="30" name="Text 28"/>
+          <p:cNvPr id="29" name="Text 27"/>
           <p:cNvSpPr/>
           <p:nvPr/>
         </p:nvSpPr>
@@ -10694,7 +10577,7 @@
       </p:sp>
       <p:sp>
         <p:nvSpPr>
-          <p:cNvPr id="31" name="Text 29"/>
+          <p:cNvPr id="30" name="Text 28"/>
           <p:cNvSpPr/>
           <p:nvPr/>
         </p:nvSpPr>
@@ -10733,7 +10616,7 @@
       </p:sp>
       <p:sp>
         <p:nvSpPr>
-          <p:cNvPr id="32" name="Shape 30"/>
+          <p:cNvPr id="31" name="Shape 29"/>
           <p:cNvSpPr/>
           <p:nvPr/>
         </p:nvSpPr>
@@ -10760,7 +10643,7 @@
       </p:sp>
       <p:sp>
         <p:nvSpPr>
-          <p:cNvPr id="33" name="Text 31"/>
+          <p:cNvPr id="32" name="Text 30"/>
           <p:cNvSpPr/>
           <p:nvPr/>
         </p:nvSpPr>
@@ -10799,7 +10682,7 @@
       </p:sp>
       <p:sp>
         <p:nvSpPr>
-          <p:cNvPr id="34" name="Shape 32"/>
+          <p:cNvPr id="33" name="Shape 31"/>
           <p:cNvSpPr/>
           <p:nvPr/>
         </p:nvSpPr>
@@ -10826,7 +10709,7 @@
       </p:sp>
       <p:sp>
         <p:nvSpPr>
-          <p:cNvPr id="35" name="Text 33"/>
+          <p:cNvPr id="34" name="Text 32"/>
           <p:cNvSpPr/>
           <p:nvPr/>
         </p:nvSpPr>
@@ -10865,22 +10748,49 @@
       </p:sp>
       <p:sp>
         <p:nvSpPr>
+          <p:cNvPr id="35" name="Shape 33"/>
+          <p:cNvSpPr/>
+          <p:nvPr/>
+        </p:nvSpPr>
+        <p:spPr>
+          <a:xfrm>
+            <a:off x="1874520" y="4096512"/>
+            <a:ext cx="6903720" cy="658368"/>
+          </a:xfrm>
+          <a:prstGeom prst="rect">
+            <a:avLst>
+              <a:gd name="adj" fmla="val 8333"/>
+            </a:avLst>
+          </a:prstGeom>
+          <a:solidFill>
+            <a:srgbClr val="FCE7F3"/>
+          </a:solidFill>
+          <a:ln w="12700">
+            <a:solidFill>
+              <a:srgbClr val="DB2777"/>
+            </a:solidFill>
+            <a:prstDash val="solid"/>
+          </a:ln>
+        </p:spPr>
+      </p:sp>
+      <p:sp>
+        <p:nvSpPr>
           <p:cNvPr id="36" name="Shape 34"/>
           <p:cNvSpPr/>
           <p:nvPr/>
         </p:nvSpPr>
         <p:spPr>
           <a:xfrm>
-            <a:off x="1874520" y="4096512"/>
-            <a:ext cx="6903720" cy="804672"/>
+            <a:off x="2124837" y="4169664"/>
+            <a:ext cx="685800" cy="475488"/>
           </a:xfrm>
           <a:prstGeom prst="rect">
             <a:avLst>
-              <a:gd name="adj" fmla="val 6818"/>
+              <a:gd name="adj" fmla="val 7692"/>
             </a:avLst>
           </a:prstGeom>
           <a:solidFill>
-            <a:srgbClr val="FCE7F3"/>
+            <a:srgbClr val="FFFFFF"/>
           </a:solidFill>
           <a:ln w="12700">
             <a:solidFill>
@@ -10892,41 +10802,14 @@
       </p:sp>
       <p:sp>
         <p:nvSpPr>
-          <p:cNvPr id="37" name="Shape 35"/>
+          <p:cNvPr id="37" name="Text 35"/>
           <p:cNvSpPr/>
           <p:nvPr/>
         </p:nvSpPr>
         <p:spPr>
           <a:xfrm>
             <a:off x="2124837" y="4169664"/>
-            <a:ext cx="685800" cy="384048"/>
-          </a:xfrm>
-          <a:prstGeom prst="rect">
-            <a:avLst>
-              <a:gd name="adj" fmla="val 9524"/>
-            </a:avLst>
-          </a:prstGeom>
-          <a:solidFill>
-            <a:srgbClr val="FFFFFF"/>
-          </a:solidFill>
-          <a:ln w="12700">
-            <a:solidFill>
-              <a:srgbClr val="DB2777"/>
-            </a:solidFill>
-            <a:prstDash val="solid"/>
-          </a:ln>
-        </p:spPr>
-      </p:sp>
-      <p:sp>
-        <p:nvSpPr>
-          <p:cNvPr id="38" name="Text 36"/>
-          <p:cNvSpPr/>
-          <p:nvPr/>
-        </p:nvSpPr>
-        <p:spPr>
-          <a:xfrm>
-            <a:off x="2124837" y="4169664"/>
-            <a:ext cx="685800" cy="384048"/>
+            <a:ext cx="685800" cy="475488"/>
           </a:xfrm>
           <a:prstGeom prst="rect">
             <a:avLst/>
@@ -10958,18 +10841,18 @@
       </p:sp>
       <p:sp>
         <p:nvSpPr>
-          <p:cNvPr id="39" name="Shape 37"/>
+          <p:cNvPr id="38" name="Shape 36"/>
           <p:cNvSpPr/>
           <p:nvPr/>
         </p:nvSpPr>
         <p:spPr>
           <a:xfrm>
             <a:off x="3033522" y="4169664"/>
-            <a:ext cx="685800" cy="384048"/>
+            <a:ext cx="685800" cy="475488"/>
           </a:xfrm>
           <a:prstGeom prst="rect">
             <a:avLst>
-              <a:gd name="adj" fmla="val 9524"/>
+              <a:gd name="adj" fmla="val 7692"/>
             </a:avLst>
           </a:prstGeom>
           <a:solidFill>
@@ -10985,14 +10868,14 @@
       </p:sp>
       <p:sp>
         <p:nvSpPr>
-          <p:cNvPr id="40" name="Text 38"/>
+          <p:cNvPr id="39" name="Text 37"/>
           <p:cNvSpPr/>
           <p:nvPr/>
         </p:nvSpPr>
         <p:spPr>
           <a:xfrm>
             <a:off x="3033522" y="4169664"/>
-            <a:ext cx="685800" cy="384048"/>
+            <a:ext cx="685800" cy="475488"/>
           </a:xfrm>
           <a:prstGeom prst="rect">
             <a:avLst/>
@@ -11024,18 +10907,18 @@
       </p:sp>
       <p:sp>
         <p:nvSpPr>
-          <p:cNvPr id="41" name="Shape 39"/>
+          <p:cNvPr id="40" name="Shape 38"/>
           <p:cNvSpPr/>
           <p:nvPr/>
         </p:nvSpPr>
         <p:spPr>
           <a:xfrm>
             <a:off x="3942207" y="4169664"/>
-            <a:ext cx="685800" cy="384048"/>
+            <a:ext cx="685800" cy="475488"/>
           </a:xfrm>
           <a:prstGeom prst="rect">
             <a:avLst>
-              <a:gd name="adj" fmla="val 9524"/>
+              <a:gd name="adj" fmla="val 7692"/>
             </a:avLst>
           </a:prstGeom>
           <a:solidFill>
@@ -11051,14 +10934,14 @@
       </p:sp>
       <p:sp>
         <p:nvSpPr>
-          <p:cNvPr id="42" name="Text 40"/>
+          <p:cNvPr id="41" name="Text 39"/>
           <p:cNvSpPr/>
           <p:nvPr/>
         </p:nvSpPr>
         <p:spPr>
           <a:xfrm>
             <a:off x="3942207" y="4169664"/>
-            <a:ext cx="685800" cy="384048"/>
+            <a:ext cx="685800" cy="475488"/>
           </a:xfrm>
           <a:prstGeom prst="rect">
             <a:avLst/>
@@ -11090,80 +10973,41 @@
       </p:sp>
       <p:sp>
         <p:nvSpPr>
+          <p:cNvPr id="42" name="Shape 40"/>
+          <p:cNvSpPr/>
+          <p:nvPr/>
+        </p:nvSpPr>
+        <p:spPr>
+          <a:xfrm>
+            <a:off x="4850892" y="4169664"/>
+            <a:ext cx="685800" cy="475488"/>
+          </a:xfrm>
+          <a:prstGeom prst="rect">
+            <a:avLst>
+              <a:gd name="adj" fmla="val 7692"/>
+            </a:avLst>
+          </a:prstGeom>
+          <a:solidFill>
+            <a:srgbClr val="FFFFFF"/>
+          </a:solidFill>
+          <a:ln w="12700">
+            <a:solidFill>
+              <a:srgbClr val="DB2777"/>
+            </a:solidFill>
+            <a:prstDash val="solid"/>
+          </a:ln>
+        </p:spPr>
+      </p:sp>
+      <p:sp>
+        <p:nvSpPr>
           <p:cNvPr id="43" name="Text 41"/>
           <p:cNvSpPr/>
           <p:nvPr/>
         </p:nvSpPr>
         <p:spPr>
           <a:xfrm>
-            <a:off x="3942207" y="4572000"/>
-            <a:ext cx="685800" cy="219456"/>
-          </a:xfrm>
-          <a:prstGeom prst="rect">
-            <a:avLst/>
-          </a:prstGeom>
-          <a:noFill/>
-          <a:ln/>
-        </p:spPr>
-        <p:txBody>
-          <a:bodyPr wrap="square" lIns="0" tIns="0" rIns="0" bIns="0" rtlCol="0" anchor="t"/>
-          <a:lstStyle/>
-          <a:p>
-            <a:pPr algn="ctr" indent="0" marL="0">
-              <a:buNone/>
-            </a:pPr>
-            <a:r>
-              <a:rPr lang="en-US" sz="750" i="1" dirty="0">
-                <a:solidFill>
-                  <a:srgbClr val="94A3B8"/>
-                </a:solidFill>
-                <a:latin typeface="Calibri" pitchFamily="34" charset="0"/>
-                <a:ea typeface="Calibri" pitchFamily="34" charset="-122"/>
-                <a:cs typeface="Calibri" pitchFamily="34" charset="-120"/>
-              </a:rPr>
-              <a:t>/k/</a:t>
-            </a:r>
-            <a:endParaRPr lang="en-US" sz="750" dirty="0"/>
-          </a:p>
-        </p:txBody>
-      </p:sp>
-      <p:sp>
-        <p:nvSpPr>
-          <p:cNvPr id="44" name="Shape 42"/>
-          <p:cNvSpPr/>
-          <p:nvPr/>
-        </p:nvSpPr>
-        <p:spPr>
-          <a:xfrm>
             <a:off x="4850892" y="4169664"/>
-            <a:ext cx="685800" cy="384048"/>
-          </a:xfrm>
-          <a:prstGeom prst="rect">
-            <a:avLst>
-              <a:gd name="adj" fmla="val 9524"/>
-            </a:avLst>
-          </a:prstGeom>
-          <a:solidFill>
-            <a:srgbClr val="FFFFFF"/>
-          </a:solidFill>
-          <a:ln w="12700">
-            <a:solidFill>
-              <a:srgbClr val="DB2777"/>
-            </a:solidFill>
-            <a:prstDash val="solid"/>
-          </a:ln>
-        </p:spPr>
-      </p:sp>
-      <p:sp>
-        <p:nvSpPr>
-          <p:cNvPr id="45" name="Text 43"/>
-          <p:cNvSpPr/>
-          <p:nvPr/>
-        </p:nvSpPr>
-        <p:spPr>
-          <a:xfrm>
-            <a:off x="4850892" y="4169664"/>
-            <a:ext cx="685800" cy="384048"/>
+            <a:ext cx="685800" cy="475488"/>
           </a:xfrm>
           <a:prstGeom prst="rect">
             <a:avLst/>
@@ -11195,18 +11039,18 @@
       </p:sp>
       <p:sp>
         <p:nvSpPr>
-          <p:cNvPr id="46" name="Shape 44"/>
+          <p:cNvPr id="44" name="Shape 42"/>
           <p:cNvSpPr/>
           <p:nvPr/>
         </p:nvSpPr>
         <p:spPr>
           <a:xfrm>
             <a:off x="5759577" y="4169664"/>
-            <a:ext cx="685800" cy="384048"/>
+            <a:ext cx="685800" cy="475488"/>
           </a:xfrm>
           <a:prstGeom prst="rect">
             <a:avLst>
-              <a:gd name="adj" fmla="val 9524"/>
+              <a:gd name="adj" fmla="val 7692"/>
             </a:avLst>
           </a:prstGeom>
           <a:solidFill>
@@ -11222,14 +11066,14 @@
       </p:sp>
       <p:sp>
         <p:nvSpPr>
-          <p:cNvPr id="47" name="Text 45"/>
+          <p:cNvPr id="45" name="Text 43"/>
           <p:cNvSpPr/>
           <p:nvPr/>
         </p:nvSpPr>
         <p:spPr>
           <a:xfrm>
             <a:off x="5759577" y="4169664"/>
-            <a:ext cx="685800" cy="384048"/>
+            <a:ext cx="685800" cy="475488"/>
           </a:xfrm>
           <a:prstGeom prst="rect">
             <a:avLst/>
@@ -11261,18 +11105,18 @@
       </p:sp>
       <p:sp>
         <p:nvSpPr>
-          <p:cNvPr id="48" name="Shape 46"/>
+          <p:cNvPr id="46" name="Shape 44"/>
           <p:cNvSpPr/>
           <p:nvPr/>
         </p:nvSpPr>
         <p:spPr>
           <a:xfrm>
             <a:off x="6668262" y="4169664"/>
-            <a:ext cx="685800" cy="384048"/>
+            <a:ext cx="685800" cy="475488"/>
           </a:xfrm>
           <a:prstGeom prst="rect">
             <a:avLst>
-              <a:gd name="adj" fmla="val 9524"/>
+              <a:gd name="adj" fmla="val 7692"/>
             </a:avLst>
           </a:prstGeom>
           <a:solidFill>
@@ -11288,14 +11132,14 @@
       </p:sp>
       <p:sp>
         <p:nvSpPr>
-          <p:cNvPr id="49" name="Text 47"/>
+          <p:cNvPr id="47" name="Text 45"/>
           <p:cNvSpPr/>
           <p:nvPr/>
         </p:nvSpPr>
         <p:spPr>
           <a:xfrm>
             <a:off x="6668262" y="4169664"/>
-            <a:ext cx="685800" cy="384048"/>
+            <a:ext cx="685800" cy="475488"/>
           </a:xfrm>
           <a:prstGeom prst="rect">
             <a:avLst/>
@@ -11327,18 +11171,18 @@
       </p:sp>
       <p:sp>
         <p:nvSpPr>
-          <p:cNvPr id="50" name="Shape 48"/>
+          <p:cNvPr id="48" name="Shape 46"/>
           <p:cNvSpPr/>
           <p:nvPr/>
         </p:nvSpPr>
         <p:spPr>
           <a:xfrm>
             <a:off x="7576947" y="4169664"/>
-            <a:ext cx="685800" cy="384048"/>
+            <a:ext cx="685800" cy="475488"/>
           </a:xfrm>
           <a:prstGeom prst="rect">
             <a:avLst>
-              <a:gd name="adj" fmla="val 9524"/>
+              <a:gd name="adj" fmla="val 7692"/>
             </a:avLst>
           </a:prstGeom>
           <a:solidFill>
@@ -11354,14 +11198,14 @@
       </p:sp>
       <p:sp>
         <p:nvSpPr>
-          <p:cNvPr id="51" name="Text 49"/>
+          <p:cNvPr id="49" name="Text 47"/>
           <p:cNvSpPr/>
           <p:nvPr/>
         </p:nvSpPr>
         <p:spPr>
           <a:xfrm>
             <a:off x="7576947" y="4169664"/>
-            <a:ext cx="685800" cy="384048"/>
+            <a:ext cx="685800" cy="475488"/>
           </a:xfrm>
           <a:prstGeom prst="rect">
             <a:avLst/>
@@ -11388,45 +11232,6 @@
               <a:t>ed</a:t>
             </a:r>
             <a:endParaRPr lang="en-US" sz="900" dirty="0"/>
-          </a:p>
-        </p:txBody>
-      </p:sp>
-      <p:sp>
-        <p:nvSpPr>
-          <p:cNvPr id="52" name="Text 50"/>
-          <p:cNvSpPr/>
-          <p:nvPr/>
-        </p:nvSpPr>
-        <p:spPr>
-          <a:xfrm>
-            <a:off x="7576947" y="4572000"/>
-            <a:ext cx="685800" cy="219456"/>
-          </a:xfrm>
-          <a:prstGeom prst="rect">
-            <a:avLst/>
-          </a:prstGeom>
-          <a:noFill/>
-          <a:ln/>
-        </p:spPr>
-        <p:txBody>
-          <a:bodyPr wrap="square" lIns="0" tIns="0" rIns="0" bIns="0" rtlCol="0" anchor="t"/>
-          <a:lstStyle/>
-          <a:p>
-            <a:pPr algn="ctr" indent="0" marL="0">
-              <a:buNone/>
-            </a:pPr>
-            <a:r>
-              <a:rPr lang="en-US" sz="750" i="1" dirty="0">
-                <a:solidFill>
-                  <a:srgbClr val="94A3B8"/>
-                </a:solidFill>
-                <a:latin typeface="Calibri" pitchFamily="34" charset="0"/>
-                <a:ea typeface="Calibri" pitchFamily="34" charset="-122"/>
-                <a:cs typeface="Calibri" pitchFamily="34" charset="-120"/>
-              </a:rPr>
-              <a:t>/d/</a:t>
-            </a:r>
-            <a:endParaRPr lang="en-US" sz="750" dirty="0"/>
           </a:p>
         </p:txBody>
       </p:sp>
@@ -11716,7 +11521,7 @@
                 <a:ea typeface="Calibri" pitchFamily="34" charset="-122"/>
                 <a:cs typeface="Calibri" pitchFamily="34" charset="-120"/>
               </a:rPr>
-              <a:t>Word Labs  •  wordlabs.app  •  Root: 'claim' = to call out or declare</a:t>
+              <a:t>Word Labs  •  wordlabs.app  •  Root: 'claim' = call out; cry</a:t>
             </a:r>
             <a:endParaRPr lang="en-US" sz="800" dirty="0"/>
           </a:p>
@@ -11855,7 +11660,7 @@
                 <a:ea typeface="Trebuchet MS" pitchFamily="34" charset="-122"/>
                 <a:cs typeface="Trebuchet MS" pitchFamily="34" charset="-120"/>
               </a:rPr>
-              <a:t>exclaim</a:t>
+              <a:t>disclaims</a:t>
             </a:r>
             <a:endParaRPr lang="en-US" sz="2800" dirty="0"/>
           </a:p>
@@ -12543,7 +12348,7 @@
                 <a:ea typeface="Calibri" pitchFamily="34" charset="-122"/>
                 <a:cs typeface="Calibri" pitchFamily="34" charset="-120"/>
               </a:rPr>
-              <a:t>Word Labs  •  wordlabs.app  •  Root: 'claim' = to call out or declare</a:t>
+              <a:t>Word Labs  •  wordlabs.app  •  Root: 'claim' = call out; cry</a:t>
             </a:r>
             <a:endParaRPr lang="en-US" sz="800" dirty="0"/>
           </a:p>
@@ -12682,7 +12487,7 @@
                 <a:ea typeface="Trebuchet MS" pitchFamily="34" charset="-122"/>
                 <a:cs typeface="Trebuchet MS" pitchFamily="34" charset="-120"/>
               </a:rPr>
-              <a:t>exclaim</a:t>
+              <a:t>disclaims</a:t>
             </a:r>
             <a:endParaRPr lang="en-US" sz="2800" dirty="0"/>
           </a:p>
@@ -12762,7 +12567,7 @@
         </p:nvSpPr>
         <p:spPr>
           <a:xfrm>
-            <a:off x="2938272" y="2258568"/>
+            <a:off x="2221992" y="2258568"/>
             <a:ext cx="1828800" cy="292608"/>
           </a:xfrm>
           <a:prstGeom prst="rect">
@@ -12796,7 +12601,7 @@
         </p:nvSpPr>
         <p:spPr>
           <a:xfrm>
-            <a:off x="2938272" y="2258568"/>
+            <a:off x="2221992" y="2258568"/>
             <a:ext cx="1828800" cy="292608"/>
           </a:xfrm>
           <a:prstGeom prst="rect">
@@ -12821,7 +12626,7 @@
                 <a:ea typeface="Trebuchet MS" pitchFamily="34" charset="-122"/>
                 <a:cs typeface="Trebuchet MS" pitchFamily="34" charset="-120"/>
               </a:rPr>
-              <a:t>ex</a:t>
+              <a:t>dis</a:t>
             </a:r>
             <a:endParaRPr lang="en-US" sz="1300" dirty="0"/>
           </a:p>
@@ -12835,7 +12640,7 @@
         </p:nvSpPr>
         <p:spPr>
           <a:xfrm>
-            <a:off x="2938272" y="2569464"/>
+            <a:off x="2221992" y="2569464"/>
             <a:ext cx="1828800" cy="201168"/>
           </a:xfrm>
           <a:prstGeom prst="rect">
@@ -12860,7 +12665,7 @@
                 <a:ea typeface="Calibri" pitchFamily="34" charset="-122"/>
                 <a:cs typeface="Calibri" pitchFamily="34" charset="-120"/>
               </a:rPr>
-              <a:t>out, away from</a:t>
+              <a:t>not; opposite; apart</a:t>
             </a:r>
             <a:endParaRPr lang="en-US" sz="850" dirty="0"/>
           </a:p>
@@ -12874,7 +12679,7 @@
         </p:nvSpPr>
         <p:spPr>
           <a:xfrm>
-            <a:off x="5803392" y="2258568"/>
+            <a:off x="4370832" y="2258568"/>
             <a:ext cx="1828800" cy="292608"/>
           </a:xfrm>
           <a:prstGeom prst="rect">
@@ -12908,7 +12713,7 @@
         </p:nvSpPr>
         <p:spPr>
           <a:xfrm>
-            <a:off x="5803392" y="2258568"/>
+            <a:off x="4370832" y="2258568"/>
             <a:ext cx="1828800" cy="292608"/>
           </a:xfrm>
           <a:prstGeom prst="rect">
@@ -12947,7 +12752,7 @@
         </p:nvSpPr>
         <p:spPr>
           <a:xfrm>
-            <a:off x="5803392" y="2569464"/>
+            <a:off x="4370832" y="2569464"/>
             <a:ext cx="1828800" cy="201168"/>
           </a:xfrm>
           <a:prstGeom prst="rect">
@@ -12972,7 +12777,7 @@
                 <a:ea typeface="Calibri" pitchFamily="34" charset="-122"/>
                 <a:cs typeface="Calibri" pitchFamily="34" charset="-120"/>
               </a:rPr>
-              <a:t>to call out or declare</a:t>
+              <a:t>call out; cry</a:t>
             </a:r>
             <a:endParaRPr lang="en-US" sz="850" dirty="0"/>
           </a:p>
@@ -12981,6 +12786,118 @@
       <p:sp>
         <p:nvSpPr>
           <p:cNvPr id="22" name="Shape 20"/>
+          <p:cNvSpPr/>
+          <p:nvPr/>
+        </p:nvSpPr>
+        <p:spPr>
+          <a:xfrm>
+            <a:off x="6519672" y="2258568"/>
+            <a:ext cx="1828800" cy="292608"/>
+          </a:xfrm>
+          <a:prstGeom prst="rect">
+            <a:avLst>
+              <a:gd name="adj" fmla="val 25000"/>
+            </a:avLst>
+          </a:prstGeom>
+          <a:solidFill>
+            <a:srgbClr val="FCE7F3"/>
+          </a:solidFill>
+          <a:ln w="19050">
+            <a:solidFill>
+              <a:srgbClr val="DB2777"/>
+            </a:solidFill>
+            <a:prstDash val="solid"/>
+          </a:ln>
+          <a:effectLst>
+            <a:outerShdw sx="100000" sy="100000" kx="0" ky="0" algn="bl" rotWithShape="0" blurRad="101600" dist="38100" dir="8100000">
+              <a:srgbClr val="000000">
+                <a:alpha val="12000"/>
+              </a:srgbClr>
+            </a:outerShdw>
+          </a:effectLst>
+        </p:spPr>
+      </p:sp>
+      <p:sp>
+        <p:nvSpPr>
+          <p:cNvPr id="23" name="Text 21"/>
+          <p:cNvSpPr/>
+          <p:nvPr/>
+        </p:nvSpPr>
+        <p:spPr>
+          <a:xfrm>
+            <a:off x="6519672" y="2258568"/>
+            <a:ext cx="1828800" cy="292608"/>
+          </a:xfrm>
+          <a:prstGeom prst="rect">
+            <a:avLst/>
+          </a:prstGeom>
+          <a:noFill/>
+          <a:ln/>
+        </p:spPr>
+        <p:txBody>
+          <a:bodyPr wrap="square" lIns="0" tIns="0" rIns="0" bIns="0" rtlCol="0" anchor="ctr"/>
+          <a:lstStyle/>
+          <a:p>
+            <a:pPr algn="ctr" indent="0" marL="0">
+              <a:buNone/>
+            </a:pPr>
+            <a:r>
+              <a:rPr lang="en-US" sz="1300" b="1" dirty="0">
+                <a:solidFill>
+                  <a:srgbClr val="9D174D"/>
+                </a:solidFill>
+                <a:latin typeface="Trebuchet MS" pitchFamily="34" charset="0"/>
+                <a:ea typeface="Trebuchet MS" pitchFamily="34" charset="-122"/>
+                <a:cs typeface="Trebuchet MS" pitchFamily="34" charset="-120"/>
+              </a:rPr>
+              <a:t>s</a:t>
+            </a:r>
+            <a:endParaRPr lang="en-US" sz="1300" dirty="0"/>
+          </a:p>
+        </p:txBody>
+      </p:sp>
+      <p:sp>
+        <p:nvSpPr>
+          <p:cNvPr id="24" name="Text 22"/>
+          <p:cNvSpPr/>
+          <p:nvPr/>
+        </p:nvSpPr>
+        <p:spPr>
+          <a:xfrm>
+            <a:off x="6519672" y="2569464"/>
+            <a:ext cx="1828800" cy="201168"/>
+          </a:xfrm>
+          <a:prstGeom prst="rect">
+            <a:avLst/>
+          </a:prstGeom>
+          <a:noFill/>
+          <a:ln/>
+        </p:spPr>
+        <p:txBody>
+          <a:bodyPr wrap="square" lIns="0" tIns="0" rIns="0" bIns="0" rtlCol="0" anchor="t"/>
+          <a:lstStyle/>
+          <a:p>
+            <a:pPr algn="ctr" indent="0" marL="0">
+              <a:buNone/>
+            </a:pPr>
+            <a:r>
+              <a:rPr lang="en-US" sz="850" dirty="0">
+                <a:solidFill>
+                  <a:srgbClr val="475569"/>
+                </a:solidFill>
+                <a:latin typeface="Calibri" pitchFamily="34" charset="0"/>
+                <a:ea typeface="Calibri" pitchFamily="34" charset="-122"/>
+                <a:cs typeface="Calibri" pitchFamily="34" charset="-120"/>
+              </a:rPr>
+              <a:t>plural or present tense</a:t>
+            </a:r>
+            <a:endParaRPr lang="en-US" sz="850" dirty="0"/>
+          </a:p>
+        </p:txBody>
+      </p:sp>
+      <p:sp>
+        <p:nvSpPr>
+          <p:cNvPr id="25" name="Shape 23"/>
           <p:cNvSpPr/>
           <p:nvPr/>
         </p:nvSpPr>
@@ -13007,7 +12924,7 @@
       </p:sp>
       <p:sp>
         <p:nvSpPr>
-          <p:cNvPr id="23" name="Text 21"/>
+          <p:cNvPr id="26" name="Text 24"/>
           <p:cNvSpPr/>
           <p:nvPr/>
         </p:nvSpPr>
@@ -13046,7 +12963,7 @@
       </p:sp>
       <p:sp>
         <p:nvSpPr>
-          <p:cNvPr id="24" name="Shape 22"/>
+          <p:cNvPr id="27" name="Shape 25"/>
           <p:cNvSpPr/>
           <p:nvPr/>
         </p:nvSpPr>
@@ -13073,7 +12990,7 @@
       </p:sp>
       <p:sp>
         <p:nvSpPr>
-          <p:cNvPr id="25" name="Text 23"/>
+          <p:cNvPr id="28" name="Text 26"/>
           <p:cNvSpPr/>
           <p:nvPr/>
         </p:nvSpPr>
@@ -13112,7 +13029,7 @@
       </p:sp>
       <p:sp>
         <p:nvSpPr>
-          <p:cNvPr id="26" name="Shape 24"/>
+          <p:cNvPr id="29" name="Shape 27"/>
           <p:cNvSpPr/>
           <p:nvPr/>
         </p:nvSpPr>
@@ -13139,7 +13056,7 @@
       </p:sp>
       <p:sp>
         <p:nvSpPr>
-          <p:cNvPr id="27" name="Text 25"/>
+          <p:cNvPr id="30" name="Text 28"/>
           <p:cNvSpPr/>
           <p:nvPr/>
         </p:nvSpPr>
@@ -13178,7 +13095,7 @@
       </p:sp>
       <p:sp>
         <p:nvSpPr>
-          <p:cNvPr id="28" name="Shape 26"/>
+          <p:cNvPr id="31" name="Shape 29"/>
           <p:cNvSpPr/>
           <p:nvPr/>
         </p:nvSpPr>
@@ -13205,7 +13122,7 @@
       </p:sp>
       <p:sp>
         <p:nvSpPr>
-          <p:cNvPr id="29" name="Text 27"/>
+          <p:cNvPr id="32" name="Text 30"/>
           <p:cNvSpPr/>
           <p:nvPr/>
         </p:nvSpPr>
@@ -13528,7 +13445,7 @@
                 <a:ea typeface="Calibri" pitchFamily="34" charset="-122"/>
                 <a:cs typeface="Calibri" pitchFamily="34" charset="-120"/>
               </a:rPr>
-              <a:t>Word Labs  •  wordlabs.app  •  Root: 'claim' = to call out or declare</a:t>
+              <a:t>Word Labs  •  wordlabs.app  •  Root: 'claim' = call out; cry</a:t>
             </a:r>
             <a:endParaRPr lang="en-US" sz="800" dirty="0"/>
           </a:p>
@@ -13667,7 +13584,7 @@
                 <a:ea typeface="Trebuchet MS" pitchFamily="34" charset="-122"/>
                 <a:cs typeface="Trebuchet MS" pitchFamily="34" charset="-120"/>
               </a:rPr>
-              <a:t>exclaim</a:t>
+              <a:t>disclaims</a:t>
             </a:r>
             <a:endParaRPr lang="en-US" sz="2800" dirty="0"/>
           </a:p>
@@ -13747,7 +13664,7 @@
         </p:nvSpPr>
         <p:spPr>
           <a:xfrm>
-            <a:off x="2938272" y="2258568"/>
+            <a:off x="2221992" y="2258568"/>
             <a:ext cx="1828800" cy="292608"/>
           </a:xfrm>
           <a:prstGeom prst="rect">
@@ -13781,7 +13698,7 @@
         </p:nvSpPr>
         <p:spPr>
           <a:xfrm>
-            <a:off x="2938272" y="2258568"/>
+            <a:off x="2221992" y="2258568"/>
             <a:ext cx="1828800" cy="292608"/>
           </a:xfrm>
           <a:prstGeom prst="rect">
@@ -13806,7 +13723,7 @@
                 <a:ea typeface="Trebuchet MS" pitchFamily="34" charset="-122"/>
                 <a:cs typeface="Trebuchet MS" pitchFamily="34" charset="-120"/>
               </a:rPr>
-              <a:t>ex</a:t>
+              <a:t>dis</a:t>
             </a:r>
             <a:endParaRPr lang="en-US" sz="1300" dirty="0"/>
           </a:p>
@@ -13820,7 +13737,7 @@
         </p:nvSpPr>
         <p:spPr>
           <a:xfrm>
-            <a:off x="2938272" y="2569464"/>
+            <a:off x="2221992" y="2569464"/>
             <a:ext cx="1828800" cy="201168"/>
           </a:xfrm>
           <a:prstGeom prst="rect">
@@ -13845,7 +13762,7 @@
                 <a:ea typeface="Calibri" pitchFamily="34" charset="-122"/>
                 <a:cs typeface="Calibri" pitchFamily="34" charset="-120"/>
               </a:rPr>
-              <a:t>out, away from</a:t>
+              <a:t>not; opposite; apart</a:t>
             </a:r>
             <a:endParaRPr lang="en-US" sz="850" dirty="0"/>
           </a:p>
@@ -13859,7 +13776,7 @@
         </p:nvSpPr>
         <p:spPr>
           <a:xfrm>
-            <a:off x="5803392" y="2258568"/>
+            <a:off x="4370832" y="2258568"/>
             <a:ext cx="1828800" cy="292608"/>
           </a:xfrm>
           <a:prstGeom prst="rect">
@@ -13893,7 +13810,7 @@
         </p:nvSpPr>
         <p:spPr>
           <a:xfrm>
-            <a:off x="5803392" y="2258568"/>
+            <a:off x="4370832" y="2258568"/>
             <a:ext cx="1828800" cy="292608"/>
           </a:xfrm>
           <a:prstGeom prst="rect">
@@ -13932,7 +13849,7 @@
         </p:nvSpPr>
         <p:spPr>
           <a:xfrm>
-            <a:off x="5803392" y="2569464"/>
+            <a:off x="4370832" y="2569464"/>
             <a:ext cx="1828800" cy="201168"/>
           </a:xfrm>
           <a:prstGeom prst="rect">
@@ -13957,7 +13874,7 @@
                 <a:ea typeface="Calibri" pitchFamily="34" charset="-122"/>
                 <a:cs typeface="Calibri" pitchFamily="34" charset="-120"/>
               </a:rPr>
-              <a:t>to call out or declare</a:t>
+              <a:t>call out; cry</a:t>
             </a:r>
             <a:endParaRPr lang="en-US" sz="850" dirty="0"/>
           </a:p>
@@ -13966,6 +13883,118 @@
       <p:sp>
         <p:nvSpPr>
           <p:cNvPr id="22" name="Shape 20"/>
+          <p:cNvSpPr/>
+          <p:nvPr/>
+        </p:nvSpPr>
+        <p:spPr>
+          <a:xfrm>
+            <a:off x="6519672" y="2258568"/>
+            <a:ext cx="1828800" cy="292608"/>
+          </a:xfrm>
+          <a:prstGeom prst="rect">
+            <a:avLst>
+              <a:gd name="adj" fmla="val 25000"/>
+            </a:avLst>
+          </a:prstGeom>
+          <a:solidFill>
+            <a:srgbClr val="FCE7F3"/>
+          </a:solidFill>
+          <a:ln w="19050">
+            <a:solidFill>
+              <a:srgbClr val="DB2777"/>
+            </a:solidFill>
+            <a:prstDash val="solid"/>
+          </a:ln>
+          <a:effectLst>
+            <a:outerShdw sx="100000" sy="100000" kx="0" ky="0" algn="bl" rotWithShape="0" blurRad="101600" dist="38100" dir="8100000">
+              <a:srgbClr val="000000">
+                <a:alpha val="12000"/>
+              </a:srgbClr>
+            </a:outerShdw>
+          </a:effectLst>
+        </p:spPr>
+      </p:sp>
+      <p:sp>
+        <p:nvSpPr>
+          <p:cNvPr id="23" name="Text 21"/>
+          <p:cNvSpPr/>
+          <p:nvPr/>
+        </p:nvSpPr>
+        <p:spPr>
+          <a:xfrm>
+            <a:off x="6519672" y="2258568"/>
+            <a:ext cx="1828800" cy="292608"/>
+          </a:xfrm>
+          <a:prstGeom prst="rect">
+            <a:avLst/>
+          </a:prstGeom>
+          <a:noFill/>
+          <a:ln/>
+        </p:spPr>
+        <p:txBody>
+          <a:bodyPr wrap="square" lIns="0" tIns="0" rIns="0" bIns="0" rtlCol="0" anchor="ctr"/>
+          <a:lstStyle/>
+          <a:p>
+            <a:pPr algn="ctr" indent="0" marL="0">
+              <a:buNone/>
+            </a:pPr>
+            <a:r>
+              <a:rPr lang="en-US" sz="1300" b="1" dirty="0">
+                <a:solidFill>
+                  <a:srgbClr val="9D174D"/>
+                </a:solidFill>
+                <a:latin typeface="Trebuchet MS" pitchFamily="34" charset="0"/>
+                <a:ea typeface="Trebuchet MS" pitchFamily="34" charset="-122"/>
+                <a:cs typeface="Trebuchet MS" pitchFamily="34" charset="-120"/>
+              </a:rPr>
+              <a:t>s</a:t>
+            </a:r>
+            <a:endParaRPr lang="en-US" sz="1300" dirty="0"/>
+          </a:p>
+        </p:txBody>
+      </p:sp>
+      <p:sp>
+        <p:nvSpPr>
+          <p:cNvPr id="24" name="Text 22"/>
+          <p:cNvSpPr/>
+          <p:nvPr/>
+        </p:nvSpPr>
+        <p:spPr>
+          <a:xfrm>
+            <a:off x="6519672" y="2569464"/>
+            <a:ext cx="1828800" cy="201168"/>
+          </a:xfrm>
+          <a:prstGeom prst="rect">
+            <a:avLst/>
+          </a:prstGeom>
+          <a:noFill/>
+          <a:ln/>
+        </p:spPr>
+        <p:txBody>
+          <a:bodyPr wrap="square" lIns="0" tIns="0" rIns="0" bIns="0" rtlCol="0" anchor="t"/>
+          <a:lstStyle/>
+          <a:p>
+            <a:pPr algn="ctr" indent="0" marL="0">
+              <a:buNone/>
+            </a:pPr>
+            <a:r>
+              <a:rPr lang="en-US" sz="850" dirty="0">
+                <a:solidFill>
+                  <a:srgbClr val="475569"/>
+                </a:solidFill>
+                <a:latin typeface="Calibri" pitchFamily="34" charset="0"/>
+                <a:ea typeface="Calibri" pitchFamily="34" charset="-122"/>
+                <a:cs typeface="Calibri" pitchFamily="34" charset="-120"/>
+              </a:rPr>
+              <a:t>plural or present tense</a:t>
+            </a:r>
+            <a:endParaRPr lang="en-US" sz="850" dirty="0"/>
+          </a:p>
+        </p:txBody>
+      </p:sp>
+      <p:sp>
+        <p:nvSpPr>
+          <p:cNvPr id="25" name="Shape 23"/>
           <p:cNvSpPr/>
           <p:nvPr/>
         </p:nvSpPr>
@@ -13992,7 +14021,7 @@
       </p:sp>
       <p:sp>
         <p:nvSpPr>
-          <p:cNvPr id="23" name="Text 21"/>
+          <p:cNvPr id="26" name="Text 24"/>
           <p:cNvSpPr/>
           <p:nvPr/>
         </p:nvSpPr>
@@ -14031,7 +14060,7 @@
       </p:sp>
       <p:sp>
         <p:nvSpPr>
-          <p:cNvPr id="24" name="Shape 22"/>
+          <p:cNvPr id="27" name="Shape 25"/>
           <p:cNvSpPr/>
           <p:nvPr/>
         </p:nvSpPr>
@@ -14058,7 +14087,7 @@
       </p:sp>
       <p:sp>
         <p:nvSpPr>
-          <p:cNvPr id="25" name="Shape 23"/>
+          <p:cNvPr id="28" name="Shape 26"/>
           <p:cNvSpPr/>
           <p:nvPr/>
         </p:nvSpPr>
@@ -14085,7 +14114,7 @@
       </p:sp>
       <p:sp>
         <p:nvSpPr>
-          <p:cNvPr id="26" name="Text 24"/>
+          <p:cNvPr id="29" name="Text 27"/>
           <p:cNvSpPr/>
           <p:nvPr/>
         </p:nvSpPr>
@@ -14116,7 +14145,7 @@
                 <a:ea typeface="Trebuchet MS" pitchFamily="34" charset="-122"/>
                 <a:cs typeface="Trebuchet MS" pitchFamily="34" charset="-120"/>
               </a:rPr>
-              <a:t>ex</a:t>
+              <a:t>dis</a:t>
             </a:r>
             <a:endParaRPr lang="en-US" sz="1400" dirty="0"/>
           </a:p>
@@ -14124,7 +14153,7 @@
       </p:sp>
       <p:sp>
         <p:nvSpPr>
-          <p:cNvPr id="27" name="Text 25"/>
+          <p:cNvPr id="30" name="Text 28"/>
           <p:cNvSpPr/>
           <p:nvPr/>
         </p:nvSpPr>
@@ -14163,7 +14192,7 @@
       </p:sp>
       <p:sp>
         <p:nvSpPr>
-          <p:cNvPr id="28" name="Shape 26"/>
+          <p:cNvPr id="31" name="Shape 29"/>
           <p:cNvSpPr/>
           <p:nvPr/>
         </p:nvSpPr>
@@ -14190,7 +14219,7 @@
       </p:sp>
       <p:sp>
         <p:nvSpPr>
-          <p:cNvPr id="29" name="Text 27"/>
+          <p:cNvPr id="32" name="Text 30"/>
           <p:cNvSpPr/>
           <p:nvPr/>
         </p:nvSpPr>
@@ -14221,7 +14250,7 @@
                 <a:ea typeface="Trebuchet MS" pitchFamily="34" charset="-122"/>
                 <a:cs typeface="Trebuchet MS" pitchFamily="34" charset="-120"/>
               </a:rPr>
-              <a:t>claim</a:t>
+              <a:t>claims</a:t>
             </a:r>
             <a:endParaRPr lang="en-US" sz="1400" dirty="0"/>
           </a:p>
@@ -14229,7 +14258,7 @@
       </p:sp>
       <p:sp>
         <p:nvSpPr>
-          <p:cNvPr id="30" name="Shape 28"/>
+          <p:cNvPr id="33" name="Shape 31"/>
           <p:cNvSpPr/>
           <p:nvPr/>
         </p:nvSpPr>
@@ -14256,7 +14285,7 @@
       </p:sp>
       <p:sp>
         <p:nvSpPr>
-          <p:cNvPr id="31" name="Text 29"/>
+          <p:cNvPr id="34" name="Text 32"/>
           <p:cNvSpPr/>
           <p:nvPr/>
         </p:nvSpPr>
@@ -14295,7 +14324,7 @@
       </p:sp>
       <p:sp>
         <p:nvSpPr>
-          <p:cNvPr id="32" name="Shape 30"/>
+          <p:cNvPr id="35" name="Shape 33"/>
           <p:cNvSpPr/>
           <p:nvPr/>
         </p:nvSpPr>
@@ -14322,7 +14351,7 @@
       </p:sp>
       <p:sp>
         <p:nvSpPr>
-          <p:cNvPr id="33" name="Text 31"/>
+          <p:cNvPr id="36" name="Text 34"/>
           <p:cNvSpPr/>
           <p:nvPr/>
         </p:nvSpPr>
@@ -14554,7 +14583,7 @@
                 <a:ea typeface="Calibri" pitchFamily="34" charset="-122"/>
                 <a:cs typeface="Calibri" pitchFamily="34" charset="-120"/>
               </a:rPr>
-              <a:t>Root 'claim' — to call out or declare</a:t>
+              <a:t>Root 'claim' — call out; cry</a:t>
             </a:r>
             <a:endParaRPr lang="en-US" sz="1600" dirty="0"/>
           </a:p>
@@ -14910,7 +14939,7 @@
                 <a:ea typeface="Calibri" pitchFamily="34" charset="-122"/>
                 <a:cs typeface="Calibri" pitchFamily="34" charset="-120"/>
               </a:rPr>
-              <a:t>Word Labs  •  wordlabs.app  •  Root: 'claim' = to call out or declare</a:t>
+              <a:t>Word Labs  •  wordlabs.app  •  Root: 'claim' = call out; cry</a:t>
             </a:r>
             <a:endParaRPr lang="en-US" sz="800" dirty="0"/>
           </a:p>
@@ -15049,7 +15078,7 @@
                 <a:ea typeface="Trebuchet MS" pitchFamily="34" charset="-122"/>
                 <a:cs typeface="Trebuchet MS" pitchFamily="34" charset="-120"/>
               </a:rPr>
-              <a:t>exclaim</a:t>
+              <a:t>disclaims</a:t>
             </a:r>
             <a:endParaRPr lang="en-US" sz="2800" dirty="0"/>
           </a:p>
@@ -15129,7 +15158,7 @@
         </p:nvSpPr>
         <p:spPr>
           <a:xfrm>
-            <a:off x="2938272" y="2258568"/>
+            <a:off x="2221992" y="2258568"/>
             <a:ext cx="1828800" cy="292608"/>
           </a:xfrm>
           <a:prstGeom prst="rect">
@@ -15163,7 +15192,7 @@
         </p:nvSpPr>
         <p:spPr>
           <a:xfrm>
-            <a:off x="2938272" y="2258568"/>
+            <a:off x="2221992" y="2258568"/>
             <a:ext cx="1828800" cy="292608"/>
           </a:xfrm>
           <a:prstGeom prst="rect">
@@ -15188,7 +15217,7 @@
                 <a:ea typeface="Trebuchet MS" pitchFamily="34" charset="-122"/>
                 <a:cs typeface="Trebuchet MS" pitchFamily="34" charset="-120"/>
               </a:rPr>
-              <a:t>ex</a:t>
+              <a:t>dis</a:t>
             </a:r>
             <a:endParaRPr lang="en-US" sz="1300" dirty="0"/>
           </a:p>
@@ -15202,7 +15231,7 @@
         </p:nvSpPr>
         <p:spPr>
           <a:xfrm>
-            <a:off x="2938272" y="2569464"/>
+            <a:off x="2221992" y="2569464"/>
             <a:ext cx="1828800" cy="201168"/>
           </a:xfrm>
           <a:prstGeom prst="rect">
@@ -15227,7 +15256,7 @@
                 <a:ea typeface="Calibri" pitchFamily="34" charset="-122"/>
                 <a:cs typeface="Calibri" pitchFamily="34" charset="-120"/>
               </a:rPr>
-              <a:t>out, away from</a:t>
+              <a:t>not; opposite; apart</a:t>
             </a:r>
             <a:endParaRPr lang="en-US" sz="850" dirty="0"/>
           </a:p>
@@ -15241,7 +15270,7 @@
         </p:nvSpPr>
         <p:spPr>
           <a:xfrm>
-            <a:off x="5803392" y="2258568"/>
+            <a:off x="4370832" y="2258568"/>
             <a:ext cx="1828800" cy="292608"/>
           </a:xfrm>
           <a:prstGeom prst="rect">
@@ -15275,7 +15304,7 @@
         </p:nvSpPr>
         <p:spPr>
           <a:xfrm>
-            <a:off x="5803392" y="2258568"/>
+            <a:off x="4370832" y="2258568"/>
             <a:ext cx="1828800" cy="292608"/>
           </a:xfrm>
           <a:prstGeom prst="rect">
@@ -15314,7 +15343,7 @@
         </p:nvSpPr>
         <p:spPr>
           <a:xfrm>
-            <a:off x="5803392" y="2569464"/>
+            <a:off x="4370832" y="2569464"/>
             <a:ext cx="1828800" cy="201168"/>
           </a:xfrm>
           <a:prstGeom prst="rect">
@@ -15339,7 +15368,7 @@
                 <a:ea typeface="Calibri" pitchFamily="34" charset="-122"/>
                 <a:cs typeface="Calibri" pitchFamily="34" charset="-120"/>
               </a:rPr>
-              <a:t>to call out or declare</a:t>
+              <a:t>call out; cry</a:t>
             </a:r>
             <a:endParaRPr lang="en-US" sz="850" dirty="0"/>
           </a:p>
@@ -15348,6 +15377,118 @@
       <p:sp>
         <p:nvSpPr>
           <p:cNvPr id="22" name="Shape 20"/>
+          <p:cNvSpPr/>
+          <p:nvPr/>
+        </p:nvSpPr>
+        <p:spPr>
+          <a:xfrm>
+            <a:off x="6519672" y="2258568"/>
+            <a:ext cx="1828800" cy="292608"/>
+          </a:xfrm>
+          <a:prstGeom prst="rect">
+            <a:avLst>
+              <a:gd name="adj" fmla="val 25000"/>
+            </a:avLst>
+          </a:prstGeom>
+          <a:solidFill>
+            <a:srgbClr val="FCE7F3"/>
+          </a:solidFill>
+          <a:ln w="19050">
+            <a:solidFill>
+              <a:srgbClr val="DB2777"/>
+            </a:solidFill>
+            <a:prstDash val="solid"/>
+          </a:ln>
+          <a:effectLst>
+            <a:outerShdw sx="100000" sy="100000" kx="0" ky="0" algn="bl" rotWithShape="0" blurRad="101600" dist="38100" dir="8100000">
+              <a:srgbClr val="000000">
+                <a:alpha val="12000"/>
+              </a:srgbClr>
+            </a:outerShdw>
+          </a:effectLst>
+        </p:spPr>
+      </p:sp>
+      <p:sp>
+        <p:nvSpPr>
+          <p:cNvPr id="23" name="Text 21"/>
+          <p:cNvSpPr/>
+          <p:nvPr/>
+        </p:nvSpPr>
+        <p:spPr>
+          <a:xfrm>
+            <a:off x="6519672" y="2258568"/>
+            <a:ext cx="1828800" cy="292608"/>
+          </a:xfrm>
+          <a:prstGeom prst="rect">
+            <a:avLst/>
+          </a:prstGeom>
+          <a:noFill/>
+          <a:ln/>
+        </p:spPr>
+        <p:txBody>
+          <a:bodyPr wrap="square" lIns="0" tIns="0" rIns="0" bIns="0" rtlCol="0" anchor="ctr"/>
+          <a:lstStyle/>
+          <a:p>
+            <a:pPr algn="ctr" indent="0" marL="0">
+              <a:buNone/>
+            </a:pPr>
+            <a:r>
+              <a:rPr lang="en-US" sz="1300" b="1" dirty="0">
+                <a:solidFill>
+                  <a:srgbClr val="9D174D"/>
+                </a:solidFill>
+                <a:latin typeface="Trebuchet MS" pitchFamily="34" charset="0"/>
+                <a:ea typeface="Trebuchet MS" pitchFamily="34" charset="-122"/>
+                <a:cs typeface="Trebuchet MS" pitchFamily="34" charset="-120"/>
+              </a:rPr>
+              <a:t>s</a:t>
+            </a:r>
+            <a:endParaRPr lang="en-US" sz="1300" dirty="0"/>
+          </a:p>
+        </p:txBody>
+      </p:sp>
+      <p:sp>
+        <p:nvSpPr>
+          <p:cNvPr id="24" name="Text 22"/>
+          <p:cNvSpPr/>
+          <p:nvPr/>
+        </p:nvSpPr>
+        <p:spPr>
+          <a:xfrm>
+            <a:off x="6519672" y="2569464"/>
+            <a:ext cx="1828800" cy="201168"/>
+          </a:xfrm>
+          <a:prstGeom prst="rect">
+            <a:avLst/>
+          </a:prstGeom>
+          <a:noFill/>
+          <a:ln/>
+        </p:spPr>
+        <p:txBody>
+          <a:bodyPr wrap="square" lIns="0" tIns="0" rIns="0" bIns="0" rtlCol="0" anchor="t"/>
+          <a:lstStyle/>
+          <a:p>
+            <a:pPr algn="ctr" indent="0" marL="0">
+              <a:buNone/>
+            </a:pPr>
+            <a:r>
+              <a:rPr lang="en-US" sz="850" dirty="0">
+                <a:solidFill>
+                  <a:srgbClr val="475569"/>
+                </a:solidFill>
+                <a:latin typeface="Calibri" pitchFamily="34" charset="0"/>
+                <a:ea typeface="Calibri" pitchFamily="34" charset="-122"/>
+                <a:cs typeface="Calibri" pitchFamily="34" charset="-120"/>
+              </a:rPr>
+              <a:t>plural or present tense</a:t>
+            </a:r>
+            <a:endParaRPr lang="en-US" sz="850" dirty="0"/>
+          </a:p>
+        </p:txBody>
+      </p:sp>
+      <p:sp>
+        <p:nvSpPr>
+          <p:cNvPr id="25" name="Shape 23"/>
           <p:cNvSpPr/>
           <p:nvPr/>
         </p:nvSpPr>
@@ -15374,7 +15515,7 @@
       </p:sp>
       <p:sp>
         <p:nvSpPr>
-          <p:cNvPr id="23" name="Text 21"/>
+          <p:cNvPr id="26" name="Text 24"/>
           <p:cNvSpPr/>
           <p:nvPr/>
         </p:nvSpPr>
@@ -15413,7 +15554,7 @@
       </p:sp>
       <p:sp>
         <p:nvSpPr>
-          <p:cNvPr id="24" name="Shape 22"/>
+          <p:cNvPr id="27" name="Shape 25"/>
           <p:cNvSpPr/>
           <p:nvPr/>
         </p:nvSpPr>
@@ -15440,7 +15581,7 @@
       </p:sp>
       <p:sp>
         <p:nvSpPr>
-          <p:cNvPr id="25" name="Shape 23"/>
+          <p:cNvPr id="28" name="Shape 26"/>
           <p:cNvSpPr/>
           <p:nvPr/>
         </p:nvSpPr>
@@ -15467,7 +15608,7 @@
       </p:sp>
       <p:sp>
         <p:nvSpPr>
-          <p:cNvPr id="26" name="Text 24"/>
+          <p:cNvPr id="29" name="Text 27"/>
           <p:cNvSpPr/>
           <p:nvPr/>
         </p:nvSpPr>
@@ -15498,7 +15639,7 @@
                 <a:ea typeface="Trebuchet MS" pitchFamily="34" charset="-122"/>
                 <a:cs typeface="Trebuchet MS" pitchFamily="34" charset="-120"/>
               </a:rPr>
-              <a:t>ex</a:t>
+              <a:t>dis</a:t>
             </a:r>
             <a:endParaRPr lang="en-US" sz="1400" dirty="0"/>
           </a:p>
@@ -15506,7 +15647,7 @@
       </p:sp>
       <p:sp>
         <p:nvSpPr>
-          <p:cNvPr id="27" name="Text 25"/>
+          <p:cNvPr id="30" name="Text 28"/>
           <p:cNvSpPr/>
           <p:nvPr/>
         </p:nvSpPr>
@@ -15545,7 +15686,7 @@
       </p:sp>
       <p:sp>
         <p:nvSpPr>
-          <p:cNvPr id="28" name="Shape 26"/>
+          <p:cNvPr id="31" name="Shape 29"/>
           <p:cNvSpPr/>
           <p:nvPr/>
         </p:nvSpPr>
@@ -15572,7 +15713,7 @@
       </p:sp>
       <p:sp>
         <p:nvSpPr>
-          <p:cNvPr id="29" name="Text 27"/>
+          <p:cNvPr id="32" name="Text 30"/>
           <p:cNvSpPr/>
           <p:nvPr/>
         </p:nvSpPr>
@@ -15603,7 +15744,7 @@
                 <a:ea typeface="Trebuchet MS" pitchFamily="34" charset="-122"/>
                 <a:cs typeface="Trebuchet MS" pitchFamily="34" charset="-120"/>
               </a:rPr>
-              <a:t>claim</a:t>
+              <a:t>claims</a:t>
             </a:r>
             <a:endParaRPr lang="en-US" sz="1400" dirty="0"/>
           </a:p>
@@ -15611,7 +15752,7 @@
       </p:sp>
       <p:sp>
         <p:nvSpPr>
-          <p:cNvPr id="30" name="Shape 28"/>
+          <p:cNvPr id="33" name="Shape 31"/>
           <p:cNvSpPr/>
           <p:nvPr/>
         </p:nvSpPr>
@@ -15638,7 +15779,7 @@
       </p:sp>
       <p:sp>
         <p:nvSpPr>
-          <p:cNvPr id="31" name="Text 29"/>
+          <p:cNvPr id="34" name="Text 32"/>
           <p:cNvSpPr/>
           <p:nvPr/>
         </p:nvSpPr>
@@ -15677,18 +15818,18 @@
       </p:sp>
       <p:sp>
         <p:nvSpPr>
-          <p:cNvPr id="32" name="Shape 30"/>
+          <p:cNvPr id="35" name="Shape 33"/>
           <p:cNvSpPr/>
           <p:nvPr/>
         </p:nvSpPr>
         <p:spPr>
           <a:xfrm>
             <a:off x="1874520" y="4096512"/>
-            <a:ext cx="6903720" cy="804672"/>
+            <a:ext cx="6903720" cy="658368"/>
           </a:xfrm>
           <a:prstGeom prst="rect">
             <a:avLst>
-              <a:gd name="adj" fmla="val 6818"/>
+              <a:gd name="adj" fmla="val 8333"/>
             </a:avLst>
           </a:prstGeom>
           <a:solidFill>
@@ -15704,18 +15845,18 @@
       </p:sp>
       <p:sp>
         <p:nvSpPr>
-          <p:cNvPr id="33" name="Shape 31"/>
-          <p:cNvSpPr/>
-          <p:nvPr/>
-        </p:nvSpPr>
-        <p:spPr>
-          <a:xfrm>
-            <a:off x="2254649" y="4169664"/>
-            <a:ext cx="685800" cy="384048"/>
+          <p:cNvPr id="36" name="Shape 34"/>
+          <p:cNvSpPr/>
+          <p:nvPr/>
+        </p:nvSpPr>
+        <p:spPr>
+          <a:xfrm>
+            <a:off x="2023872" y="4169664"/>
+            <a:ext cx="685800" cy="475488"/>
           </a:xfrm>
           <a:prstGeom prst="rect">
             <a:avLst>
-              <a:gd name="adj" fmla="val 9524"/>
+              <a:gd name="adj" fmla="val 7692"/>
             </a:avLst>
           </a:prstGeom>
           <a:solidFill>
@@ -15731,14 +15872,14 @@
       </p:sp>
       <p:sp>
         <p:nvSpPr>
-          <p:cNvPr id="34" name="Text 32"/>
-          <p:cNvSpPr/>
-          <p:nvPr/>
-        </p:nvSpPr>
-        <p:spPr>
-          <a:xfrm>
-            <a:off x="2254649" y="4169664"/>
-            <a:ext cx="685800" cy="384048"/>
+          <p:cNvPr id="37" name="Text 35"/>
+          <p:cNvSpPr/>
+          <p:nvPr/>
+        </p:nvSpPr>
+        <p:spPr>
+          <a:xfrm>
+            <a:off x="2023872" y="4169664"/>
+            <a:ext cx="685800" cy="475488"/>
           </a:xfrm>
           <a:prstGeom prst="rect">
             <a:avLst/>
@@ -15762,7 +15903,7 @@
                 <a:ea typeface="Trebuchet MS" pitchFamily="34" charset="-122"/>
                 <a:cs typeface="Trebuchet MS" pitchFamily="34" charset="-120"/>
               </a:rPr>
-              <a:t>e</a:t>
+              <a:t>d</a:t>
             </a:r>
             <a:endParaRPr lang="en-US" sz="900" dirty="0"/>
           </a:p>
@@ -15770,18 +15911,18 @@
       </p:sp>
       <p:sp>
         <p:nvSpPr>
-          <p:cNvPr id="35" name="Shape 33"/>
-          <p:cNvSpPr/>
-          <p:nvPr/>
-        </p:nvSpPr>
-        <p:spPr>
-          <a:xfrm>
-            <a:off x="3293146" y="4169664"/>
-            <a:ext cx="685800" cy="384048"/>
+          <p:cNvPr id="38" name="Shape 36"/>
+          <p:cNvSpPr/>
+          <p:nvPr/>
+        </p:nvSpPr>
+        <p:spPr>
+          <a:xfrm>
+            <a:off x="2831592" y="4169664"/>
+            <a:ext cx="685800" cy="475488"/>
           </a:xfrm>
           <a:prstGeom prst="rect">
             <a:avLst>
-              <a:gd name="adj" fmla="val 9524"/>
+              <a:gd name="adj" fmla="val 7692"/>
             </a:avLst>
           </a:prstGeom>
           <a:solidFill>
@@ -15797,14 +15938,14 @@
       </p:sp>
       <p:sp>
         <p:nvSpPr>
-          <p:cNvPr id="36" name="Text 34"/>
-          <p:cNvSpPr/>
-          <p:nvPr/>
-        </p:nvSpPr>
-        <p:spPr>
-          <a:xfrm>
-            <a:off x="3293146" y="4169664"/>
-            <a:ext cx="685800" cy="384048"/>
+          <p:cNvPr id="39" name="Text 37"/>
+          <p:cNvSpPr/>
+          <p:nvPr/>
+        </p:nvSpPr>
+        <p:spPr>
+          <a:xfrm>
+            <a:off x="2831592" y="4169664"/>
+            <a:ext cx="685800" cy="475488"/>
           </a:xfrm>
           <a:prstGeom prst="rect">
             <a:avLst/>
@@ -15828,7 +15969,7 @@
                 <a:ea typeface="Trebuchet MS" pitchFamily="34" charset="-122"/>
                 <a:cs typeface="Trebuchet MS" pitchFamily="34" charset="-120"/>
               </a:rPr>
-              <a:t>x</a:t>
+              <a:t>i</a:t>
             </a:r>
             <a:endParaRPr lang="en-US" sz="900" dirty="0"/>
           </a:p>
@@ -15836,57 +15977,18 @@
       </p:sp>
       <p:sp>
         <p:nvSpPr>
-          <p:cNvPr id="37" name="Text 35"/>
-          <p:cNvSpPr/>
-          <p:nvPr/>
-        </p:nvSpPr>
-        <p:spPr>
-          <a:xfrm>
-            <a:off x="3293146" y="4572000"/>
-            <a:ext cx="685800" cy="219456"/>
-          </a:xfrm>
-          <a:prstGeom prst="rect">
-            <a:avLst/>
-          </a:prstGeom>
-          <a:noFill/>
-          <a:ln/>
-        </p:spPr>
-        <p:txBody>
-          <a:bodyPr wrap="square" lIns="0" tIns="0" rIns="0" bIns="0" rtlCol="0" anchor="t"/>
-          <a:lstStyle/>
-          <a:p>
-            <a:pPr algn="ctr" indent="0" marL="0">
-              <a:buNone/>
-            </a:pPr>
-            <a:r>
-              <a:rPr lang="en-US" sz="750" i="1" dirty="0">
-                <a:solidFill>
-                  <a:srgbClr val="94A3B8"/>
-                </a:solidFill>
-                <a:latin typeface="Calibri" pitchFamily="34" charset="0"/>
-                <a:ea typeface="Calibri" pitchFamily="34" charset="-122"/>
-                <a:cs typeface="Calibri" pitchFamily="34" charset="-120"/>
-              </a:rPr>
-              <a:t>/ks/</a:t>
-            </a:r>
-            <a:endParaRPr lang="en-US" sz="750" dirty="0"/>
-          </a:p>
-        </p:txBody>
-      </p:sp>
-      <p:sp>
-        <p:nvSpPr>
-          <p:cNvPr id="38" name="Shape 36"/>
-          <p:cNvSpPr/>
-          <p:nvPr/>
-        </p:nvSpPr>
-        <p:spPr>
-          <a:xfrm>
-            <a:off x="4331643" y="4169664"/>
-            <a:ext cx="685800" cy="384048"/>
+          <p:cNvPr id="40" name="Shape 38"/>
+          <p:cNvSpPr/>
+          <p:nvPr/>
+        </p:nvSpPr>
+        <p:spPr>
+          <a:xfrm>
+            <a:off x="3639312" y="4169664"/>
+            <a:ext cx="685800" cy="475488"/>
           </a:xfrm>
           <a:prstGeom prst="rect">
             <a:avLst>
-              <a:gd name="adj" fmla="val 9524"/>
+              <a:gd name="adj" fmla="val 7692"/>
             </a:avLst>
           </a:prstGeom>
           <a:solidFill>
@@ -15902,14 +16004,14 @@
       </p:sp>
       <p:sp>
         <p:nvSpPr>
-          <p:cNvPr id="39" name="Text 37"/>
-          <p:cNvSpPr/>
-          <p:nvPr/>
-        </p:nvSpPr>
-        <p:spPr>
-          <a:xfrm>
-            <a:off x="4331643" y="4169664"/>
-            <a:ext cx="685800" cy="384048"/>
+          <p:cNvPr id="41" name="Text 39"/>
+          <p:cNvSpPr/>
+          <p:nvPr/>
+        </p:nvSpPr>
+        <p:spPr>
+          <a:xfrm>
+            <a:off x="3639312" y="4169664"/>
+            <a:ext cx="685800" cy="475488"/>
           </a:xfrm>
           <a:prstGeom prst="rect">
             <a:avLst/>
@@ -15933,7 +16035,7 @@
                 <a:ea typeface="Trebuchet MS" pitchFamily="34" charset="-122"/>
                 <a:cs typeface="Trebuchet MS" pitchFamily="34" charset="-120"/>
               </a:rPr>
-              <a:t>c</a:t>
+              <a:t>s</a:t>
             </a:r>
             <a:endParaRPr lang="en-US" sz="900" dirty="0"/>
           </a:p>
@@ -15941,57 +16043,18 @@
       </p:sp>
       <p:sp>
         <p:nvSpPr>
-          <p:cNvPr id="40" name="Text 38"/>
-          <p:cNvSpPr/>
-          <p:nvPr/>
-        </p:nvSpPr>
-        <p:spPr>
-          <a:xfrm>
-            <a:off x="4331643" y="4572000"/>
-            <a:ext cx="685800" cy="219456"/>
-          </a:xfrm>
-          <a:prstGeom prst="rect">
-            <a:avLst/>
-          </a:prstGeom>
-          <a:noFill/>
-          <a:ln/>
-        </p:spPr>
-        <p:txBody>
-          <a:bodyPr wrap="square" lIns="0" tIns="0" rIns="0" bIns="0" rtlCol="0" anchor="t"/>
-          <a:lstStyle/>
-          <a:p>
-            <a:pPr algn="ctr" indent="0" marL="0">
-              <a:buNone/>
-            </a:pPr>
-            <a:r>
-              <a:rPr lang="en-US" sz="750" i="1" dirty="0">
-                <a:solidFill>
-                  <a:srgbClr val="94A3B8"/>
-                </a:solidFill>
-                <a:latin typeface="Calibri" pitchFamily="34" charset="0"/>
-                <a:ea typeface="Calibri" pitchFamily="34" charset="-122"/>
-                <a:cs typeface="Calibri" pitchFamily="34" charset="-120"/>
-              </a:rPr>
-              <a:t>/k/</a:t>
-            </a:r>
-            <a:endParaRPr lang="en-US" sz="750" dirty="0"/>
-          </a:p>
-        </p:txBody>
-      </p:sp>
-      <p:sp>
-        <p:nvSpPr>
-          <p:cNvPr id="41" name="Shape 39"/>
-          <p:cNvSpPr/>
-          <p:nvPr/>
-        </p:nvSpPr>
-        <p:spPr>
-          <a:xfrm>
-            <a:off x="5370141" y="4169664"/>
-            <a:ext cx="685800" cy="384048"/>
+          <p:cNvPr id="42" name="Shape 40"/>
+          <p:cNvSpPr/>
+          <p:nvPr/>
+        </p:nvSpPr>
+        <p:spPr>
+          <a:xfrm>
+            <a:off x="4447032" y="4169664"/>
+            <a:ext cx="685800" cy="475488"/>
           </a:xfrm>
           <a:prstGeom prst="rect">
             <a:avLst>
-              <a:gd name="adj" fmla="val 9524"/>
+              <a:gd name="adj" fmla="val 7692"/>
             </a:avLst>
           </a:prstGeom>
           <a:solidFill>
@@ -16007,14 +16070,14 @@
       </p:sp>
       <p:sp>
         <p:nvSpPr>
-          <p:cNvPr id="42" name="Text 40"/>
-          <p:cNvSpPr/>
-          <p:nvPr/>
-        </p:nvSpPr>
-        <p:spPr>
-          <a:xfrm>
-            <a:off x="5370141" y="4169664"/>
-            <a:ext cx="685800" cy="384048"/>
+          <p:cNvPr id="43" name="Text 41"/>
+          <p:cNvSpPr/>
+          <p:nvPr/>
+        </p:nvSpPr>
+        <p:spPr>
+          <a:xfrm>
+            <a:off x="4447032" y="4169664"/>
+            <a:ext cx="685800" cy="475488"/>
           </a:xfrm>
           <a:prstGeom prst="rect">
             <a:avLst/>
@@ -16038,7 +16101,7 @@
                 <a:ea typeface="Trebuchet MS" pitchFamily="34" charset="-122"/>
                 <a:cs typeface="Trebuchet MS" pitchFamily="34" charset="-120"/>
               </a:rPr>
-              <a:t>l</a:t>
+              <a:t>c</a:t>
             </a:r>
             <a:endParaRPr lang="en-US" sz="900" dirty="0"/>
           </a:p>
@@ -16046,18 +16109,18 @@
       </p:sp>
       <p:sp>
         <p:nvSpPr>
-          <p:cNvPr id="43" name="Shape 41"/>
-          <p:cNvSpPr/>
-          <p:nvPr/>
-        </p:nvSpPr>
-        <p:spPr>
-          <a:xfrm>
-            <a:off x="6408638" y="4169664"/>
-            <a:ext cx="685800" cy="384048"/>
+          <p:cNvPr id="44" name="Shape 42"/>
+          <p:cNvSpPr/>
+          <p:nvPr/>
+        </p:nvSpPr>
+        <p:spPr>
+          <a:xfrm>
+            <a:off x="5254752" y="4169664"/>
+            <a:ext cx="685800" cy="475488"/>
           </a:xfrm>
           <a:prstGeom prst="rect">
             <a:avLst>
-              <a:gd name="adj" fmla="val 9524"/>
+              <a:gd name="adj" fmla="val 7692"/>
             </a:avLst>
           </a:prstGeom>
           <a:solidFill>
@@ -16073,14 +16136,14 @@
       </p:sp>
       <p:sp>
         <p:nvSpPr>
-          <p:cNvPr id="44" name="Text 42"/>
-          <p:cNvSpPr/>
-          <p:nvPr/>
-        </p:nvSpPr>
-        <p:spPr>
-          <a:xfrm>
-            <a:off x="6408638" y="4169664"/>
-            <a:ext cx="685800" cy="384048"/>
+          <p:cNvPr id="45" name="Text 43"/>
+          <p:cNvSpPr/>
+          <p:nvPr/>
+        </p:nvSpPr>
+        <p:spPr>
+          <a:xfrm>
+            <a:off x="5254752" y="4169664"/>
+            <a:ext cx="685800" cy="475488"/>
           </a:xfrm>
           <a:prstGeom prst="rect">
             <a:avLst/>
@@ -16104,7 +16167,7 @@
                 <a:ea typeface="Trebuchet MS" pitchFamily="34" charset="-122"/>
                 <a:cs typeface="Trebuchet MS" pitchFamily="34" charset="-120"/>
               </a:rPr>
-              <a:t>ai</a:t>
+              <a:t>l</a:t>
             </a:r>
             <a:endParaRPr lang="en-US" sz="900" dirty="0"/>
           </a:p>
@@ -16112,18 +16175,18 @@
       </p:sp>
       <p:sp>
         <p:nvSpPr>
-          <p:cNvPr id="45" name="Shape 43"/>
-          <p:cNvSpPr/>
-          <p:nvPr/>
-        </p:nvSpPr>
-        <p:spPr>
-          <a:xfrm>
-            <a:off x="7447135" y="4169664"/>
-            <a:ext cx="685800" cy="384048"/>
+          <p:cNvPr id="46" name="Shape 44"/>
+          <p:cNvSpPr/>
+          <p:nvPr/>
+        </p:nvSpPr>
+        <p:spPr>
+          <a:xfrm>
+            <a:off x="6062472" y="4169664"/>
+            <a:ext cx="685800" cy="475488"/>
           </a:xfrm>
           <a:prstGeom prst="rect">
             <a:avLst>
-              <a:gd name="adj" fmla="val 9524"/>
+              <a:gd name="adj" fmla="val 7692"/>
             </a:avLst>
           </a:prstGeom>
           <a:solidFill>
@@ -16139,14 +16202,14 @@
       </p:sp>
       <p:sp>
         <p:nvSpPr>
-          <p:cNvPr id="46" name="Text 44"/>
-          <p:cNvSpPr/>
-          <p:nvPr/>
-        </p:nvSpPr>
-        <p:spPr>
-          <a:xfrm>
-            <a:off x="7447135" y="4169664"/>
-            <a:ext cx="685800" cy="384048"/>
+          <p:cNvPr id="47" name="Text 45"/>
+          <p:cNvSpPr/>
+          <p:nvPr/>
+        </p:nvSpPr>
+        <p:spPr>
+          <a:xfrm>
+            <a:off x="6062472" y="4169664"/>
+            <a:ext cx="685800" cy="475488"/>
           </a:xfrm>
           <a:prstGeom prst="rect">
             <a:avLst/>
@@ -16170,7 +16233,139 @@
                 <a:ea typeface="Trebuchet MS" pitchFamily="34" charset="-122"/>
                 <a:cs typeface="Trebuchet MS" pitchFamily="34" charset="-120"/>
               </a:rPr>
+              <a:t>ai</a:t>
+            </a:r>
+            <a:endParaRPr lang="en-US" sz="900" dirty="0"/>
+          </a:p>
+        </p:txBody>
+      </p:sp>
+      <p:sp>
+        <p:nvSpPr>
+          <p:cNvPr id="48" name="Shape 46"/>
+          <p:cNvSpPr/>
+          <p:nvPr/>
+        </p:nvSpPr>
+        <p:spPr>
+          <a:xfrm>
+            <a:off x="6870192" y="4169664"/>
+            <a:ext cx="685800" cy="475488"/>
+          </a:xfrm>
+          <a:prstGeom prst="rect">
+            <a:avLst>
+              <a:gd name="adj" fmla="val 7692"/>
+            </a:avLst>
+          </a:prstGeom>
+          <a:solidFill>
+            <a:srgbClr val="FFFFFF"/>
+          </a:solidFill>
+          <a:ln w="12700">
+            <a:solidFill>
+              <a:srgbClr val="DB2777"/>
+            </a:solidFill>
+            <a:prstDash val="solid"/>
+          </a:ln>
+        </p:spPr>
+      </p:sp>
+      <p:sp>
+        <p:nvSpPr>
+          <p:cNvPr id="49" name="Text 47"/>
+          <p:cNvSpPr/>
+          <p:nvPr/>
+        </p:nvSpPr>
+        <p:spPr>
+          <a:xfrm>
+            <a:off x="6870192" y="4169664"/>
+            <a:ext cx="685800" cy="475488"/>
+          </a:xfrm>
+          <a:prstGeom prst="rect">
+            <a:avLst/>
+          </a:prstGeom>
+          <a:noFill/>
+          <a:ln/>
+        </p:spPr>
+        <p:txBody>
+          <a:bodyPr wrap="square" lIns="0" tIns="0" rIns="0" bIns="0" rtlCol="0" anchor="ctr"/>
+          <a:lstStyle/>
+          <a:p>
+            <a:pPr algn="ctr" indent="0" marL="0">
+              <a:buNone/>
+            </a:pPr>
+            <a:r>
+              <a:rPr lang="en-US" sz="900" b="1" dirty="0">
+                <a:solidFill>
+                  <a:srgbClr val="9D174D"/>
+                </a:solidFill>
+                <a:latin typeface="Trebuchet MS" pitchFamily="34" charset="0"/>
+                <a:ea typeface="Trebuchet MS" pitchFamily="34" charset="-122"/>
+                <a:cs typeface="Trebuchet MS" pitchFamily="34" charset="-120"/>
+              </a:rPr>
               <a:t>m</a:t>
+            </a:r>
+            <a:endParaRPr lang="en-US" sz="900" dirty="0"/>
+          </a:p>
+        </p:txBody>
+      </p:sp>
+      <p:sp>
+        <p:nvSpPr>
+          <p:cNvPr id="50" name="Shape 48"/>
+          <p:cNvSpPr/>
+          <p:nvPr/>
+        </p:nvSpPr>
+        <p:spPr>
+          <a:xfrm>
+            <a:off x="7677912" y="4169664"/>
+            <a:ext cx="685800" cy="475488"/>
+          </a:xfrm>
+          <a:prstGeom prst="rect">
+            <a:avLst>
+              <a:gd name="adj" fmla="val 7692"/>
+            </a:avLst>
+          </a:prstGeom>
+          <a:solidFill>
+            <a:srgbClr val="FFFFFF"/>
+          </a:solidFill>
+          <a:ln w="12700">
+            <a:solidFill>
+              <a:srgbClr val="DB2777"/>
+            </a:solidFill>
+            <a:prstDash val="solid"/>
+          </a:ln>
+        </p:spPr>
+      </p:sp>
+      <p:sp>
+        <p:nvSpPr>
+          <p:cNvPr id="51" name="Text 49"/>
+          <p:cNvSpPr/>
+          <p:nvPr/>
+        </p:nvSpPr>
+        <p:spPr>
+          <a:xfrm>
+            <a:off x="7677912" y="4169664"/>
+            <a:ext cx="685800" cy="475488"/>
+          </a:xfrm>
+          <a:prstGeom prst="rect">
+            <a:avLst/>
+          </a:prstGeom>
+          <a:noFill/>
+          <a:ln/>
+        </p:spPr>
+        <p:txBody>
+          <a:bodyPr wrap="square" lIns="0" tIns="0" rIns="0" bIns="0" rtlCol="0" anchor="ctr"/>
+          <a:lstStyle/>
+          <a:p>
+            <a:pPr algn="ctr" indent="0" marL="0">
+              <a:buNone/>
+            </a:pPr>
+            <a:r>
+              <a:rPr lang="en-US" sz="900" b="1" dirty="0">
+                <a:solidFill>
+                  <a:srgbClr val="9D174D"/>
+                </a:solidFill>
+                <a:latin typeface="Trebuchet MS" pitchFamily="34" charset="0"/>
+                <a:ea typeface="Trebuchet MS" pitchFamily="34" charset="-122"/>
+                <a:cs typeface="Trebuchet MS" pitchFamily="34" charset="-120"/>
+              </a:rPr>
+              <a:t>s</a:t>
             </a:r>
             <a:endParaRPr lang="en-US" sz="900" dirty="0"/>
           </a:p>
@@ -16744,7 +16939,7 @@
                 <a:ea typeface="Calibri" pitchFamily="34" charset="-122"/>
                 <a:cs typeface="Calibri" pitchFamily="34" charset="-120"/>
               </a:rPr>
-              <a:t>Word Labs  •  wordlabs.app  •  Root: 'claim' = to call out or declare</a:t>
+              <a:t>Word Labs  •  wordlabs.app  •  Root: 'claim' = call out; cry</a:t>
             </a:r>
             <a:endParaRPr lang="en-US" sz="800" dirty="0"/>
           </a:p>
@@ -17078,7 +17273,7 @@
                 <a:ea typeface="Trebuchet MS" pitchFamily="34" charset="-122"/>
                 <a:cs typeface="Trebuchet MS" pitchFamily="34" charset="-120"/>
               </a:rPr>
-              <a:t>2</a:t>
+              <a:t>0</a:t>
             </a:r>
             <a:pPr algn="ctr" indent="0" marL="0">
               <a:buNone/>
@@ -17092,7 +17287,7 @@
                 <a:ea typeface="Trebuchet MS" pitchFamily="34" charset="-122"/>
                 <a:cs typeface="Trebuchet MS" pitchFamily="34" charset="-120"/>
               </a:rPr>
-              <a:t>  punctuation marks</a:t>
+              <a:t>  punctuation mark</a:t>
             </a:r>
             <a:endParaRPr lang="en-US" sz="2800" dirty="0"/>
           </a:p>
@@ -17384,7 +17579,7 @@
                 <a:ea typeface="Calibri" pitchFamily="34" charset="-122"/>
                 <a:cs typeface="Calibri" pitchFamily="34" charset="-120"/>
               </a:rPr>
-              <a:t>Word Labs  •  wordlabs.app  •  Root: 'claim' = to call out or declare</a:t>
+              <a:t>Word Labs  •  wordlabs.app  •  Root: 'claim' = call out; cry</a:t>
             </a:r>
             <a:endParaRPr lang="en-US" sz="800" dirty="0"/>
           </a:p>
@@ -17496,7 +17691,7 @@
                 <a:ea typeface="Calibri" pitchFamily="34" charset="-122"/>
                 <a:cs typeface="Calibri" pitchFamily="34" charset="-120"/>
               </a:rPr>
-              <a:t>The mayor would </a:t>
+              <a:t>The advert had a </a:t>
             </a:r>
             <a:pPr algn="l" indent="0" marL="0">
               <a:buNone/>
@@ -17513,7 +17708,7 @@
                 <a:ea typeface="Calibri" pitchFamily="34" charset="-122"/>
                 <a:cs typeface="Calibri" pitchFamily="34" charset="-120"/>
               </a:rPr>
-              <a:t>proclaim</a:t>
+              <a:t>disclaimer</a:t>
             </a:r>
             <a:pPr algn="l" indent="0" marL="0">
               <a:buNone/>
@@ -17527,7 +17722,7 @@
                 <a:ea typeface="Calibri" pitchFamily="34" charset="-122"/>
                 <a:cs typeface="Calibri" pitchFamily="34" charset="-120"/>
               </a:rPr>
-              <a:t> the new law, but the citizens wanted to </a:t>
+              <a:t> saying results may vary. The mayor </a:t>
             </a:r>
             <a:pPr algn="l" indent="0" marL="0">
               <a:buNone/>
@@ -17544,7 +17739,7 @@
                 <a:ea typeface="Calibri" pitchFamily="34" charset="-122"/>
                 <a:cs typeface="Calibri" pitchFamily="34" charset="-120"/>
               </a:rPr>
-              <a:t>reclaim</a:t>
+              <a:t>proclaimed</a:t>
             </a:r>
             <a:pPr algn="l" indent="0" marL="0">
               <a:buNone/>
@@ -17558,7 +17753,7 @@
                 <a:ea typeface="Calibri" pitchFamily="34" charset="-122"/>
                 <a:cs typeface="Calibri" pitchFamily="34" charset="-120"/>
               </a:rPr>
-              <a:t> their rights, and some would </a:t>
+              <a:t> a public holiday for the town's anniversary. The website listed several </a:t>
             </a:r>
             <a:pPr algn="l" indent="0" marL="0">
               <a:buNone/>
@@ -17575,7 +17770,7 @@
                 <a:ea typeface="Calibri" pitchFamily="34" charset="-122"/>
                 <a:cs typeface="Calibri" pitchFamily="34" charset="-120"/>
               </a:rPr>
-              <a:t>disclaim</a:t>
+              <a:t>disclaimers</a:t>
             </a:r>
             <a:pPr algn="l" indent="0" marL="0">
               <a:buNone/>
@@ -17589,7 +17784,7 @@
                 <a:ea typeface="Calibri" pitchFamily="34" charset="-122"/>
                 <a:cs typeface="Calibri" pitchFamily="34" charset="-120"/>
               </a:rPr>
-              <a:t> any part in the vote.</a:t>
+              <a:t> about the health advice.</a:t>
             </a:r>
             <a:endParaRPr lang="en-US" sz="1800" dirty="0"/>
           </a:p>
@@ -17744,7 +17939,7 @@
                 <a:ea typeface="Trebuchet MS" pitchFamily="34" charset="-122"/>
                 <a:cs typeface="Trebuchet MS" pitchFamily="34" charset="-120"/>
               </a:rPr>
-              <a:t>proclaim</a:t>
+              <a:t>disclaimer</a:t>
             </a:r>
             <a:endParaRPr lang="en-US" sz="1400" dirty="0"/>
           </a:p>
@@ -17872,7 +18067,7 @@
                 <a:ea typeface="Trebuchet MS" pitchFamily="34" charset="-122"/>
                 <a:cs typeface="Trebuchet MS" pitchFamily="34" charset="-120"/>
               </a:rPr>
-              <a:t>reclaim</a:t>
+              <a:t>proclaimed</a:t>
             </a:r>
             <a:endParaRPr lang="en-US" sz="1400" dirty="0"/>
           </a:p>
@@ -18000,7 +18195,7 @@
                 <a:ea typeface="Trebuchet MS" pitchFamily="34" charset="-122"/>
                 <a:cs typeface="Trebuchet MS" pitchFamily="34" charset="-120"/>
               </a:rPr>
-              <a:t>disclaim</a:t>
+              <a:t>disclaimers</a:t>
             </a:r>
             <a:endParaRPr lang="en-US" sz="1400" dirty="0"/>
           </a:p>
@@ -18331,7 +18526,7 @@
                 <a:ea typeface="Calibri" pitchFamily="34" charset="-122"/>
                 <a:cs typeface="Calibri" pitchFamily="34" charset="-120"/>
               </a:rPr>
-              <a:t>Word Labs  •  wordlabs.app  •  Root: 'claim' = to call out or declare</a:t>
+              <a:t>Word Labs  •  wordlabs.app  •  Root: 'claim' = call out; cry</a:t>
             </a:r>
             <a:endParaRPr lang="en-US" sz="800" dirty="0"/>
           </a:p>
@@ -18470,7 +18665,7 @@
                 <a:ea typeface="Trebuchet MS" pitchFamily="34" charset="-122"/>
                 <a:cs typeface="Trebuchet MS" pitchFamily="34" charset="-120"/>
               </a:rPr>
-              <a:t>proclaim</a:t>
+              <a:t>disclaimer</a:t>
             </a:r>
             <a:endParaRPr lang="en-US" sz="2800" dirty="0"/>
           </a:p>
@@ -19158,7 +19353,7 @@
                 <a:ea typeface="Calibri" pitchFamily="34" charset="-122"/>
                 <a:cs typeface="Calibri" pitchFamily="34" charset="-120"/>
               </a:rPr>
-              <a:t>Word Labs  •  wordlabs.app  •  Root: 'claim' = to call out or declare</a:t>
+              <a:t>Word Labs  •  wordlabs.app  •  Root: 'claim' = call out; cry</a:t>
             </a:r>
             <a:endParaRPr lang="en-US" sz="800" dirty="0"/>
           </a:p>
@@ -19297,7 +19492,7 @@
                 <a:ea typeface="Trebuchet MS" pitchFamily="34" charset="-122"/>
                 <a:cs typeface="Trebuchet MS" pitchFamily="34" charset="-120"/>
               </a:rPr>
-              <a:t>proclaim</a:t>
+              <a:t>disclaimer</a:t>
             </a:r>
             <a:endParaRPr lang="en-US" sz="2800" dirty="0"/>
           </a:p>
@@ -19377,7 +19572,7 @@
         </p:nvSpPr>
         <p:spPr>
           <a:xfrm>
-            <a:off x="2938272" y="2258568"/>
+            <a:off x="2221992" y="2258568"/>
             <a:ext cx="1828800" cy="292608"/>
           </a:xfrm>
           <a:prstGeom prst="rect">
@@ -19411,7 +19606,7 @@
         </p:nvSpPr>
         <p:spPr>
           <a:xfrm>
-            <a:off x="2938272" y="2258568"/>
+            <a:off x="2221992" y="2258568"/>
             <a:ext cx="1828800" cy="292608"/>
           </a:xfrm>
           <a:prstGeom prst="rect">
@@ -19436,7 +19631,7 @@
                 <a:ea typeface="Trebuchet MS" pitchFamily="34" charset="-122"/>
                 <a:cs typeface="Trebuchet MS" pitchFamily="34" charset="-120"/>
               </a:rPr>
-              <a:t>pro</a:t>
+              <a:t>dis</a:t>
             </a:r>
             <a:endParaRPr lang="en-US" sz="1300" dirty="0"/>
           </a:p>
@@ -19450,7 +19645,7 @@
         </p:nvSpPr>
         <p:spPr>
           <a:xfrm>
-            <a:off x="2938272" y="2569464"/>
+            <a:off x="2221992" y="2569464"/>
             <a:ext cx="1828800" cy="201168"/>
           </a:xfrm>
           <a:prstGeom prst="rect">
@@ -19475,7 +19670,7 @@
                 <a:ea typeface="Calibri" pitchFamily="34" charset="-122"/>
                 <a:cs typeface="Calibri" pitchFamily="34" charset="-120"/>
               </a:rPr>
-              <a:t>forward, publicly</a:t>
+              <a:t>not; opposite; apart</a:t>
             </a:r>
             <a:endParaRPr lang="en-US" sz="850" dirty="0"/>
           </a:p>
@@ -19489,7 +19684,7 @@
         </p:nvSpPr>
         <p:spPr>
           <a:xfrm>
-            <a:off x="5803392" y="2258568"/>
+            <a:off x="4370832" y="2258568"/>
             <a:ext cx="1828800" cy="292608"/>
           </a:xfrm>
           <a:prstGeom prst="rect">
@@ -19523,7 +19718,7 @@
         </p:nvSpPr>
         <p:spPr>
           <a:xfrm>
-            <a:off x="5803392" y="2258568"/>
+            <a:off x="4370832" y="2258568"/>
             <a:ext cx="1828800" cy="292608"/>
           </a:xfrm>
           <a:prstGeom prst="rect">
@@ -19562,7 +19757,7 @@
         </p:nvSpPr>
         <p:spPr>
           <a:xfrm>
-            <a:off x="5803392" y="2569464"/>
+            <a:off x="4370832" y="2569464"/>
             <a:ext cx="1828800" cy="201168"/>
           </a:xfrm>
           <a:prstGeom prst="rect">
@@ -19587,7 +19782,7 @@
                 <a:ea typeface="Calibri" pitchFamily="34" charset="-122"/>
                 <a:cs typeface="Calibri" pitchFamily="34" charset="-120"/>
               </a:rPr>
-              <a:t>to call out or declare</a:t>
+              <a:t>call out; cry</a:t>
             </a:r>
             <a:endParaRPr lang="en-US" sz="850" dirty="0"/>
           </a:p>
@@ -19596,6 +19791,118 @@
       <p:sp>
         <p:nvSpPr>
           <p:cNvPr id="22" name="Shape 20"/>
+          <p:cNvSpPr/>
+          <p:nvPr/>
+        </p:nvSpPr>
+        <p:spPr>
+          <a:xfrm>
+            <a:off x="6519672" y="2258568"/>
+            <a:ext cx="1828800" cy="292608"/>
+          </a:xfrm>
+          <a:prstGeom prst="rect">
+            <a:avLst>
+              <a:gd name="adj" fmla="val 25000"/>
+            </a:avLst>
+          </a:prstGeom>
+          <a:solidFill>
+            <a:srgbClr val="FCE7F3"/>
+          </a:solidFill>
+          <a:ln w="19050">
+            <a:solidFill>
+              <a:srgbClr val="DB2777"/>
+            </a:solidFill>
+            <a:prstDash val="solid"/>
+          </a:ln>
+          <a:effectLst>
+            <a:outerShdw sx="100000" sy="100000" kx="0" ky="0" algn="bl" rotWithShape="0" blurRad="101600" dist="38100" dir="8100000">
+              <a:srgbClr val="000000">
+                <a:alpha val="12000"/>
+              </a:srgbClr>
+            </a:outerShdw>
+          </a:effectLst>
+        </p:spPr>
+      </p:sp>
+      <p:sp>
+        <p:nvSpPr>
+          <p:cNvPr id="23" name="Text 21"/>
+          <p:cNvSpPr/>
+          <p:nvPr/>
+        </p:nvSpPr>
+        <p:spPr>
+          <a:xfrm>
+            <a:off x="6519672" y="2258568"/>
+            <a:ext cx="1828800" cy="292608"/>
+          </a:xfrm>
+          <a:prstGeom prst="rect">
+            <a:avLst/>
+          </a:prstGeom>
+          <a:noFill/>
+          <a:ln/>
+        </p:spPr>
+        <p:txBody>
+          <a:bodyPr wrap="square" lIns="0" tIns="0" rIns="0" bIns="0" rtlCol="0" anchor="ctr"/>
+          <a:lstStyle/>
+          <a:p>
+            <a:pPr algn="ctr" indent="0" marL="0">
+              <a:buNone/>
+            </a:pPr>
+            <a:r>
+              <a:rPr lang="en-US" sz="1300" b="1" dirty="0">
+                <a:solidFill>
+                  <a:srgbClr val="9D174D"/>
+                </a:solidFill>
+                <a:latin typeface="Trebuchet MS" pitchFamily="34" charset="0"/>
+                <a:ea typeface="Trebuchet MS" pitchFamily="34" charset="-122"/>
+                <a:cs typeface="Trebuchet MS" pitchFamily="34" charset="-120"/>
+              </a:rPr>
+              <a:t>er</a:t>
+            </a:r>
+            <a:endParaRPr lang="en-US" sz="1300" dirty="0"/>
+          </a:p>
+        </p:txBody>
+      </p:sp>
+      <p:sp>
+        <p:nvSpPr>
+          <p:cNvPr id="24" name="Text 22"/>
+          <p:cNvSpPr/>
+          <p:nvPr/>
+        </p:nvSpPr>
+        <p:spPr>
+          <a:xfrm>
+            <a:off x="6519672" y="2569464"/>
+            <a:ext cx="1828800" cy="201168"/>
+          </a:xfrm>
+          <a:prstGeom prst="rect">
+            <a:avLst/>
+          </a:prstGeom>
+          <a:noFill/>
+          <a:ln/>
+        </p:spPr>
+        <p:txBody>
+          <a:bodyPr wrap="square" lIns="0" tIns="0" rIns="0" bIns="0" rtlCol="0" anchor="t"/>
+          <a:lstStyle/>
+          <a:p>
+            <a:pPr algn="ctr" indent="0" marL="0">
+              <a:buNone/>
+            </a:pPr>
+            <a:r>
+              <a:rPr lang="en-US" sz="850" dirty="0">
+                <a:solidFill>
+                  <a:srgbClr val="475569"/>
+                </a:solidFill>
+                <a:latin typeface="Calibri" pitchFamily="34" charset="0"/>
+                <a:ea typeface="Calibri" pitchFamily="34" charset="-122"/>
+                <a:cs typeface="Calibri" pitchFamily="34" charset="-120"/>
+              </a:rPr>
+              <a:t>person who; more</a:t>
+            </a:r>
+            <a:endParaRPr lang="en-US" sz="850" dirty="0"/>
+          </a:p>
+        </p:txBody>
+      </p:sp>
+      <p:sp>
+        <p:nvSpPr>
+          <p:cNvPr id="25" name="Shape 23"/>
           <p:cNvSpPr/>
           <p:nvPr/>
         </p:nvSpPr>
@@ -19622,7 +19929,7 @@
       </p:sp>
       <p:sp>
         <p:nvSpPr>
-          <p:cNvPr id="23" name="Text 21"/>
+          <p:cNvPr id="26" name="Text 24"/>
           <p:cNvSpPr/>
           <p:nvPr/>
         </p:nvSpPr>
@@ -19661,7 +19968,7 @@
       </p:sp>
       <p:sp>
         <p:nvSpPr>
-          <p:cNvPr id="24" name="Shape 22"/>
+          <p:cNvPr id="27" name="Shape 25"/>
           <p:cNvSpPr/>
           <p:nvPr/>
         </p:nvSpPr>
@@ -19688,7 +19995,7 @@
       </p:sp>
       <p:sp>
         <p:nvSpPr>
-          <p:cNvPr id="25" name="Text 23"/>
+          <p:cNvPr id="28" name="Text 26"/>
           <p:cNvSpPr/>
           <p:nvPr/>
         </p:nvSpPr>
@@ -19727,7 +20034,7 @@
       </p:sp>
       <p:sp>
         <p:nvSpPr>
-          <p:cNvPr id="26" name="Shape 24"/>
+          <p:cNvPr id="29" name="Shape 27"/>
           <p:cNvSpPr/>
           <p:nvPr/>
         </p:nvSpPr>
@@ -19754,7 +20061,7 @@
       </p:sp>
       <p:sp>
         <p:nvSpPr>
-          <p:cNvPr id="27" name="Text 25"/>
+          <p:cNvPr id="30" name="Text 28"/>
           <p:cNvSpPr/>
           <p:nvPr/>
         </p:nvSpPr>
@@ -19793,7 +20100,7 @@
       </p:sp>
       <p:sp>
         <p:nvSpPr>
-          <p:cNvPr id="28" name="Shape 26"/>
+          <p:cNvPr id="31" name="Shape 29"/>
           <p:cNvSpPr/>
           <p:nvPr/>
         </p:nvSpPr>
@@ -19820,7 +20127,7 @@
       </p:sp>
       <p:sp>
         <p:nvSpPr>
-          <p:cNvPr id="29" name="Text 27"/>
+          <p:cNvPr id="32" name="Text 30"/>
           <p:cNvSpPr/>
           <p:nvPr/>
         </p:nvSpPr>
@@ -20143,7 +20450,7 @@
                 <a:ea typeface="Calibri" pitchFamily="34" charset="-122"/>
                 <a:cs typeface="Calibri" pitchFamily="34" charset="-120"/>
               </a:rPr>
-              <a:t>Word Labs  •  wordlabs.app  •  Root: 'claim' = to call out or declare</a:t>
+              <a:t>Word Labs  •  wordlabs.app  •  Root: 'claim' = call out; cry</a:t>
             </a:r>
             <a:endParaRPr lang="en-US" sz="800" dirty="0"/>
           </a:p>
@@ -20282,7 +20589,7 @@
                 <a:ea typeface="Trebuchet MS" pitchFamily="34" charset="-122"/>
                 <a:cs typeface="Trebuchet MS" pitchFamily="34" charset="-120"/>
               </a:rPr>
-              <a:t>proclaim</a:t>
+              <a:t>disclaimer</a:t>
             </a:r>
             <a:endParaRPr lang="en-US" sz="2800" dirty="0"/>
           </a:p>
@@ -20362,7 +20669,7 @@
         </p:nvSpPr>
         <p:spPr>
           <a:xfrm>
-            <a:off x="2938272" y="2258568"/>
+            <a:off x="2221992" y="2258568"/>
             <a:ext cx="1828800" cy="292608"/>
           </a:xfrm>
           <a:prstGeom prst="rect">
@@ -20396,7 +20703,7 @@
         </p:nvSpPr>
         <p:spPr>
           <a:xfrm>
-            <a:off x="2938272" y="2258568"/>
+            <a:off x="2221992" y="2258568"/>
             <a:ext cx="1828800" cy="292608"/>
           </a:xfrm>
           <a:prstGeom prst="rect">
@@ -20421,7 +20728,7 @@
                 <a:ea typeface="Trebuchet MS" pitchFamily="34" charset="-122"/>
                 <a:cs typeface="Trebuchet MS" pitchFamily="34" charset="-120"/>
               </a:rPr>
-              <a:t>pro</a:t>
+              <a:t>dis</a:t>
             </a:r>
             <a:endParaRPr lang="en-US" sz="1300" dirty="0"/>
           </a:p>
@@ -20435,7 +20742,7 @@
         </p:nvSpPr>
         <p:spPr>
           <a:xfrm>
-            <a:off x="2938272" y="2569464"/>
+            <a:off x="2221992" y="2569464"/>
             <a:ext cx="1828800" cy="201168"/>
           </a:xfrm>
           <a:prstGeom prst="rect">
@@ -20460,7 +20767,7 @@
                 <a:ea typeface="Calibri" pitchFamily="34" charset="-122"/>
                 <a:cs typeface="Calibri" pitchFamily="34" charset="-120"/>
               </a:rPr>
-              <a:t>forward, publicly</a:t>
+              <a:t>not; opposite; apart</a:t>
             </a:r>
             <a:endParaRPr lang="en-US" sz="850" dirty="0"/>
           </a:p>
@@ -20474,7 +20781,7 @@
         </p:nvSpPr>
         <p:spPr>
           <a:xfrm>
-            <a:off x="5803392" y="2258568"/>
+            <a:off x="4370832" y="2258568"/>
             <a:ext cx="1828800" cy="292608"/>
           </a:xfrm>
           <a:prstGeom prst="rect">
@@ -20508,7 +20815,7 @@
         </p:nvSpPr>
         <p:spPr>
           <a:xfrm>
-            <a:off x="5803392" y="2258568"/>
+            <a:off x="4370832" y="2258568"/>
             <a:ext cx="1828800" cy="292608"/>
           </a:xfrm>
           <a:prstGeom prst="rect">
@@ -20547,7 +20854,7 @@
         </p:nvSpPr>
         <p:spPr>
           <a:xfrm>
-            <a:off x="5803392" y="2569464"/>
+            <a:off x="4370832" y="2569464"/>
             <a:ext cx="1828800" cy="201168"/>
           </a:xfrm>
           <a:prstGeom prst="rect">
@@ -20572,7 +20879,7 @@
                 <a:ea typeface="Calibri" pitchFamily="34" charset="-122"/>
                 <a:cs typeface="Calibri" pitchFamily="34" charset="-120"/>
               </a:rPr>
-              <a:t>to call out or declare</a:t>
+              <a:t>call out; cry</a:t>
             </a:r>
             <a:endParaRPr lang="en-US" sz="850" dirty="0"/>
           </a:p>
@@ -20581,6 +20888,118 @@
       <p:sp>
         <p:nvSpPr>
           <p:cNvPr id="22" name="Shape 20"/>
+          <p:cNvSpPr/>
+          <p:nvPr/>
+        </p:nvSpPr>
+        <p:spPr>
+          <a:xfrm>
+            <a:off x="6519672" y="2258568"/>
+            <a:ext cx="1828800" cy="292608"/>
+          </a:xfrm>
+          <a:prstGeom prst="rect">
+            <a:avLst>
+              <a:gd name="adj" fmla="val 25000"/>
+            </a:avLst>
+          </a:prstGeom>
+          <a:solidFill>
+            <a:srgbClr val="FCE7F3"/>
+          </a:solidFill>
+          <a:ln w="19050">
+            <a:solidFill>
+              <a:srgbClr val="DB2777"/>
+            </a:solidFill>
+            <a:prstDash val="solid"/>
+          </a:ln>
+          <a:effectLst>
+            <a:outerShdw sx="100000" sy="100000" kx="0" ky="0" algn="bl" rotWithShape="0" blurRad="101600" dist="38100" dir="8100000">
+              <a:srgbClr val="000000">
+                <a:alpha val="12000"/>
+              </a:srgbClr>
+            </a:outerShdw>
+          </a:effectLst>
+        </p:spPr>
+      </p:sp>
+      <p:sp>
+        <p:nvSpPr>
+          <p:cNvPr id="23" name="Text 21"/>
+          <p:cNvSpPr/>
+          <p:nvPr/>
+        </p:nvSpPr>
+        <p:spPr>
+          <a:xfrm>
+            <a:off x="6519672" y="2258568"/>
+            <a:ext cx="1828800" cy="292608"/>
+          </a:xfrm>
+          <a:prstGeom prst="rect">
+            <a:avLst/>
+          </a:prstGeom>
+          <a:noFill/>
+          <a:ln/>
+        </p:spPr>
+        <p:txBody>
+          <a:bodyPr wrap="square" lIns="0" tIns="0" rIns="0" bIns="0" rtlCol="0" anchor="ctr"/>
+          <a:lstStyle/>
+          <a:p>
+            <a:pPr algn="ctr" indent="0" marL="0">
+              <a:buNone/>
+            </a:pPr>
+            <a:r>
+              <a:rPr lang="en-US" sz="1300" b="1" dirty="0">
+                <a:solidFill>
+                  <a:srgbClr val="9D174D"/>
+                </a:solidFill>
+                <a:latin typeface="Trebuchet MS" pitchFamily="34" charset="0"/>
+                <a:ea typeface="Trebuchet MS" pitchFamily="34" charset="-122"/>
+                <a:cs typeface="Trebuchet MS" pitchFamily="34" charset="-120"/>
+              </a:rPr>
+              <a:t>er</a:t>
+            </a:r>
+            <a:endParaRPr lang="en-US" sz="1300" dirty="0"/>
+          </a:p>
+        </p:txBody>
+      </p:sp>
+      <p:sp>
+        <p:nvSpPr>
+          <p:cNvPr id="24" name="Text 22"/>
+          <p:cNvSpPr/>
+          <p:nvPr/>
+        </p:nvSpPr>
+        <p:spPr>
+          <a:xfrm>
+            <a:off x="6519672" y="2569464"/>
+            <a:ext cx="1828800" cy="201168"/>
+          </a:xfrm>
+          <a:prstGeom prst="rect">
+            <a:avLst/>
+          </a:prstGeom>
+          <a:noFill/>
+          <a:ln/>
+        </p:spPr>
+        <p:txBody>
+          <a:bodyPr wrap="square" lIns="0" tIns="0" rIns="0" bIns="0" rtlCol="0" anchor="t"/>
+          <a:lstStyle/>
+          <a:p>
+            <a:pPr algn="ctr" indent="0" marL="0">
+              <a:buNone/>
+            </a:pPr>
+            <a:r>
+              <a:rPr lang="en-US" sz="850" dirty="0">
+                <a:solidFill>
+                  <a:srgbClr val="475569"/>
+                </a:solidFill>
+                <a:latin typeface="Calibri" pitchFamily="34" charset="0"/>
+                <a:ea typeface="Calibri" pitchFamily="34" charset="-122"/>
+                <a:cs typeface="Calibri" pitchFamily="34" charset="-120"/>
+              </a:rPr>
+              <a:t>person who; more</a:t>
+            </a:r>
+            <a:endParaRPr lang="en-US" sz="850" dirty="0"/>
+          </a:p>
+        </p:txBody>
+      </p:sp>
+      <p:sp>
+        <p:nvSpPr>
+          <p:cNvPr id="25" name="Shape 23"/>
           <p:cNvSpPr/>
           <p:nvPr/>
         </p:nvSpPr>
@@ -20607,7 +21026,7 @@
       </p:sp>
       <p:sp>
         <p:nvSpPr>
-          <p:cNvPr id="23" name="Text 21"/>
+          <p:cNvPr id="26" name="Text 24"/>
           <p:cNvSpPr/>
           <p:nvPr/>
         </p:nvSpPr>
@@ -20646,7 +21065,7 @@
       </p:sp>
       <p:sp>
         <p:nvSpPr>
-          <p:cNvPr id="24" name="Shape 22"/>
+          <p:cNvPr id="27" name="Shape 25"/>
           <p:cNvSpPr/>
           <p:nvPr/>
         </p:nvSpPr>
@@ -20673,13 +21092,13 @@
       </p:sp>
       <p:sp>
         <p:nvSpPr>
-          <p:cNvPr id="25" name="Shape 23"/>
-          <p:cNvSpPr/>
-          <p:nvPr/>
-        </p:nvSpPr>
-        <p:spPr>
-          <a:xfrm>
-            <a:off x="2999232" y="3364992"/>
+          <p:cNvPr id="28" name="Shape 26"/>
+          <p:cNvSpPr/>
+          <p:nvPr/>
+        </p:nvSpPr>
+        <p:spPr>
+          <a:xfrm>
+            <a:off x="2313432" y="3364992"/>
             <a:ext cx="1645920" cy="475488"/>
           </a:xfrm>
           <a:prstGeom prst="rect">
@@ -20700,13 +21119,13 @@
       </p:sp>
       <p:sp>
         <p:nvSpPr>
-          <p:cNvPr id="26" name="Text 24"/>
-          <p:cNvSpPr/>
-          <p:nvPr/>
-        </p:nvSpPr>
-        <p:spPr>
-          <a:xfrm>
-            <a:off x="2999232" y="3364992"/>
+          <p:cNvPr id="29" name="Text 27"/>
+          <p:cNvSpPr/>
+          <p:nvPr/>
+        </p:nvSpPr>
+        <p:spPr>
+          <a:xfrm>
+            <a:off x="2313432" y="3364992"/>
             <a:ext cx="1645920" cy="475488"/>
           </a:xfrm>
           <a:prstGeom prst="rect">
@@ -20731,7 +21150,7 @@
                 <a:ea typeface="Trebuchet MS" pitchFamily="34" charset="-122"/>
                 <a:cs typeface="Trebuchet MS" pitchFamily="34" charset="-120"/>
               </a:rPr>
-              <a:t>pro</a:t>
+              <a:t>dis</a:t>
             </a:r>
             <a:endParaRPr lang="en-US" sz="1400" dirty="0"/>
           </a:p>
@@ -20739,14 +21158,14 @@
       </p:sp>
       <p:sp>
         <p:nvSpPr>
-          <p:cNvPr id="27" name="Text 25"/>
-          <p:cNvSpPr/>
-          <p:nvPr/>
-        </p:nvSpPr>
-        <p:spPr>
-          <a:xfrm>
-            <a:off x="4645152" y="3364992"/>
-            <a:ext cx="1097280" cy="475488"/>
+          <p:cNvPr id="30" name="Text 28"/>
+          <p:cNvSpPr/>
+          <p:nvPr/>
+        </p:nvSpPr>
+        <p:spPr>
+          <a:xfrm>
+            <a:off x="3959352" y="3364992"/>
+            <a:ext cx="411480" cy="475488"/>
           </a:xfrm>
           <a:prstGeom prst="rect">
             <a:avLst/>
@@ -20778,13 +21197,13 @@
       </p:sp>
       <p:sp>
         <p:nvSpPr>
-          <p:cNvPr id="28" name="Shape 26"/>
-          <p:cNvSpPr/>
-          <p:nvPr/>
-        </p:nvSpPr>
-        <p:spPr>
-          <a:xfrm>
-            <a:off x="5742432" y="3364992"/>
+          <p:cNvPr id="31" name="Shape 29"/>
+          <p:cNvSpPr/>
+          <p:nvPr/>
+        </p:nvSpPr>
+        <p:spPr>
+          <a:xfrm>
+            <a:off x="4370832" y="3364992"/>
             <a:ext cx="1645920" cy="475488"/>
           </a:xfrm>
           <a:prstGeom prst="rect">
@@ -20805,13 +21224,13 @@
       </p:sp>
       <p:sp>
         <p:nvSpPr>
-          <p:cNvPr id="29" name="Text 27"/>
-          <p:cNvSpPr/>
-          <p:nvPr/>
-        </p:nvSpPr>
-        <p:spPr>
-          <a:xfrm>
-            <a:off x="5742432" y="3364992"/>
+          <p:cNvPr id="32" name="Text 30"/>
+          <p:cNvSpPr/>
+          <p:nvPr/>
+        </p:nvSpPr>
+        <p:spPr>
+          <a:xfrm>
+            <a:off x="4370832" y="3364992"/>
             <a:ext cx="1645920" cy="475488"/>
           </a:xfrm>
           <a:prstGeom prst="rect">
@@ -20844,7 +21263,112 @@
       </p:sp>
       <p:sp>
         <p:nvSpPr>
-          <p:cNvPr id="30" name="Shape 28"/>
+          <p:cNvPr id="33" name="Text 31"/>
+          <p:cNvSpPr/>
+          <p:nvPr/>
+        </p:nvSpPr>
+        <p:spPr>
+          <a:xfrm>
+            <a:off x="6016752" y="3364992"/>
+            <a:ext cx="411480" cy="475488"/>
+          </a:xfrm>
+          <a:prstGeom prst="rect">
+            <a:avLst/>
+          </a:prstGeom>
+          <a:noFill/>
+          <a:ln/>
+        </p:spPr>
+        <p:txBody>
+          <a:bodyPr wrap="square" lIns="0" tIns="0" rIns="0" bIns="0" rtlCol="0" anchor="ctr"/>
+          <a:lstStyle/>
+          <a:p>
+            <a:pPr algn="ctr" indent="0" marL="0">
+              <a:buNone/>
+            </a:pPr>
+            <a:r>
+              <a:rPr lang="en-US" sz="1600" b="1" dirty="0">
+                <a:solidFill>
+                  <a:srgbClr val="0D9488"/>
+                </a:solidFill>
+                <a:latin typeface="Trebuchet MS" pitchFamily="34" charset="0"/>
+                <a:ea typeface="Trebuchet MS" pitchFamily="34" charset="-122"/>
+                <a:cs typeface="Trebuchet MS" pitchFamily="34" charset="-120"/>
+              </a:rPr>
+              <a:t>·</a:t>
+            </a:r>
+            <a:endParaRPr lang="en-US" sz="1600" dirty="0"/>
+          </a:p>
+        </p:txBody>
+      </p:sp>
+      <p:sp>
+        <p:nvSpPr>
+          <p:cNvPr id="34" name="Shape 32"/>
+          <p:cNvSpPr/>
+          <p:nvPr/>
+        </p:nvSpPr>
+        <p:spPr>
+          <a:xfrm>
+            <a:off x="6428232" y="3364992"/>
+            <a:ext cx="1645920" cy="475488"/>
+          </a:xfrm>
+          <a:prstGeom prst="rect">
+            <a:avLst>
+              <a:gd name="adj" fmla="val 9615"/>
+            </a:avLst>
+          </a:prstGeom>
+          <a:solidFill>
+            <a:srgbClr val="FFFFFF"/>
+          </a:solidFill>
+          <a:ln w="12700">
+            <a:solidFill>
+              <a:srgbClr val="0D9488"/>
+            </a:solidFill>
+            <a:prstDash val="solid"/>
+          </a:ln>
+        </p:spPr>
+      </p:sp>
+      <p:sp>
+        <p:nvSpPr>
+          <p:cNvPr id="35" name="Text 33"/>
+          <p:cNvSpPr/>
+          <p:nvPr/>
+        </p:nvSpPr>
+        <p:spPr>
+          <a:xfrm>
+            <a:off x="6428232" y="3364992"/>
+            <a:ext cx="1645920" cy="475488"/>
+          </a:xfrm>
+          <a:prstGeom prst="rect">
+            <a:avLst/>
+          </a:prstGeom>
+          <a:noFill/>
+          <a:ln/>
+        </p:spPr>
+        <p:txBody>
+          <a:bodyPr wrap="square" lIns="0" tIns="0" rIns="0" bIns="0" rtlCol="0" anchor="ctr"/>
+          <a:lstStyle/>
+          <a:p>
+            <a:pPr algn="ctr" indent="0" marL="0">
+              <a:buNone/>
+            </a:pPr>
+            <a:r>
+              <a:rPr lang="en-US" sz="1400" b="1" dirty="0">
+                <a:solidFill>
+                  <a:srgbClr val="0D9488"/>
+                </a:solidFill>
+                <a:latin typeface="Trebuchet MS" pitchFamily="34" charset="0"/>
+                <a:ea typeface="Trebuchet MS" pitchFamily="34" charset="-122"/>
+                <a:cs typeface="Trebuchet MS" pitchFamily="34" charset="-120"/>
+              </a:rPr>
+              <a:t>er</a:t>
+            </a:r>
+            <a:endParaRPr lang="en-US" sz="1400" dirty="0"/>
+          </a:p>
+        </p:txBody>
+      </p:sp>
+      <p:sp>
+        <p:nvSpPr>
+          <p:cNvPr id="36" name="Shape 34"/>
           <p:cNvSpPr/>
           <p:nvPr/>
         </p:nvSpPr>
@@ -20871,7 +21395,7 @@
       </p:sp>
       <p:sp>
         <p:nvSpPr>
-          <p:cNvPr id="31" name="Text 29"/>
+          <p:cNvPr id="37" name="Text 35"/>
           <p:cNvSpPr/>
           <p:nvPr/>
         </p:nvSpPr>
@@ -20910,7 +21434,7 @@
       </p:sp>
       <p:sp>
         <p:nvSpPr>
-          <p:cNvPr id="32" name="Shape 30"/>
+          <p:cNvPr id="38" name="Shape 36"/>
           <p:cNvSpPr/>
           <p:nvPr/>
         </p:nvSpPr>
@@ -20937,7 +21461,7 @@
       </p:sp>
       <p:sp>
         <p:nvSpPr>
-          <p:cNvPr id="33" name="Text 31"/>
+          <p:cNvPr id="39" name="Text 37"/>
           <p:cNvSpPr/>
           <p:nvPr/>
         </p:nvSpPr>
@@ -21260,7 +21784,7 @@
                 <a:ea typeface="Calibri" pitchFamily="34" charset="-122"/>
                 <a:cs typeface="Calibri" pitchFamily="34" charset="-120"/>
               </a:rPr>
-              <a:t>Word Labs  •  wordlabs.app  •  Root: 'claim' = to call out or declare</a:t>
+              <a:t>Word Labs  •  wordlabs.app  •  Root: 'claim' = call out; cry</a:t>
             </a:r>
             <a:endParaRPr lang="en-US" sz="800" dirty="0"/>
           </a:p>
@@ -21399,7 +21923,7 @@
                 <a:ea typeface="Trebuchet MS" pitchFamily="34" charset="-122"/>
                 <a:cs typeface="Trebuchet MS" pitchFamily="34" charset="-120"/>
               </a:rPr>
-              <a:t>proclaim</a:t>
+              <a:t>disclaimer</a:t>
             </a:r>
             <a:endParaRPr lang="en-US" sz="2800" dirty="0"/>
           </a:p>
@@ -21479,7 +22003,7 @@
         </p:nvSpPr>
         <p:spPr>
           <a:xfrm>
-            <a:off x="2938272" y="2258568"/>
+            <a:off x="2221992" y="2258568"/>
             <a:ext cx="1828800" cy="292608"/>
           </a:xfrm>
           <a:prstGeom prst="rect">
@@ -21513,7 +22037,7 @@
         </p:nvSpPr>
         <p:spPr>
           <a:xfrm>
-            <a:off x="2938272" y="2258568"/>
+            <a:off x="2221992" y="2258568"/>
             <a:ext cx="1828800" cy="292608"/>
           </a:xfrm>
           <a:prstGeom prst="rect">
@@ -21538,7 +22062,7 @@
                 <a:ea typeface="Trebuchet MS" pitchFamily="34" charset="-122"/>
                 <a:cs typeface="Trebuchet MS" pitchFamily="34" charset="-120"/>
               </a:rPr>
-              <a:t>pro</a:t>
+              <a:t>dis</a:t>
             </a:r>
             <a:endParaRPr lang="en-US" sz="1300" dirty="0"/>
           </a:p>
@@ -21552,7 +22076,7 @@
         </p:nvSpPr>
         <p:spPr>
           <a:xfrm>
-            <a:off x="2938272" y="2569464"/>
+            <a:off x="2221992" y="2569464"/>
             <a:ext cx="1828800" cy="201168"/>
           </a:xfrm>
           <a:prstGeom prst="rect">
@@ -21577,7 +22101,7 @@
                 <a:ea typeface="Calibri" pitchFamily="34" charset="-122"/>
                 <a:cs typeface="Calibri" pitchFamily="34" charset="-120"/>
               </a:rPr>
-              <a:t>forward, publicly</a:t>
+              <a:t>not; opposite; apart</a:t>
             </a:r>
             <a:endParaRPr lang="en-US" sz="850" dirty="0"/>
           </a:p>
@@ -21591,7 +22115,7 @@
         </p:nvSpPr>
         <p:spPr>
           <a:xfrm>
-            <a:off x="5803392" y="2258568"/>
+            <a:off x="4370832" y="2258568"/>
             <a:ext cx="1828800" cy="292608"/>
           </a:xfrm>
           <a:prstGeom prst="rect">
@@ -21625,7 +22149,7 @@
         </p:nvSpPr>
         <p:spPr>
           <a:xfrm>
-            <a:off x="5803392" y="2258568"/>
+            <a:off x="4370832" y="2258568"/>
             <a:ext cx="1828800" cy="292608"/>
           </a:xfrm>
           <a:prstGeom prst="rect">
@@ -21664,7 +22188,7 @@
         </p:nvSpPr>
         <p:spPr>
           <a:xfrm>
-            <a:off x="5803392" y="2569464"/>
+            <a:off x="4370832" y="2569464"/>
             <a:ext cx="1828800" cy="201168"/>
           </a:xfrm>
           <a:prstGeom prst="rect">
@@ -21689,7 +22213,7 @@
                 <a:ea typeface="Calibri" pitchFamily="34" charset="-122"/>
                 <a:cs typeface="Calibri" pitchFamily="34" charset="-120"/>
               </a:rPr>
-              <a:t>to call out or declare</a:t>
+              <a:t>call out; cry</a:t>
             </a:r>
             <a:endParaRPr lang="en-US" sz="850" dirty="0"/>
           </a:p>
@@ -21698,6 +22222,118 @@
       <p:sp>
         <p:nvSpPr>
           <p:cNvPr id="22" name="Shape 20"/>
+          <p:cNvSpPr/>
+          <p:nvPr/>
+        </p:nvSpPr>
+        <p:spPr>
+          <a:xfrm>
+            <a:off x="6519672" y="2258568"/>
+            <a:ext cx="1828800" cy="292608"/>
+          </a:xfrm>
+          <a:prstGeom prst="rect">
+            <a:avLst>
+              <a:gd name="adj" fmla="val 25000"/>
+            </a:avLst>
+          </a:prstGeom>
+          <a:solidFill>
+            <a:srgbClr val="FCE7F3"/>
+          </a:solidFill>
+          <a:ln w="19050">
+            <a:solidFill>
+              <a:srgbClr val="DB2777"/>
+            </a:solidFill>
+            <a:prstDash val="solid"/>
+          </a:ln>
+          <a:effectLst>
+            <a:outerShdw sx="100000" sy="100000" kx="0" ky="0" algn="bl" rotWithShape="0" blurRad="101600" dist="38100" dir="8100000">
+              <a:srgbClr val="000000">
+                <a:alpha val="12000"/>
+              </a:srgbClr>
+            </a:outerShdw>
+          </a:effectLst>
+        </p:spPr>
+      </p:sp>
+      <p:sp>
+        <p:nvSpPr>
+          <p:cNvPr id="23" name="Text 21"/>
+          <p:cNvSpPr/>
+          <p:nvPr/>
+        </p:nvSpPr>
+        <p:spPr>
+          <a:xfrm>
+            <a:off x="6519672" y="2258568"/>
+            <a:ext cx="1828800" cy="292608"/>
+          </a:xfrm>
+          <a:prstGeom prst="rect">
+            <a:avLst/>
+          </a:prstGeom>
+          <a:noFill/>
+          <a:ln/>
+        </p:spPr>
+        <p:txBody>
+          <a:bodyPr wrap="square" lIns="0" tIns="0" rIns="0" bIns="0" rtlCol="0" anchor="ctr"/>
+          <a:lstStyle/>
+          <a:p>
+            <a:pPr algn="ctr" indent="0" marL="0">
+              <a:buNone/>
+            </a:pPr>
+            <a:r>
+              <a:rPr lang="en-US" sz="1300" b="1" dirty="0">
+                <a:solidFill>
+                  <a:srgbClr val="9D174D"/>
+                </a:solidFill>
+                <a:latin typeface="Trebuchet MS" pitchFamily="34" charset="0"/>
+                <a:ea typeface="Trebuchet MS" pitchFamily="34" charset="-122"/>
+                <a:cs typeface="Trebuchet MS" pitchFamily="34" charset="-120"/>
+              </a:rPr>
+              <a:t>er</a:t>
+            </a:r>
+            <a:endParaRPr lang="en-US" sz="1300" dirty="0"/>
+          </a:p>
+        </p:txBody>
+      </p:sp>
+      <p:sp>
+        <p:nvSpPr>
+          <p:cNvPr id="24" name="Text 22"/>
+          <p:cNvSpPr/>
+          <p:nvPr/>
+        </p:nvSpPr>
+        <p:spPr>
+          <a:xfrm>
+            <a:off x="6519672" y="2569464"/>
+            <a:ext cx="1828800" cy="201168"/>
+          </a:xfrm>
+          <a:prstGeom prst="rect">
+            <a:avLst/>
+          </a:prstGeom>
+          <a:noFill/>
+          <a:ln/>
+        </p:spPr>
+        <p:txBody>
+          <a:bodyPr wrap="square" lIns="0" tIns="0" rIns="0" bIns="0" rtlCol="0" anchor="t"/>
+          <a:lstStyle/>
+          <a:p>
+            <a:pPr algn="ctr" indent="0" marL="0">
+              <a:buNone/>
+            </a:pPr>
+            <a:r>
+              <a:rPr lang="en-US" sz="850" dirty="0">
+                <a:solidFill>
+                  <a:srgbClr val="475569"/>
+                </a:solidFill>
+                <a:latin typeface="Calibri" pitchFamily="34" charset="0"/>
+                <a:ea typeface="Calibri" pitchFamily="34" charset="-122"/>
+                <a:cs typeface="Calibri" pitchFamily="34" charset="-120"/>
+              </a:rPr>
+              <a:t>person who; more</a:t>
+            </a:r>
+            <a:endParaRPr lang="en-US" sz="850" dirty="0"/>
+          </a:p>
+        </p:txBody>
+      </p:sp>
+      <p:sp>
+        <p:nvSpPr>
+          <p:cNvPr id="25" name="Shape 23"/>
           <p:cNvSpPr/>
           <p:nvPr/>
         </p:nvSpPr>
@@ -21724,7 +22360,7 @@
       </p:sp>
       <p:sp>
         <p:nvSpPr>
-          <p:cNvPr id="23" name="Text 21"/>
+          <p:cNvPr id="26" name="Text 24"/>
           <p:cNvSpPr/>
           <p:nvPr/>
         </p:nvSpPr>
@@ -21763,7 +22399,7 @@
       </p:sp>
       <p:sp>
         <p:nvSpPr>
-          <p:cNvPr id="24" name="Shape 22"/>
+          <p:cNvPr id="27" name="Shape 25"/>
           <p:cNvSpPr/>
           <p:nvPr/>
         </p:nvSpPr>
@@ -21790,13 +22426,13 @@
       </p:sp>
       <p:sp>
         <p:nvSpPr>
-          <p:cNvPr id="25" name="Shape 23"/>
-          <p:cNvSpPr/>
-          <p:nvPr/>
-        </p:nvSpPr>
-        <p:spPr>
-          <a:xfrm>
-            <a:off x="2999232" y="3364992"/>
+          <p:cNvPr id="28" name="Shape 26"/>
+          <p:cNvSpPr/>
+          <p:nvPr/>
+        </p:nvSpPr>
+        <p:spPr>
+          <a:xfrm>
+            <a:off x="2313432" y="3364992"/>
             <a:ext cx="1645920" cy="475488"/>
           </a:xfrm>
           <a:prstGeom prst="rect">
@@ -21817,13 +22453,13 @@
       </p:sp>
       <p:sp>
         <p:nvSpPr>
-          <p:cNvPr id="26" name="Text 24"/>
-          <p:cNvSpPr/>
-          <p:nvPr/>
-        </p:nvSpPr>
-        <p:spPr>
-          <a:xfrm>
-            <a:off x="2999232" y="3364992"/>
+          <p:cNvPr id="29" name="Text 27"/>
+          <p:cNvSpPr/>
+          <p:nvPr/>
+        </p:nvSpPr>
+        <p:spPr>
+          <a:xfrm>
+            <a:off x="2313432" y="3364992"/>
             <a:ext cx="1645920" cy="475488"/>
           </a:xfrm>
           <a:prstGeom prst="rect">
@@ -21848,7 +22484,7 @@
                 <a:ea typeface="Trebuchet MS" pitchFamily="34" charset="-122"/>
                 <a:cs typeface="Trebuchet MS" pitchFamily="34" charset="-120"/>
               </a:rPr>
-              <a:t>pro</a:t>
+              <a:t>dis</a:t>
             </a:r>
             <a:endParaRPr lang="en-US" sz="1400" dirty="0"/>
           </a:p>
@@ -21856,14 +22492,14 @@
       </p:sp>
       <p:sp>
         <p:nvSpPr>
-          <p:cNvPr id="27" name="Text 25"/>
-          <p:cNvSpPr/>
-          <p:nvPr/>
-        </p:nvSpPr>
-        <p:spPr>
-          <a:xfrm>
-            <a:off x="4645152" y="3364992"/>
-            <a:ext cx="1097280" cy="475488"/>
+          <p:cNvPr id="30" name="Text 28"/>
+          <p:cNvSpPr/>
+          <p:nvPr/>
+        </p:nvSpPr>
+        <p:spPr>
+          <a:xfrm>
+            <a:off x="3959352" y="3364992"/>
+            <a:ext cx="411480" cy="475488"/>
           </a:xfrm>
           <a:prstGeom prst="rect">
             <a:avLst/>
@@ -21895,13 +22531,13 @@
       </p:sp>
       <p:sp>
         <p:nvSpPr>
-          <p:cNvPr id="28" name="Shape 26"/>
-          <p:cNvSpPr/>
-          <p:nvPr/>
-        </p:nvSpPr>
-        <p:spPr>
-          <a:xfrm>
-            <a:off x="5742432" y="3364992"/>
+          <p:cNvPr id="31" name="Shape 29"/>
+          <p:cNvSpPr/>
+          <p:nvPr/>
+        </p:nvSpPr>
+        <p:spPr>
+          <a:xfrm>
+            <a:off x="4370832" y="3364992"/>
             <a:ext cx="1645920" cy="475488"/>
           </a:xfrm>
           <a:prstGeom prst="rect">
@@ -21922,13 +22558,13 @@
       </p:sp>
       <p:sp>
         <p:nvSpPr>
-          <p:cNvPr id="29" name="Text 27"/>
-          <p:cNvSpPr/>
-          <p:nvPr/>
-        </p:nvSpPr>
-        <p:spPr>
-          <a:xfrm>
-            <a:off x="5742432" y="3364992"/>
+          <p:cNvPr id="32" name="Text 30"/>
+          <p:cNvSpPr/>
+          <p:nvPr/>
+        </p:nvSpPr>
+        <p:spPr>
+          <a:xfrm>
+            <a:off x="4370832" y="3364992"/>
             <a:ext cx="1645920" cy="475488"/>
           </a:xfrm>
           <a:prstGeom prst="rect">
@@ -21961,7 +22597,112 @@
       </p:sp>
       <p:sp>
         <p:nvSpPr>
-          <p:cNvPr id="30" name="Shape 28"/>
+          <p:cNvPr id="33" name="Text 31"/>
+          <p:cNvSpPr/>
+          <p:nvPr/>
+        </p:nvSpPr>
+        <p:spPr>
+          <a:xfrm>
+            <a:off x="6016752" y="3364992"/>
+            <a:ext cx="411480" cy="475488"/>
+          </a:xfrm>
+          <a:prstGeom prst="rect">
+            <a:avLst/>
+          </a:prstGeom>
+          <a:noFill/>
+          <a:ln/>
+        </p:spPr>
+        <p:txBody>
+          <a:bodyPr wrap="square" lIns="0" tIns="0" rIns="0" bIns="0" rtlCol="0" anchor="ctr"/>
+          <a:lstStyle/>
+          <a:p>
+            <a:pPr algn="ctr" indent="0" marL="0">
+              <a:buNone/>
+            </a:pPr>
+            <a:r>
+              <a:rPr lang="en-US" sz="1600" b="1" dirty="0">
+                <a:solidFill>
+                  <a:srgbClr val="0D9488"/>
+                </a:solidFill>
+                <a:latin typeface="Trebuchet MS" pitchFamily="34" charset="0"/>
+                <a:ea typeface="Trebuchet MS" pitchFamily="34" charset="-122"/>
+                <a:cs typeface="Trebuchet MS" pitchFamily="34" charset="-120"/>
+              </a:rPr>
+              <a:t>·</a:t>
+            </a:r>
+            <a:endParaRPr lang="en-US" sz="1600" dirty="0"/>
+          </a:p>
+        </p:txBody>
+      </p:sp>
+      <p:sp>
+        <p:nvSpPr>
+          <p:cNvPr id="34" name="Shape 32"/>
+          <p:cNvSpPr/>
+          <p:nvPr/>
+        </p:nvSpPr>
+        <p:spPr>
+          <a:xfrm>
+            <a:off x="6428232" y="3364992"/>
+            <a:ext cx="1645920" cy="475488"/>
+          </a:xfrm>
+          <a:prstGeom prst="rect">
+            <a:avLst>
+              <a:gd name="adj" fmla="val 9615"/>
+            </a:avLst>
+          </a:prstGeom>
+          <a:solidFill>
+            <a:srgbClr val="FFFFFF"/>
+          </a:solidFill>
+          <a:ln w="12700">
+            <a:solidFill>
+              <a:srgbClr val="0D9488"/>
+            </a:solidFill>
+            <a:prstDash val="solid"/>
+          </a:ln>
+        </p:spPr>
+      </p:sp>
+      <p:sp>
+        <p:nvSpPr>
+          <p:cNvPr id="35" name="Text 33"/>
+          <p:cNvSpPr/>
+          <p:nvPr/>
+        </p:nvSpPr>
+        <p:spPr>
+          <a:xfrm>
+            <a:off x="6428232" y="3364992"/>
+            <a:ext cx="1645920" cy="475488"/>
+          </a:xfrm>
+          <a:prstGeom prst="rect">
+            <a:avLst/>
+          </a:prstGeom>
+          <a:noFill/>
+          <a:ln/>
+        </p:spPr>
+        <p:txBody>
+          <a:bodyPr wrap="square" lIns="0" tIns="0" rIns="0" bIns="0" rtlCol="0" anchor="ctr"/>
+          <a:lstStyle/>
+          <a:p>
+            <a:pPr algn="ctr" indent="0" marL="0">
+              <a:buNone/>
+            </a:pPr>
+            <a:r>
+              <a:rPr lang="en-US" sz="1400" b="1" dirty="0">
+                <a:solidFill>
+                  <a:srgbClr val="0D9488"/>
+                </a:solidFill>
+                <a:latin typeface="Trebuchet MS" pitchFamily="34" charset="0"/>
+                <a:ea typeface="Trebuchet MS" pitchFamily="34" charset="-122"/>
+                <a:cs typeface="Trebuchet MS" pitchFamily="34" charset="-120"/>
+              </a:rPr>
+              <a:t>er</a:t>
+            </a:r>
+            <a:endParaRPr lang="en-US" sz="1400" dirty="0"/>
+          </a:p>
+        </p:txBody>
+      </p:sp>
+      <p:sp>
+        <p:nvSpPr>
+          <p:cNvPr id="36" name="Shape 34"/>
           <p:cNvSpPr/>
           <p:nvPr/>
         </p:nvSpPr>
@@ -21988,7 +22729,7 @@
       </p:sp>
       <p:sp>
         <p:nvSpPr>
-          <p:cNvPr id="31" name="Text 29"/>
+          <p:cNvPr id="37" name="Text 35"/>
           <p:cNvSpPr/>
           <p:nvPr/>
         </p:nvSpPr>
@@ -22027,18 +22768,18 @@
       </p:sp>
       <p:sp>
         <p:nvSpPr>
-          <p:cNvPr id="32" name="Shape 30"/>
+          <p:cNvPr id="38" name="Shape 36"/>
           <p:cNvSpPr/>
           <p:nvPr/>
         </p:nvSpPr>
         <p:spPr>
           <a:xfrm>
             <a:off x="1874520" y="4096512"/>
-            <a:ext cx="6903720" cy="804672"/>
+            <a:ext cx="6903720" cy="658368"/>
           </a:xfrm>
           <a:prstGeom prst="rect">
             <a:avLst>
-              <a:gd name="adj" fmla="val 6818"/>
+              <a:gd name="adj" fmla="val 8333"/>
             </a:avLst>
           </a:prstGeom>
           <a:solidFill>
@@ -22054,18 +22795,18 @@
       </p:sp>
       <p:sp>
         <p:nvSpPr>
-          <p:cNvPr id="33" name="Shape 31"/>
-          <p:cNvSpPr/>
-          <p:nvPr/>
-        </p:nvSpPr>
-        <p:spPr>
-          <a:xfrm>
-            <a:off x="2124837" y="4169664"/>
-            <a:ext cx="685800" cy="384048"/>
+          <p:cNvPr id="39" name="Shape 37"/>
+          <p:cNvSpPr/>
+          <p:nvPr/>
+        </p:nvSpPr>
+        <p:spPr>
+          <a:xfrm>
+            <a:off x="2023872" y="4169664"/>
+            <a:ext cx="685800" cy="475488"/>
           </a:xfrm>
           <a:prstGeom prst="rect">
             <a:avLst>
-              <a:gd name="adj" fmla="val 9524"/>
+              <a:gd name="adj" fmla="val 7692"/>
             </a:avLst>
           </a:prstGeom>
           <a:solidFill>
@@ -22081,14 +22822,14 @@
       </p:sp>
       <p:sp>
         <p:nvSpPr>
-          <p:cNvPr id="34" name="Text 32"/>
-          <p:cNvSpPr/>
-          <p:nvPr/>
-        </p:nvSpPr>
-        <p:spPr>
-          <a:xfrm>
-            <a:off x="2124837" y="4169664"/>
-            <a:ext cx="685800" cy="384048"/>
+          <p:cNvPr id="40" name="Text 38"/>
+          <p:cNvSpPr/>
+          <p:nvPr/>
+        </p:nvSpPr>
+        <p:spPr>
+          <a:xfrm>
+            <a:off x="2023872" y="4169664"/>
+            <a:ext cx="685800" cy="475488"/>
           </a:xfrm>
           <a:prstGeom prst="rect">
             <a:avLst/>
@@ -22112,7 +22853,7 @@
                 <a:ea typeface="Trebuchet MS" pitchFamily="34" charset="-122"/>
                 <a:cs typeface="Trebuchet MS" pitchFamily="34" charset="-120"/>
               </a:rPr>
-              <a:t>p</a:t>
+              <a:t>d</a:t>
             </a:r>
             <a:endParaRPr lang="en-US" sz="900" dirty="0"/>
           </a:p>
@@ -22120,18 +22861,18 @@
       </p:sp>
       <p:sp>
         <p:nvSpPr>
-          <p:cNvPr id="35" name="Shape 33"/>
-          <p:cNvSpPr/>
-          <p:nvPr/>
-        </p:nvSpPr>
-        <p:spPr>
-          <a:xfrm>
-            <a:off x="3033522" y="4169664"/>
-            <a:ext cx="685800" cy="384048"/>
+          <p:cNvPr id="41" name="Shape 39"/>
+          <p:cNvSpPr/>
+          <p:nvPr/>
+        </p:nvSpPr>
+        <p:spPr>
+          <a:xfrm>
+            <a:off x="2831592" y="4169664"/>
+            <a:ext cx="685800" cy="475488"/>
           </a:xfrm>
           <a:prstGeom prst="rect">
             <a:avLst>
-              <a:gd name="adj" fmla="val 9524"/>
+              <a:gd name="adj" fmla="val 7692"/>
             </a:avLst>
           </a:prstGeom>
           <a:solidFill>
@@ -22147,14 +22888,14 @@
       </p:sp>
       <p:sp>
         <p:nvSpPr>
-          <p:cNvPr id="36" name="Text 34"/>
-          <p:cNvSpPr/>
-          <p:nvPr/>
-        </p:nvSpPr>
-        <p:spPr>
-          <a:xfrm>
-            <a:off x="3033522" y="4169664"/>
-            <a:ext cx="685800" cy="384048"/>
+          <p:cNvPr id="42" name="Text 40"/>
+          <p:cNvSpPr/>
+          <p:nvPr/>
+        </p:nvSpPr>
+        <p:spPr>
+          <a:xfrm>
+            <a:off x="2831592" y="4169664"/>
+            <a:ext cx="685800" cy="475488"/>
           </a:xfrm>
           <a:prstGeom prst="rect">
             <a:avLst/>
@@ -22178,7 +22919,7 @@
                 <a:ea typeface="Trebuchet MS" pitchFamily="34" charset="-122"/>
                 <a:cs typeface="Trebuchet MS" pitchFamily="34" charset="-120"/>
               </a:rPr>
-              <a:t>r</a:t>
+              <a:t>i</a:t>
             </a:r>
             <a:endParaRPr lang="en-US" sz="900" dirty="0"/>
           </a:p>
@@ -22186,18 +22927,18 @@
       </p:sp>
       <p:sp>
         <p:nvSpPr>
-          <p:cNvPr id="37" name="Shape 35"/>
-          <p:cNvSpPr/>
-          <p:nvPr/>
-        </p:nvSpPr>
-        <p:spPr>
-          <a:xfrm>
-            <a:off x="3942207" y="4169664"/>
-            <a:ext cx="685800" cy="384048"/>
+          <p:cNvPr id="43" name="Shape 41"/>
+          <p:cNvSpPr/>
+          <p:nvPr/>
+        </p:nvSpPr>
+        <p:spPr>
+          <a:xfrm>
+            <a:off x="3639312" y="4169664"/>
+            <a:ext cx="685800" cy="475488"/>
           </a:xfrm>
           <a:prstGeom prst="rect">
             <a:avLst>
-              <a:gd name="adj" fmla="val 9524"/>
+              <a:gd name="adj" fmla="val 7692"/>
             </a:avLst>
           </a:prstGeom>
           <a:solidFill>
@@ -22213,14 +22954,14 @@
       </p:sp>
       <p:sp>
         <p:nvSpPr>
-          <p:cNvPr id="38" name="Text 36"/>
-          <p:cNvSpPr/>
-          <p:nvPr/>
-        </p:nvSpPr>
-        <p:spPr>
-          <a:xfrm>
-            <a:off x="3942207" y="4169664"/>
-            <a:ext cx="685800" cy="384048"/>
+          <p:cNvPr id="44" name="Text 42"/>
+          <p:cNvSpPr/>
+          <p:nvPr/>
+        </p:nvSpPr>
+        <p:spPr>
+          <a:xfrm>
+            <a:off x="3639312" y="4169664"/>
+            <a:ext cx="685800" cy="475488"/>
           </a:xfrm>
           <a:prstGeom prst="rect">
             <a:avLst/>
@@ -22244,7 +22985,7 @@
                 <a:ea typeface="Trebuchet MS" pitchFamily="34" charset="-122"/>
                 <a:cs typeface="Trebuchet MS" pitchFamily="34" charset="-120"/>
               </a:rPr>
-              <a:t>o</a:t>
+              <a:t>s</a:t>
             </a:r>
             <a:endParaRPr lang="en-US" sz="900" dirty="0"/>
           </a:p>
@@ -22252,18 +22993,18 @@
       </p:sp>
       <p:sp>
         <p:nvSpPr>
-          <p:cNvPr id="39" name="Shape 37"/>
-          <p:cNvSpPr/>
-          <p:nvPr/>
-        </p:nvSpPr>
-        <p:spPr>
-          <a:xfrm>
-            <a:off x="4850892" y="4169664"/>
-            <a:ext cx="685800" cy="384048"/>
+          <p:cNvPr id="45" name="Shape 43"/>
+          <p:cNvSpPr/>
+          <p:nvPr/>
+        </p:nvSpPr>
+        <p:spPr>
+          <a:xfrm>
+            <a:off x="4447032" y="4169664"/>
+            <a:ext cx="685800" cy="475488"/>
           </a:xfrm>
           <a:prstGeom prst="rect">
             <a:avLst>
-              <a:gd name="adj" fmla="val 9524"/>
+              <a:gd name="adj" fmla="val 7692"/>
             </a:avLst>
           </a:prstGeom>
           <a:solidFill>
@@ -22279,14 +23020,14 @@
       </p:sp>
       <p:sp>
         <p:nvSpPr>
-          <p:cNvPr id="40" name="Text 38"/>
-          <p:cNvSpPr/>
-          <p:nvPr/>
-        </p:nvSpPr>
-        <p:spPr>
-          <a:xfrm>
-            <a:off x="4850892" y="4169664"/>
-            <a:ext cx="685800" cy="384048"/>
+          <p:cNvPr id="46" name="Text 44"/>
+          <p:cNvSpPr/>
+          <p:nvPr/>
+        </p:nvSpPr>
+        <p:spPr>
+          <a:xfrm>
+            <a:off x="4447032" y="4169664"/>
+            <a:ext cx="685800" cy="475488"/>
           </a:xfrm>
           <a:prstGeom prst="rect">
             <a:avLst/>
@@ -22318,57 +23059,18 @@
       </p:sp>
       <p:sp>
         <p:nvSpPr>
-          <p:cNvPr id="41" name="Text 39"/>
-          <p:cNvSpPr/>
-          <p:nvPr/>
-        </p:nvSpPr>
-        <p:spPr>
-          <a:xfrm>
-            <a:off x="4850892" y="4572000"/>
-            <a:ext cx="685800" cy="219456"/>
-          </a:xfrm>
-          <a:prstGeom prst="rect">
-            <a:avLst/>
-          </a:prstGeom>
-          <a:noFill/>
-          <a:ln/>
-        </p:spPr>
-        <p:txBody>
-          <a:bodyPr wrap="square" lIns="0" tIns="0" rIns="0" bIns="0" rtlCol="0" anchor="t"/>
-          <a:lstStyle/>
-          <a:p>
-            <a:pPr algn="ctr" indent="0" marL="0">
-              <a:buNone/>
-            </a:pPr>
-            <a:r>
-              <a:rPr lang="en-US" sz="750" i="1" dirty="0">
-                <a:solidFill>
-                  <a:srgbClr val="94A3B8"/>
-                </a:solidFill>
-                <a:latin typeface="Calibri" pitchFamily="34" charset="0"/>
-                <a:ea typeface="Calibri" pitchFamily="34" charset="-122"/>
-                <a:cs typeface="Calibri" pitchFamily="34" charset="-120"/>
-              </a:rPr>
-              <a:t>/k/</a:t>
-            </a:r>
-            <a:endParaRPr lang="en-US" sz="750" dirty="0"/>
-          </a:p>
-        </p:txBody>
-      </p:sp>
-      <p:sp>
-        <p:nvSpPr>
-          <p:cNvPr id="42" name="Shape 40"/>
-          <p:cNvSpPr/>
-          <p:nvPr/>
-        </p:nvSpPr>
-        <p:spPr>
-          <a:xfrm>
-            <a:off x="5759577" y="4169664"/>
-            <a:ext cx="685800" cy="384048"/>
+          <p:cNvPr id="47" name="Shape 45"/>
+          <p:cNvSpPr/>
+          <p:nvPr/>
+        </p:nvSpPr>
+        <p:spPr>
+          <a:xfrm>
+            <a:off x="5254752" y="4169664"/>
+            <a:ext cx="685800" cy="475488"/>
           </a:xfrm>
           <a:prstGeom prst="rect">
             <a:avLst>
-              <a:gd name="adj" fmla="val 9524"/>
+              <a:gd name="adj" fmla="val 7692"/>
             </a:avLst>
           </a:prstGeom>
           <a:solidFill>
@@ -22384,14 +23086,14 @@
       </p:sp>
       <p:sp>
         <p:nvSpPr>
-          <p:cNvPr id="43" name="Text 41"/>
-          <p:cNvSpPr/>
-          <p:nvPr/>
-        </p:nvSpPr>
-        <p:spPr>
-          <a:xfrm>
-            <a:off x="5759577" y="4169664"/>
-            <a:ext cx="685800" cy="384048"/>
+          <p:cNvPr id="48" name="Text 46"/>
+          <p:cNvSpPr/>
+          <p:nvPr/>
+        </p:nvSpPr>
+        <p:spPr>
+          <a:xfrm>
+            <a:off x="5254752" y="4169664"/>
+            <a:ext cx="685800" cy="475488"/>
           </a:xfrm>
           <a:prstGeom prst="rect">
             <a:avLst/>
@@ -22423,18 +23125,18 @@
       </p:sp>
       <p:sp>
         <p:nvSpPr>
-          <p:cNvPr id="44" name="Shape 42"/>
-          <p:cNvSpPr/>
-          <p:nvPr/>
-        </p:nvSpPr>
-        <p:spPr>
-          <a:xfrm>
-            <a:off x="6668262" y="4169664"/>
-            <a:ext cx="685800" cy="384048"/>
+          <p:cNvPr id="49" name="Shape 47"/>
+          <p:cNvSpPr/>
+          <p:nvPr/>
+        </p:nvSpPr>
+        <p:spPr>
+          <a:xfrm>
+            <a:off x="6062472" y="4169664"/>
+            <a:ext cx="685800" cy="475488"/>
           </a:xfrm>
           <a:prstGeom prst="rect">
             <a:avLst>
-              <a:gd name="adj" fmla="val 9524"/>
+              <a:gd name="adj" fmla="val 7692"/>
             </a:avLst>
           </a:prstGeom>
           <a:solidFill>
@@ -22450,14 +23152,14 @@
       </p:sp>
       <p:sp>
         <p:nvSpPr>
-          <p:cNvPr id="45" name="Text 43"/>
-          <p:cNvSpPr/>
-          <p:nvPr/>
-        </p:nvSpPr>
-        <p:spPr>
-          <a:xfrm>
-            <a:off x="6668262" y="4169664"/>
-            <a:ext cx="685800" cy="384048"/>
+          <p:cNvPr id="50" name="Text 48"/>
+          <p:cNvSpPr/>
+          <p:nvPr/>
+        </p:nvSpPr>
+        <p:spPr>
+          <a:xfrm>
+            <a:off x="6062472" y="4169664"/>
+            <a:ext cx="685800" cy="475488"/>
           </a:xfrm>
           <a:prstGeom prst="rect">
             <a:avLst/>
@@ -22489,18 +23191,18 @@
       </p:sp>
       <p:sp>
         <p:nvSpPr>
-          <p:cNvPr id="46" name="Shape 44"/>
-          <p:cNvSpPr/>
-          <p:nvPr/>
-        </p:nvSpPr>
-        <p:spPr>
-          <a:xfrm>
-            <a:off x="7576947" y="4169664"/>
-            <a:ext cx="685800" cy="384048"/>
+          <p:cNvPr id="51" name="Shape 49"/>
+          <p:cNvSpPr/>
+          <p:nvPr/>
+        </p:nvSpPr>
+        <p:spPr>
+          <a:xfrm>
+            <a:off x="6870192" y="4169664"/>
+            <a:ext cx="685800" cy="475488"/>
           </a:xfrm>
           <a:prstGeom prst="rect">
             <a:avLst>
-              <a:gd name="adj" fmla="val 9524"/>
+              <a:gd name="adj" fmla="val 7692"/>
             </a:avLst>
           </a:prstGeom>
           <a:solidFill>
@@ -22516,14 +23218,14 @@
       </p:sp>
       <p:sp>
         <p:nvSpPr>
-          <p:cNvPr id="47" name="Text 45"/>
-          <p:cNvSpPr/>
-          <p:nvPr/>
-        </p:nvSpPr>
-        <p:spPr>
-          <a:xfrm>
-            <a:off x="7576947" y="4169664"/>
-            <a:ext cx="685800" cy="384048"/>
+          <p:cNvPr id="52" name="Text 50"/>
+          <p:cNvSpPr/>
+          <p:nvPr/>
+        </p:nvSpPr>
+        <p:spPr>
+          <a:xfrm>
+            <a:off x="6870192" y="4169664"/>
+            <a:ext cx="685800" cy="475488"/>
           </a:xfrm>
           <a:prstGeom prst="rect">
             <a:avLst/>
@@ -22548,6 +23250,72 @@
                 <a:cs typeface="Trebuchet MS" pitchFamily="34" charset="-120"/>
               </a:rPr>
               <a:t>m</a:t>
+            </a:r>
+            <a:endParaRPr lang="en-US" sz="900" dirty="0"/>
+          </a:p>
+        </p:txBody>
+      </p:sp>
+      <p:sp>
+        <p:nvSpPr>
+          <p:cNvPr id="53" name="Shape 51"/>
+          <p:cNvSpPr/>
+          <p:nvPr/>
+        </p:nvSpPr>
+        <p:spPr>
+          <a:xfrm>
+            <a:off x="7677912" y="4169664"/>
+            <a:ext cx="685800" cy="475488"/>
+          </a:xfrm>
+          <a:prstGeom prst="rect">
+            <a:avLst>
+              <a:gd name="adj" fmla="val 7692"/>
+            </a:avLst>
+          </a:prstGeom>
+          <a:solidFill>
+            <a:srgbClr val="FFFFFF"/>
+          </a:solidFill>
+          <a:ln w="12700">
+            <a:solidFill>
+              <a:srgbClr val="DB2777"/>
+            </a:solidFill>
+            <a:prstDash val="solid"/>
+          </a:ln>
+        </p:spPr>
+      </p:sp>
+      <p:sp>
+        <p:nvSpPr>
+          <p:cNvPr id="54" name="Text 52"/>
+          <p:cNvSpPr/>
+          <p:nvPr/>
+        </p:nvSpPr>
+        <p:spPr>
+          <a:xfrm>
+            <a:off x="7677912" y="4169664"/>
+            <a:ext cx="685800" cy="475488"/>
+          </a:xfrm>
+          <a:prstGeom prst="rect">
+            <a:avLst/>
+          </a:prstGeom>
+          <a:noFill/>
+          <a:ln/>
+        </p:spPr>
+        <p:txBody>
+          <a:bodyPr wrap="square" lIns="0" tIns="0" rIns="0" bIns="0" rtlCol="0" anchor="ctr"/>
+          <a:lstStyle/>
+          <a:p>
+            <a:pPr algn="ctr" indent="0" marL="0">
+              <a:buNone/>
+            </a:pPr>
+            <a:r>
+              <a:rPr lang="en-US" sz="900" b="1" dirty="0">
+                <a:solidFill>
+                  <a:srgbClr val="9D174D"/>
+                </a:solidFill>
+                <a:latin typeface="Trebuchet MS" pitchFamily="34" charset="0"/>
+                <a:ea typeface="Trebuchet MS" pitchFamily="34" charset="-122"/>
+                <a:cs typeface="Trebuchet MS" pitchFamily="34" charset="-120"/>
+              </a:rPr>
+              <a:t>er</a:t>
             </a:r>
             <a:endParaRPr lang="en-US" sz="900" dirty="0"/>
           </a:p>
@@ -22839,7 +23607,7 @@
                 <a:ea typeface="Calibri" pitchFamily="34" charset="-122"/>
                 <a:cs typeface="Calibri" pitchFamily="34" charset="-120"/>
               </a:rPr>
-              <a:t>Word Labs  •  wordlabs.app  •  Root: 'claim' = to call out or declare</a:t>
+              <a:t>Word Labs  •  wordlabs.app  •  Root: 'claim' = call out; cry</a:t>
             </a:r>
             <a:endParaRPr lang="en-US" sz="800" dirty="0"/>
           </a:p>
@@ -22978,7 +23746,7 @@
                 <a:ea typeface="Trebuchet MS" pitchFamily="34" charset="-122"/>
                 <a:cs typeface="Trebuchet MS" pitchFamily="34" charset="-120"/>
               </a:rPr>
-              <a:t>reclaim</a:t>
+              <a:t>proclaimed</a:t>
             </a:r>
             <a:endParaRPr lang="en-US" sz="2800" dirty="0"/>
           </a:p>
@@ -23666,7 +24434,7 @@
                 <a:ea typeface="Calibri" pitchFamily="34" charset="-122"/>
                 <a:cs typeface="Calibri" pitchFamily="34" charset="-120"/>
               </a:rPr>
-              <a:t>Word Labs  •  wordlabs.app  •  Root: 'claim' = to call out or declare</a:t>
+              <a:t>Word Labs  •  wordlabs.app  •  Root: 'claim' = call out; cry</a:t>
             </a:r>
             <a:endParaRPr lang="en-US" sz="800" dirty="0"/>
           </a:p>
@@ -23805,7 +24573,7 @@
                 <a:ea typeface="Trebuchet MS" pitchFamily="34" charset="-122"/>
                 <a:cs typeface="Trebuchet MS" pitchFamily="34" charset="-120"/>
               </a:rPr>
-              <a:t>reclaim</a:t>
+              <a:t>proclaimed</a:t>
             </a:r>
             <a:endParaRPr lang="en-US" sz="2800" dirty="0"/>
           </a:p>
@@ -23885,7 +24653,7 @@
         </p:nvSpPr>
         <p:spPr>
           <a:xfrm>
-            <a:off x="2938272" y="2258568"/>
+            <a:off x="2221992" y="2258568"/>
             <a:ext cx="1828800" cy="292608"/>
           </a:xfrm>
           <a:prstGeom prst="rect">
@@ -23919,7 +24687,7 @@
         </p:nvSpPr>
         <p:spPr>
           <a:xfrm>
-            <a:off x="2938272" y="2258568"/>
+            <a:off x="2221992" y="2258568"/>
             <a:ext cx="1828800" cy="292608"/>
           </a:xfrm>
           <a:prstGeom prst="rect">
@@ -23944,7 +24712,7 @@
                 <a:ea typeface="Trebuchet MS" pitchFamily="34" charset="-122"/>
                 <a:cs typeface="Trebuchet MS" pitchFamily="34" charset="-120"/>
               </a:rPr>
-              <a:t>re</a:t>
+              <a:t>pro</a:t>
             </a:r>
             <a:endParaRPr lang="en-US" sz="1300" dirty="0"/>
           </a:p>
@@ -23958,7 +24726,7 @@
         </p:nvSpPr>
         <p:spPr>
           <a:xfrm>
-            <a:off x="2938272" y="2569464"/>
+            <a:off x="2221992" y="2569464"/>
             <a:ext cx="1828800" cy="201168"/>
           </a:xfrm>
           <a:prstGeom prst="rect">
@@ -23983,7 +24751,7 @@
                 <a:ea typeface="Calibri" pitchFamily="34" charset="-122"/>
                 <a:cs typeface="Calibri" pitchFamily="34" charset="-120"/>
               </a:rPr>
-              <a:t>again, back</a:t>
+              <a:t>in favour of; forward</a:t>
             </a:r>
             <a:endParaRPr lang="en-US" sz="850" dirty="0"/>
           </a:p>
@@ -23997,7 +24765,7 @@
         </p:nvSpPr>
         <p:spPr>
           <a:xfrm>
-            <a:off x="5803392" y="2258568"/>
+            <a:off x="4370832" y="2258568"/>
             <a:ext cx="1828800" cy="292608"/>
           </a:xfrm>
           <a:prstGeom prst="rect">
@@ -24031,7 +24799,7 @@
         </p:nvSpPr>
         <p:spPr>
           <a:xfrm>
-            <a:off x="5803392" y="2258568"/>
+            <a:off x="4370832" y="2258568"/>
             <a:ext cx="1828800" cy="292608"/>
           </a:xfrm>
           <a:prstGeom prst="rect">
@@ -24070,7 +24838,7 @@
         </p:nvSpPr>
         <p:spPr>
           <a:xfrm>
-            <a:off x="5803392" y="2569464"/>
+            <a:off x="4370832" y="2569464"/>
             <a:ext cx="1828800" cy="201168"/>
           </a:xfrm>
           <a:prstGeom prst="rect">
@@ -24095,7 +24863,7 @@
                 <a:ea typeface="Calibri" pitchFamily="34" charset="-122"/>
                 <a:cs typeface="Calibri" pitchFamily="34" charset="-120"/>
               </a:rPr>
-              <a:t>to call out or declare</a:t>
+              <a:t>call out; cry</a:t>
             </a:r>
             <a:endParaRPr lang="en-US" sz="850" dirty="0"/>
           </a:p>
@@ -24104,6 +24872,118 @@
       <p:sp>
         <p:nvSpPr>
           <p:cNvPr id="22" name="Shape 20"/>
+          <p:cNvSpPr/>
+          <p:nvPr/>
+        </p:nvSpPr>
+        <p:spPr>
+          <a:xfrm>
+            <a:off x="6519672" y="2258568"/>
+            <a:ext cx="1828800" cy="292608"/>
+          </a:xfrm>
+          <a:prstGeom prst="rect">
+            <a:avLst>
+              <a:gd name="adj" fmla="val 25000"/>
+            </a:avLst>
+          </a:prstGeom>
+          <a:solidFill>
+            <a:srgbClr val="FCE7F3"/>
+          </a:solidFill>
+          <a:ln w="19050">
+            <a:solidFill>
+              <a:srgbClr val="DB2777"/>
+            </a:solidFill>
+            <a:prstDash val="solid"/>
+          </a:ln>
+          <a:effectLst>
+            <a:outerShdw sx="100000" sy="100000" kx="0" ky="0" algn="bl" rotWithShape="0" blurRad="101600" dist="38100" dir="8100000">
+              <a:srgbClr val="000000">
+                <a:alpha val="12000"/>
+              </a:srgbClr>
+            </a:outerShdw>
+          </a:effectLst>
+        </p:spPr>
+      </p:sp>
+      <p:sp>
+        <p:nvSpPr>
+          <p:cNvPr id="23" name="Text 21"/>
+          <p:cNvSpPr/>
+          <p:nvPr/>
+        </p:nvSpPr>
+        <p:spPr>
+          <a:xfrm>
+            <a:off x="6519672" y="2258568"/>
+            <a:ext cx="1828800" cy="292608"/>
+          </a:xfrm>
+          <a:prstGeom prst="rect">
+            <a:avLst/>
+          </a:prstGeom>
+          <a:noFill/>
+          <a:ln/>
+        </p:spPr>
+        <p:txBody>
+          <a:bodyPr wrap="square" lIns="0" tIns="0" rIns="0" bIns="0" rtlCol="0" anchor="ctr"/>
+          <a:lstStyle/>
+          <a:p>
+            <a:pPr algn="ctr" indent="0" marL="0">
+              <a:buNone/>
+            </a:pPr>
+            <a:r>
+              <a:rPr lang="en-US" sz="1300" b="1" dirty="0">
+                <a:solidFill>
+                  <a:srgbClr val="9D174D"/>
+                </a:solidFill>
+                <a:latin typeface="Trebuchet MS" pitchFamily="34" charset="0"/>
+                <a:ea typeface="Trebuchet MS" pitchFamily="34" charset="-122"/>
+                <a:cs typeface="Trebuchet MS" pitchFamily="34" charset="-120"/>
+              </a:rPr>
+              <a:t>ed</a:t>
+            </a:r>
+            <a:endParaRPr lang="en-US" sz="1300" dirty="0"/>
+          </a:p>
+        </p:txBody>
+      </p:sp>
+      <p:sp>
+        <p:nvSpPr>
+          <p:cNvPr id="24" name="Text 22"/>
+          <p:cNvSpPr/>
+          <p:nvPr/>
+        </p:nvSpPr>
+        <p:spPr>
+          <a:xfrm>
+            <a:off x="6519672" y="2569464"/>
+            <a:ext cx="1828800" cy="201168"/>
+          </a:xfrm>
+          <a:prstGeom prst="rect">
+            <a:avLst/>
+          </a:prstGeom>
+          <a:noFill/>
+          <a:ln/>
+        </p:spPr>
+        <p:txBody>
+          <a:bodyPr wrap="square" lIns="0" tIns="0" rIns="0" bIns="0" rtlCol="0" anchor="t"/>
+          <a:lstStyle/>
+          <a:p>
+            <a:pPr algn="ctr" indent="0" marL="0">
+              <a:buNone/>
+            </a:pPr>
+            <a:r>
+              <a:rPr lang="en-US" sz="850" dirty="0">
+                <a:solidFill>
+                  <a:srgbClr val="475569"/>
+                </a:solidFill>
+                <a:latin typeface="Calibri" pitchFamily="34" charset="0"/>
+                <a:ea typeface="Calibri" pitchFamily="34" charset="-122"/>
+                <a:cs typeface="Calibri" pitchFamily="34" charset="-120"/>
+              </a:rPr>
+              <a:t>past tense</a:t>
+            </a:r>
+            <a:endParaRPr lang="en-US" sz="850" dirty="0"/>
+          </a:p>
+        </p:txBody>
+      </p:sp>
+      <p:sp>
+        <p:nvSpPr>
+          <p:cNvPr id="25" name="Shape 23"/>
           <p:cNvSpPr/>
           <p:nvPr/>
         </p:nvSpPr>
@@ -24130,7 +25010,7 @@
       </p:sp>
       <p:sp>
         <p:nvSpPr>
-          <p:cNvPr id="23" name="Text 21"/>
+          <p:cNvPr id="26" name="Text 24"/>
           <p:cNvSpPr/>
           <p:nvPr/>
         </p:nvSpPr>
@@ -24169,7 +25049,7 @@
       </p:sp>
       <p:sp>
         <p:nvSpPr>
-          <p:cNvPr id="24" name="Shape 22"/>
+          <p:cNvPr id="27" name="Shape 25"/>
           <p:cNvSpPr/>
           <p:nvPr/>
         </p:nvSpPr>
@@ -24196,7 +25076,7 @@
       </p:sp>
       <p:sp>
         <p:nvSpPr>
-          <p:cNvPr id="25" name="Text 23"/>
+          <p:cNvPr id="28" name="Text 26"/>
           <p:cNvSpPr/>
           <p:nvPr/>
         </p:nvSpPr>
@@ -24235,7 +25115,7 @@
       </p:sp>
       <p:sp>
         <p:nvSpPr>
-          <p:cNvPr id="26" name="Shape 24"/>
+          <p:cNvPr id="29" name="Shape 27"/>
           <p:cNvSpPr/>
           <p:nvPr/>
         </p:nvSpPr>
@@ -24262,7 +25142,7 @@
       </p:sp>
       <p:sp>
         <p:nvSpPr>
-          <p:cNvPr id="27" name="Text 25"/>
+          <p:cNvPr id="30" name="Text 28"/>
           <p:cNvSpPr/>
           <p:nvPr/>
         </p:nvSpPr>
@@ -24301,7 +25181,7 @@
       </p:sp>
       <p:sp>
         <p:nvSpPr>
-          <p:cNvPr id="28" name="Shape 26"/>
+          <p:cNvPr id="31" name="Shape 29"/>
           <p:cNvSpPr/>
           <p:nvPr/>
         </p:nvSpPr>
@@ -24328,7 +25208,7 @@
       </p:sp>
       <p:sp>
         <p:nvSpPr>
-          <p:cNvPr id="29" name="Text 27"/>
+          <p:cNvPr id="32" name="Text 30"/>
           <p:cNvSpPr/>
           <p:nvPr/>
         </p:nvSpPr>
@@ -24651,7 +25531,7 @@
                 <a:ea typeface="Calibri" pitchFamily="34" charset="-122"/>
                 <a:cs typeface="Calibri" pitchFamily="34" charset="-120"/>
               </a:rPr>
-              <a:t>Word Labs  •  wordlabs.app  •  Root: 'claim' = to call out or declare</a:t>
+              <a:t>Word Labs  •  wordlabs.app  •  Root: 'claim' = call out; cry</a:t>
             </a:r>
             <a:endParaRPr lang="en-US" sz="800" dirty="0"/>
           </a:p>
@@ -24724,7 +25604,7 @@
                 <a:ea typeface="Trebuchet MS" pitchFamily="34" charset="-122"/>
                 <a:cs typeface="Trebuchet MS" pitchFamily="34" charset="-120"/>
               </a:rPr>
-              <a:t>We are learning that the root 'claim' means 'to call out or declare'.</a:t>
+              <a:t>We are learning that the root 'claim' means 'call out; cry'.</a:t>
             </a:r>
             <a:endParaRPr lang="en-US" sz="2000" dirty="0"/>
           </a:p>
@@ -25370,7 +26250,7 @@
                 <a:ea typeface="Calibri" pitchFamily="34" charset="-122"/>
                 <a:cs typeface="Calibri" pitchFamily="34" charset="-120"/>
               </a:rPr>
-              <a:t>Word Labs  •  wordlabs.app  •  Root: 'claim' = to call out or declare</a:t>
+              <a:t>Word Labs  •  wordlabs.app  •  Root: 'claim' = call out; cry</a:t>
             </a:r>
             <a:endParaRPr lang="en-US" sz="800" dirty="0"/>
           </a:p>
@@ -25509,7 +26389,7 @@
                 <a:ea typeface="Trebuchet MS" pitchFamily="34" charset="-122"/>
                 <a:cs typeface="Trebuchet MS" pitchFamily="34" charset="-120"/>
               </a:rPr>
-              <a:t>reclaim</a:t>
+              <a:t>proclaimed</a:t>
             </a:r>
             <a:endParaRPr lang="en-US" sz="2800" dirty="0"/>
           </a:p>
@@ -25589,7 +26469,7 @@
         </p:nvSpPr>
         <p:spPr>
           <a:xfrm>
-            <a:off x="2938272" y="2258568"/>
+            <a:off x="2221992" y="2258568"/>
             <a:ext cx="1828800" cy="292608"/>
           </a:xfrm>
           <a:prstGeom prst="rect">
@@ -25623,7 +26503,7 @@
         </p:nvSpPr>
         <p:spPr>
           <a:xfrm>
-            <a:off x="2938272" y="2258568"/>
+            <a:off x="2221992" y="2258568"/>
             <a:ext cx="1828800" cy="292608"/>
           </a:xfrm>
           <a:prstGeom prst="rect">
@@ -25648,7 +26528,7 @@
                 <a:ea typeface="Trebuchet MS" pitchFamily="34" charset="-122"/>
                 <a:cs typeface="Trebuchet MS" pitchFamily="34" charset="-120"/>
               </a:rPr>
-              <a:t>re</a:t>
+              <a:t>pro</a:t>
             </a:r>
             <a:endParaRPr lang="en-US" sz="1300" dirty="0"/>
           </a:p>
@@ -25662,7 +26542,7 @@
         </p:nvSpPr>
         <p:spPr>
           <a:xfrm>
-            <a:off x="2938272" y="2569464"/>
+            <a:off x="2221992" y="2569464"/>
             <a:ext cx="1828800" cy="201168"/>
           </a:xfrm>
           <a:prstGeom prst="rect">
@@ -25687,7 +26567,7 @@
                 <a:ea typeface="Calibri" pitchFamily="34" charset="-122"/>
                 <a:cs typeface="Calibri" pitchFamily="34" charset="-120"/>
               </a:rPr>
-              <a:t>again, back</a:t>
+              <a:t>in favour of; forward</a:t>
             </a:r>
             <a:endParaRPr lang="en-US" sz="850" dirty="0"/>
           </a:p>
@@ -25701,7 +26581,7 @@
         </p:nvSpPr>
         <p:spPr>
           <a:xfrm>
-            <a:off x="5803392" y="2258568"/>
+            <a:off x="4370832" y="2258568"/>
             <a:ext cx="1828800" cy="292608"/>
           </a:xfrm>
           <a:prstGeom prst="rect">
@@ -25735,7 +26615,7 @@
         </p:nvSpPr>
         <p:spPr>
           <a:xfrm>
-            <a:off x="5803392" y="2258568"/>
+            <a:off x="4370832" y="2258568"/>
             <a:ext cx="1828800" cy="292608"/>
           </a:xfrm>
           <a:prstGeom prst="rect">
@@ -25774,7 +26654,7 @@
         </p:nvSpPr>
         <p:spPr>
           <a:xfrm>
-            <a:off x="5803392" y="2569464"/>
+            <a:off x="4370832" y="2569464"/>
             <a:ext cx="1828800" cy="201168"/>
           </a:xfrm>
           <a:prstGeom prst="rect">
@@ -25799,7 +26679,7 @@
                 <a:ea typeface="Calibri" pitchFamily="34" charset="-122"/>
                 <a:cs typeface="Calibri" pitchFamily="34" charset="-120"/>
               </a:rPr>
-              <a:t>to call out or declare</a:t>
+              <a:t>call out; cry</a:t>
             </a:r>
             <a:endParaRPr lang="en-US" sz="850" dirty="0"/>
           </a:p>
@@ -25808,6 +26688,118 @@
       <p:sp>
         <p:nvSpPr>
           <p:cNvPr id="22" name="Shape 20"/>
+          <p:cNvSpPr/>
+          <p:nvPr/>
+        </p:nvSpPr>
+        <p:spPr>
+          <a:xfrm>
+            <a:off x="6519672" y="2258568"/>
+            <a:ext cx="1828800" cy="292608"/>
+          </a:xfrm>
+          <a:prstGeom prst="rect">
+            <a:avLst>
+              <a:gd name="adj" fmla="val 25000"/>
+            </a:avLst>
+          </a:prstGeom>
+          <a:solidFill>
+            <a:srgbClr val="FCE7F3"/>
+          </a:solidFill>
+          <a:ln w="19050">
+            <a:solidFill>
+              <a:srgbClr val="DB2777"/>
+            </a:solidFill>
+            <a:prstDash val="solid"/>
+          </a:ln>
+          <a:effectLst>
+            <a:outerShdw sx="100000" sy="100000" kx="0" ky="0" algn="bl" rotWithShape="0" blurRad="101600" dist="38100" dir="8100000">
+              <a:srgbClr val="000000">
+                <a:alpha val="12000"/>
+              </a:srgbClr>
+            </a:outerShdw>
+          </a:effectLst>
+        </p:spPr>
+      </p:sp>
+      <p:sp>
+        <p:nvSpPr>
+          <p:cNvPr id="23" name="Text 21"/>
+          <p:cNvSpPr/>
+          <p:nvPr/>
+        </p:nvSpPr>
+        <p:spPr>
+          <a:xfrm>
+            <a:off x="6519672" y="2258568"/>
+            <a:ext cx="1828800" cy="292608"/>
+          </a:xfrm>
+          <a:prstGeom prst="rect">
+            <a:avLst/>
+          </a:prstGeom>
+          <a:noFill/>
+          <a:ln/>
+        </p:spPr>
+        <p:txBody>
+          <a:bodyPr wrap="square" lIns="0" tIns="0" rIns="0" bIns="0" rtlCol="0" anchor="ctr"/>
+          <a:lstStyle/>
+          <a:p>
+            <a:pPr algn="ctr" indent="0" marL="0">
+              <a:buNone/>
+            </a:pPr>
+            <a:r>
+              <a:rPr lang="en-US" sz="1300" b="1" dirty="0">
+                <a:solidFill>
+                  <a:srgbClr val="9D174D"/>
+                </a:solidFill>
+                <a:latin typeface="Trebuchet MS" pitchFamily="34" charset="0"/>
+                <a:ea typeface="Trebuchet MS" pitchFamily="34" charset="-122"/>
+                <a:cs typeface="Trebuchet MS" pitchFamily="34" charset="-120"/>
+              </a:rPr>
+              <a:t>ed</a:t>
+            </a:r>
+            <a:endParaRPr lang="en-US" sz="1300" dirty="0"/>
+          </a:p>
+        </p:txBody>
+      </p:sp>
+      <p:sp>
+        <p:nvSpPr>
+          <p:cNvPr id="24" name="Text 22"/>
+          <p:cNvSpPr/>
+          <p:nvPr/>
+        </p:nvSpPr>
+        <p:spPr>
+          <a:xfrm>
+            <a:off x="6519672" y="2569464"/>
+            <a:ext cx="1828800" cy="201168"/>
+          </a:xfrm>
+          <a:prstGeom prst="rect">
+            <a:avLst/>
+          </a:prstGeom>
+          <a:noFill/>
+          <a:ln/>
+        </p:spPr>
+        <p:txBody>
+          <a:bodyPr wrap="square" lIns="0" tIns="0" rIns="0" bIns="0" rtlCol="0" anchor="t"/>
+          <a:lstStyle/>
+          <a:p>
+            <a:pPr algn="ctr" indent="0" marL="0">
+              <a:buNone/>
+            </a:pPr>
+            <a:r>
+              <a:rPr lang="en-US" sz="850" dirty="0">
+                <a:solidFill>
+                  <a:srgbClr val="475569"/>
+                </a:solidFill>
+                <a:latin typeface="Calibri" pitchFamily="34" charset="0"/>
+                <a:ea typeface="Calibri" pitchFamily="34" charset="-122"/>
+                <a:cs typeface="Calibri" pitchFamily="34" charset="-120"/>
+              </a:rPr>
+              <a:t>past tense</a:t>
+            </a:r>
+            <a:endParaRPr lang="en-US" sz="850" dirty="0"/>
+          </a:p>
+        </p:txBody>
+      </p:sp>
+      <p:sp>
+        <p:nvSpPr>
+          <p:cNvPr id="25" name="Shape 23"/>
           <p:cNvSpPr/>
           <p:nvPr/>
         </p:nvSpPr>
@@ -25834,7 +26826,7 @@
       </p:sp>
       <p:sp>
         <p:nvSpPr>
-          <p:cNvPr id="23" name="Text 21"/>
+          <p:cNvPr id="26" name="Text 24"/>
           <p:cNvSpPr/>
           <p:nvPr/>
         </p:nvSpPr>
@@ -25873,7 +26865,7 @@
       </p:sp>
       <p:sp>
         <p:nvSpPr>
-          <p:cNvPr id="24" name="Shape 22"/>
+          <p:cNvPr id="27" name="Shape 25"/>
           <p:cNvSpPr/>
           <p:nvPr/>
         </p:nvSpPr>
@@ -25900,7 +26892,7 @@
       </p:sp>
       <p:sp>
         <p:nvSpPr>
-          <p:cNvPr id="25" name="Shape 23"/>
+          <p:cNvPr id="28" name="Shape 26"/>
           <p:cNvSpPr/>
           <p:nvPr/>
         </p:nvSpPr>
@@ -25927,7 +26919,7 @@
       </p:sp>
       <p:sp>
         <p:nvSpPr>
-          <p:cNvPr id="26" name="Text 24"/>
+          <p:cNvPr id="29" name="Text 27"/>
           <p:cNvSpPr/>
           <p:nvPr/>
         </p:nvSpPr>
@@ -25958,7 +26950,7 @@
                 <a:ea typeface="Trebuchet MS" pitchFamily="34" charset="-122"/>
                 <a:cs typeface="Trebuchet MS" pitchFamily="34" charset="-120"/>
               </a:rPr>
-              <a:t>re</a:t>
+              <a:t>pro</a:t>
             </a:r>
             <a:endParaRPr lang="en-US" sz="1400" dirty="0"/>
           </a:p>
@@ -25966,7 +26958,7 @@
       </p:sp>
       <p:sp>
         <p:nvSpPr>
-          <p:cNvPr id="27" name="Text 25"/>
+          <p:cNvPr id="30" name="Text 28"/>
           <p:cNvSpPr/>
           <p:nvPr/>
         </p:nvSpPr>
@@ -26005,7 +26997,7 @@
       </p:sp>
       <p:sp>
         <p:nvSpPr>
-          <p:cNvPr id="28" name="Shape 26"/>
+          <p:cNvPr id="31" name="Shape 29"/>
           <p:cNvSpPr/>
           <p:nvPr/>
         </p:nvSpPr>
@@ -26032,7 +27024,7 @@
       </p:sp>
       <p:sp>
         <p:nvSpPr>
-          <p:cNvPr id="29" name="Text 27"/>
+          <p:cNvPr id="32" name="Text 30"/>
           <p:cNvSpPr/>
           <p:nvPr/>
         </p:nvSpPr>
@@ -26063,7 +27055,7 @@
                 <a:ea typeface="Trebuchet MS" pitchFamily="34" charset="-122"/>
                 <a:cs typeface="Trebuchet MS" pitchFamily="34" charset="-120"/>
               </a:rPr>
-              <a:t>claim</a:t>
+              <a:t>claimed</a:t>
             </a:r>
             <a:endParaRPr lang="en-US" sz="1400" dirty="0"/>
           </a:p>
@@ -26071,7 +27063,7 @@
       </p:sp>
       <p:sp>
         <p:nvSpPr>
-          <p:cNvPr id="30" name="Shape 28"/>
+          <p:cNvPr id="33" name="Shape 31"/>
           <p:cNvSpPr/>
           <p:nvPr/>
         </p:nvSpPr>
@@ -26098,7 +27090,7 @@
       </p:sp>
       <p:sp>
         <p:nvSpPr>
-          <p:cNvPr id="31" name="Text 29"/>
+          <p:cNvPr id="34" name="Text 32"/>
           <p:cNvSpPr/>
           <p:nvPr/>
         </p:nvSpPr>
@@ -26137,7 +27129,7 @@
       </p:sp>
       <p:sp>
         <p:nvSpPr>
-          <p:cNvPr id="32" name="Shape 30"/>
+          <p:cNvPr id="35" name="Shape 33"/>
           <p:cNvSpPr/>
           <p:nvPr/>
         </p:nvSpPr>
@@ -26164,7 +27156,7 @@
       </p:sp>
       <p:sp>
         <p:nvSpPr>
-          <p:cNvPr id="33" name="Text 31"/>
+          <p:cNvPr id="36" name="Text 34"/>
           <p:cNvSpPr/>
           <p:nvPr/>
         </p:nvSpPr>
@@ -26487,7 +27479,7 @@
                 <a:ea typeface="Calibri" pitchFamily="34" charset="-122"/>
                 <a:cs typeface="Calibri" pitchFamily="34" charset="-120"/>
               </a:rPr>
-              <a:t>Word Labs  •  wordlabs.app  •  Root: 'claim' = to call out or declare</a:t>
+              <a:t>Word Labs  •  wordlabs.app  •  Root: 'claim' = call out; cry</a:t>
             </a:r>
             <a:endParaRPr lang="en-US" sz="800" dirty="0"/>
           </a:p>
@@ -26626,7 +27618,7 @@
                 <a:ea typeface="Trebuchet MS" pitchFamily="34" charset="-122"/>
                 <a:cs typeface="Trebuchet MS" pitchFamily="34" charset="-120"/>
               </a:rPr>
-              <a:t>reclaim</a:t>
+              <a:t>proclaimed</a:t>
             </a:r>
             <a:endParaRPr lang="en-US" sz="2800" dirty="0"/>
           </a:p>
@@ -26706,7 +27698,7 @@
         </p:nvSpPr>
         <p:spPr>
           <a:xfrm>
-            <a:off x="2938272" y="2258568"/>
+            <a:off x="2221992" y="2258568"/>
             <a:ext cx="1828800" cy="292608"/>
           </a:xfrm>
           <a:prstGeom prst="rect">
@@ -26740,7 +27732,7 @@
         </p:nvSpPr>
         <p:spPr>
           <a:xfrm>
-            <a:off x="2938272" y="2258568"/>
+            <a:off x="2221992" y="2258568"/>
             <a:ext cx="1828800" cy="292608"/>
           </a:xfrm>
           <a:prstGeom prst="rect">
@@ -26765,7 +27757,7 @@
                 <a:ea typeface="Trebuchet MS" pitchFamily="34" charset="-122"/>
                 <a:cs typeface="Trebuchet MS" pitchFamily="34" charset="-120"/>
               </a:rPr>
-              <a:t>re</a:t>
+              <a:t>pro</a:t>
             </a:r>
             <a:endParaRPr lang="en-US" sz="1300" dirty="0"/>
           </a:p>
@@ -26779,7 +27771,7 @@
         </p:nvSpPr>
         <p:spPr>
           <a:xfrm>
-            <a:off x="2938272" y="2569464"/>
+            <a:off x="2221992" y="2569464"/>
             <a:ext cx="1828800" cy="201168"/>
           </a:xfrm>
           <a:prstGeom prst="rect">
@@ -26804,7 +27796,7 @@
                 <a:ea typeface="Calibri" pitchFamily="34" charset="-122"/>
                 <a:cs typeface="Calibri" pitchFamily="34" charset="-120"/>
               </a:rPr>
-              <a:t>again, back</a:t>
+              <a:t>in favour of; forward</a:t>
             </a:r>
             <a:endParaRPr lang="en-US" sz="850" dirty="0"/>
           </a:p>
@@ -26818,7 +27810,7 @@
         </p:nvSpPr>
         <p:spPr>
           <a:xfrm>
-            <a:off x="5803392" y="2258568"/>
+            <a:off x="4370832" y="2258568"/>
             <a:ext cx="1828800" cy="292608"/>
           </a:xfrm>
           <a:prstGeom prst="rect">
@@ -26852,7 +27844,7 @@
         </p:nvSpPr>
         <p:spPr>
           <a:xfrm>
-            <a:off x="5803392" y="2258568"/>
+            <a:off x="4370832" y="2258568"/>
             <a:ext cx="1828800" cy="292608"/>
           </a:xfrm>
           <a:prstGeom prst="rect">
@@ -26891,7 +27883,7 @@
         </p:nvSpPr>
         <p:spPr>
           <a:xfrm>
-            <a:off x="5803392" y="2569464"/>
+            <a:off x="4370832" y="2569464"/>
             <a:ext cx="1828800" cy="201168"/>
           </a:xfrm>
           <a:prstGeom prst="rect">
@@ -26916,7 +27908,7 @@
                 <a:ea typeface="Calibri" pitchFamily="34" charset="-122"/>
                 <a:cs typeface="Calibri" pitchFamily="34" charset="-120"/>
               </a:rPr>
-              <a:t>to call out or declare</a:t>
+              <a:t>call out; cry</a:t>
             </a:r>
             <a:endParaRPr lang="en-US" sz="850" dirty="0"/>
           </a:p>
@@ -26925,6 +27917,118 @@
       <p:sp>
         <p:nvSpPr>
           <p:cNvPr id="22" name="Shape 20"/>
+          <p:cNvSpPr/>
+          <p:nvPr/>
+        </p:nvSpPr>
+        <p:spPr>
+          <a:xfrm>
+            <a:off x="6519672" y="2258568"/>
+            <a:ext cx="1828800" cy="292608"/>
+          </a:xfrm>
+          <a:prstGeom prst="rect">
+            <a:avLst>
+              <a:gd name="adj" fmla="val 25000"/>
+            </a:avLst>
+          </a:prstGeom>
+          <a:solidFill>
+            <a:srgbClr val="FCE7F3"/>
+          </a:solidFill>
+          <a:ln w="19050">
+            <a:solidFill>
+              <a:srgbClr val="DB2777"/>
+            </a:solidFill>
+            <a:prstDash val="solid"/>
+          </a:ln>
+          <a:effectLst>
+            <a:outerShdw sx="100000" sy="100000" kx="0" ky="0" algn="bl" rotWithShape="0" blurRad="101600" dist="38100" dir="8100000">
+              <a:srgbClr val="000000">
+                <a:alpha val="12000"/>
+              </a:srgbClr>
+            </a:outerShdw>
+          </a:effectLst>
+        </p:spPr>
+      </p:sp>
+      <p:sp>
+        <p:nvSpPr>
+          <p:cNvPr id="23" name="Text 21"/>
+          <p:cNvSpPr/>
+          <p:nvPr/>
+        </p:nvSpPr>
+        <p:spPr>
+          <a:xfrm>
+            <a:off x="6519672" y="2258568"/>
+            <a:ext cx="1828800" cy="292608"/>
+          </a:xfrm>
+          <a:prstGeom prst="rect">
+            <a:avLst/>
+          </a:prstGeom>
+          <a:noFill/>
+          <a:ln/>
+        </p:spPr>
+        <p:txBody>
+          <a:bodyPr wrap="square" lIns="0" tIns="0" rIns="0" bIns="0" rtlCol="0" anchor="ctr"/>
+          <a:lstStyle/>
+          <a:p>
+            <a:pPr algn="ctr" indent="0" marL="0">
+              <a:buNone/>
+            </a:pPr>
+            <a:r>
+              <a:rPr lang="en-US" sz="1300" b="1" dirty="0">
+                <a:solidFill>
+                  <a:srgbClr val="9D174D"/>
+                </a:solidFill>
+                <a:latin typeface="Trebuchet MS" pitchFamily="34" charset="0"/>
+                <a:ea typeface="Trebuchet MS" pitchFamily="34" charset="-122"/>
+                <a:cs typeface="Trebuchet MS" pitchFamily="34" charset="-120"/>
+              </a:rPr>
+              <a:t>ed</a:t>
+            </a:r>
+            <a:endParaRPr lang="en-US" sz="1300" dirty="0"/>
+          </a:p>
+        </p:txBody>
+      </p:sp>
+      <p:sp>
+        <p:nvSpPr>
+          <p:cNvPr id="24" name="Text 22"/>
+          <p:cNvSpPr/>
+          <p:nvPr/>
+        </p:nvSpPr>
+        <p:spPr>
+          <a:xfrm>
+            <a:off x="6519672" y="2569464"/>
+            <a:ext cx="1828800" cy="201168"/>
+          </a:xfrm>
+          <a:prstGeom prst="rect">
+            <a:avLst/>
+          </a:prstGeom>
+          <a:noFill/>
+          <a:ln/>
+        </p:spPr>
+        <p:txBody>
+          <a:bodyPr wrap="square" lIns="0" tIns="0" rIns="0" bIns="0" rtlCol="0" anchor="t"/>
+          <a:lstStyle/>
+          <a:p>
+            <a:pPr algn="ctr" indent="0" marL="0">
+              <a:buNone/>
+            </a:pPr>
+            <a:r>
+              <a:rPr lang="en-US" sz="850" dirty="0">
+                <a:solidFill>
+                  <a:srgbClr val="475569"/>
+                </a:solidFill>
+                <a:latin typeface="Calibri" pitchFamily="34" charset="0"/>
+                <a:ea typeface="Calibri" pitchFamily="34" charset="-122"/>
+                <a:cs typeface="Calibri" pitchFamily="34" charset="-120"/>
+              </a:rPr>
+              <a:t>past tense</a:t>
+            </a:r>
+            <a:endParaRPr lang="en-US" sz="850" dirty="0"/>
+          </a:p>
+        </p:txBody>
+      </p:sp>
+      <p:sp>
+        <p:nvSpPr>
+          <p:cNvPr id="25" name="Shape 23"/>
           <p:cNvSpPr/>
           <p:nvPr/>
         </p:nvSpPr>
@@ -26951,7 +28055,7 @@
       </p:sp>
       <p:sp>
         <p:nvSpPr>
-          <p:cNvPr id="23" name="Text 21"/>
+          <p:cNvPr id="26" name="Text 24"/>
           <p:cNvSpPr/>
           <p:nvPr/>
         </p:nvSpPr>
@@ -26990,7 +28094,7 @@
       </p:sp>
       <p:sp>
         <p:nvSpPr>
-          <p:cNvPr id="24" name="Shape 22"/>
+          <p:cNvPr id="27" name="Shape 25"/>
           <p:cNvSpPr/>
           <p:nvPr/>
         </p:nvSpPr>
@@ -27017,7 +28121,7 @@
       </p:sp>
       <p:sp>
         <p:nvSpPr>
-          <p:cNvPr id="25" name="Shape 23"/>
+          <p:cNvPr id="28" name="Shape 26"/>
           <p:cNvSpPr/>
           <p:nvPr/>
         </p:nvSpPr>
@@ -27044,7 +28148,7 @@
       </p:sp>
       <p:sp>
         <p:nvSpPr>
-          <p:cNvPr id="26" name="Text 24"/>
+          <p:cNvPr id="29" name="Text 27"/>
           <p:cNvSpPr/>
           <p:nvPr/>
         </p:nvSpPr>
@@ -27075,7 +28179,7 @@
                 <a:ea typeface="Trebuchet MS" pitchFamily="34" charset="-122"/>
                 <a:cs typeface="Trebuchet MS" pitchFamily="34" charset="-120"/>
               </a:rPr>
-              <a:t>re</a:t>
+              <a:t>pro</a:t>
             </a:r>
             <a:endParaRPr lang="en-US" sz="1400" dirty="0"/>
           </a:p>
@@ -27083,7 +28187,7 @@
       </p:sp>
       <p:sp>
         <p:nvSpPr>
-          <p:cNvPr id="27" name="Text 25"/>
+          <p:cNvPr id="30" name="Text 28"/>
           <p:cNvSpPr/>
           <p:nvPr/>
         </p:nvSpPr>
@@ -27122,7 +28226,7 @@
       </p:sp>
       <p:sp>
         <p:nvSpPr>
-          <p:cNvPr id="28" name="Shape 26"/>
+          <p:cNvPr id="31" name="Shape 29"/>
           <p:cNvSpPr/>
           <p:nvPr/>
         </p:nvSpPr>
@@ -27149,7 +28253,7 @@
       </p:sp>
       <p:sp>
         <p:nvSpPr>
-          <p:cNvPr id="29" name="Text 27"/>
+          <p:cNvPr id="32" name="Text 30"/>
           <p:cNvSpPr/>
           <p:nvPr/>
         </p:nvSpPr>
@@ -27180,7 +28284,7 @@
                 <a:ea typeface="Trebuchet MS" pitchFamily="34" charset="-122"/>
                 <a:cs typeface="Trebuchet MS" pitchFamily="34" charset="-120"/>
               </a:rPr>
-              <a:t>claim</a:t>
+              <a:t>claimed</a:t>
             </a:r>
             <a:endParaRPr lang="en-US" sz="1400" dirty="0"/>
           </a:p>
@@ -27188,7 +28292,7 @@
       </p:sp>
       <p:sp>
         <p:nvSpPr>
-          <p:cNvPr id="30" name="Shape 28"/>
+          <p:cNvPr id="33" name="Shape 31"/>
           <p:cNvSpPr/>
           <p:nvPr/>
         </p:nvSpPr>
@@ -27215,7 +28319,7 @@
       </p:sp>
       <p:sp>
         <p:nvSpPr>
-          <p:cNvPr id="31" name="Text 29"/>
+          <p:cNvPr id="34" name="Text 32"/>
           <p:cNvSpPr/>
           <p:nvPr/>
         </p:nvSpPr>
@@ -27254,18 +28358,18 @@
       </p:sp>
       <p:sp>
         <p:nvSpPr>
-          <p:cNvPr id="32" name="Shape 30"/>
+          <p:cNvPr id="35" name="Shape 33"/>
           <p:cNvSpPr/>
           <p:nvPr/>
         </p:nvSpPr>
         <p:spPr>
           <a:xfrm>
             <a:off x="1874520" y="4096512"/>
-            <a:ext cx="6903720" cy="804672"/>
+            <a:ext cx="6903720" cy="658368"/>
           </a:xfrm>
           <a:prstGeom prst="rect">
             <a:avLst>
-              <a:gd name="adj" fmla="val 6818"/>
+              <a:gd name="adj" fmla="val 8333"/>
             </a:avLst>
           </a:prstGeom>
           <a:solidFill>
@@ -27281,18 +28385,18 @@
       </p:sp>
       <p:sp>
         <p:nvSpPr>
-          <p:cNvPr id="33" name="Shape 31"/>
-          <p:cNvSpPr/>
-          <p:nvPr/>
-        </p:nvSpPr>
-        <p:spPr>
-          <a:xfrm>
-            <a:off x="2254649" y="4169664"/>
-            <a:ext cx="685800" cy="384048"/>
+          <p:cNvPr id="36" name="Shape 34"/>
+          <p:cNvSpPr/>
+          <p:nvPr/>
+        </p:nvSpPr>
+        <p:spPr>
+          <a:xfrm>
+            <a:off x="2023872" y="4169664"/>
+            <a:ext cx="685800" cy="475488"/>
           </a:xfrm>
           <a:prstGeom prst="rect">
             <a:avLst>
-              <a:gd name="adj" fmla="val 9524"/>
+              <a:gd name="adj" fmla="val 7692"/>
             </a:avLst>
           </a:prstGeom>
           <a:solidFill>
@@ -27308,14 +28412,14 @@
       </p:sp>
       <p:sp>
         <p:nvSpPr>
-          <p:cNvPr id="34" name="Text 32"/>
-          <p:cNvSpPr/>
-          <p:nvPr/>
-        </p:nvSpPr>
-        <p:spPr>
-          <a:xfrm>
-            <a:off x="2254649" y="4169664"/>
-            <a:ext cx="685800" cy="384048"/>
+          <p:cNvPr id="37" name="Text 35"/>
+          <p:cNvSpPr/>
+          <p:nvPr/>
+        </p:nvSpPr>
+        <p:spPr>
+          <a:xfrm>
+            <a:off x="2023872" y="4169664"/>
+            <a:ext cx="685800" cy="475488"/>
           </a:xfrm>
           <a:prstGeom prst="rect">
             <a:avLst/>
@@ -27339,7 +28443,7 @@
                 <a:ea typeface="Trebuchet MS" pitchFamily="34" charset="-122"/>
                 <a:cs typeface="Trebuchet MS" pitchFamily="34" charset="-120"/>
               </a:rPr>
-              <a:t>r</a:t>
+              <a:t>p</a:t>
             </a:r>
             <a:endParaRPr lang="en-US" sz="900" dirty="0"/>
           </a:p>
@@ -27347,18 +28451,18 @@
       </p:sp>
       <p:sp>
         <p:nvSpPr>
-          <p:cNvPr id="35" name="Shape 33"/>
-          <p:cNvSpPr/>
-          <p:nvPr/>
-        </p:nvSpPr>
-        <p:spPr>
-          <a:xfrm>
-            <a:off x="3293146" y="4169664"/>
-            <a:ext cx="685800" cy="384048"/>
+          <p:cNvPr id="38" name="Shape 36"/>
+          <p:cNvSpPr/>
+          <p:nvPr/>
+        </p:nvSpPr>
+        <p:spPr>
+          <a:xfrm>
+            <a:off x="2831592" y="4169664"/>
+            <a:ext cx="685800" cy="475488"/>
           </a:xfrm>
           <a:prstGeom prst="rect">
             <a:avLst>
-              <a:gd name="adj" fmla="val 9524"/>
+              <a:gd name="adj" fmla="val 7692"/>
             </a:avLst>
           </a:prstGeom>
           <a:solidFill>
@@ -27374,14 +28478,14 @@
       </p:sp>
       <p:sp>
         <p:nvSpPr>
-          <p:cNvPr id="36" name="Text 34"/>
-          <p:cNvSpPr/>
-          <p:nvPr/>
-        </p:nvSpPr>
-        <p:spPr>
-          <a:xfrm>
-            <a:off x="3293146" y="4169664"/>
-            <a:ext cx="685800" cy="384048"/>
+          <p:cNvPr id="39" name="Text 37"/>
+          <p:cNvSpPr/>
+          <p:nvPr/>
+        </p:nvSpPr>
+        <p:spPr>
+          <a:xfrm>
+            <a:off x="2831592" y="4169664"/>
+            <a:ext cx="685800" cy="475488"/>
           </a:xfrm>
           <a:prstGeom prst="rect">
             <a:avLst/>
@@ -27405,7 +28509,7 @@
                 <a:ea typeface="Trebuchet MS" pitchFamily="34" charset="-122"/>
                 <a:cs typeface="Trebuchet MS" pitchFamily="34" charset="-120"/>
               </a:rPr>
-              <a:t>e</a:t>
+              <a:t>r</a:t>
             </a:r>
             <a:endParaRPr lang="en-US" sz="900" dirty="0"/>
           </a:p>
@@ -27413,18 +28517,18 @@
       </p:sp>
       <p:sp>
         <p:nvSpPr>
-          <p:cNvPr id="37" name="Shape 35"/>
-          <p:cNvSpPr/>
-          <p:nvPr/>
-        </p:nvSpPr>
-        <p:spPr>
-          <a:xfrm>
-            <a:off x="4331643" y="4169664"/>
-            <a:ext cx="685800" cy="384048"/>
+          <p:cNvPr id="40" name="Shape 38"/>
+          <p:cNvSpPr/>
+          <p:nvPr/>
+        </p:nvSpPr>
+        <p:spPr>
+          <a:xfrm>
+            <a:off x="3639312" y="4169664"/>
+            <a:ext cx="685800" cy="475488"/>
           </a:xfrm>
           <a:prstGeom prst="rect">
             <a:avLst>
-              <a:gd name="adj" fmla="val 9524"/>
+              <a:gd name="adj" fmla="val 7692"/>
             </a:avLst>
           </a:prstGeom>
           <a:solidFill>
@@ -27440,14 +28544,14 @@
       </p:sp>
       <p:sp>
         <p:nvSpPr>
-          <p:cNvPr id="38" name="Text 36"/>
-          <p:cNvSpPr/>
-          <p:nvPr/>
-        </p:nvSpPr>
-        <p:spPr>
-          <a:xfrm>
-            <a:off x="4331643" y="4169664"/>
-            <a:ext cx="685800" cy="384048"/>
+          <p:cNvPr id="41" name="Text 39"/>
+          <p:cNvSpPr/>
+          <p:nvPr/>
+        </p:nvSpPr>
+        <p:spPr>
+          <a:xfrm>
+            <a:off x="3639312" y="4169664"/>
+            <a:ext cx="685800" cy="475488"/>
           </a:xfrm>
           <a:prstGeom prst="rect">
             <a:avLst/>
@@ -27471,7 +28575,7 @@
                 <a:ea typeface="Trebuchet MS" pitchFamily="34" charset="-122"/>
                 <a:cs typeface="Trebuchet MS" pitchFamily="34" charset="-120"/>
               </a:rPr>
-              <a:t>c</a:t>
+              <a:t>o</a:t>
             </a:r>
             <a:endParaRPr lang="en-US" sz="900" dirty="0"/>
           </a:p>
@@ -27479,57 +28583,18 @@
       </p:sp>
       <p:sp>
         <p:nvSpPr>
-          <p:cNvPr id="39" name="Text 37"/>
-          <p:cNvSpPr/>
-          <p:nvPr/>
-        </p:nvSpPr>
-        <p:spPr>
-          <a:xfrm>
-            <a:off x="4331643" y="4572000"/>
-            <a:ext cx="685800" cy="219456"/>
-          </a:xfrm>
-          <a:prstGeom prst="rect">
-            <a:avLst/>
-          </a:prstGeom>
-          <a:noFill/>
-          <a:ln/>
-        </p:spPr>
-        <p:txBody>
-          <a:bodyPr wrap="square" lIns="0" tIns="0" rIns="0" bIns="0" rtlCol="0" anchor="t"/>
-          <a:lstStyle/>
-          <a:p>
-            <a:pPr algn="ctr" indent="0" marL="0">
-              <a:buNone/>
-            </a:pPr>
-            <a:r>
-              <a:rPr lang="en-US" sz="750" i="1" dirty="0">
-                <a:solidFill>
-                  <a:srgbClr val="94A3B8"/>
-                </a:solidFill>
-                <a:latin typeface="Calibri" pitchFamily="34" charset="0"/>
-                <a:ea typeface="Calibri" pitchFamily="34" charset="-122"/>
-                <a:cs typeface="Calibri" pitchFamily="34" charset="-120"/>
-              </a:rPr>
-              <a:t>/k/</a:t>
-            </a:r>
-            <a:endParaRPr lang="en-US" sz="750" dirty="0"/>
-          </a:p>
-        </p:txBody>
-      </p:sp>
-      <p:sp>
-        <p:nvSpPr>
-          <p:cNvPr id="40" name="Shape 38"/>
-          <p:cNvSpPr/>
-          <p:nvPr/>
-        </p:nvSpPr>
-        <p:spPr>
-          <a:xfrm>
-            <a:off x="5370141" y="4169664"/>
-            <a:ext cx="685800" cy="384048"/>
+          <p:cNvPr id="42" name="Shape 40"/>
+          <p:cNvSpPr/>
+          <p:nvPr/>
+        </p:nvSpPr>
+        <p:spPr>
+          <a:xfrm>
+            <a:off x="4447032" y="4169664"/>
+            <a:ext cx="685800" cy="475488"/>
           </a:xfrm>
           <a:prstGeom prst="rect">
             <a:avLst>
-              <a:gd name="adj" fmla="val 9524"/>
+              <a:gd name="adj" fmla="val 7692"/>
             </a:avLst>
           </a:prstGeom>
           <a:solidFill>
@@ -27545,14 +28610,14 @@
       </p:sp>
       <p:sp>
         <p:nvSpPr>
-          <p:cNvPr id="41" name="Text 39"/>
-          <p:cNvSpPr/>
-          <p:nvPr/>
-        </p:nvSpPr>
-        <p:spPr>
-          <a:xfrm>
-            <a:off x="5370141" y="4169664"/>
-            <a:ext cx="685800" cy="384048"/>
+          <p:cNvPr id="43" name="Text 41"/>
+          <p:cNvSpPr/>
+          <p:nvPr/>
+        </p:nvSpPr>
+        <p:spPr>
+          <a:xfrm>
+            <a:off x="4447032" y="4169664"/>
+            <a:ext cx="685800" cy="475488"/>
           </a:xfrm>
           <a:prstGeom prst="rect">
             <a:avLst/>
@@ -27576,7 +28641,7 @@
                 <a:ea typeface="Trebuchet MS" pitchFamily="34" charset="-122"/>
                 <a:cs typeface="Trebuchet MS" pitchFamily="34" charset="-120"/>
               </a:rPr>
-              <a:t>l</a:t>
+              <a:t>c</a:t>
             </a:r>
             <a:endParaRPr lang="en-US" sz="900" dirty="0"/>
           </a:p>
@@ -27584,18 +28649,18 @@
       </p:sp>
       <p:sp>
         <p:nvSpPr>
-          <p:cNvPr id="42" name="Shape 40"/>
-          <p:cNvSpPr/>
-          <p:nvPr/>
-        </p:nvSpPr>
-        <p:spPr>
-          <a:xfrm>
-            <a:off x="6408638" y="4169664"/>
-            <a:ext cx="685800" cy="384048"/>
+          <p:cNvPr id="44" name="Shape 42"/>
+          <p:cNvSpPr/>
+          <p:nvPr/>
+        </p:nvSpPr>
+        <p:spPr>
+          <a:xfrm>
+            <a:off x="5254752" y="4169664"/>
+            <a:ext cx="685800" cy="475488"/>
           </a:xfrm>
           <a:prstGeom prst="rect">
             <a:avLst>
-              <a:gd name="adj" fmla="val 9524"/>
+              <a:gd name="adj" fmla="val 7692"/>
             </a:avLst>
           </a:prstGeom>
           <a:solidFill>
@@ -27611,14 +28676,14 @@
       </p:sp>
       <p:sp>
         <p:nvSpPr>
-          <p:cNvPr id="43" name="Text 41"/>
-          <p:cNvSpPr/>
-          <p:nvPr/>
-        </p:nvSpPr>
-        <p:spPr>
-          <a:xfrm>
-            <a:off x="6408638" y="4169664"/>
-            <a:ext cx="685800" cy="384048"/>
+          <p:cNvPr id="45" name="Text 43"/>
+          <p:cNvSpPr/>
+          <p:nvPr/>
+        </p:nvSpPr>
+        <p:spPr>
+          <a:xfrm>
+            <a:off x="5254752" y="4169664"/>
+            <a:ext cx="685800" cy="475488"/>
           </a:xfrm>
           <a:prstGeom prst="rect">
             <a:avLst/>
@@ -27642,7 +28707,7 @@
                 <a:ea typeface="Trebuchet MS" pitchFamily="34" charset="-122"/>
                 <a:cs typeface="Trebuchet MS" pitchFamily="34" charset="-120"/>
               </a:rPr>
-              <a:t>ai</a:t>
+              <a:t>l</a:t>
             </a:r>
             <a:endParaRPr lang="en-US" sz="900" dirty="0"/>
           </a:p>
@@ -27650,18 +28715,18 @@
       </p:sp>
       <p:sp>
         <p:nvSpPr>
-          <p:cNvPr id="44" name="Shape 42"/>
-          <p:cNvSpPr/>
-          <p:nvPr/>
-        </p:nvSpPr>
-        <p:spPr>
-          <a:xfrm>
-            <a:off x="7447135" y="4169664"/>
-            <a:ext cx="685800" cy="384048"/>
+          <p:cNvPr id="46" name="Shape 44"/>
+          <p:cNvSpPr/>
+          <p:nvPr/>
+        </p:nvSpPr>
+        <p:spPr>
+          <a:xfrm>
+            <a:off x="6062472" y="4169664"/>
+            <a:ext cx="685800" cy="475488"/>
           </a:xfrm>
           <a:prstGeom prst="rect">
             <a:avLst>
-              <a:gd name="adj" fmla="val 9524"/>
+              <a:gd name="adj" fmla="val 7692"/>
             </a:avLst>
           </a:prstGeom>
           <a:solidFill>
@@ -27677,14 +28742,14 @@
       </p:sp>
       <p:sp>
         <p:nvSpPr>
-          <p:cNvPr id="45" name="Text 43"/>
-          <p:cNvSpPr/>
-          <p:nvPr/>
-        </p:nvSpPr>
-        <p:spPr>
-          <a:xfrm>
-            <a:off x="7447135" y="4169664"/>
-            <a:ext cx="685800" cy="384048"/>
+          <p:cNvPr id="47" name="Text 45"/>
+          <p:cNvSpPr/>
+          <p:nvPr/>
+        </p:nvSpPr>
+        <p:spPr>
+          <a:xfrm>
+            <a:off x="6062472" y="4169664"/>
+            <a:ext cx="685800" cy="475488"/>
           </a:xfrm>
           <a:prstGeom prst="rect">
             <a:avLst/>
@@ -27708,7 +28773,139 @@
                 <a:ea typeface="Trebuchet MS" pitchFamily="34" charset="-122"/>
                 <a:cs typeface="Trebuchet MS" pitchFamily="34" charset="-120"/>
               </a:rPr>
+              <a:t>ai</a:t>
+            </a:r>
+            <a:endParaRPr lang="en-US" sz="900" dirty="0"/>
+          </a:p>
+        </p:txBody>
+      </p:sp>
+      <p:sp>
+        <p:nvSpPr>
+          <p:cNvPr id="48" name="Shape 46"/>
+          <p:cNvSpPr/>
+          <p:nvPr/>
+        </p:nvSpPr>
+        <p:spPr>
+          <a:xfrm>
+            <a:off x="6870192" y="4169664"/>
+            <a:ext cx="685800" cy="475488"/>
+          </a:xfrm>
+          <a:prstGeom prst="rect">
+            <a:avLst>
+              <a:gd name="adj" fmla="val 7692"/>
+            </a:avLst>
+          </a:prstGeom>
+          <a:solidFill>
+            <a:srgbClr val="FFFFFF"/>
+          </a:solidFill>
+          <a:ln w="12700">
+            <a:solidFill>
+              <a:srgbClr val="DB2777"/>
+            </a:solidFill>
+            <a:prstDash val="solid"/>
+          </a:ln>
+        </p:spPr>
+      </p:sp>
+      <p:sp>
+        <p:nvSpPr>
+          <p:cNvPr id="49" name="Text 47"/>
+          <p:cNvSpPr/>
+          <p:nvPr/>
+        </p:nvSpPr>
+        <p:spPr>
+          <a:xfrm>
+            <a:off x="6870192" y="4169664"/>
+            <a:ext cx="685800" cy="475488"/>
+          </a:xfrm>
+          <a:prstGeom prst="rect">
+            <a:avLst/>
+          </a:prstGeom>
+          <a:noFill/>
+          <a:ln/>
+        </p:spPr>
+        <p:txBody>
+          <a:bodyPr wrap="square" lIns="0" tIns="0" rIns="0" bIns="0" rtlCol="0" anchor="ctr"/>
+          <a:lstStyle/>
+          <a:p>
+            <a:pPr algn="ctr" indent="0" marL="0">
+              <a:buNone/>
+            </a:pPr>
+            <a:r>
+              <a:rPr lang="en-US" sz="900" b="1" dirty="0">
+                <a:solidFill>
+                  <a:srgbClr val="9D174D"/>
+                </a:solidFill>
+                <a:latin typeface="Trebuchet MS" pitchFamily="34" charset="0"/>
+                <a:ea typeface="Trebuchet MS" pitchFamily="34" charset="-122"/>
+                <a:cs typeface="Trebuchet MS" pitchFamily="34" charset="-120"/>
+              </a:rPr>
               <a:t>m</a:t>
+            </a:r>
+            <a:endParaRPr lang="en-US" sz="900" dirty="0"/>
+          </a:p>
+        </p:txBody>
+      </p:sp>
+      <p:sp>
+        <p:nvSpPr>
+          <p:cNvPr id="50" name="Shape 48"/>
+          <p:cNvSpPr/>
+          <p:nvPr/>
+        </p:nvSpPr>
+        <p:spPr>
+          <a:xfrm>
+            <a:off x="7677912" y="4169664"/>
+            <a:ext cx="685800" cy="475488"/>
+          </a:xfrm>
+          <a:prstGeom prst="rect">
+            <a:avLst>
+              <a:gd name="adj" fmla="val 7692"/>
+            </a:avLst>
+          </a:prstGeom>
+          <a:solidFill>
+            <a:srgbClr val="FFFFFF"/>
+          </a:solidFill>
+          <a:ln w="12700">
+            <a:solidFill>
+              <a:srgbClr val="DB2777"/>
+            </a:solidFill>
+            <a:prstDash val="solid"/>
+          </a:ln>
+        </p:spPr>
+      </p:sp>
+      <p:sp>
+        <p:nvSpPr>
+          <p:cNvPr id="51" name="Text 49"/>
+          <p:cNvSpPr/>
+          <p:nvPr/>
+        </p:nvSpPr>
+        <p:spPr>
+          <a:xfrm>
+            <a:off x="7677912" y="4169664"/>
+            <a:ext cx="685800" cy="475488"/>
+          </a:xfrm>
+          <a:prstGeom prst="rect">
+            <a:avLst/>
+          </a:prstGeom>
+          <a:noFill/>
+          <a:ln/>
+        </p:spPr>
+        <p:txBody>
+          <a:bodyPr wrap="square" lIns="0" tIns="0" rIns="0" bIns="0" rtlCol="0" anchor="ctr"/>
+          <a:lstStyle/>
+          <a:p>
+            <a:pPr algn="ctr" indent="0" marL="0">
+              <a:buNone/>
+            </a:pPr>
+            <a:r>
+              <a:rPr lang="en-US" sz="900" b="1" dirty="0">
+                <a:solidFill>
+                  <a:srgbClr val="9D174D"/>
+                </a:solidFill>
+                <a:latin typeface="Trebuchet MS" pitchFamily="34" charset="0"/>
+                <a:ea typeface="Trebuchet MS" pitchFamily="34" charset="-122"/>
+                <a:cs typeface="Trebuchet MS" pitchFamily="34" charset="-120"/>
+              </a:rPr>
+              <a:t>ed</a:t>
             </a:r>
             <a:endParaRPr lang="en-US" sz="900" dirty="0"/>
           </a:p>
@@ -28000,7 +29197,7 @@
                 <a:ea typeface="Calibri" pitchFamily="34" charset="-122"/>
                 <a:cs typeface="Calibri" pitchFamily="34" charset="-120"/>
               </a:rPr>
-              <a:t>Word Labs  •  wordlabs.app  •  Root: 'claim' = to call out or declare</a:t>
+              <a:t>Word Labs  •  wordlabs.app  •  Root: 'claim' = call out; cry</a:t>
             </a:r>
             <a:endParaRPr lang="en-US" sz="800" dirty="0"/>
           </a:p>
@@ -28139,7 +29336,7 @@
                 <a:ea typeface="Trebuchet MS" pitchFamily="34" charset="-122"/>
                 <a:cs typeface="Trebuchet MS" pitchFamily="34" charset="-120"/>
               </a:rPr>
-              <a:t>disclaim</a:t>
+              <a:t>disclaimers</a:t>
             </a:r>
             <a:endParaRPr lang="en-US" sz="2800" dirty="0"/>
           </a:p>
@@ -28827,7 +30024,7 @@
                 <a:ea typeface="Calibri" pitchFamily="34" charset="-122"/>
                 <a:cs typeface="Calibri" pitchFamily="34" charset="-120"/>
               </a:rPr>
-              <a:t>Word Labs  •  wordlabs.app  •  Root: 'claim' = to call out or declare</a:t>
+              <a:t>Word Labs  •  wordlabs.app  •  Root: 'claim' = call out; cry</a:t>
             </a:r>
             <a:endParaRPr lang="en-US" sz="800" dirty="0"/>
           </a:p>
@@ -28966,7 +30163,7 @@
                 <a:ea typeface="Trebuchet MS" pitchFamily="34" charset="-122"/>
                 <a:cs typeface="Trebuchet MS" pitchFamily="34" charset="-120"/>
               </a:rPr>
-              <a:t>disclaim</a:t>
+              <a:t>disclaimers</a:t>
             </a:r>
             <a:endParaRPr lang="en-US" sz="2800" dirty="0"/>
           </a:p>
@@ -29046,8 +30243,8 @@
         </p:nvSpPr>
         <p:spPr>
           <a:xfrm>
-            <a:off x="2938272" y="2258568"/>
-            <a:ext cx="1828800" cy="292608"/>
+            <a:off x="1989734" y="2258568"/>
+            <a:ext cx="1581912" cy="292608"/>
           </a:xfrm>
           <a:prstGeom prst="rect">
             <a:avLst>
@@ -29080,8 +30277,8 @@
         </p:nvSpPr>
         <p:spPr>
           <a:xfrm>
-            <a:off x="2938272" y="2258568"/>
-            <a:ext cx="1828800" cy="292608"/>
+            <a:off x="1989734" y="2258568"/>
+            <a:ext cx="1581912" cy="292608"/>
           </a:xfrm>
           <a:prstGeom prst="rect">
             <a:avLst/>
@@ -29119,8 +30316,8 @@
         </p:nvSpPr>
         <p:spPr>
           <a:xfrm>
-            <a:off x="2938272" y="2569464"/>
-            <a:ext cx="1828800" cy="201168"/>
+            <a:off x="1989734" y="2569464"/>
+            <a:ext cx="1581912" cy="201168"/>
           </a:xfrm>
           <a:prstGeom prst="rect">
             <a:avLst/>
@@ -29144,7 +30341,7 @@
                 <a:ea typeface="Calibri" pitchFamily="34" charset="-122"/>
                 <a:cs typeface="Calibri" pitchFamily="34" charset="-120"/>
               </a:rPr>
-              <a:t>not, away from</a:t>
+              <a:t>not; opposite; apart</a:t>
             </a:r>
             <a:endParaRPr lang="en-US" sz="850" dirty="0"/>
           </a:p>
@@ -29158,8 +30355,8 @@
         </p:nvSpPr>
         <p:spPr>
           <a:xfrm>
-            <a:off x="5803392" y="2258568"/>
-            <a:ext cx="1828800" cy="292608"/>
+            <a:off x="3659429" y="2258568"/>
+            <a:ext cx="1581912" cy="292608"/>
           </a:xfrm>
           <a:prstGeom prst="rect">
             <a:avLst>
@@ -29192,8 +30389,8 @@
         </p:nvSpPr>
         <p:spPr>
           <a:xfrm>
-            <a:off x="5803392" y="2258568"/>
-            <a:ext cx="1828800" cy="292608"/>
+            <a:off x="3659429" y="2258568"/>
+            <a:ext cx="1581912" cy="292608"/>
           </a:xfrm>
           <a:prstGeom prst="rect">
             <a:avLst/>
@@ -29231,8 +30428,8 @@
         </p:nvSpPr>
         <p:spPr>
           <a:xfrm>
-            <a:off x="5803392" y="2569464"/>
-            <a:ext cx="1828800" cy="201168"/>
+            <a:off x="3659429" y="2569464"/>
+            <a:ext cx="1581912" cy="201168"/>
           </a:xfrm>
           <a:prstGeom prst="rect">
             <a:avLst/>
@@ -29256,7 +30453,7 @@
                 <a:ea typeface="Calibri" pitchFamily="34" charset="-122"/>
                 <a:cs typeface="Calibri" pitchFamily="34" charset="-120"/>
               </a:rPr>
-              <a:t>to call out or declare</a:t>
+              <a:t>call out; cry</a:t>
             </a:r>
             <a:endParaRPr lang="en-US" sz="850" dirty="0"/>
           </a:p>
@@ -29265,6 +30462,230 @@
       <p:sp>
         <p:nvSpPr>
           <p:cNvPr id="22" name="Shape 20"/>
+          <p:cNvSpPr/>
+          <p:nvPr/>
+        </p:nvSpPr>
+        <p:spPr>
+          <a:xfrm>
+            <a:off x="5329123" y="2258568"/>
+            <a:ext cx="1581912" cy="292608"/>
+          </a:xfrm>
+          <a:prstGeom prst="rect">
+            <a:avLst>
+              <a:gd name="adj" fmla="val 25000"/>
+            </a:avLst>
+          </a:prstGeom>
+          <a:solidFill>
+            <a:srgbClr val="FCE7F3"/>
+          </a:solidFill>
+          <a:ln w="19050">
+            <a:solidFill>
+              <a:srgbClr val="DB2777"/>
+            </a:solidFill>
+            <a:prstDash val="solid"/>
+          </a:ln>
+          <a:effectLst>
+            <a:outerShdw sx="100000" sy="100000" kx="0" ky="0" algn="bl" rotWithShape="0" blurRad="101600" dist="38100" dir="8100000">
+              <a:srgbClr val="000000">
+                <a:alpha val="12000"/>
+              </a:srgbClr>
+            </a:outerShdw>
+          </a:effectLst>
+        </p:spPr>
+      </p:sp>
+      <p:sp>
+        <p:nvSpPr>
+          <p:cNvPr id="23" name="Text 21"/>
+          <p:cNvSpPr/>
+          <p:nvPr/>
+        </p:nvSpPr>
+        <p:spPr>
+          <a:xfrm>
+            <a:off x="5329123" y="2258568"/>
+            <a:ext cx="1581912" cy="292608"/>
+          </a:xfrm>
+          <a:prstGeom prst="rect">
+            <a:avLst/>
+          </a:prstGeom>
+          <a:noFill/>
+          <a:ln/>
+        </p:spPr>
+        <p:txBody>
+          <a:bodyPr wrap="square" lIns="0" tIns="0" rIns="0" bIns="0" rtlCol="0" anchor="ctr"/>
+          <a:lstStyle/>
+          <a:p>
+            <a:pPr algn="ctr" indent="0" marL="0">
+              <a:buNone/>
+            </a:pPr>
+            <a:r>
+              <a:rPr lang="en-US" sz="1300" b="1" dirty="0">
+                <a:solidFill>
+                  <a:srgbClr val="9D174D"/>
+                </a:solidFill>
+                <a:latin typeface="Trebuchet MS" pitchFamily="34" charset="0"/>
+                <a:ea typeface="Trebuchet MS" pitchFamily="34" charset="-122"/>
+                <a:cs typeface="Trebuchet MS" pitchFamily="34" charset="-120"/>
+              </a:rPr>
+              <a:t>er</a:t>
+            </a:r>
+            <a:endParaRPr lang="en-US" sz="1300" dirty="0"/>
+          </a:p>
+        </p:txBody>
+      </p:sp>
+      <p:sp>
+        <p:nvSpPr>
+          <p:cNvPr id="24" name="Text 22"/>
+          <p:cNvSpPr/>
+          <p:nvPr/>
+        </p:nvSpPr>
+        <p:spPr>
+          <a:xfrm>
+            <a:off x="5329123" y="2569464"/>
+            <a:ext cx="1581912" cy="201168"/>
+          </a:xfrm>
+          <a:prstGeom prst="rect">
+            <a:avLst/>
+          </a:prstGeom>
+          <a:noFill/>
+          <a:ln/>
+        </p:spPr>
+        <p:txBody>
+          <a:bodyPr wrap="square" lIns="0" tIns="0" rIns="0" bIns="0" rtlCol="0" anchor="t"/>
+          <a:lstStyle/>
+          <a:p>
+            <a:pPr algn="ctr" indent="0" marL="0">
+              <a:buNone/>
+            </a:pPr>
+            <a:r>
+              <a:rPr lang="en-US" sz="850" dirty="0">
+                <a:solidFill>
+                  <a:srgbClr val="475569"/>
+                </a:solidFill>
+                <a:latin typeface="Calibri" pitchFamily="34" charset="0"/>
+                <a:ea typeface="Calibri" pitchFamily="34" charset="-122"/>
+                <a:cs typeface="Calibri" pitchFamily="34" charset="-120"/>
+              </a:rPr>
+              <a:t>person who; more</a:t>
+            </a:r>
+            <a:endParaRPr lang="en-US" sz="850" dirty="0"/>
+          </a:p>
+        </p:txBody>
+      </p:sp>
+      <p:sp>
+        <p:nvSpPr>
+          <p:cNvPr id="25" name="Shape 23"/>
+          <p:cNvSpPr/>
+          <p:nvPr/>
+        </p:nvSpPr>
+        <p:spPr>
+          <a:xfrm>
+            <a:off x="6998818" y="2258568"/>
+            <a:ext cx="1581912" cy="292608"/>
+          </a:xfrm>
+          <a:prstGeom prst="rect">
+            <a:avLst>
+              <a:gd name="adj" fmla="val 25000"/>
+            </a:avLst>
+          </a:prstGeom>
+          <a:solidFill>
+            <a:srgbClr val="FCE7F3"/>
+          </a:solidFill>
+          <a:ln w="19050">
+            <a:solidFill>
+              <a:srgbClr val="DB2777"/>
+            </a:solidFill>
+            <a:prstDash val="solid"/>
+          </a:ln>
+          <a:effectLst>
+            <a:outerShdw sx="100000" sy="100000" kx="0" ky="0" algn="bl" rotWithShape="0" blurRad="101600" dist="38100" dir="8100000">
+              <a:srgbClr val="000000">
+                <a:alpha val="12000"/>
+              </a:srgbClr>
+            </a:outerShdw>
+          </a:effectLst>
+        </p:spPr>
+      </p:sp>
+      <p:sp>
+        <p:nvSpPr>
+          <p:cNvPr id="26" name="Text 24"/>
+          <p:cNvSpPr/>
+          <p:nvPr/>
+        </p:nvSpPr>
+        <p:spPr>
+          <a:xfrm>
+            <a:off x="6998818" y="2258568"/>
+            <a:ext cx="1581912" cy="292608"/>
+          </a:xfrm>
+          <a:prstGeom prst="rect">
+            <a:avLst/>
+          </a:prstGeom>
+          <a:noFill/>
+          <a:ln/>
+        </p:spPr>
+        <p:txBody>
+          <a:bodyPr wrap="square" lIns="0" tIns="0" rIns="0" bIns="0" rtlCol="0" anchor="ctr"/>
+          <a:lstStyle/>
+          <a:p>
+            <a:pPr algn="ctr" indent="0" marL="0">
+              <a:buNone/>
+            </a:pPr>
+            <a:r>
+              <a:rPr lang="en-US" sz="1300" b="1" dirty="0">
+                <a:solidFill>
+                  <a:srgbClr val="9D174D"/>
+                </a:solidFill>
+                <a:latin typeface="Trebuchet MS" pitchFamily="34" charset="0"/>
+                <a:ea typeface="Trebuchet MS" pitchFamily="34" charset="-122"/>
+                <a:cs typeface="Trebuchet MS" pitchFamily="34" charset="-120"/>
+              </a:rPr>
+              <a:t>s</a:t>
+            </a:r>
+            <a:endParaRPr lang="en-US" sz="1300" dirty="0"/>
+          </a:p>
+        </p:txBody>
+      </p:sp>
+      <p:sp>
+        <p:nvSpPr>
+          <p:cNvPr id="27" name="Text 25"/>
+          <p:cNvSpPr/>
+          <p:nvPr/>
+        </p:nvSpPr>
+        <p:spPr>
+          <a:xfrm>
+            <a:off x="6998818" y="2569464"/>
+            <a:ext cx="1581912" cy="201168"/>
+          </a:xfrm>
+          <a:prstGeom prst="rect">
+            <a:avLst/>
+          </a:prstGeom>
+          <a:noFill/>
+          <a:ln/>
+        </p:spPr>
+        <p:txBody>
+          <a:bodyPr wrap="square" lIns="0" tIns="0" rIns="0" bIns="0" rtlCol="0" anchor="t"/>
+          <a:lstStyle/>
+          <a:p>
+            <a:pPr algn="ctr" indent="0" marL="0">
+              <a:buNone/>
+            </a:pPr>
+            <a:r>
+              <a:rPr lang="en-US" sz="850" dirty="0">
+                <a:solidFill>
+                  <a:srgbClr val="475569"/>
+                </a:solidFill>
+                <a:latin typeface="Calibri" pitchFamily="34" charset="0"/>
+                <a:ea typeface="Calibri" pitchFamily="34" charset="-122"/>
+                <a:cs typeface="Calibri" pitchFamily="34" charset="-120"/>
+              </a:rPr>
+              <a:t>plural or present tense</a:t>
+            </a:r>
+            <a:endParaRPr lang="en-US" sz="850" dirty="0"/>
+          </a:p>
+        </p:txBody>
+      </p:sp>
+      <p:sp>
+        <p:nvSpPr>
+          <p:cNvPr id="28" name="Shape 26"/>
           <p:cNvSpPr/>
           <p:nvPr/>
         </p:nvSpPr>
@@ -29291,7 +30712,7 @@
       </p:sp>
       <p:sp>
         <p:nvSpPr>
-          <p:cNvPr id="23" name="Text 21"/>
+          <p:cNvPr id="29" name="Text 27"/>
           <p:cNvSpPr/>
           <p:nvPr/>
         </p:nvSpPr>
@@ -29330,7 +30751,7 @@
       </p:sp>
       <p:sp>
         <p:nvSpPr>
-          <p:cNvPr id="24" name="Shape 22"/>
+          <p:cNvPr id="30" name="Shape 28"/>
           <p:cNvSpPr/>
           <p:nvPr/>
         </p:nvSpPr>
@@ -29357,7 +30778,7 @@
       </p:sp>
       <p:sp>
         <p:nvSpPr>
-          <p:cNvPr id="25" name="Text 23"/>
+          <p:cNvPr id="31" name="Text 29"/>
           <p:cNvSpPr/>
           <p:nvPr/>
         </p:nvSpPr>
@@ -29396,7 +30817,7 @@
       </p:sp>
       <p:sp>
         <p:nvSpPr>
-          <p:cNvPr id="26" name="Shape 24"/>
+          <p:cNvPr id="32" name="Shape 30"/>
           <p:cNvSpPr/>
           <p:nvPr/>
         </p:nvSpPr>
@@ -29423,7 +30844,7 @@
       </p:sp>
       <p:sp>
         <p:nvSpPr>
-          <p:cNvPr id="27" name="Text 25"/>
+          <p:cNvPr id="33" name="Text 31"/>
           <p:cNvSpPr/>
           <p:nvPr/>
         </p:nvSpPr>
@@ -29462,7 +30883,7 @@
       </p:sp>
       <p:sp>
         <p:nvSpPr>
-          <p:cNvPr id="28" name="Shape 26"/>
+          <p:cNvPr id="34" name="Shape 32"/>
           <p:cNvSpPr/>
           <p:nvPr/>
         </p:nvSpPr>
@@ -29489,7 +30910,7 @@
       </p:sp>
       <p:sp>
         <p:nvSpPr>
-          <p:cNvPr id="29" name="Text 27"/>
+          <p:cNvPr id="35" name="Text 33"/>
           <p:cNvSpPr/>
           <p:nvPr/>
         </p:nvSpPr>
@@ -29812,7 +31233,7 @@
                 <a:ea typeface="Calibri" pitchFamily="34" charset="-122"/>
                 <a:cs typeface="Calibri" pitchFamily="34" charset="-120"/>
               </a:rPr>
-              <a:t>Word Labs  •  wordlabs.app  •  Root: 'claim' = to call out or declare</a:t>
+              <a:t>Word Labs  •  wordlabs.app  •  Root: 'claim' = call out; cry</a:t>
             </a:r>
             <a:endParaRPr lang="en-US" sz="800" dirty="0"/>
           </a:p>
@@ -29951,7 +31372,7 @@
                 <a:ea typeface="Trebuchet MS" pitchFamily="34" charset="-122"/>
                 <a:cs typeface="Trebuchet MS" pitchFamily="34" charset="-120"/>
               </a:rPr>
-              <a:t>disclaim</a:t>
+              <a:t>disclaimers</a:t>
             </a:r>
             <a:endParaRPr lang="en-US" sz="2800" dirty="0"/>
           </a:p>
@@ -30031,8 +31452,8 @@
         </p:nvSpPr>
         <p:spPr>
           <a:xfrm>
-            <a:off x="2938272" y="2258568"/>
-            <a:ext cx="1828800" cy="292608"/>
+            <a:off x="1989734" y="2258568"/>
+            <a:ext cx="1581912" cy="292608"/>
           </a:xfrm>
           <a:prstGeom prst="rect">
             <a:avLst>
@@ -30065,8 +31486,8 @@
         </p:nvSpPr>
         <p:spPr>
           <a:xfrm>
-            <a:off x="2938272" y="2258568"/>
-            <a:ext cx="1828800" cy="292608"/>
+            <a:off x="1989734" y="2258568"/>
+            <a:ext cx="1581912" cy="292608"/>
           </a:xfrm>
           <a:prstGeom prst="rect">
             <a:avLst/>
@@ -30104,8 +31525,8 @@
         </p:nvSpPr>
         <p:spPr>
           <a:xfrm>
-            <a:off x="2938272" y="2569464"/>
-            <a:ext cx="1828800" cy="201168"/>
+            <a:off x="1989734" y="2569464"/>
+            <a:ext cx="1581912" cy="201168"/>
           </a:xfrm>
           <a:prstGeom prst="rect">
             <a:avLst/>
@@ -30129,7 +31550,7 @@
                 <a:ea typeface="Calibri" pitchFamily="34" charset="-122"/>
                 <a:cs typeface="Calibri" pitchFamily="34" charset="-120"/>
               </a:rPr>
-              <a:t>not, away from</a:t>
+              <a:t>not; opposite; apart</a:t>
             </a:r>
             <a:endParaRPr lang="en-US" sz="850" dirty="0"/>
           </a:p>
@@ -30143,8 +31564,8 @@
         </p:nvSpPr>
         <p:spPr>
           <a:xfrm>
-            <a:off x="5803392" y="2258568"/>
-            <a:ext cx="1828800" cy="292608"/>
+            <a:off x="3659429" y="2258568"/>
+            <a:ext cx="1581912" cy="292608"/>
           </a:xfrm>
           <a:prstGeom prst="rect">
             <a:avLst>
@@ -30177,8 +31598,8 @@
         </p:nvSpPr>
         <p:spPr>
           <a:xfrm>
-            <a:off x="5803392" y="2258568"/>
-            <a:ext cx="1828800" cy="292608"/>
+            <a:off x="3659429" y="2258568"/>
+            <a:ext cx="1581912" cy="292608"/>
           </a:xfrm>
           <a:prstGeom prst="rect">
             <a:avLst/>
@@ -30216,8 +31637,8 @@
         </p:nvSpPr>
         <p:spPr>
           <a:xfrm>
-            <a:off x="5803392" y="2569464"/>
-            <a:ext cx="1828800" cy="201168"/>
+            <a:off x="3659429" y="2569464"/>
+            <a:ext cx="1581912" cy="201168"/>
           </a:xfrm>
           <a:prstGeom prst="rect">
             <a:avLst/>
@@ -30241,7 +31662,7 @@
                 <a:ea typeface="Calibri" pitchFamily="34" charset="-122"/>
                 <a:cs typeface="Calibri" pitchFamily="34" charset="-120"/>
               </a:rPr>
-              <a:t>to call out or declare</a:t>
+              <a:t>call out; cry</a:t>
             </a:r>
             <a:endParaRPr lang="en-US" sz="850" dirty="0"/>
           </a:p>
@@ -30250,6 +31671,230 @@
       <p:sp>
         <p:nvSpPr>
           <p:cNvPr id="22" name="Shape 20"/>
+          <p:cNvSpPr/>
+          <p:nvPr/>
+        </p:nvSpPr>
+        <p:spPr>
+          <a:xfrm>
+            <a:off x="5329123" y="2258568"/>
+            <a:ext cx="1581912" cy="292608"/>
+          </a:xfrm>
+          <a:prstGeom prst="rect">
+            <a:avLst>
+              <a:gd name="adj" fmla="val 25000"/>
+            </a:avLst>
+          </a:prstGeom>
+          <a:solidFill>
+            <a:srgbClr val="FCE7F3"/>
+          </a:solidFill>
+          <a:ln w="19050">
+            <a:solidFill>
+              <a:srgbClr val="DB2777"/>
+            </a:solidFill>
+            <a:prstDash val="solid"/>
+          </a:ln>
+          <a:effectLst>
+            <a:outerShdw sx="100000" sy="100000" kx="0" ky="0" algn="bl" rotWithShape="0" blurRad="101600" dist="38100" dir="8100000">
+              <a:srgbClr val="000000">
+                <a:alpha val="12000"/>
+              </a:srgbClr>
+            </a:outerShdw>
+          </a:effectLst>
+        </p:spPr>
+      </p:sp>
+      <p:sp>
+        <p:nvSpPr>
+          <p:cNvPr id="23" name="Text 21"/>
+          <p:cNvSpPr/>
+          <p:nvPr/>
+        </p:nvSpPr>
+        <p:spPr>
+          <a:xfrm>
+            <a:off x="5329123" y="2258568"/>
+            <a:ext cx="1581912" cy="292608"/>
+          </a:xfrm>
+          <a:prstGeom prst="rect">
+            <a:avLst/>
+          </a:prstGeom>
+          <a:noFill/>
+          <a:ln/>
+        </p:spPr>
+        <p:txBody>
+          <a:bodyPr wrap="square" lIns="0" tIns="0" rIns="0" bIns="0" rtlCol="0" anchor="ctr"/>
+          <a:lstStyle/>
+          <a:p>
+            <a:pPr algn="ctr" indent="0" marL="0">
+              <a:buNone/>
+            </a:pPr>
+            <a:r>
+              <a:rPr lang="en-US" sz="1300" b="1" dirty="0">
+                <a:solidFill>
+                  <a:srgbClr val="9D174D"/>
+                </a:solidFill>
+                <a:latin typeface="Trebuchet MS" pitchFamily="34" charset="0"/>
+                <a:ea typeface="Trebuchet MS" pitchFamily="34" charset="-122"/>
+                <a:cs typeface="Trebuchet MS" pitchFamily="34" charset="-120"/>
+              </a:rPr>
+              <a:t>er</a:t>
+            </a:r>
+            <a:endParaRPr lang="en-US" sz="1300" dirty="0"/>
+          </a:p>
+        </p:txBody>
+      </p:sp>
+      <p:sp>
+        <p:nvSpPr>
+          <p:cNvPr id="24" name="Text 22"/>
+          <p:cNvSpPr/>
+          <p:nvPr/>
+        </p:nvSpPr>
+        <p:spPr>
+          <a:xfrm>
+            <a:off x="5329123" y="2569464"/>
+            <a:ext cx="1581912" cy="201168"/>
+          </a:xfrm>
+          <a:prstGeom prst="rect">
+            <a:avLst/>
+          </a:prstGeom>
+          <a:noFill/>
+          <a:ln/>
+        </p:spPr>
+        <p:txBody>
+          <a:bodyPr wrap="square" lIns="0" tIns="0" rIns="0" bIns="0" rtlCol="0" anchor="t"/>
+          <a:lstStyle/>
+          <a:p>
+            <a:pPr algn="ctr" indent="0" marL="0">
+              <a:buNone/>
+            </a:pPr>
+            <a:r>
+              <a:rPr lang="en-US" sz="850" dirty="0">
+                <a:solidFill>
+                  <a:srgbClr val="475569"/>
+                </a:solidFill>
+                <a:latin typeface="Calibri" pitchFamily="34" charset="0"/>
+                <a:ea typeface="Calibri" pitchFamily="34" charset="-122"/>
+                <a:cs typeface="Calibri" pitchFamily="34" charset="-120"/>
+              </a:rPr>
+              <a:t>person who; more</a:t>
+            </a:r>
+            <a:endParaRPr lang="en-US" sz="850" dirty="0"/>
+          </a:p>
+        </p:txBody>
+      </p:sp>
+      <p:sp>
+        <p:nvSpPr>
+          <p:cNvPr id="25" name="Shape 23"/>
+          <p:cNvSpPr/>
+          <p:nvPr/>
+        </p:nvSpPr>
+        <p:spPr>
+          <a:xfrm>
+            <a:off x="6998818" y="2258568"/>
+            <a:ext cx="1581912" cy="292608"/>
+          </a:xfrm>
+          <a:prstGeom prst="rect">
+            <a:avLst>
+              <a:gd name="adj" fmla="val 25000"/>
+            </a:avLst>
+          </a:prstGeom>
+          <a:solidFill>
+            <a:srgbClr val="FCE7F3"/>
+          </a:solidFill>
+          <a:ln w="19050">
+            <a:solidFill>
+              <a:srgbClr val="DB2777"/>
+            </a:solidFill>
+            <a:prstDash val="solid"/>
+          </a:ln>
+          <a:effectLst>
+            <a:outerShdw sx="100000" sy="100000" kx="0" ky="0" algn="bl" rotWithShape="0" blurRad="101600" dist="38100" dir="8100000">
+              <a:srgbClr val="000000">
+                <a:alpha val="12000"/>
+              </a:srgbClr>
+            </a:outerShdw>
+          </a:effectLst>
+        </p:spPr>
+      </p:sp>
+      <p:sp>
+        <p:nvSpPr>
+          <p:cNvPr id="26" name="Text 24"/>
+          <p:cNvSpPr/>
+          <p:nvPr/>
+        </p:nvSpPr>
+        <p:spPr>
+          <a:xfrm>
+            <a:off x="6998818" y="2258568"/>
+            <a:ext cx="1581912" cy="292608"/>
+          </a:xfrm>
+          <a:prstGeom prst="rect">
+            <a:avLst/>
+          </a:prstGeom>
+          <a:noFill/>
+          <a:ln/>
+        </p:spPr>
+        <p:txBody>
+          <a:bodyPr wrap="square" lIns="0" tIns="0" rIns="0" bIns="0" rtlCol="0" anchor="ctr"/>
+          <a:lstStyle/>
+          <a:p>
+            <a:pPr algn="ctr" indent="0" marL="0">
+              <a:buNone/>
+            </a:pPr>
+            <a:r>
+              <a:rPr lang="en-US" sz="1300" b="1" dirty="0">
+                <a:solidFill>
+                  <a:srgbClr val="9D174D"/>
+                </a:solidFill>
+                <a:latin typeface="Trebuchet MS" pitchFamily="34" charset="0"/>
+                <a:ea typeface="Trebuchet MS" pitchFamily="34" charset="-122"/>
+                <a:cs typeface="Trebuchet MS" pitchFamily="34" charset="-120"/>
+              </a:rPr>
+              <a:t>s</a:t>
+            </a:r>
+            <a:endParaRPr lang="en-US" sz="1300" dirty="0"/>
+          </a:p>
+        </p:txBody>
+      </p:sp>
+      <p:sp>
+        <p:nvSpPr>
+          <p:cNvPr id="27" name="Text 25"/>
+          <p:cNvSpPr/>
+          <p:nvPr/>
+        </p:nvSpPr>
+        <p:spPr>
+          <a:xfrm>
+            <a:off x="6998818" y="2569464"/>
+            <a:ext cx="1581912" cy="201168"/>
+          </a:xfrm>
+          <a:prstGeom prst="rect">
+            <a:avLst/>
+          </a:prstGeom>
+          <a:noFill/>
+          <a:ln/>
+        </p:spPr>
+        <p:txBody>
+          <a:bodyPr wrap="square" lIns="0" tIns="0" rIns="0" bIns="0" rtlCol="0" anchor="t"/>
+          <a:lstStyle/>
+          <a:p>
+            <a:pPr algn="ctr" indent="0" marL="0">
+              <a:buNone/>
+            </a:pPr>
+            <a:r>
+              <a:rPr lang="en-US" sz="850" dirty="0">
+                <a:solidFill>
+                  <a:srgbClr val="475569"/>
+                </a:solidFill>
+                <a:latin typeface="Calibri" pitchFamily="34" charset="0"/>
+                <a:ea typeface="Calibri" pitchFamily="34" charset="-122"/>
+                <a:cs typeface="Calibri" pitchFamily="34" charset="-120"/>
+              </a:rPr>
+              <a:t>plural or present tense</a:t>
+            </a:r>
+            <a:endParaRPr lang="en-US" sz="850" dirty="0"/>
+          </a:p>
+        </p:txBody>
+      </p:sp>
+      <p:sp>
+        <p:nvSpPr>
+          <p:cNvPr id="28" name="Shape 26"/>
           <p:cNvSpPr/>
           <p:nvPr/>
         </p:nvSpPr>
@@ -30276,7 +31921,7 @@
       </p:sp>
       <p:sp>
         <p:nvSpPr>
-          <p:cNvPr id="23" name="Text 21"/>
+          <p:cNvPr id="29" name="Text 27"/>
           <p:cNvSpPr/>
           <p:nvPr/>
         </p:nvSpPr>
@@ -30315,7 +31960,7 @@
       </p:sp>
       <p:sp>
         <p:nvSpPr>
-          <p:cNvPr id="24" name="Shape 22"/>
+          <p:cNvPr id="30" name="Shape 28"/>
           <p:cNvSpPr/>
           <p:nvPr/>
         </p:nvSpPr>
@@ -30342,13 +31987,13 @@
       </p:sp>
       <p:sp>
         <p:nvSpPr>
-          <p:cNvPr id="25" name="Shape 23"/>
-          <p:cNvSpPr/>
-          <p:nvPr/>
-        </p:nvSpPr>
-        <p:spPr>
-          <a:xfrm>
-            <a:off x="2999232" y="3364992"/>
+          <p:cNvPr id="31" name="Shape 29"/>
+          <p:cNvSpPr/>
+          <p:nvPr/>
+        </p:nvSpPr>
+        <p:spPr>
+          <a:xfrm>
+            <a:off x="2313432" y="3364992"/>
             <a:ext cx="1645920" cy="475488"/>
           </a:xfrm>
           <a:prstGeom prst="rect">
@@ -30369,13 +32014,13 @@
       </p:sp>
       <p:sp>
         <p:nvSpPr>
-          <p:cNvPr id="26" name="Text 24"/>
-          <p:cNvSpPr/>
-          <p:nvPr/>
-        </p:nvSpPr>
-        <p:spPr>
-          <a:xfrm>
-            <a:off x="2999232" y="3364992"/>
+          <p:cNvPr id="32" name="Text 30"/>
+          <p:cNvSpPr/>
+          <p:nvPr/>
+        </p:nvSpPr>
+        <p:spPr>
+          <a:xfrm>
+            <a:off x="2313432" y="3364992"/>
             <a:ext cx="1645920" cy="475488"/>
           </a:xfrm>
           <a:prstGeom prst="rect">
@@ -30408,14 +32053,14 @@
       </p:sp>
       <p:sp>
         <p:nvSpPr>
-          <p:cNvPr id="27" name="Text 25"/>
-          <p:cNvSpPr/>
-          <p:nvPr/>
-        </p:nvSpPr>
-        <p:spPr>
-          <a:xfrm>
-            <a:off x="4645152" y="3364992"/>
-            <a:ext cx="1097280" cy="475488"/>
+          <p:cNvPr id="33" name="Text 31"/>
+          <p:cNvSpPr/>
+          <p:nvPr/>
+        </p:nvSpPr>
+        <p:spPr>
+          <a:xfrm>
+            <a:off x="3959352" y="3364992"/>
+            <a:ext cx="411480" cy="475488"/>
           </a:xfrm>
           <a:prstGeom prst="rect">
             <a:avLst/>
@@ -30447,13 +32092,13 @@
       </p:sp>
       <p:sp>
         <p:nvSpPr>
-          <p:cNvPr id="28" name="Shape 26"/>
-          <p:cNvSpPr/>
-          <p:nvPr/>
-        </p:nvSpPr>
-        <p:spPr>
-          <a:xfrm>
-            <a:off x="5742432" y="3364992"/>
+          <p:cNvPr id="34" name="Shape 32"/>
+          <p:cNvSpPr/>
+          <p:nvPr/>
+        </p:nvSpPr>
+        <p:spPr>
+          <a:xfrm>
+            <a:off x="4370832" y="3364992"/>
             <a:ext cx="1645920" cy="475488"/>
           </a:xfrm>
           <a:prstGeom prst="rect">
@@ -30474,13 +32119,13 @@
       </p:sp>
       <p:sp>
         <p:nvSpPr>
-          <p:cNvPr id="29" name="Text 27"/>
-          <p:cNvSpPr/>
-          <p:nvPr/>
-        </p:nvSpPr>
-        <p:spPr>
-          <a:xfrm>
-            <a:off x="5742432" y="3364992"/>
+          <p:cNvPr id="35" name="Text 33"/>
+          <p:cNvSpPr/>
+          <p:nvPr/>
+        </p:nvSpPr>
+        <p:spPr>
+          <a:xfrm>
+            <a:off x="4370832" y="3364992"/>
             <a:ext cx="1645920" cy="475488"/>
           </a:xfrm>
           <a:prstGeom prst="rect">
@@ -30513,7 +32158,112 @@
       </p:sp>
       <p:sp>
         <p:nvSpPr>
-          <p:cNvPr id="30" name="Shape 28"/>
+          <p:cNvPr id="36" name="Text 34"/>
+          <p:cNvSpPr/>
+          <p:nvPr/>
+        </p:nvSpPr>
+        <p:spPr>
+          <a:xfrm>
+            <a:off x="6016752" y="3364992"/>
+            <a:ext cx="411480" cy="475488"/>
+          </a:xfrm>
+          <a:prstGeom prst="rect">
+            <a:avLst/>
+          </a:prstGeom>
+          <a:noFill/>
+          <a:ln/>
+        </p:spPr>
+        <p:txBody>
+          <a:bodyPr wrap="square" lIns="0" tIns="0" rIns="0" bIns="0" rtlCol="0" anchor="ctr"/>
+          <a:lstStyle/>
+          <a:p>
+            <a:pPr algn="ctr" indent="0" marL="0">
+              <a:buNone/>
+            </a:pPr>
+            <a:r>
+              <a:rPr lang="en-US" sz="1600" b="1" dirty="0">
+                <a:solidFill>
+                  <a:srgbClr val="0D9488"/>
+                </a:solidFill>
+                <a:latin typeface="Trebuchet MS" pitchFamily="34" charset="0"/>
+                <a:ea typeface="Trebuchet MS" pitchFamily="34" charset="-122"/>
+                <a:cs typeface="Trebuchet MS" pitchFamily="34" charset="-120"/>
+              </a:rPr>
+              <a:t>·</a:t>
+            </a:r>
+            <a:endParaRPr lang="en-US" sz="1600" dirty="0"/>
+          </a:p>
+        </p:txBody>
+      </p:sp>
+      <p:sp>
+        <p:nvSpPr>
+          <p:cNvPr id="37" name="Shape 35"/>
+          <p:cNvSpPr/>
+          <p:nvPr/>
+        </p:nvSpPr>
+        <p:spPr>
+          <a:xfrm>
+            <a:off x="6428232" y="3364992"/>
+            <a:ext cx="1645920" cy="475488"/>
+          </a:xfrm>
+          <a:prstGeom prst="rect">
+            <a:avLst>
+              <a:gd name="adj" fmla="val 9615"/>
+            </a:avLst>
+          </a:prstGeom>
+          <a:solidFill>
+            <a:srgbClr val="FFFFFF"/>
+          </a:solidFill>
+          <a:ln w="12700">
+            <a:solidFill>
+              <a:srgbClr val="0D9488"/>
+            </a:solidFill>
+            <a:prstDash val="solid"/>
+          </a:ln>
+        </p:spPr>
+      </p:sp>
+      <p:sp>
+        <p:nvSpPr>
+          <p:cNvPr id="38" name="Text 36"/>
+          <p:cNvSpPr/>
+          <p:nvPr/>
+        </p:nvSpPr>
+        <p:spPr>
+          <a:xfrm>
+            <a:off x="6428232" y="3364992"/>
+            <a:ext cx="1645920" cy="475488"/>
+          </a:xfrm>
+          <a:prstGeom prst="rect">
+            <a:avLst/>
+          </a:prstGeom>
+          <a:noFill/>
+          <a:ln/>
+        </p:spPr>
+        <p:txBody>
+          <a:bodyPr wrap="square" lIns="0" tIns="0" rIns="0" bIns="0" rtlCol="0" anchor="ctr"/>
+          <a:lstStyle/>
+          <a:p>
+            <a:pPr algn="ctr" indent="0" marL="0">
+              <a:buNone/>
+            </a:pPr>
+            <a:r>
+              <a:rPr lang="en-US" sz="1400" b="1" dirty="0">
+                <a:solidFill>
+                  <a:srgbClr val="0D9488"/>
+                </a:solidFill>
+                <a:latin typeface="Trebuchet MS" pitchFamily="34" charset="0"/>
+                <a:ea typeface="Trebuchet MS" pitchFamily="34" charset="-122"/>
+                <a:cs typeface="Trebuchet MS" pitchFamily="34" charset="-120"/>
+              </a:rPr>
+              <a:t>ers</a:t>
+            </a:r>
+            <a:endParaRPr lang="en-US" sz="1400" dirty="0"/>
+          </a:p>
+        </p:txBody>
+      </p:sp>
+      <p:sp>
+        <p:nvSpPr>
+          <p:cNvPr id="39" name="Shape 37"/>
           <p:cNvSpPr/>
           <p:nvPr/>
         </p:nvSpPr>
@@ -30540,7 +32290,7 @@
       </p:sp>
       <p:sp>
         <p:nvSpPr>
-          <p:cNvPr id="31" name="Text 29"/>
+          <p:cNvPr id="40" name="Text 38"/>
           <p:cNvSpPr/>
           <p:nvPr/>
         </p:nvSpPr>
@@ -30579,7 +32329,7 @@
       </p:sp>
       <p:sp>
         <p:nvSpPr>
-          <p:cNvPr id="32" name="Shape 30"/>
+          <p:cNvPr id="41" name="Shape 39"/>
           <p:cNvSpPr/>
           <p:nvPr/>
         </p:nvSpPr>
@@ -30606,7 +32356,7 @@
       </p:sp>
       <p:sp>
         <p:nvSpPr>
-          <p:cNvPr id="33" name="Text 31"/>
+          <p:cNvPr id="42" name="Text 40"/>
           <p:cNvSpPr/>
           <p:nvPr/>
         </p:nvSpPr>
@@ -30929,7 +32679,7 @@
                 <a:ea typeface="Calibri" pitchFamily="34" charset="-122"/>
                 <a:cs typeface="Calibri" pitchFamily="34" charset="-120"/>
               </a:rPr>
-              <a:t>Word Labs  •  wordlabs.app  •  Root: 'claim' = to call out or declare</a:t>
+              <a:t>Word Labs  •  wordlabs.app  •  Root: 'claim' = call out; cry</a:t>
             </a:r>
             <a:endParaRPr lang="en-US" sz="800" dirty="0"/>
           </a:p>
@@ -31068,7 +32818,7 @@
                 <a:ea typeface="Trebuchet MS" pitchFamily="34" charset="-122"/>
                 <a:cs typeface="Trebuchet MS" pitchFamily="34" charset="-120"/>
               </a:rPr>
-              <a:t>disclaim</a:t>
+              <a:t>disclaimers</a:t>
             </a:r>
             <a:endParaRPr lang="en-US" sz="2800" dirty="0"/>
           </a:p>
@@ -31148,8 +32898,8 @@
         </p:nvSpPr>
         <p:spPr>
           <a:xfrm>
-            <a:off x="2938272" y="2258568"/>
-            <a:ext cx="1828800" cy="292608"/>
+            <a:off x="1989734" y="2258568"/>
+            <a:ext cx="1581912" cy="292608"/>
           </a:xfrm>
           <a:prstGeom prst="rect">
             <a:avLst>
@@ -31182,8 +32932,8 @@
         </p:nvSpPr>
         <p:spPr>
           <a:xfrm>
-            <a:off x="2938272" y="2258568"/>
-            <a:ext cx="1828800" cy="292608"/>
+            <a:off x="1989734" y="2258568"/>
+            <a:ext cx="1581912" cy="292608"/>
           </a:xfrm>
           <a:prstGeom prst="rect">
             <a:avLst/>
@@ -31221,8 +32971,8 @@
         </p:nvSpPr>
         <p:spPr>
           <a:xfrm>
-            <a:off x="2938272" y="2569464"/>
-            <a:ext cx="1828800" cy="201168"/>
+            <a:off x="1989734" y="2569464"/>
+            <a:ext cx="1581912" cy="201168"/>
           </a:xfrm>
           <a:prstGeom prst="rect">
             <a:avLst/>
@@ -31246,7 +32996,7 @@
                 <a:ea typeface="Calibri" pitchFamily="34" charset="-122"/>
                 <a:cs typeface="Calibri" pitchFamily="34" charset="-120"/>
               </a:rPr>
-              <a:t>not, away from</a:t>
+              <a:t>not; opposite; apart</a:t>
             </a:r>
             <a:endParaRPr lang="en-US" sz="850" dirty="0"/>
           </a:p>
@@ -31260,8 +33010,8 @@
         </p:nvSpPr>
         <p:spPr>
           <a:xfrm>
-            <a:off x="5803392" y="2258568"/>
-            <a:ext cx="1828800" cy="292608"/>
+            <a:off x="3659429" y="2258568"/>
+            <a:ext cx="1581912" cy="292608"/>
           </a:xfrm>
           <a:prstGeom prst="rect">
             <a:avLst>
@@ -31294,8 +33044,8 @@
         </p:nvSpPr>
         <p:spPr>
           <a:xfrm>
-            <a:off x="5803392" y="2258568"/>
-            <a:ext cx="1828800" cy="292608"/>
+            <a:off x="3659429" y="2258568"/>
+            <a:ext cx="1581912" cy="292608"/>
           </a:xfrm>
           <a:prstGeom prst="rect">
             <a:avLst/>
@@ -31333,8 +33083,8 @@
         </p:nvSpPr>
         <p:spPr>
           <a:xfrm>
-            <a:off x="5803392" y="2569464"/>
-            <a:ext cx="1828800" cy="201168"/>
+            <a:off x="3659429" y="2569464"/>
+            <a:ext cx="1581912" cy="201168"/>
           </a:xfrm>
           <a:prstGeom prst="rect">
             <a:avLst/>
@@ -31358,7 +33108,7 @@
                 <a:ea typeface="Calibri" pitchFamily="34" charset="-122"/>
                 <a:cs typeface="Calibri" pitchFamily="34" charset="-120"/>
               </a:rPr>
-              <a:t>to call out or declare</a:t>
+              <a:t>call out; cry</a:t>
             </a:r>
             <a:endParaRPr lang="en-US" sz="850" dirty="0"/>
           </a:p>
@@ -31367,6 +33117,230 @@
       <p:sp>
         <p:nvSpPr>
           <p:cNvPr id="22" name="Shape 20"/>
+          <p:cNvSpPr/>
+          <p:nvPr/>
+        </p:nvSpPr>
+        <p:spPr>
+          <a:xfrm>
+            <a:off x="5329123" y="2258568"/>
+            <a:ext cx="1581912" cy="292608"/>
+          </a:xfrm>
+          <a:prstGeom prst="rect">
+            <a:avLst>
+              <a:gd name="adj" fmla="val 25000"/>
+            </a:avLst>
+          </a:prstGeom>
+          <a:solidFill>
+            <a:srgbClr val="FCE7F3"/>
+          </a:solidFill>
+          <a:ln w="19050">
+            <a:solidFill>
+              <a:srgbClr val="DB2777"/>
+            </a:solidFill>
+            <a:prstDash val="solid"/>
+          </a:ln>
+          <a:effectLst>
+            <a:outerShdw sx="100000" sy="100000" kx="0" ky="0" algn="bl" rotWithShape="0" blurRad="101600" dist="38100" dir="8100000">
+              <a:srgbClr val="000000">
+                <a:alpha val="12000"/>
+              </a:srgbClr>
+            </a:outerShdw>
+          </a:effectLst>
+        </p:spPr>
+      </p:sp>
+      <p:sp>
+        <p:nvSpPr>
+          <p:cNvPr id="23" name="Text 21"/>
+          <p:cNvSpPr/>
+          <p:nvPr/>
+        </p:nvSpPr>
+        <p:spPr>
+          <a:xfrm>
+            <a:off x="5329123" y="2258568"/>
+            <a:ext cx="1581912" cy="292608"/>
+          </a:xfrm>
+          <a:prstGeom prst="rect">
+            <a:avLst/>
+          </a:prstGeom>
+          <a:noFill/>
+          <a:ln/>
+        </p:spPr>
+        <p:txBody>
+          <a:bodyPr wrap="square" lIns="0" tIns="0" rIns="0" bIns="0" rtlCol="0" anchor="ctr"/>
+          <a:lstStyle/>
+          <a:p>
+            <a:pPr algn="ctr" indent="0" marL="0">
+              <a:buNone/>
+            </a:pPr>
+            <a:r>
+              <a:rPr lang="en-US" sz="1300" b="1" dirty="0">
+                <a:solidFill>
+                  <a:srgbClr val="9D174D"/>
+                </a:solidFill>
+                <a:latin typeface="Trebuchet MS" pitchFamily="34" charset="0"/>
+                <a:ea typeface="Trebuchet MS" pitchFamily="34" charset="-122"/>
+                <a:cs typeface="Trebuchet MS" pitchFamily="34" charset="-120"/>
+              </a:rPr>
+              <a:t>er</a:t>
+            </a:r>
+            <a:endParaRPr lang="en-US" sz="1300" dirty="0"/>
+          </a:p>
+        </p:txBody>
+      </p:sp>
+      <p:sp>
+        <p:nvSpPr>
+          <p:cNvPr id="24" name="Text 22"/>
+          <p:cNvSpPr/>
+          <p:nvPr/>
+        </p:nvSpPr>
+        <p:spPr>
+          <a:xfrm>
+            <a:off x="5329123" y="2569464"/>
+            <a:ext cx="1581912" cy="201168"/>
+          </a:xfrm>
+          <a:prstGeom prst="rect">
+            <a:avLst/>
+          </a:prstGeom>
+          <a:noFill/>
+          <a:ln/>
+        </p:spPr>
+        <p:txBody>
+          <a:bodyPr wrap="square" lIns="0" tIns="0" rIns="0" bIns="0" rtlCol="0" anchor="t"/>
+          <a:lstStyle/>
+          <a:p>
+            <a:pPr algn="ctr" indent="0" marL="0">
+              <a:buNone/>
+            </a:pPr>
+            <a:r>
+              <a:rPr lang="en-US" sz="850" dirty="0">
+                <a:solidFill>
+                  <a:srgbClr val="475569"/>
+                </a:solidFill>
+                <a:latin typeface="Calibri" pitchFamily="34" charset="0"/>
+                <a:ea typeface="Calibri" pitchFamily="34" charset="-122"/>
+                <a:cs typeface="Calibri" pitchFamily="34" charset="-120"/>
+              </a:rPr>
+              <a:t>person who; more</a:t>
+            </a:r>
+            <a:endParaRPr lang="en-US" sz="850" dirty="0"/>
+          </a:p>
+        </p:txBody>
+      </p:sp>
+      <p:sp>
+        <p:nvSpPr>
+          <p:cNvPr id="25" name="Shape 23"/>
+          <p:cNvSpPr/>
+          <p:nvPr/>
+        </p:nvSpPr>
+        <p:spPr>
+          <a:xfrm>
+            <a:off x="6998818" y="2258568"/>
+            <a:ext cx="1581912" cy="292608"/>
+          </a:xfrm>
+          <a:prstGeom prst="rect">
+            <a:avLst>
+              <a:gd name="adj" fmla="val 25000"/>
+            </a:avLst>
+          </a:prstGeom>
+          <a:solidFill>
+            <a:srgbClr val="FCE7F3"/>
+          </a:solidFill>
+          <a:ln w="19050">
+            <a:solidFill>
+              <a:srgbClr val="DB2777"/>
+            </a:solidFill>
+            <a:prstDash val="solid"/>
+          </a:ln>
+          <a:effectLst>
+            <a:outerShdw sx="100000" sy="100000" kx="0" ky="0" algn="bl" rotWithShape="0" blurRad="101600" dist="38100" dir="8100000">
+              <a:srgbClr val="000000">
+                <a:alpha val="12000"/>
+              </a:srgbClr>
+            </a:outerShdw>
+          </a:effectLst>
+        </p:spPr>
+      </p:sp>
+      <p:sp>
+        <p:nvSpPr>
+          <p:cNvPr id="26" name="Text 24"/>
+          <p:cNvSpPr/>
+          <p:nvPr/>
+        </p:nvSpPr>
+        <p:spPr>
+          <a:xfrm>
+            <a:off x="6998818" y="2258568"/>
+            <a:ext cx="1581912" cy="292608"/>
+          </a:xfrm>
+          <a:prstGeom prst="rect">
+            <a:avLst/>
+          </a:prstGeom>
+          <a:noFill/>
+          <a:ln/>
+        </p:spPr>
+        <p:txBody>
+          <a:bodyPr wrap="square" lIns="0" tIns="0" rIns="0" bIns="0" rtlCol="0" anchor="ctr"/>
+          <a:lstStyle/>
+          <a:p>
+            <a:pPr algn="ctr" indent="0" marL="0">
+              <a:buNone/>
+            </a:pPr>
+            <a:r>
+              <a:rPr lang="en-US" sz="1300" b="1" dirty="0">
+                <a:solidFill>
+                  <a:srgbClr val="9D174D"/>
+                </a:solidFill>
+                <a:latin typeface="Trebuchet MS" pitchFamily="34" charset="0"/>
+                <a:ea typeface="Trebuchet MS" pitchFamily="34" charset="-122"/>
+                <a:cs typeface="Trebuchet MS" pitchFamily="34" charset="-120"/>
+              </a:rPr>
+              <a:t>s</a:t>
+            </a:r>
+            <a:endParaRPr lang="en-US" sz="1300" dirty="0"/>
+          </a:p>
+        </p:txBody>
+      </p:sp>
+      <p:sp>
+        <p:nvSpPr>
+          <p:cNvPr id="27" name="Text 25"/>
+          <p:cNvSpPr/>
+          <p:nvPr/>
+        </p:nvSpPr>
+        <p:spPr>
+          <a:xfrm>
+            <a:off x="6998818" y="2569464"/>
+            <a:ext cx="1581912" cy="201168"/>
+          </a:xfrm>
+          <a:prstGeom prst="rect">
+            <a:avLst/>
+          </a:prstGeom>
+          <a:noFill/>
+          <a:ln/>
+        </p:spPr>
+        <p:txBody>
+          <a:bodyPr wrap="square" lIns="0" tIns="0" rIns="0" bIns="0" rtlCol="0" anchor="t"/>
+          <a:lstStyle/>
+          <a:p>
+            <a:pPr algn="ctr" indent="0" marL="0">
+              <a:buNone/>
+            </a:pPr>
+            <a:r>
+              <a:rPr lang="en-US" sz="850" dirty="0">
+                <a:solidFill>
+                  <a:srgbClr val="475569"/>
+                </a:solidFill>
+                <a:latin typeface="Calibri" pitchFamily="34" charset="0"/>
+                <a:ea typeface="Calibri" pitchFamily="34" charset="-122"/>
+                <a:cs typeface="Calibri" pitchFamily="34" charset="-120"/>
+              </a:rPr>
+              <a:t>plural or present tense</a:t>
+            </a:r>
+            <a:endParaRPr lang="en-US" sz="850" dirty="0"/>
+          </a:p>
+        </p:txBody>
+      </p:sp>
+      <p:sp>
+        <p:nvSpPr>
+          <p:cNvPr id="28" name="Shape 26"/>
           <p:cNvSpPr/>
           <p:nvPr/>
         </p:nvSpPr>
@@ -31393,7 +33367,7 @@
       </p:sp>
       <p:sp>
         <p:nvSpPr>
-          <p:cNvPr id="23" name="Text 21"/>
+          <p:cNvPr id="29" name="Text 27"/>
           <p:cNvSpPr/>
           <p:nvPr/>
         </p:nvSpPr>
@@ -31432,7 +33406,7 @@
       </p:sp>
       <p:sp>
         <p:nvSpPr>
-          <p:cNvPr id="24" name="Shape 22"/>
+          <p:cNvPr id="30" name="Shape 28"/>
           <p:cNvSpPr/>
           <p:nvPr/>
         </p:nvSpPr>
@@ -31459,13 +33433,13 @@
       </p:sp>
       <p:sp>
         <p:nvSpPr>
-          <p:cNvPr id="25" name="Shape 23"/>
-          <p:cNvSpPr/>
-          <p:nvPr/>
-        </p:nvSpPr>
-        <p:spPr>
-          <a:xfrm>
-            <a:off x="2999232" y="3364992"/>
+          <p:cNvPr id="31" name="Shape 29"/>
+          <p:cNvSpPr/>
+          <p:nvPr/>
+        </p:nvSpPr>
+        <p:spPr>
+          <a:xfrm>
+            <a:off x="2313432" y="3364992"/>
             <a:ext cx="1645920" cy="475488"/>
           </a:xfrm>
           <a:prstGeom prst="rect">
@@ -31486,13 +33460,13 @@
       </p:sp>
       <p:sp>
         <p:nvSpPr>
-          <p:cNvPr id="26" name="Text 24"/>
-          <p:cNvSpPr/>
-          <p:nvPr/>
-        </p:nvSpPr>
-        <p:spPr>
-          <a:xfrm>
-            <a:off x="2999232" y="3364992"/>
+          <p:cNvPr id="32" name="Text 30"/>
+          <p:cNvSpPr/>
+          <p:nvPr/>
+        </p:nvSpPr>
+        <p:spPr>
+          <a:xfrm>
+            <a:off x="2313432" y="3364992"/>
             <a:ext cx="1645920" cy="475488"/>
           </a:xfrm>
           <a:prstGeom prst="rect">
@@ -31525,14 +33499,14 @@
       </p:sp>
       <p:sp>
         <p:nvSpPr>
-          <p:cNvPr id="27" name="Text 25"/>
-          <p:cNvSpPr/>
-          <p:nvPr/>
-        </p:nvSpPr>
-        <p:spPr>
-          <a:xfrm>
-            <a:off x="4645152" y="3364992"/>
-            <a:ext cx="1097280" cy="475488"/>
+          <p:cNvPr id="33" name="Text 31"/>
+          <p:cNvSpPr/>
+          <p:nvPr/>
+        </p:nvSpPr>
+        <p:spPr>
+          <a:xfrm>
+            <a:off x="3959352" y="3364992"/>
+            <a:ext cx="411480" cy="475488"/>
           </a:xfrm>
           <a:prstGeom prst="rect">
             <a:avLst/>
@@ -31564,13 +33538,13 @@
       </p:sp>
       <p:sp>
         <p:nvSpPr>
-          <p:cNvPr id="28" name="Shape 26"/>
-          <p:cNvSpPr/>
-          <p:nvPr/>
-        </p:nvSpPr>
-        <p:spPr>
-          <a:xfrm>
-            <a:off x="5742432" y="3364992"/>
+          <p:cNvPr id="34" name="Shape 32"/>
+          <p:cNvSpPr/>
+          <p:nvPr/>
+        </p:nvSpPr>
+        <p:spPr>
+          <a:xfrm>
+            <a:off x="4370832" y="3364992"/>
             <a:ext cx="1645920" cy="475488"/>
           </a:xfrm>
           <a:prstGeom prst="rect">
@@ -31591,13 +33565,13 @@
       </p:sp>
       <p:sp>
         <p:nvSpPr>
-          <p:cNvPr id="29" name="Text 27"/>
-          <p:cNvSpPr/>
-          <p:nvPr/>
-        </p:nvSpPr>
-        <p:spPr>
-          <a:xfrm>
-            <a:off x="5742432" y="3364992"/>
+          <p:cNvPr id="35" name="Text 33"/>
+          <p:cNvSpPr/>
+          <p:nvPr/>
+        </p:nvSpPr>
+        <p:spPr>
+          <a:xfrm>
+            <a:off x="4370832" y="3364992"/>
             <a:ext cx="1645920" cy="475488"/>
           </a:xfrm>
           <a:prstGeom prst="rect">
@@ -31630,7 +33604,112 @@
       </p:sp>
       <p:sp>
         <p:nvSpPr>
-          <p:cNvPr id="30" name="Shape 28"/>
+          <p:cNvPr id="36" name="Text 34"/>
+          <p:cNvSpPr/>
+          <p:nvPr/>
+        </p:nvSpPr>
+        <p:spPr>
+          <a:xfrm>
+            <a:off x="6016752" y="3364992"/>
+            <a:ext cx="411480" cy="475488"/>
+          </a:xfrm>
+          <a:prstGeom prst="rect">
+            <a:avLst/>
+          </a:prstGeom>
+          <a:noFill/>
+          <a:ln/>
+        </p:spPr>
+        <p:txBody>
+          <a:bodyPr wrap="square" lIns="0" tIns="0" rIns="0" bIns="0" rtlCol="0" anchor="ctr"/>
+          <a:lstStyle/>
+          <a:p>
+            <a:pPr algn="ctr" indent="0" marL="0">
+              <a:buNone/>
+            </a:pPr>
+            <a:r>
+              <a:rPr lang="en-US" sz="1600" b="1" dirty="0">
+                <a:solidFill>
+                  <a:srgbClr val="0D9488"/>
+                </a:solidFill>
+                <a:latin typeface="Trebuchet MS" pitchFamily="34" charset="0"/>
+                <a:ea typeface="Trebuchet MS" pitchFamily="34" charset="-122"/>
+                <a:cs typeface="Trebuchet MS" pitchFamily="34" charset="-120"/>
+              </a:rPr>
+              <a:t>·</a:t>
+            </a:r>
+            <a:endParaRPr lang="en-US" sz="1600" dirty="0"/>
+          </a:p>
+        </p:txBody>
+      </p:sp>
+      <p:sp>
+        <p:nvSpPr>
+          <p:cNvPr id="37" name="Shape 35"/>
+          <p:cNvSpPr/>
+          <p:nvPr/>
+        </p:nvSpPr>
+        <p:spPr>
+          <a:xfrm>
+            <a:off x="6428232" y="3364992"/>
+            <a:ext cx="1645920" cy="475488"/>
+          </a:xfrm>
+          <a:prstGeom prst="rect">
+            <a:avLst>
+              <a:gd name="adj" fmla="val 9615"/>
+            </a:avLst>
+          </a:prstGeom>
+          <a:solidFill>
+            <a:srgbClr val="FFFFFF"/>
+          </a:solidFill>
+          <a:ln w="12700">
+            <a:solidFill>
+              <a:srgbClr val="0D9488"/>
+            </a:solidFill>
+            <a:prstDash val="solid"/>
+          </a:ln>
+        </p:spPr>
+      </p:sp>
+      <p:sp>
+        <p:nvSpPr>
+          <p:cNvPr id="38" name="Text 36"/>
+          <p:cNvSpPr/>
+          <p:nvPr/>
+        </p:nvSpPr>
+        <p:spPr>
+          <a:xfrm>
+            <a:off x="6428232" y="3364992"/>
+            <a:ext cx="1645920" cy="475488"/>
+          </a:xfrm>
+          <a:prstGeom prst="rect">
+            <a:avLst/>
+          </a:prstGeom>
+          <a:noFill/>
+          <a:ln/>
+        </p:spPr>
+        <p:txBody>
+          <a:bodyPr wrap="square" lIns="0" tIns="0" rIns="0" bIns="0" rtlCol="0" anchor="ctr"/>
+          <a:lstStyle/>
+          <a:p>
+            <a:pPr algn="ctr" indent="0" marL="0">
+              <a:buNone/>
+            </a:pPr>
+            <a:r>
+              <a:rPr lang="en-US" sz="1400" b="1" dirty="0">
+                <a:solidFill>
+                  <a:srgbClr val="0D9488"/>
+                </a:solidFill>
+                <a:latin typeface="Trebuchet MS" pitchFamily="34" charset="0"/>
+                <a:ea typeface="Trebuchet MS" pitchFamily="34" charset="-122"/>
+                <a:cs typeface="Trebuchet MS" pitchFamily="34" charset="-120"/>
+              </a:rPr>
+              <a:t>ers</a:t>
+            </a:r>
+            <a:endParaRPr lang="en-US" sz="1400" dirty="0"/>
+          </a:p>
+        </p:txBody>
+      </p:sp>
+      <p:sp>
+        <p:nvSpPr>
+          <p:cNvPr id="39" name="Shape 37"/>
           <p:cNvSpPr/>
           <p:nvPr/>
         </p:nvSpPr>
@@ -31657,7 +33736,7 @@
       </p:sp>
       <p:sp>
         <p:nvSpPr>
-          <p:cNvPr id="31" name="Text 29"/>
+          <p:cNvPr id="40" name="Text 38"/>
           <p:cNvSpPr/>
           <p:nvPr/>
         </p:nvSpPr>
@@ -31696,18 +33775,18 @@
       </p:sp>
       <p:sp>
         <p:nvSpPr>
-          <p:cNvPr id="32" name="Shape 30"/>
+          <p:cNvPr id="41" name="Shape 39"/>
           <p:cNvSpPr/>
           <p:nvPr/>
         </p:nvSpPr>
         <p:spPr>
           <a:xfrm>
             <a:off x="1874520" y="4096512"/>
-            <a:ext cx="6903720" cy="804672"/>
+            <a:ext cx="6903720" cy="658368"/>
           </a:xfrm>
           <a:prstGeom prst="rect">
             <a:avLst>
-              <a:gd name="adj" fmla="val 6818"/>
+              <a:gd name="adj" fmla="val 8333"/>
             </a:avLst>
           </a:prstGeom>
           <a:solidFill>
@@ -31723,18 +33802,18 @@
       </p:sp>
       <p:sp>
         <p:nvSpPr>
-          <p:cNvPr id="33" name="Shape 31"/>
-          <p:cNvSpPr/>
-          <p:nvPr/>
-        </p:nvSpPr>
-        <p:spPr>
-          <a:xfrm>
-            <a:off x="2124837" y="4169664"/>
-            <a:ext cx="685800" cy="384048"/>
+          <p:cNvPr id="42" name="Shape 40"/>
+          <p:cNvSpPr/>
+          <p:nvPr/>
+        </p:nvSpPr>
+        <p:spPr>
+          <a:xfrm>
+            <a:off x="1951330" y="4169664"/>
+            <a:ext cx="676656" cy="475488"/>
           </a:xfrm>
           <a:prstGeom prst="rect">
             <a:avLst>
-              <a:gd name="adj" fmla="val 9524"/>
+              <a:gd name="adj" fmla="val 7692"/>
             </a:avLst>
           </a:prstGeom>
           <a:solidFill>
@@ -31750,14 +33829,14 @@
       </p:sp>
       <p:sp>
         <p:nvSpPr>
-          <p:cNvPr id="34" name="Text 32"/>
-          <p:cNvSpPr/>
-          <p:nvPr/>
-        </p:nvSpPr>
-        <p:spPr>
-          <a:xfrm>
-            <a:off x="2124837" y="4169664"/>
-            <a:ext cx="685800" cy="384048"/>
+          <p:cNvPr id="43" name="Text 41"/>
+          <p:cNvSpPr/>
+          <p:nvPr/>
+        </p:nvSpPr>
+        <p:spPr>
+          <a:xfrm>
+            <a:off x="1951330" y="4169664"/>
+            <a:ext cx="676656" cy="475488"/>
           </a:xfrm>
           <a:prstGeom prst="rect">
             <a:avLst/>
@@ -31789,18 +33868,18 @@
       </p:sp>
       <p:sp>
         <p:nvSpPr>
-          <p:cNvPr id="35" name="Shape 33"/>
-          <p:cNvSpPr/>
-          <p:nvPr/>
-        </p:nvSpPr>
-        <p:spPr>
-          <a:xfrm>
-            <a:off x="3033522" y="4169664"/>
-            <a:ext cx="685800" cy="384048"/>
+          <p:cNvPr id="44" name="Shape 42"/>
+          <p:cNvSpPr/>
+          <p:nvPr/>
+        </p:nvSpPr>
+        <p:spPr>
+          <a:xfrm>
+            <a:off x="2677363" y="4169664"/>
+            <a:ext cx="676656" cy="475488"/>
           </a:xfrm>
           <a:prstGeom prst="rect">
             <a:avLst>
-              <a:gd name="adj" fmla="val 9524"/>
+              <a:gd name="adj" fmla="val 7692"/>
             </a:avLst>
           </a:prstGeom>
           <a:solidFill>
@@ -31816,14 +33895,14 @@
       </p:sp>
       <p:sp>
         <p:nvSpPr>
-          <p:cNvPr id="36" name="Text 34"/>
-          <p:cNvSpPr/>
-          <p:nvPr/>
-        </p:nvSpPr>
-        <p:spPr>
-          <a:xfrm>
-            <a:off x="3033522" y="4169664"/>
-            <a:ext cx="685800" cy="384048"/>
+          <p:cNvPr id="45" name="Text 43"/>
+          <p:cNvSpPr/>
+          <p:nvPr/>
+        </p:nvSpPr>
+        <p:spPr>
+          <a:xfrm>
+            <a:off x="2677363" y="4169664"/>
+            <a:ext cx="676656" cy="475488"/>
           </a:xfrm>
           <a:prstGeom prst="rect">
             <a:avLst/>
@@ -31855,18 +33934,18 @@
       </p:sp>
       <p:sp>
         <p:nvSpPr>
-          <p:cNvPr id="37" name="Shape 35"/>
-          <p:cNvSpPr/>
-          <p:nvPr/>
-        </p:nvSpPr>
-        <p:spPr>
-          <a:xfrm>
-            <a:off x="3942207" y="4169664"/>
-            <a:ext cx="685800" cy="384048"/>
+          <p:cNvPr id="46" name="Shape 44"/>
+          <p:cNvSpPr/>
+          <p:nvPr/>
+        </p:nvSpPr>
+        <p:spPr>
+          <a:xfrm>
+            <a:off x="3403397" y="4169664"/>
+            <a:ext cx="676656" cy="475488"/>
           </a:xfrm>
           <a:prstGeom prst="rect">
             <a:avLst>
-              <a:gd name="adj" fmla="val 9524"/>
+              <a:gd name="adj" fmla="val 7692"/>
             </a:avLst>
           </a:prstGeom>
           <a:solidFill>
@@ -31882,14 +33961,14 @@
       </p:sp>
       <p:sp>
         <p:nvSpPr>
-          <p:cNvPr id="38" name="Text 36"/>
-          <p:cNvSpPr/>
-          <p:nvPr/>
-        </p:nvSpPr>
-        <p:spPr>
-          <a:xfrm>
-            <a:off x="3942207" y="4169664"/>
-            <a:ext cx="685800" cy="384048"/>
+          <p:cNvPr id="47" name="Text 45"/>
+          <p:cNvSpPr/>
+          <p:nvPr/>
+        </p:nvSpPr>
+        <p:spPr>
+          <a:xfrm>
+            <a:off x="3403397" y="4169664"/>
+            <a:ext cx="676656" cy="475488"/>
           </a:xfrm>
           <a:prstGeom prst="rect">
             <a:avLst/>
@@ -31921,18 +34000,18 @@
       </p:sp>
       <p:sp>
         <p:nvSpPr>
-          <p:cNvPr id="39" name="Shape 37"/>
-          <p:cNvSpPr/>
-          <p:nvPr/>
-        </p:nvSpPr>
-        <p:spPr>
-          <a:xfrm>
-            <a:off x="4850892" y="4169664"/>
-            <a:ext cx="685800" cy="384048"/>
+          <p:cNvPr id="48" name="Shape 46"/>
+          <p:cNvSpPr/>
+          <p:nvPr/>
+        </p:nvSpPr>
+        <p:spPr>
+          <a:xfrm>
+            <a:off x="4129430" y="4169664"/>
+            <a:ext cx="676656" cy="475488"/>
           </a:xfrm>
           <a:prstGeom prst="rect">
             <a:avLst>
-              <a:gd name="adj" fmla="val 9524"/>
+              <a:gd name="adj" fmla="val 7692"/>
             </a:avLst>
           </a:prstGeom>
           <a:solidFill>
@@ -31948,14 +34027,14 @@
       </p:sp>
       <p:sp>
         <p:nvSpPr>
-          <p:cNvPr id="40" name="Text 38"/>
-          <p:cNvSpPr/>
-          <p:nvPr/>
-        </p:nvSpPr>
-        <p:spPr>
-          <a:xfrm>
-            <a:off x="4850892" y="4169664"/>
-            <a:ext cx="685800" cy="384048"/>
+          <p:cNvPr id="49" name="Text 47"/>
+          <p:cNvSpPr/>
+          <p:nvPr/>
+        </p:nvSpPr>
+        <p:spPr>
+          <a:xfrm>
+            <a:off x="4129430" y="4169664"/>
+            <a:ext cx="676656" cy="475488"/>
           </a:xfrm>
           <a:prstGeom prst="rect">
             <a:avLst/>
@@ -31987,57 +34066,18 @@
       </p:sp>
       <p:sp>
         <p:nvSpPr>
-          <p:cNvPr id="41" name="Text 39"/>
-          <p:cNvSpPr/>
-          <p:nvPr/>
-        </p:nvSpPr>
-        <p:spPr>
-          <a:xfrm>
-            <a:off x="4850892" y="4572000"/>
-            <a:ext cx="685800" cy="219456"/>
-          </a:xfrm>
-          <a:prstGeom prst="rect">
-            <a:avLst/>
-          </a:prstGeom>
-          <a:noFill/>
-          <a:ln/>
-        </p:spPr>
-        <p:txBody>
-          <a:bodyPr wrap="square" lIns="0" tIns="0" rIns="0" bIns="0" rtlCol="0" anchor="t"/>
-          <a:lstStyle/>
-          <a:p>
-            <a:pPr algn="ctr" indent="0" marL="0">
-              <a:buNone/>
-            </a:pPr>
-            <a:r>
-              <a:rPr lang="en-US" sz="750" i="1" dirty="0">
-                <a:solidFill>
-                  <a:srgbClr val="94A3B8"/>
-                </a:solidFill>
-                <a:latin typeface="Calibri" pitchFamily="34" charset="0"/>
-                <a:ea typeface="Calibri" pitchFamily="34" charset="-122"/>
-                <a:cs typeface="Calibri" pitchFamily="34" charset="-120"/>
-              </a:rPr>
-              <a:t>/k/</a:t>
-            </a:r>
-            <a:endParaRPr lang="en-US" sz="750" dirty="0"/>
-          </a:p>
-        </p:txBody>
-      </p:sp>
-      <p:sp>
-        <p:nvSpPr>
-          <p:cNvPr id="42" name="Shape 40"/>
-          <p:cNvSpPr/>
-          <p:nvPr/>
-        </p:nvSpPr>
-        <p:spPr>
-          <a:xfrm>
-            <a:off x="5759577" y="4169664"/>
-            <a:ext cx="685800" cy="384048"/>
+          <p:cNvPr id="50" name="Shape 48"/>
+          <p:cNvSpPr/>
+          <p:nvPr/>
+        </p:nvSpPr>
+        <p:spPr>
+          <a:xfrm>
+            <a:off x="4855464" y="4169664"/>
+            <a:ext cx="676656" cy="475488"/>
           </a:xfrm>
           <a:prstGeom prst="rect">
             <a:avLst>
-              <a:gd name="adj" fmla="val 9524"/>
+              <a:gd name="adj" fmla="val 7692"/>
             </a:avLst>
           </a:prstGeom>
           <a:solidFill>
@@ -32053,14 +34093,14 @@
       </p:sp>
       <p:sp>
         <p:nvSpPr>
-          <p:cNvPr id="43" name="Text 41"/>
-          <p:cNvSpPr/>
-          <p:nvPr/>
-        </p:nvSpPr>
-        <p:spPr>
-          <a:xfrm>
-            <a:off x="5759577" y="4169664"/>
-            <a:ext cx="685800" cy="384048"/>
+          <p:cNvPr id="51" name="Text 49"/>
+          <p:cNvSpPr/>
+          <p:nvPr/>
+        </p:nvSpPr>
+        <p:spPr>
+          <a:xfrm>
+            <a:off x="4855464" y="4169664"/>
+            <a:ext cx="676656" cy="475488"/>
           </a:xfrm>
           <a:prstGeom prst="rect">
             <a:avLst/>
@@ -32092,18 +34132,18 @@
       </p:sp>
       <p:sp>
         <p:nvSpPr>
-          <p:cNvPr id="44" name="Shape 42"/>
-          <p:cNvSpPr/>
-          <p:nvPr/>
-        </p:nvSpPr>
-        <p:spPr>
-          <a:xfrm>
-            <a:off x="6668262" y="4169664"/>
-            <a:ext cx="685800" cy="384048"/>
+          <p:cNvPr id="52" name="Shape 50"/>
+          <p:cNvSpPr/>
+          <p:nvPr/>
+        </p:nvSpPr>
+        <p:spPr>
+          <a:xfrm>
+            <a:off x="5581498" y="4169664"/>
+            <a:ext cx="676656" cy="475488"/>
           </a:xfrm>
           <a:prstGeom prst="rect">
             <a:avLst>
-              <a:gd name="adj" fmla="val 9524"/>
+              <a:gd name="adj" fmla="val 7692"/>
             </a:avLst>
           </a:prstGeom>
           <a:solidFill>
@@ -32119,14 +34159,14 @@
       </p:sp>
       <p:sp>
         <p:nvSpPr>
-          <p:cNvPr id="45" name="Text 43"/>
-          <p:cNvSpPr/>
-          <p:nvPr/>
-        </p:nvSpPr>
-        <p:spPr>
-          <a:xfrm>
-            <a:off x="6668262" y="4169664"/>
-            <a:ext cx="685800" cy="384048"/>
+          <p:cNvPr id="53" name="Text 51"/>
+          <p:cNvSpPr/>
+          <p:nvPr/>
+        </p:nvSpPr>
+        <p:spPr>
+          <a:xfrm>
+            <a:off x="5581498" y="4169664"/>
+            <a:ext cx="676656" cy="475488"/>
           </a:xfrm>
           <a:prstGeom prst="rect">
             <a:avLst/>
@@ -32158,18 +34198,18 @@
       </p:sp>
       <p:sp>
         <p:nvSpPr>
-          <p:cNvPr id="46" name="Shape 44"/>
-          <p:cNvSpPr/>
-          <p:nvPr/>
-        </p:nvSpPr>
-        <p:spPr>
-          <a:xfrm>
-            <a:off x="7576947" y="4169664"/>
-            <a:ext cx="685800" cy="384048"/>
+          <p:cNvPr id="54" name="Shape 52"/>
+          <p:cNvSpPr/>
+          <p:nvPr/>
+        </p:nvSpPr>
+        <p:spPr>
+          <a:xfrm>
+            <a:off x="6307531" y="4169664"/>
+            <a:ext cx="676656" cy="475488"/>
           </a:xfrm>
           <a:prstGeom prst="rect">
             <a:avLst>
-              <a:gd name="adj" fmla="val 9524"/>
+              <a:gd name="adj" fmla="val 7692"/>
             </a:avLst>
           </a:prstGeom>
           <a:solidFill>
@@ -32185,14 +34225,14 @@
       </p:sp>
       <p:sp>
         <p:nvSpPr>
-          <p:cNvPr id="47" name="Text 45"/>
-          <p:cNvSpPr/>
-          <p:nvPr/>
-        </p:nvSpPr>
-        <p:spPr>
-          <a:xfrm>
-            <a:off x="7576947" y="4169664"/>
-            <a:ext cx="685800" cy="384048"/>
+          <p:cNvPr id="55" name="Text 53"/>
+          <p:cNvSpPr/>
+          <p:nvPr/>
+        </p:nvSpPr>
+        <p:spPr>
+          <a:xfrm>
+            <a:off x="6307531" y="4169664"/>
+            <a:ext cx="676656" cy="475488"/>
           </a:xfrm>
           <a:prstGeom prst="rect">
             <a:avLst/>
@@ -32217,6 +34257,138 @@
                 <a:cs typeface="Trebuchet MS" pitchFamily="34" charset="-120"/>
               </a:rPr>
               <a:t>m</a:t>
+            </a:r>
+            <a:endParaRPr lang="en-US" sz="900" dirty="0"/>
+          </a:p>
+        </p:txBody>
+      </p:sp>
+      <p:sp>
+        <p:nvSpPr>
+          <p:cNvPr id="56" name="Shape 54"/>
+          <p:cNvSpPr/>
+          <p:nvPr/>
+        </p:nvSpPr>
+        <p:spPr>
+          <a:xfrm>
+            <a:off x="7033565" y="4169664"/>
+            <a:ext cx="676656" cy="475488"/>
+          </a:xfrm>
+          <a:prstGeom prst="rect">
+            <a:avLst>
+              <a:gd name="adj" fmla="val 7692"/>
+            </a:avLst>
+          </a:prstGeom>
+          <a:solidFill>
+            <a:srgbClr val="FFFFFF"/>
+          </a:solidFill>
+          <a:ln w="12700">
+            <a:solidFill>
+              <a:srgbClr val="DB2777"/>
+            </a:solidFill>
+            <a:prstDash val="solid"/>
+          </a:ln>
+        </p:spPr>
+      </p:sp>
+      <p:sp>
+        <p:nvSpPr>
+          <p:cNvPr id="57" name="Text 55"/>
+          <p:cNvSpPr/>
+          <p:nvPr/>
+        </p:nvSpPr>
+        <p:spPr>
+          <a:xfrm>
+            <a:off x="7033565" y="4169664"/>
+            <a:ext cx="676656" cy="475488"/>
+          </a:xfrm>
+          <a:prstGeom prst="rect">
+            <a:avLst/>
+          </a:prstGeom>
+          <a:noFill/>
+          <a:ln/>
+        </p:spPr>
+        <p:txBody>
+          <a:bodyPr wrap="square" lIns="0" tIns="0" rIns="0" bIns="0" rtlCol="0" anchor="ctr"/>
+          <a:lstStyle/>
+          <a:p>
+            <a:pPr algn="ctr" indent="0" marL="0">
+              <a:buNone/>
+            </a:pPr>
+            <a:r>
+              <a:rPr lang="en-US" sz="900" b="1" dirty="0">
+                <a:solidFill>
+                  <a:srgbClr val="9D174D"/>
+                </a:solidFill>
+                <a:latin typeface="Trebuchet MS" pitchFamily="34" charset="0"/>
+                <a:ea typeface="Trebuchet MS" pitchFamily="34" charset="-122"/>
+                <a:cs typeface="Trebuchet MS" pitchFamily="34" charset="-120"/>
+              </a:rPr>
+              <a:t>er</a:t>
+            </a:r>
+            <a:endParaRPr lang="en-US" sz="900" dirty="0"/>
+          </a:p>
+        </p:txBody>
+      </p:sp>
+      <p:sp>
+        <p:nvSpPr>
+          <p:cNvPr id="58" name="Shape 56"/>
+          <p:cNvSpPr/>
+          <p:nvPr/>
+        </p:nvSpPr>
+        <p:spPr>
+          <a:xfrm>
+            <a:off x="7759598" y="4169664"/>
+            <a:ext cx="676656" cy="475488"/>
+          </a:xfrm>
+          <a:prstGeom prst="rect">
+            <a:avLst>
+              <a:gd name="adj" fmla="val 7692"/>
+            </a:avLst>
+          </a:prstGeom>
+          <a:solidFill>
+            <a:srgbClr val="FFFFFF"/>
+          </a:solidFill>
+          <a:ln w="12700">
+            <a:solidFill>
+              <a:srgbClr val="DB2777"/>
+            </a:solidFill>
+            <a:prstDash val="solid"/>
+          </a:ln>
+        </p:spPr>
+      </p:sp>
+      <p:sp>
+        <p:nvSpPr>
+          <p:cNvPr id="59" name="Text 57"/>
+          <p:cNvSpPr/>
+          <p:nvPr/>
+        </p:nvSpPr>
+        <p:spPr>
+          <a:xfrm>
+            <a:off x="7759598" y="4169664"/>
+            <a:ext cx="676656" cy="475488"/>
+          </a:xfrm>
+          <a:prstGeom prst="rect">
+            <a:avLst/>
+          </a:prstGeom>
+          <a:noFill/>
+          <a:ln/>
+        </p:spPr>
+        <p:txBody>
+          <a:bodyPr wrap="square" lIns="0" tIns="0" rIns="0" bIns="0" rtlCol="0" anchor="ctr"/>
+          <a:lstStyle/>
+          <a:p>
+            <a:pPr algn="ctr" indent="0" marL="0">
+              <a:buNone/>
+            </a:pPr>
+            <a:r>
+              <a:rPr lang="en-US" sz="900" b="1" dirty="0">
+                <a:solidFill>
+                  <a:srgbClr val="9D174D"/>
+                </a:solidFill>
+                <a:latin typeface="Trebuchet MS" pitchFamily="34" charset="0"/>
+                <a:ea typeface="Trebuchet MS" pitchFamily="34" charset="-122"/>
+                <a:cs typeface="Trebuchet MS" pitchFamily="34" charset="-120"/>
+              </a:rPr>
+              <a:t>s</a:t>
             </a:r>
             <a:endParaRPr lang="en-US" sz="900" dirty="0"/>
           </a:p>
@@ -32508,7 +34680,7 @@
                 <a:ea typeface="Calibri" pitchFamily="34" charset="-122"/>
                 <a:cs typeface="Calibri" pitchFamily="34" charset="-120"/>
               </a:rPr>
-              <a:t>Word Labs  •  wordlabs.app  •  Root: 'claim' = to call out or declare</a:t>
+              <a:t>Word Labs  •  wordlabs.app  •  Root: 'claim' = call out; cry</a:t>
             </a:r>
             <a:endParaRPr lang="en-US" sz="800" dirty="0"/>
           </a:p>
@@ -33677,7 +35849,7 @@
                 <a:ea typeface="Calibri" pitchFamily="34" charset="-122"/>
                 <a:cs typeface="Calibri" pitchFamily="34" charset="-120"/>
               </a:rPr>
-              <a:t>Word Labs  •  wordlabs.app  •  Root: 'claim' = to call out or declare</a:t>
+              <a:t>Word Labs  •  wordlabs.app  •  Root: 'claim' = call out; cry</a:t>
             </a:r>
             <a:endParaRPr lang="en-US" sz="800" dirty="0"/>
           </a:p>
@@ -33978,7 +36150,7 @@
                 <a:ea typeface="Trebuchet MS" pitchFamily="34" charset="-122"/>
                 <a:cs typeface="Trebuchet MS" pitchFamily="34" charset="-120"/>
               </a:rPr>
-              <a:t>re-</a:t>
+              <a:t>ad-</a:t>
             </a:r>
             <a:endParaRPr lang="en-US" sz="1300" dirty="0"/>
           </a:p>
@@ -34170,7 +36342,7 @@
                 <a:ea typeface="Trebuchet MS" pitchFamily="34" charset="-122"/>
                 <a:cs typeface="Trebuchet MS" pitchFamily="34" charset="-120"/>
               </a:rPr>
-              <a:t>ex-</a:t>
+              <a:t>dis-</a:t>
             </a:r>
             <a:endParaRPr lang="en-US" sz="1300" dirty="0"/>
           </a:p>
@@ -34259,7 +36431,7 @@
                 <a:ea typeface="Trebuchet MS" pitchFamily="34" charset="-122"/>
                 <a:cs typeface="Trebuchet MS" pitchFamily="34" charset="-120"/>
               </a:rPr>
-              <a:t>-ing</a:t>
+              <a:t>-ant</a:t>
             </a:r>
             <a:endParaRPr lang="en-US" sz="1300" dirty="0"/>
           </a:p>
@@ -34323,7 +36495,7 @@
                 <a:ea typeface="Trebuchet MS" pitchFamily="34" charset="-122"/>
                 <a:cs typeface="Trebuchet MS" pitchFamily="34" charset="-120"/>
               </a:rPr>
-              <a:t>ac-</a:t>
+              <a:t>ex-</a:t>
             </a:r>
             <a:endParaRPr lang="en-US" sz="1300" dirty="0"/>
           </a:p>
@@ -34412,7 +36584,7 @@
                 <a:ea typeface="Trebuchet MS" pitchFamily="34" charset="-122"/>
                 <a:cs typeface="Trebuchet MS" pitchFamily="34" charset="-120"/>
               </a:rPr>
-              <a:t>-er</a:t>
+              <a:t>-ing</a:t>
             </a:r>
             <a:endParaRPr lang="en-US" sz="1300" dirty="0"/>
           </a:p>
@@ -34565,7 +36737,7 @@
                 <a:ea typeface="Trebuchet MS" pitchFamily="34" charset="-122"/>
                 <a:cs typeface="Trebuchet MS" pitchFamily="34" charset="-120"/>
               </a:rPr>
-              <a:t>-ant</a:t>
+              <a:t>-s</a:t>
             </a:r>
             <a:endParaRPr lang="en-US" sz="1300" dirty="0"/>
           </a:p>
@@ -34629,7 +36801,7 @@
                 <a:ea typeface="Trebuchet MS" pitchFamily="34" charset="-122"/>
                 <a:cs typeface="Trebuchet MS" pitchFamily="34" charset="-120"/>
               </a:rPr>
-              <a:t>dis-</a:t>
+              <a:t>re-</a:t>
             </a:r>
             <a:endParaRPr lang="en-US" sz="1300" dirty="0"/>
           </a:p>
@@ -34718,7 +36890,7 @@
                 <a:ea typeface="Trebuchet MS" pitchFamily="34" charset="-122"/>
                 <a:cs typeface="Trebuchet MS" pitchFamily="34" charset="-120"/>
               </a:rPr>
-              <a:t>-ation</a:t>
+              <a:t>-er</a:t>
             </a:r>
             <a:endParaRPr lang="en-US" sz="1300" dirty="0"/>
           </a:p>
@@ -34889,7 +37061,7 @@
                 <a:ea typeface="Trebuchet MS" pitchFamily="34" charset="-122"/>
                 <a:cs typeface="Trebuchet MS" pitchFamily="34" charset="-120"/>
               </a:rPr>
-              <a:t>exclaim</a:t>
+              <a:t>claims</a:t>
             </a:r>
             <a:endParaRPr lang="en-US" sz="1200" dirty="0"/>
           </a:p>
@@ -34955,7 +37127,7 @@
                 <a:ea typeface="Trebuchet MS" pitchFamily="34" charset="-122"/>
                 <a:cs typeface="Trebuchet MS" pitchFamily="34" charset="-120"/>
               </a:rPr>
-              <a:t>reclaim</a:t>
+              <a:t>acclaim</a:t>
             </a:r>
             <a:endParaRPr lang="en-US" sz="1200" dirty="0"/>
           </a:p>
@@ -35021,7 +37193,7 @@
                 <a:ea typeface="Trebuchet MS" pitchFamily="34" charset="-122"/>
                 <a:cs typeface="Trebuchet MS" pitchFamily="34" charset="-120"/>
               </a:rPr>
-              <a:t>acclaim</a:t>
+              <a:t>claimed</a:t>
             </a:r>
             <a:endParaRPr lang="en-US" sz="1200" dirty="0"/>
           </a:p>
@@ -35087,7 +37259,7 @@
                 <a:ea typeface="Trebuchet MS" pitchFamily="34" charset="-122"/>
                 <a:cs typeface="Trebuchet MS" pitchFamily="34" charset="-120"/>
               </a:rPr>
-              <a:t>disclaim</a:t>
+              <a:t>exclaim</a:t>
             </a:r>
             <a:endParaRPr lang="en-US" sz="1200" dirty="0"/>
           </a:p>
@@ -35153,7 +37325,7 @@
                 <a:ea typeface="Trebuchet MS" pitchFamily="34" charset="-122"/>
                 <a:cs typeface="Trebuchet MS" pitchFamily="34" charset="-120"/>
               </a:rPr>
-              <a:t>proclaim</a:t>
+              <a:t>reclaim</a:t>
             </a:r>
             <a:endParaRPr lang="en-US" sz="1200" dirty="0"/>
           </a:p>
@@ -35219,73 +37391,7 @@
                 <a:ea typeface="Trebuchet MS" pitchFamily="34" charset="-122"/>
                 <a:cs typeface="Trebuchet MS" pitchFamily="34" charset="-120"/>
               </a:rPr>
-              <a:t>claiming</a:t>
-            </a:r>
-            <a:endParaRPr lang="en-US" sz="1200" dirty="0"/>
-          </a:p>
-        </p:txBody>
-      </p:sp>
-      <p:sp>
-        <p:nvSpPr>
-          <p:cNvPr id="58" name="Shape 56"/>
-          <p:cNvSpPr/>
-          <p:nvPr/>
-        </p:nvSpPr>
-        <p:spPr>
-          <a:xfrm>
-            <a:off x="6894576" y="4498848"/>
-            <a:ext cx="2011680" cy="402336"/>
-          </a:xfrm>
-          <a:prstGeom prst="rect">
-            <a:avLst>
-              <a:gd name="adj" fmla="val 13636"/>
-            </a:avLst>
-          </a:prstGeom>
-          <a:solidFill>
-            <a:srgbClr val="EEF2FF"/>
-          </a:solidFill>
-          <a:ln w="12700">
-            <a:solidFill>
-              <a:srgbClr val="6366F1"/>
-            </a:solidFill>
-            <a:prstDash val="solid"/>
-          </a:ln>
-        </p:spPr>
-      </p:sp>
-      <p:sp>
-        <p:nvSpPr>
-          <p:cNvPr id="59" name="Text 57"/>
-          <p:cNvSpPr/>
-          <p:nvPr/>
-        </p:nvSpPr>
-        <p:spPr>
-          <a:xfrm>
-            <a:off x="6894576" y="4498848"/>
-            <a:ext cx="2011680" cy="402336"/>
-          </a:xfrm>
-          <a:prstGeom prst="rect">
-            <a:avLst/>
-          </a:prstGeom>
-          <a:noFill/>
-          <a:ln/>
-        </p:spPr>
-        <p:txBody>
-          <a:bodyPr wrap="square" lIns="0" tIns="0" rIns="0" bIns="0" rtlCol="0" anchor="ctr"/>
-          <a:lstStyle/>
-          <a:p>
-            <a:pPr algn="ctr" indent="0" marL="0">
-              <a:buNone/>
-            </a:pPr>
-            <a:r>
-              <a:rPr lang="en-US" sz="1200" b="1" dirty="0">
-                <a:solidFill>
-                  <a:srgbClr val="4338CA"/>
-                </a:solidFill>
-                <a:latin typeface="Trebuchet MS" pitchFamily="34" charset="0"/>
-                <a:ea typeface="Trebuchet MS" pitchFamily="34" charset="-122"/>
-                <a:cs typeface="Trebuchet MS" pitchFamily="34" charset="-120"/>
-              </a:rPr>
-              <a:t>exclaimed</a:t>
+              <a:t>claimant</a:t>
             </a:r>
             <a:endParaRPr lang="en-US" sz="1200" dirty="0"/>
           </a:p>
@@ -35577,7 +37683,7 @@
                 <a:ea typeface="Calibri" pitchFamily="34" charset="-122"/>
                 <a:cs typeface="Calibri" pitchFamily="34" charset="-120"/>
               </a:rPr>
-              <a:t>Word Labs  •  wordlabs.app  •  Root: 'claim' = to call out or declare</a:t>
+              <a:t>Word Labs  •  wordlabs.app  •  Root: 'claim' = call out; cry</a:t>
             </a:r>
             <a:endParaRPr lang="en-US" sz="800" dirty="0"/>
           </a:p>
@@ -35741,7 +37847,7 @@
                 <a:ea typeface="Calibri" pitchFamily="34" charset="-122"/>
                 <a:cs typeface="Calibri" pitchFamily="34" charset="-120"/>
               </a:rPr>
-              <a:t>The core part of a word carrying its basic meaning. For example, 'claim' means 'to call out or declare'.</a:t>
+              <a:t>The core part of a word carrying its basic meaning. For example, 'claim' means 'call out; cry'.</a:t>
             </a:r>
             <a:endParaRPr lang="en-US" sz="1350" dirty="0"/>
           </a:p>
@@ -36361,7 +38467,7 @@
                 <a:ea typeface="Calibri" pitchFamily="34" charset="-122"/>
                 <a:cs typeface="Calibri" pitchFamily="34" charset="-120"/>
               </a:rPr>
-              <a:t>Word Labs  •  wordlabs.app  •  Root: 'claim' = to call out or declare</a:t>
+              <a:t>Word Labs  •  wordlabs.app  •  Root: 'claim' = call out; cry</a:t>
             </a:r>
             <a:endParaRPr lang="en-US" sz="800" dirty="0"/>
           </a:p>
@@ -36473,7 +38579,7 @@
                 <a:ea typeface="Calibri" pitchFamily="34" charset="-122"/>
                 <a:cs typeface="Calibri" pitchFamily="34" charset="-120"/>
               </a:rPr>
-              <a:t>1.  The prefix 're' in 'reclaim' means to do something again or get something back.</a:t>
+              <a:t>1.  'claims' means 'says something is true, or asks for something believed to be owed'.</a:t>
             </a:r>
             <a:endParaRPr lang="en-US" sz="1300" dirty="0"/>
           </a:p>
@@ -36612,7 +38718,7 @@
                 <a:ea typeface="Calibri" pitchFamily="34" charset="-122"/>
                 <a:cs typeface="Calibri" pitchFamily="34" charset="-120"/>
               </a:rPr>
-              <a:t>2.  The root 'claim' comes from a Latin word meaning to call out.</a:t>
+              <a:t>2.  'claim' means 'call out; cry'.</a:t>
             </a:r>
             <a:endParaRPr lang="en-US" sz="1300" dirty="0"/>
           </a:p>
@@ -36751,7 +38857,7 @@
                 <a:ea typeface="Calibri" pitchFamily="34" charset="-122"/>
                 <a:cs typeface="Calibri" pitchFamily="34" charset="-120"/>
               </a:rPr>
-              <a:t>3.  The word 'acclaim' contains the root 'claim'.</a:t>
+              <a:t>3.  'claims' means 'throws objects a long distance'.</a:t>
             </a:r>
             <a:endParaRPr lang="en-US" sz="1300" dirty="0"/>
           </a:p>
@@ -36774,11 +38880,11 @@
             </a:avLst>
           </a:prstGeom>
           <a:solidFill>
-            <a:srgbClr val="DCFCE7"/>
-          </a:solidFill>
-          <a:ln w="12700">
-            <a:solidFill>
-              <a:srgbClr val="16A34A"/>
+            <a:srgbClr val="FEE2E2"/>
+          </a:solidFill>
+          <a:ln w="12700">
+            <a:solidFill>
+              <a:srgbClr val="DC2626"/>
             </a:solidFill>
             <a:prstDash val="solid"/>
           </a:ln>
@@ -36811,13 +38917,13 @@
             <a:r>
               <a:rPr lang="en-US" sz="1100" b="1" dirty="0">
                 <a:solidFill>
-                  <a:srgbClr val="16A34A"/>
+                  <a:srgbClr val="DC2626"/>
                 </a:solidFill>
                 <a:latin typeface="Trebuchet MS" pitchFamily="34" charset="0"/>
                 <a:ea typeface="Trebuchet MS" pitchFamily="34" charset="-122"/>
                 <a:cs typeface="Trebuchet MS" pitchFamily="34" charset="-120"/>
               </a:rPr>
-              <a:t>TRUE</a:t>
+              <a:t>FALSE</a:t>
             </a:r>
             <a:endParaRPr lang="en-US" sz="1100" dirty="0"/>
           </a:p>
@@ -36890,7 +38996,7 @@
                 <a:ea typeface="Calibri" pitchFamily="34" charset="-122"/>
                 <a:cs typeface="Calibri" pitchFamily="34" charset="-120"/>
               </a:rPr>
-              <a:t>4.  The root 'claim' originally came from a Greek word meaning to write.</a:t>
+              <a:t>4.  'claim' means 'to say that something is true, or to ask for something you believe you deserve'.</a:t>
             </a:r>
             <a:endParaRPr lang="en-US" sz="1300" dirty="0"/>
           </a:p>
@@ -36913,11 +39019,11 @@
             </a:avLst>
           </a:prstGeom>
           <a:solidFill>
-            <a:srgbClr val="FEE2E2"/>
-          </a:solidFill>
-          <a:ln w="12700">
-            <a:solidFill>
-              <a:srgbClr val="DC2626"/>
+            <a:srgbClr val="DCFCE7"/>
+          </a:solidFill>
+          <a:ln w="12700">
+            <a:solidFill>
+              <a:srgbClr val="16A34A"/>
             </a:solidFill>
             <a:prstDash val="solid"/>
           </a:ln>
@@ -36950,13 +39056,13 @@
             <a:r>
               <a:rPr lang="en-US" sz="1100" b="1" dirty="0">
                 <a:solidFill>
-                  <a:srgbClr val="DC2626"/>
+                  <a:srgbClr val="16A34A"/>
                 </a:solidFill>
                 <a:latin typeface="Trebuchet MS" pitchFamily="34" charset="0"/>
                 <a:ea typeface="Trebuchet MS" pitchFamily="34" charset="-122"/>
                 <a:cs typeface="Trebuchet MS" pitchFamily="34" charset="-120"/>
               </a:rPr>
-              <a:t>FALSE</a:t>
+              <a:t>TRUE</a:t>
             </a:r>
             <a:endParaRPr lang="en-US" sz="1100" dirty="0"/>
           </a:p>
@@ -37029,7 +39135,7 @@
                 <a:ea typeface="Calibri" pitchFamily="34" charset="-122"/>
                 <a:cs typeface="Calibri" pitchFamily="34" charset="-120"/>
               </a:rPr>
-              <a:t>5.  The word 'exclaim' means to stay silent and say nothing.</a:t>
+              <a:t>5.  'claim' means 'to throw something as far as possible'.</a:t>
             </a:r>
             <a:endParaRPr lang="en-US" sz="1300" dirty="0"/>
           </a:p>
@@ -37387,7 +39493,7 @@
                 <a:ea typeface="Calibri" pitchFamily="34" charset="-122"/>
                 <a:cs typeface="Calibri" pitchFamily="34" charset="-120"/>
               </a:rPr>
-              <a:t>Word Labs  •  wordlabs.app  •  Root: 'claim' = to call out or declare</a:t>
+              <a:t>Word Labs  •  wordlabs.app  •  Root: 'claim' = call out; cry</a:t>
             </a:r>
             <a:endParaRPr lang="en-US" sz="800" dirty="0"/>
           </a:p>
@@ -37524,7 +39630,7 @@
                 <a:ea typeface="Trebuchet MS" pitchFamily="34" charset="-122"/>
                 <a:cs typeface="Trebuchet MS" pitchFamily="34" charset="-120"/>
               </a:rPr>
-              <a:t>to call out or declare</a:t>
+              <a:t>call out; cry</a:t>
             </a:r>
             <a:endParaRPr lang="en-US" sz="2000" dirty="0"/>
           </a:p>
@@ -37563,7 +39669,7 @@
                 <a:ea typeface="Calibri" pitchFamily="34" charset="-122"/>
                 <a:cs typeface="Calibri" pitchFamily="34" charset="-120"/>
               </a:rPr>
-              <a:t>Origin: Latin: clamare</a:t>
+              <a:t>Origin: Latin root</a:t>
             </a:r>
             <a:endParaRPr lang="en-US" sz="1100" dirty="0"/>
           </a:p>
@@ -37734,7 +39840,7 @@
                 <a:ea typeface="Trebuchet MS" pitchFamily="34" charset="-122"/>
                 <a:cs typeface="Trebuchet MS" pitchFamily="34" charset="-120"/>
               </a:rPr>
-              <a:t>exclaim</a:t>
+              <a:t>claims</a:t>
             </a:r>
             <a:endParaRPr lang="en-US" sz="1300" dirty="0"/>
           </a:p>
@@ -37800,7 +39906,7 @@
                 <a:ea typeface="Trebuchet MS" pitchFamily="34" charset="-122"/>
                 <a:cs typeface="Trebuchet MS" pitchFamily="34" charset="-120"/>
               </a:rPr>
-              <a:t>reclaim</a:t>
+              <a:t>acclaim</a:t>
             </a:r>
             <a:endParaRPr lang="en-US" sz="1300" dirty="0"/>
           </a:p>
@@ -37866,7 +39972,7 @@
                 <a:ea typeface="Trebuchet MS" pitchFamily="34" charset="-122"/>
                 <a:cs typeface="Trebuchet MS" pitchFamily="34" charset="-120"/>
               </a:rPr>
-              <a:t>acclaim</a:t>
+              <a:t>claimed</a:t>
             </a:r>
             <a:endParaRPr lang="en-US" sz="1300" dirty="0"/>
           </a:p>
@@ -37932,7 +40038,7 @@
                 <a:ea typeface="Trebuchet MS" pitchFamily="34" charset="-122"/>
                 <a:cs typeface="Trebuchet MS" pitchFamily="34" charset="-120"/>
               </a:rPr>
-              <a:t>disclaim</a:t>
+              <a:t>exclaim</a:t>
             </a:r>
             <a:endParaRPr lang="en-US" sz="1300" dirty="0"/>
           </a:p>
@@ -37998,7 +40104,7 @@
                 <a:ea typeface="Trebuchet MS" pitchFamily="34" charset="-122"/>
                 <a:cs typeface="Trebuchet MS" pitchFamily="34" charset="-120"/>
               </a:rPr>
-              <a:t>proclaim</a:t>
+              <a:t>reclaim</a:t>
             </a:r>
             <a:endParaRPr lang="en-US" sz="1300" dirty="0"/>
           </a:p>
@@ -38064,7 +40170,7 @@
                 <a:ea typeface="Trebuchet MS" pitchFamily="34" charset="-122"/>
                 <a:cs typeface="Trebuchet MS" pitchFamily="34" charset="-120"/>
               </a:rPr>
-              <a:t>claiming</a:t>
+              <a:t>claimant</a:t>
             </a:r>
             <a:endParaRPr lang="en-US" sz="1300" dirty="0"/>
           </a:p>
@@ -38356,7 +40462,7 @@
                 <a:ea typeface="Calibri" pitchFamily="34" charset="-122"/>
                 <a:cs typeface="Calibri" pitchFamily="34" charset="-120"/>
               </a:rPr>
-              <a:t>Word Labs  •  wordlabs.app  •  Root: 'claim' = to call out or declare</a:t>
+              <a:t>Word Labs  •  wordlabs.app  •  Root: 'claim' = call out; cry</a:t>
             </a:r>
             <a:endParaRPr lang="en-US" sz="800" dirty="0"/>
           </a:p>
@@ -38657,7 +40763,7 @@
                 <a:ea typeface="Trebuchet MS" pitchFamily="34" charset="-122"/>
                 <a:cs typeface="Trebuchet MS" pitchFamily="34" charset="-120"/>
               </a:rPr>
-              <a:t>re-</a:t>
+              <a:t>ad-</a:t>
             </a:r>
             <a:endParaRPr lang="en-US" sz="1300" dirty="0"/>
           </a:p>
@@ -38849,7 +40955,7 @@
                 <a:ea typeface="Trebuchet MS" pitchFamily="34" charset="-122"/>
                 <a:cs typeface="Trebuchet MS" pitchFamily="34" charset="-120"/>
               </a:rPr>
-              <a:t>ex-</a:t>
+              <a:t>dis-</a:t>
             </a:r>
             <a:endParaRPr lang="en-US" sz="1300" dirty="0"/>
           </a:p>
@@ -38938,7 +41044,7 @@
                 <a:ea typeface="Trebuchet MS" pitchFamily="34" charset="-122"/>
                 <a:cs typeface="Trebuchet MS" pitchFamily="34" charset="-120"/>
               </a:rPr>
-              <a:t>-ing</a:t>
+              <a:t>-ant</a:t>
             </a:r>
             <a:endParaRPr lang="en-US" sz="1300" dirty="0"/>
           </a:p>
@@ -39002,7 +41108,7 @@
                 <a:ea typeface="Trebuchet MS" pitchFamily="34" charset="-122"/>
                 <a:cs typeface="Trebuchet MS" pitchFamily="34" charset="-120"/>
               </a:rPr>
-              <a:t>ac-</a:t>
+              <a:t>ex-</a:t>
             </a:r>
             <a:endParaRPr lang="en-US" sz="1300" dirty="0"/>
           </a:p>
@@ -39091,7 +41197,7 @@
                 <a:ea typeface="Trebuchet MS" pitchFamily="34" charset="-122"/>
                 <a:cs typeface="Trebuchet MS" pitchFamily="34" charset="-120"/>
               </a:rPr>
-              <a:t>-er</a:t>
+              <a:t>-ing</a:t>
             </a:r>
             <a:endParaRPr lang="en-US" sz="1300" dirty="0"/>
           </a:p>
@@ -39244,7 +41350,7 @@
                 <a:ea typeface="Trebuchet MS" pitchFamily="34" charset="-122"/>
                 <a:cs typeface="Trebuchet MS" pitchFamily="34" charset="-120"/>
               </a:rPr>
-              <a:t>-ant</a:t>
+              <a:t>-s</a:t>
             </a:r>
             <a:endParaRPr lang="en-US" sz="1300" dirty="0"/>
           </a:p>
@@ -39308,7 +41414,7 @@
                 <a:ea typeface="Trebuchet MS" pitchFamily="34" charset="-122"/>
                 <a:cs typeface="Trebuchet MS" pitchFamily="34" charset="-120"/>
               </a:rPr>
-              <a:t>dis-</a:t>
+              <a:t>re-</a:t>
             </a:r>
             <a:endParaRPr lang="en-US" sz="1300" dirty="0"/>
           </a:p>
@@ -39397,7 +41503,7 @@
                 <a:ea typeface="Trebuchet MS" pitchFamily="34" charset="-122"/>
                 <a:cs typeface="Trebuchet MS" pitchFamily="34" charset="-120"/>
               </a:rPr>
-              <a:t>-ation</a:t>
+              <a:t>-er</a:t>
             </a:r>
             <a:endParaRPr lang="en-US" sz="1300" dirty="0"/>
           </a:p>
@@ -39509,7 +41615,7 @@
                 <a:ea typeface="Trebuchet MS" pitchFamily="34" charset="-122"/>
                 <a:cs typeface="Trebuchet MS" pitchFamily="34" charset="-120"/>
               </a:rPr>
-              <a:t>re-</a:t>
+              <a:t>ad-</a:t>
             </a:r>
             <a:endParaRPr lang="en-US" sz="1300" dirty="0"/>
           </a:p>
@@ -40130,7 +42236,7 @@
                 <a:ea typeface="Calibri" pitchFamily="34" charset="-122"/>
                 <a:cs typeface="Calibri" pitchFamily="34" charset="-120"/>
               </a:rPr>
-              <a:t>Word Labs  •  wordlabs.app  •  Root: 'claim' = to call out or declare</a:t>
+              <a:t>Word Labs  •  wordlabs.app  •  Root: 'claim' = call out; cry</a:t>
             </a:r>
             <a:endParaRPr lang="en-US" sz="800" dirty="0"/>
           </a:p>
@@ -40308,7 +42414,7 @@
                 <a:ea typeface="Calibri" pitchFamily="34" charset="-122"/>
                 <a:cs typeface="Calibri" pitchFamily="34" charset="-120"/>
               </a:rPr>
-              <a:t>The act of saying something is yours or that something is true right now.</a:t>
+              <a:t>a person who says they have a right to something, such as money or property</a:t>
             </a:r>
             <a:endParaRPr lang="en-US" sz="1200" dirty="0"/>
           </a:p>
@@ -40381,7 +42487,7 @@
                 <a:ea typeface="Trebuchet MS" pitchFamily="34" charset="-122"/>
                 <a:cs typeface="Trebuchet MS" pitchFamily="34" charset="-120"/>
               </a:rPr>
-              <a:t>exclaim</a:t>
+              <a:t>claims</a:t>
             </a:r>
             <a:endParaRPr lang="en-US" sz="1200" dirty="0"/>
           </a:p>
@@ -40447,7 +42553,7 @@
                 <a:ea typeface="Calibri" pitchFamily="34" charset="-122"/>
                 <a:cs typeface="Calibri" pitchFamily="34" charset="-120"/>
               </a:rPr>
-              <a:t>To praise someone or something very enthusiastically and publicly.</a:t>
+              <a:t>said something was true, or asked for something believed to be owed (in the past)</a:t>
             </a:r>
             <a:endParaRPr lang="en-US" sz="1200" dirty="0"/>
           </a:p>
@@ -40520,7 +42626,7 @@
                 <a:ea typeface="Trebuchet MS" pitchFamily="34" charset="-122"/>
                 <a:cs typeface="Trebuchet MS" pitchFamily="34" charset="-120"/>
               </a:rPr>
-              <a:t>reclaim</a:t>
+              <a:t>acclaim</a:t>
             </a:r>
             <a:endParaRPr lang="en-US" sz="1200" dirty="0"/>
           </a:p>
@@ -40586,7 +42692,7 @@
                 <a:ea typeface="Calibri" pitchFamily="34" charset="-122"/>
                 <a:cs typeface="Calibri" pitchFamily="34" charset="-120"/>
               </a:rPr>
-              <a:t>To announce something important to lots of people in a very clear and confident way.</a:t>
+              <a:t>to get something back that was lost, taken away, or given up</a:t>
             </a:r>
             <a:endParaRPr lang="en-US" sz="1200" dirty="0"/>
           </a:p>
@@ -40659,7 +42765,7 @@
                 <a:ea typeface="Trebuchet MS" pitchFamily="34" charset="-122"/>
                 <a:cs typeface="Trebuchet MS" pitchFamily="34" charset="-120"/>
               </a:rPr>
-              <a:t>acclaim</a:t>
+              <a:t>claimed</a:t>
             </a:r>
             <a:endParaRPr lang="en-US" sz="1200" dirty="0"/>
           </a:p>
@@ -40725,7 +42831,7 @@
                 <a:ea typeface="Calibri" pitchFamily="34" charset="-122"/>
                 <a:cs typeface="Calibri" pitchFamily="34" charset="-120"/>
               </a:rPr>
-              <a:t>To say that you have no connection to something or that it is not your responsibility.</a:t>
+              <a:t>to cry out suddenly in surprise or strong feeling</a:t>
             </a:r>
             <a:endParaRPr lang="en-US" sz="1200" dirty="0"/>
           </a:p>
@@ -40798,7 +42904,7 @@
                 <a:ea typeface="Trebuchet MS" pitchFamily="34" charset="-122"/>
                 <a:cs typeface="Trebuchet MS" pitchFamily="34" charset="-120"/>
               </a:rPr>
-              <a:t>disclaim</a:t>
+              <a:t>exclaim</a:t>
             </a:r>
             <a:endParaRPr lang="en-US" sz="1200" dirty="0"/>
           </a:p>
@@ -40864,7 +42970,7 @@
                 <a:ea typeface="Calibri" pitchFamily="34" charset="-122"/>
                 <a:cs typeface="Calibri" pitchFamily="34" charset="-120"/>
               </a:rPr>
-              <a:t>To say that something belongs to you or that something is true.</a:t>
+              <a:t>to say that something is true, or to ask for something you believe you deserve</a:t>
             </a:r>
             <a:endParaRPr lang="en-US" sz="1200" dirty="0"/>
           </a:p>
@@ -40937,7 +43043,7 @@
                 <a:ea typeface="Trebuchet MS" pitchFamily="34" charset="-122"/>
                 <a:cs typeface="Trebuchet MS" pitchFamily="34" charset="-120"/>
               </a:rPr>
-              <a:t>proclaim</a:t>
+              <a:t>reclaim</a:t>
             </a:r>
             <a:endParaRPr lang="en-US" sz="1200" dirty="0"/>
           </a:p>
@@ -41003,7 +43109,7 @@
                 <a:ea typeface="Calibri" pitchFamily="34" charset="-122"/>
                 <a:cs typeface="Calibri" pitchFamily="34" charset="-120"/>
               </a:rPr>
-              <a:t>To get something back that was yours, or to make land useful again.</a:t>
+              <a:t>enthusiastic public praise or approval</a:t>
             </a:r>
             <a:endParaRPr lang="en-US" sz="1200" dirty="0"/>
           </a:p>
@@ -41076,7 +43182,7 @@
                 <a:ea typeface="Trebuchet MS" pitchFamily="34" charset="-122"/>
                 <a:cs typeface="Trebuchet MS" pitchFamily="34" charset="-120"/>
               </a:rPr>
-              <a:t>claiming</a:t>
+              <a:t>claimant</a:t>
             </a:r>
             <a:endParaRPr lang="en-US" sz="1200" dirty="0"/>
           </a:p>
@@ -41142,7 +43248,7 @@
                 <a:ea typeface="Calibri" pitchFamily="34" charset="-122"/>
                 <a:cs typeface="Calibri" pitchFamily="34" charset="-120"/>
               </a:rPr>
-              <a:t>To say something suddenly and loudly, often because you are surprised or excited.</a:t>
+              <a:t>says something is true, or asks for something believed to be owed</a:t>
             </a:r>
             <a:endParaRPr lang="en-US" sz="1200" dirty="0"/>
           </a:p>
@@ -41434,7 +43540,7 @@
                 <a:ea typeface="Calibri" pitchFamily="34" charset="-122"/>
                 <a:cs typeface="Calibri" pitchFamily="34" charset="-120"/>
               </a:rPr>
-              <a:t>Word Labs  •  wordlabs.app  •  Root: 'claim' = to call out or declare</a:t>
+              <a:t>Word Labs  •  wordlabs.app  •  Root: 'claim' = call out; cry</a:t>
             </a:r>
             <a:endParaRPr lang="en-US" sz="800" dirty="0"/>
           </a:p>
@@ -41637,7 +43743,7 @@
                 <a:ea typeface="Calibri" pitchFamily="34" charset="-122"/>
                 <a:cs typeface="Calibri" pitchFamily="34" charset="-120"/>
               </a:rPr>
-              <a:t>She stood up to exclaim her excitement when her name was called for the award.</a:t>
+              <a:t>He will claim his prize after winning the competition.</a:t>
             </a:r>
             <a:endParaRPr lang="en-US" sz="1500" dirty="0"/>
           </a:p>
@@ -41801,7 +43907,7 @@
                 <a:ea typeface="Calibri" pitchFamily="34" charset="-122"/>
                 <a:cs typeface="Calibri" pitchFamily="34" charset="-120"/>
               </a:rPr>
-              <a:t>The explorer wanted to reclaim the treasure that had been stolen from his village.</a:t>
+              <a:t>The company claims its products are completely safe.</a:t>
             </a:r>
             <a:endParaRPr lang="en-US" sz="1500" dirty="0"/>
           </a:p>
@@ -41965,7 +44071,7 @@
                 <a:ea typeface="Calibri" pitchFamily="34" charset="-122"/>
                 <a:cs typeface="Calibri" pitchFamily="34" charset="-120"/>
               </a:rPr>
-              <a:t>The king would proclaim a holiday so that everyone in the land could celebrate.</a:t>
+              <a:t>The young author's first novel received widespread acclaim.</a:t>
             </a:r>
             <a:endParaRPr lang="en-US" sz="1500" dirty="0"/>
           </a:p>
